--- a/pitch/context-compiler-pitch.pptx
+++ b/pitch/context-compiler-pitch.pptx
@@ -1650,7 +1650,7 @@
                 <a:ea typeface="Calibri" pitchFamily="34" charset="-122"/>
                 <a:cs typeface="Calibri" pitchFamily="34" charset="-120"/>
               </a:rPr>
-              <a:t>verified: unit tests + live runs</a:t>
+              <a:t>verified: unit tests + recall eval + live runs</a:t>
             </a:r>
             <a:endParaRPr lang="en-US" sz="1000" dirty="0"/>
           </a:p>
@@ -2922,7 +2922,7 @@
                 <a:ea typeface="Calibri" pitchFamily="34" charset="-122"/>
                 <a:cs typeface="Calibri" pitchFamily="34" charset="-120"/>
               </a:rPr>
-              <a:t>+ Claude Haiku rerank</a:t>
+              <a:t>+ optional LLM rerank</a:t>
             </a:r>
             <a:endParaRPr lang="en-US" sz="1150" dirty="0"/>
           </a:p>
@@ -3752,7 +3752,7 @@
                 <a:ea typeface="Calibri" pitchFamily="34" charset="-122"/>
                 <a:cs typeface="Calibri" pitchFamily="34" charset="-120"/>
               </a:rPr>
-              <a:t>Claude answers from full file vs compiled context, side by side in the demo</a:t>
+              <a:t>Same question answered from full file vs compiled context, side by side in the demo</a:t>
             </a:r>
             <a:endParaRPr lang="en-US" sz="1200" dirty="0"/>
           </a:p>
@@ -3932,7 +3932,7 @@
                 <a:ea typeface="Calibri" pitchFamily="34" charset="-122"/>
                 <a:cs typeface="Calibri" pitchFamily="34" charset="-120"/>
               </a:rPr>
-              <a:t>compiled — 591 tokens · answer intact · verified by test suite + MCP integration run</a:t>
+              <a:t>compiled — 591 tokens · answer intact · verified by test suite + recall eval + MCP run</a:t>
             </a:r>
             <a:endParaRPr lang="en-US" sz="1200" dirty="0"/>
           </a:p>
@@ -4656,7 +4656,7 @@
                 <a:ea typeface="Calibri" pitchFamily="34" charset="-122"/>
                 <a:cs typeface="Calibri" pitchFamily="34" charset="-120"/>
               </a:rPr>
-              <a:t>local embeddings next to BM25 for paraphrased questions</a:t>
+              <a:t>CJK bigrams + offline recall eval shipped; local embeddings next for paraphrase</a:t>
             </a:r>
             <a:endParaRPr lang="en-US" sz="1200" dirty="0"/>
           </a:p>
@@ -5127,7 +5127,7 @@
                 <a:ea typeface="Courier New" pitchFamily="34" charset="-122"/>
                 <a:cs typeface="Courier New" pitchFamily="34" charset="-120"/>
               </a:rPr>
-              <a:t>demo:  &lt;hosted URL&gt;</a:t>
+              <a:t>demo:  Docker / Render deploy of this repo</a:t>
             </a:r>
             <a:endParaRPr lang="en-US" sz="1200" dirty="0"/>
           </a:p>
@@ -5144,7 +5144,7 @@
                 <a:ea typeface="Courier New" pitchFamily="34" charset="-122"/>
                 <a:cs typeface="Courier New" pitchFamily="34" charset="-120"/>
               </a:rPr>
-              <a:t>repo:  github.com/&lt;you&gt;/context-compiler</a:t>
+              <a:t>repo:  github.com/shenba1712/context-compiler</a:t>
             </a:r>
             <a:endParaRPr lang="en-US" sz="1200" dirty="0"/>
           </a:p>
@@ -5183,7 +5183,7 @@
                 <a:ea typeface="Calibri" pitchFamily="34" charset="-122"/>
                 <a:cs typeface="Calibri" pitchFamily="34" charset="-120"/>
               </a:rPr>
-              <a:t>Upload a document, ask a question, drag the budget slider — then click “Prove answer parity” and watch Claude give the same answer from 3% of the tokens.</a:t>
+              <a:t>Upload a document, ask a question, drag the budget slider — then click “Prove answer parity” and watch the model give the same answer from 3% of the tokens.</a:t>
             </a:r>
             <a:endParaRPr lang="en-US" sz="1250" dirty="0"/>
           </a:p>

--- a/pitch/context-compiler-pitch.pptx
+++ b/pitch/context-compiler-pitch.pptx
@@ -2276,7 +2276,7 @@
                 <a:ea typeface="Calibri" pitchFamily="34" charset="-122"/>
                 <a:cs typeface="Calibri" pitchFamily="34" charset="-120"/>
               </a:rPr>
-              <a:t>(Claude Sonnet input, $3/Mtok)</a:t>
+              <a:t>(at $3/Mtok input — demo cost meter default)</a:t>
             </a:r>
             <a:endParaRPr lang="en-US" sz="1200" dirty="0"/>
           </a:p>
@@ -2905,7 +2905,7 @@
                 <a:ea typeface="Calibri" pitchFamily="34" charset="-122"/>
                 <a:cs typeface="Calibri" pitchFamily="34" charset="-120"/>
               </a:rPr>
-              <a:t>BM25 baseline</a:t>
+              <a:t>BM25 + query cleanup</a:t>
             </a:r>
             <a:endParaRPr lang="en-US" sz="1150" dirty="0"/>
           </a:p>
@@ -2922,7 +2922,7 @@
                 <a:ea typeface="Calibri" pitchFamily="34" charset="-122"/>
                 <a:cs typeface="Calibri" pitchFamily="34" charset="-120"/>
               </a:rPr>
-              <a:t>+ optional LLM rerank</a:t>
+              <a:t>stopwords / honorifics</a:t>
             </a:r>
             <a:endParaRPr lang="en-US" sz="1150" dirty="0"/>
           </a:p>
@@ -3051,7 +3051,7 @@
                 <a:ea typeface="Calibri" pitchFamily="34" charset="-122"/>
                 <a:cs typeface="Calibri" pitchFamily="34" charset="-120"/>
               </a:rPr>
-              <a:t>greedy fill</a:t>
+              <a:t>hard pack under budget</a:t>
             </a:r>
             <a:endParaRPr lang="en-US" sz="1150" dirty="0"/>
           </a:p>
@@ -3068,7 +3068,7 @@
                 <a:ea typeface="Calibri" pitchFamily="34" charset="-122"/>
                 <a:cs typeface="Calibri" pitchFamily="34" charset="-120"/>
               </a:rPr>
-              <a:t>budget enforced</a:t>
+              <a:t>relevance floor</a:t>
             </a:r>
             <a:endParaRPr lang="en-US" sz="1150" dirty="0"/>
           </a:p>
@@ -3217,7 +3217,7 @@
                 <a:ea typeface="Calibri" pitchFamily="34" charset="-122"/>
                 <a:cs typeface="Calibri" pitchFamily="34" charset="-120"/>
               </a:rPr>
-              <a:t>MCP server with two tools: compile_context + expand_section. Two lines of config in Claude Desktop, Claude Code, or Cursor. Web demo for everyone else.</a:t>
+              <a:t>MCP server with two tools: compile_context + expand_section. Two lines of config in Cursor, Claude Code, Codex, or Claude Desktop. Web demo for everyone else.</a:t>
             </a:r>
             <a:endParaRPr lang="en-US" sz="1250" dirty="0"/>
           </a:p>
@@ -3752,7 +3752,7 @@
                 <a:ea typeface="Calibri" pitchFamily="34" charset="-122"/>
                 <a:cs typeface="Calibri" pitchFamily="34" charset="-120"/>
               </a:rPr>
-              <a:t>Same question answered from full file vs compiled context, side by side in the demo</a:t>
+              <a:t>Full file vs compile (+ Include in Prove expands) — dual buttons; not an Agent run</a:t>
             </a:r>
             <a:endParaRPr lang="en-US" sz="1200" dirty="0"/>
           </a:p>
@@ -4362,7 +4362,7 @@
                 <a:ea typeface="Calibri" pitchFamily="34" charset="-122"/>
                 <a:cs typeface="Calibri" pitchFamily="34" charset="-120"/>
               </a:rPr>
-              <a:t>Hard token budget, enforced on real output</a:t>
+              <a:t>Same slider: Compile hard pack + Agent soft ceiling</a:t>
             </a:r>
             <a:endParaRPr lang="en-US" sz="1300" dirty="0"/>
           </a:p>
@@ -4383,7 +4383,7 @@
                 <a:ea typeface="Calibri" pitchFamily="34" charset="-122"/>
                 <a:cs typeface="Calibri" pitchFamily="34" charset="-120"/>
               </a:rPr>
-              <a:t>Recall manifest + expand_section escape hatch</a:t>
+              <a:t>Manifest + peek / Include in Prove / expand_section</a:t>
             </a:r>
             <a:endParaRPr lang="en-US" sz="1300" dirty="0"/>
           </a:p>
@@ -4455,7 +4455,7 @@
               <a:buNone/>
             </a:pPr>
             <a:r>
-              <a:rPr lang="en-US" sz="1400" dirty="0">
+              <a:rPr lang="en-US" sz="1400" dirty="0" b="0">
                 <a:solidFill>
                   <a:srgbClr val="9AA0B0"/>
                 </a:solidFill>
@@ -4463,7 +4463,7 @@
                 <a:ea typeface="Calibri" pitchFamily="34" charset="-122"/>
                 <a:cs typeface="Calibri" pitchFamily="34" charset="-120"/>
               </a:rPr>
-              <a:t>every team wiring agents to documents. The MCP ecosystem — Claude, Cursor, Windsurf, and growing — is the distribution rail: adoption is one config entry, not a new workflow.</a:t>
+              <a:t>every team wiring agents to documents. The MCP ecosystem — Cursor, Claude, Codex, and growing — is the distribution rail: adoption is one config entry, not a new workflow.</a:t>
             </a:r>
             <a:endParaRPr lang="en-US" sz="1400" dirty="0"/>
           </a:p>
@@ -4656,7 +4656,7 @@
                 <a:ea typeface="Calibri" pitchFamily="34" charset="-122"/>
                 <a:cs typeface="Calibri" pitchFamily="34" charset="-120"/>
               </a:rPr>
-              <a:t>CJK bigrams + offline recall eval shipped; local embeddings next for paraphrase</a:t>
+              <a:t>Honorific/filler query cleanup + offline recall eval shipped; local embeddings next for paraphrase</a:t>
             </a:r>
             <a:endParaRPr lang="en-US" sz="1200" dirty="0"/>
           </a:p>
@@ -5183,7 +5183,7 @@
                 <a:ea typeface="Calibri" pitchFamily="34" charset="-122"/>
                 <a:cs typeface="Calibri" pitchFamily="34" charset="-120"/>
               </a:rPr>
-              <a:t>Upload a document, ask a question, drag the budget slider — then click “Prove answer parity” and watch the model give the same answer from 3% of the tokens.</a:t>
+              <a:t>One budget slider → Compile (spinner banner). Peek omitted sections; Include in Prove only for parity. Run agent = soft ceiling + SSE + optional Compare. Gemini → OpenRouter failover.</a:t>
             </a:r>
             <a:endParaRPr lang="en-US" sz="1250" dirty="0"/>
           </a:p>

--- a/pitch/context-compiler-pitch.pptx
+++ b/pitch/context-compiler-pitch.pptx
@@ -12,7 +12,7 @@
     <p:sldId id="260" r:id="rId11"/>
     <p:sldId id="261" r:id="rId12"/>
   </p:sldIdLst>
-  <p:sldSz cx="12192000" cy="6858000" type="screen4x3"/>
+  <p:sldSz cx="12191695" cy="6858000" type="screen4x3"/>
   <p:notesSz cx="6858000" cy="9144000"/>
   <p:defaultTextStyle>
     <a:defPPr>
@@ -3086,14 +3086,6 @@
 <file path=ppt/slides/slide1.xml><?xml version="1.0" encoding="utf-8"?>
 <p:sld xmlns:a="http://schemas.openxmlformats.org/drawingml/2006/main" xmlns:p="http://schemas.openxmlformats.org/presentationml/2006/main" xmlns:r="http://schemas.openxmlformats.org/officeDocument/2006/relationships">
   <p:cSld>
-    <p:bg>
-      <p:bgPr>
-        <a:solidFill>
-          <a:srgbClr val="0F1117"/>
-        </a:solidFill>
-        <a:effectLst/>
-      </p:bgPr>
-    </p:bg>
     <p:spTree>
       <p:nvGrpSpPr>
         <p:cNvPr id="1" name=""/>
@@ -3103,124 +3095,20 @@
       <p:grpSpPr/>
       <p:sp>
         <p:nvSpPr>
-          <p:cNvPr id="2" name="Text 0"/>
-          <p:cNvSpPr txBox="1"/>
-          <p:nvPr/>
-        </p:nvSpPr>
-        <p:spPr>
-          <a:xfrm>
-            <a:off x="640080" y="1965960"/>
-            <a:ext cx="6583680" cy="914400"/>
-          </a:xfrm>
-          <a:prstGeom prst="rect">
-            <a:avLst/>
-          </a:prstGeom>
-          <a:noFill/>
-        </p:spPr>
-        <p:txBody>
-          <a:bodyPr wrap="square">
-            <a:spAutoFit/>
-          </a:bodyPr>
-          <a:lstStyle/>
-          <a:p>
-            <a:r>
-              <a:rPr sz="4400" b="1">
-                <a:solidFill>
-                  <a:srgbClr val="E8EAF0"/>
-                </a:solidFill>
-                <a:latin typeface="Calibri"/>
-              </a:rPr>
-              <a:t>Context Compiler</a:t>
-            </a:r>
-          </a:p>
-        </p:txBody>
-      </p:sp>
-      <p:sp>
-        <p:nvSpPr>
-          <p:cNvPr id="3" name="Text 1"/>
-          <p:cNvSpPr txBox="1"/>
-          <p:nvPr/>
-        </p:nvSpPr>
-        <p:spPr>
-          <a:xfrm>
-            <a:off x="640080" y="2926080"/>
-            <a:ext cx="6583680" cy="502920"/>
-          </a:xfrm>
-          <a:prstGeom prst="rect">
-            <a:avLst/>
-          </a:prstGeom>
-          <a:noFill/>
-        </p:spPr>
-        <p:txBody>
-          <a:bodyPr wrap="square">
-            <a:spAutoFit/>
-          </a:bodyPr>
-          <a:lstStyle/>
-          <a:p>
-            <a:r>
-              <a:rPr sz="2200" b="0">
-                <a:solidFill>
-                  <a:srgbClr val="4ADE80"/>
-                </a:solidFill>
-                <a:latin typeface="Calibri"/>
-              </a:rPr>
-              <a:t>Same answer. 3% of the tokens.</a:t>
-            </a:r>
-          </a:p>
-        </p:txBody>
-      </p:sp>
-      <p:sp>
-        <p:nvSpPr>
-          <p:cNvPr id="4" name="Text 2"/>
-          <p:cNvSpPr txBox="1"/>
-          <p:nvPr/>
-        </p:nvSpPr>
-        <p:spPr>
-          <a:xfrm>
-            <a:off x="640080" y="3520440"/>
-            <a:ext cx="6217920" cy="731520"/>
-          </a:xfrm>
-          <a:prstGeom prst="rect">
-            <a:avLst/>
-          </a:prstGeom>
-          <a:noFill/>
-        </p:spPr>
-        <p:txBody>
-          <a:bodyPr wrap="square">
-            <a:spAutoFit/>
-          </a:bodyPr>
-          <a:lstStyle/>
-          <a:p>
-            <a:r>
-              <a:rPr sz="1400" b="0">
-                <a:solidFill>
-                  <a:srgbClr val="9AA0B0"/>
-                </a:solidFill>
-                <a:latin typeface="Calibri"/>
-              </a:rPr>
-              <a:t>A task-aware, token-budgeted context layer for AI agents — plug in via MCP or the hosted demo.</a:t>
-            </a:r>
-          </a:p>
-        </p:txBody>
-      </p:sp>
-      <p:sp>
-        <p:nvSpPr>
-          <p:cNvPr id="5" name="Shape 3"/>
+          <p:cNvPr id="2" name="Rectangle 1"/>
           <p:cNvSpPr/>
           <p:nvPr/>
         </p:nvSpPr>
         <p:spPr>
           <a:xfrm>
-            <a:off x="7406640" y="1965960"/>
-            <a:ext cx="4114800" cy="2514600"/>
-          </a:xfrm>
-          <a:prstGeom prst="roundRect">
-            <a:avLst>
-              <a:gd name="adj" fmla="val 8000"/>
-            </a:avLst>
+            <a:off x="0" y="0"/>
+            <a:ext cx="12191695" cy="6858000"/>
+          </a:xfrm>
+          <a:prstGeom prst="rect">
+            <a:avLst/>
           </a:prstGeom>
           <a:solidFill>
-            <a:srgbClr val="181B23"/>
+            <a:srgbClr val="E8ECE9"/>
           </a:solidFill>
           <a:ln>
             <a:noFill/>
@@ -3250,14 +3138,14 @@
       </p:sp>
       <p:sp>
         <p:nvSpPr>
-          <p:cNvPr id="6" name="Text 4"/>
+          <p:cNvPr id="3" name="TextBox 2"/>
           <p:cNvSpPr txBox="1"/>
           <p:nvPr/>
         </p:nvSpPr>
         <p:spPr>
           <a:xfrm>
-            <a:off x="7680960" y="2148840"/>
-            <a:ext cx="3657600" cy="274320"/>
+            <a:off x="640080" y="1691640"/>
+            <a:ext cx="6217920" cy="1005840"/>
           </a:xfrm>
           <a:prstGeom prst="rect">
             <a:avLst/>
@@ -3265,39 +3153,220 @@
           <a:noFill/>
         </p:spPr>
         <p:txBody>
-          <a:bodyPr wrap="square">
+          <a:bodyPr wrap="none">
             <a:spAutoFit/>
           </a:bodyPr>
           <a:lstStyle/>
           <a:p>
             <a:r>
+              <a:rPr sz="4400" b="1">
+                <a:cs typeface="Georgia"/>
+                <a:ea typeface="Georgia"/>
+                <a:solidFill>
+                  <a:srgbClr val="1A221E"/>
+                </a:solidFill>
+                <a:latin typeface="Georgia"/>
+              </a:rPr>
+              <a:t>Context </a:t>
+            </a:r>
+            <a:r>
+              <a:rPr sz="4400" b="1">
+                <a:cs typeface="Georgia"/>
+                <a:ea typeface="Georgia"/>
+                <a:solidFill>
+                  <a:srgbClr val="1F5C42"/>
+                </a:solidFill>
+                <a:latin typeface="Georgia"/>
+              </a:rPr>
+              <a:t>Compiler</a:t>
+            </a:r>
+          </a:p>
+        </p:txBody>
+      </p:sp>
+      <p:sp>
+        <p:nvSpPr>
+          <p:cNvPr id="4" name="TextBox 3"/>
+          <p:cNvSpPr txBox="1"/>
+          <p:nvPr/>
+        </p:nvSpPr>
+        <p:spPr>
+          <a:xfrm>
+            <a:off x="640080" y="2606040"/>
+            <a:ext cx="6217920" cy="320040"/>
+          </a:xfrm>
+          <a:prstGeom prst="rect">
+            <a:avLst/>
+          </a:prstGeom>
+          <a:noFill/>
+        </p:spPr>
+        <p:txBody>
+          <a:bodyPr wrap="square" anchor="t"/>
+          <a:lstStyle/>
+          <a:p>
+            <a:pPr algn="l">
+              <a:spcBef>
+                <a:spcPts val="0"/>
+              </a:spcBef>
+              <a:spcAft>
+                <a:spcPts val="0"/>
+              </a:spcAft>
+            </a:pPr>
+            <a:r>
               <a:rPr sz="1100" b="0">
-                <a:solidFill>
-                  <a:srgbClr val="9AA0B0"/>
-                </a:solidFill>
-                <a:latin typeface="Calibri"/>
+                <a:cs typeface="Menlo"/>
+                <a:ea typeface="Menlo"/>
+                <a:solidFill>
+                  <a:srgbClr val="1F5C42"/>
+                </a:solidFill>
+                <a:latin typeface="Menlo"/>
               </a:rPr>
-              <a:t>one 100-page document, one question</a:t>
-            </a:r>
-          </a:p>
-        </p:txBody>
-      </p:sp>
-      <p:sp>
-        <p:nvSpPr>
-          <p:cNvPr id="7" name="Text 5"/>
+              <a:t>MCP · LOCAL BM25 · NO KEY FOR COMPILE</a:t>
+            </a:r>
+          </a:p>
+        </p:txBody>
+      </p:sp>
+      <p:sp>
+        <p:nvSpPr>
+          <p:cNvPr id="5" name="TextBox 4"/>
+          <p:cNvSpPr txBox="1"/>
+          <p:nvPr/>
+        </p:nvSpPr>
+        <p:spPr>
+          <a:xfrm>
+            <a:off x="640080" y="3063240"/>
+            <a:ext cx="6035040" cy="640080"/>
+          </a:xfrm>
+          <a:prstGeom prst="rect">
+            <a:avLst/>
+          </a:prstGeom>
+          <a:noFill/>
+        </p:spPr>
+        <p:txBody>
+          <a:bodyPr wrap="square" anchor="t"/>
+          <a:lstStyle/>
+          <a:p>
+            <a:pPr algn="l">
+              <a:spcBef>
+                <a:spcPts val="0"/>
+              </a:spcBef>
+              <a:spcAft>
+                <a:spcPts val="0"/>
+              </a:spcAft>
+            </a:pPr>
+            <a:r>
+              <a:rPr sz="2600" b="1">
+                <a:cs typeface="Helvetica"/>
+                <a:ea typeface="Helvetica"/>
+                <a:solidFill>
+                  <a:srgbClr val="1A221E"/>
+                </a:solidFill>
+                <a:latin typeface="Helvetica"/>
+              </a:rPr>
+              <a:t>Same answer. 3% of the tokens.</a:t>
+            </a:r>
+          </a:p>
+        </p:txBody>
+      </p:sp>
+      <p:sp>
+        <p:nvSpPr>
+          <p:cNvPr id="6" name="TextBox 5"/>
+          <p:cNvSpPr txBox="1"/>
+          <p:nvPr/>
+        </p:nvSpPr>
+        <p:spPr>
+          <a:xfrm>
+            <a:off x="640080" y="3749039"/>
+            <a:ext cx="5852160" cy="1097280"/>
+          </a:xfrm>
+          <a:prstGeom prst="rect">
+            <a:avLst/>
+          </a:prstGeom>
+          <a:noFill/>
+        </p:spPr>
+        <p:txBody>
+          <a:bodyPr wrap="square" anchor="t"/>
+          <a:lstStyle/>
+          <a:p>
+            <a:pPr algn="l">
+              <a:spcBef>
+                <a:spcPts val="0"/>
+              </a:spcBef>
+              <a:spcAft>
+                <a:spcPts val="0"/>
+              </a:spcAft>
+            </a:pPr>
+            <a:r>
+              <a:rPr sz="1500" b="0">
+                <a:cs typeface="Helvetica"/>
+                <a:ea typeface="Helvetica"/>
+                <a:solidFill>
+                  <a:srgbClr val="4A5850"/>
+                </a:solidFill>
+                <a:latin typeface="Helvetica"/>
+              </a:rPr>
+              <a:t>Task-aware compile under a hard token budget — coverage-first packing, omit honesty, MCP or the hosted web demo.</a:t>
+            </a:r>
+          </a:p>
+        </p:txBody>
+      </p:sp>
+      <p:sp>
+        <p:nvSpPr>
+          <p:cNvPr id="7" name="TextBox 6"/>
+          <p:cNvSpPr txBox="1"/>
+          <p:nvPr/>
+        </p:nvSpPr>
+        <p:spPr>
+          <a:xfrm>
+            <a:off x="640080" y="6263640"/>
+            <a:ext cx="10972800" cy="320040"/>
+          </a:xfrm>
+          <a:prstGeom prst="rect">
+            <a:avLst/>
+          </a:prstGeom>
+          <a:noFill/>
+        </p:spPr>
+        <p:txBody>
+          <a:bodyPr wrap="square" anchor="t"/>
+          <a:lstStyle/>
+          <a:p>
+            <a:pPr algn="l">
+              <a:spcBef>
+                <a:spcPts val="0"/>
+              </a:spcBef>
+              <a:spcAft>
+                <a:spcPts val="0"/>
+              </a:spcAft>
+            </a:pPr>
+            <a:r>
+              <a:rPr sz="1100" b="0">
+                <a:cs typeface="Menlo"/>
+                <a:ea typeface="Menlo"/>
+                <a:solidFill>
+                  <a:srgbClr val="5C6B62"/>
+                </a:solidFill>
+                <a:latin typeface="Menlo"/>
+              </a:rPr>
+              <a:t>OpenAI × NamasteDev Codex Hackathon · July 2026 · solo build</a:t>
+            </a:r>
+          </a:p>
+        </p:txBody>
+      </p:sp>
+      <p:sp>
+        <p:nvSpPr>
+          <p:cNvPr id="8" name="Rectangle 7"/>
           <p:cNvSpPr/>
           <p:nvPr/>
         </p:nvSpPr>
         <p:spPr>
           <a:xfrm>
-            <a:off x="7680960" y="2560320"/>
-            <a:ext cx="3566160" cy="457200"/>
+            <a:off x="7360920" y="1554480"/>
+            <a:ext cx="4160520" cy="3657600"/>
           </a:xfrm>
           <a:prstGeom prst="rect">
             <a:avLst/>
           </a:prstGeom>
           <a:solidFill>
-            <a:srgbClr val="F87171"/>
+            <a:srgbClr val="1F5C42"/>
           </a:solidFill>
           <a:ln>
             <a:noFill/>
@@ -3327,14 +3396,14 @@
       </p:sp>
       <p:sp>
         <p:nvSpPr>
-          <p:cNvPr id="8" name="Text 5b"/>
+          <p:cNvPr id="9" name="TextBox 8"/>
           <p:cNvSpPr txBox="1"/>
           <p:nvPr/>
         </p:nvSpPr>
         <p:spPr>
           <a:xfrm>
-            <a:off x="7680960" y="2560320"/>
-            <a:ext cx="3566160" cy="457200"/>
+            <a:off x="7635240" y="1783080"/>
+            <a:ext cx="3657600" cy="365760"/>
           </a:xfrm>
           <a:prstGeom prst="rect">
             <a:avLst/>
@@ -3342,39 +3411,131 @@
           <a:noFill/>
         </p:spPr>
         <p:txBody>
-          <a:bodyPr wrap="square">
-            <a:spAutoFit/>
-          </a:bodyPr>
-          <a:lstStyle/>
-          <a:p>
-            <a:r>
-              <a:rPr sz="1200" b="1">
-                <a:solidFill>
-                  <a:srgbClr val="2B0A0A"/>
-                </a:solidFill>
-                <a:latin typeface="Calibri"/>
+          <a:bodyPr wrap="square" anchor="t"/>
+          <a:lstStyle/>
+          <a:p>
+            <a:pPr algn="l">
+              <a:spcBef>
+                <a:spcPts val="0"/>
+              </a:spcBef>
+              <a:spcAft>
+                <a:spcPts val="0"/>
+              </a:spcAft>
+            </a:pPr>
+            <a:r>
+              <a:rPr sz="1100" b="0">
+                <a:cs typeface="Menlo"/>
+                <a:ea typeface="Menlo"/>
+                <a:solidFill>
+                  <a:srgbClr val="B8D0C4"/>
+                </a:solidFill>
+                <a:latin typeface="Menlo"/>
               </a:rPr>
-              <a:t>raw file — 20,364 tokens</a:t>
-            </a:r>
-          </a:p>
-        </p:txBody>
-      </p:sp>
-      <p:sp>
-        <p:nvSpPr>
-          <p:cNvPr id="9" name="Text 6"/>
+              <a:t>vendor_handbook.docx · one question</a:t>
+            </a:r>
+          </a:p>
+        </p:txBody>
+      </p:sp>
+      <p:sp>
+        <p:nvSpPr>
+          <p:cNvPr id="10" name="TextBox 9"/>
+          <p:cNvSpPr txBox="1"/>
+          <p:nvPr/>
+        </p:nvSpPr>
+        <p:spPr>
+          <a:xfrm>
+            <a:off x="7635240" y="2286000"/>
+            <a:ext cx="3657600" cy="274320"/>
+          </a:xfrm>
+          <a:prstGeom prst="rect">
+            <a:avLst/>
+          </a:prstGeom>
+          <a:noFill/>
+        </p:spPr>
+        <p:txBody>
+          <a:bodyPr wrap="square" anchor="t"/>
+          <a:lstStyle/>
+          <a:p>
+            <a:pPr algn="l">
+              <a:spcBef>
+                <a:spcPts val="0"/>
+              </a:spcBef>
+              <a:spcAft>
+                <a:spcPts val="0"/>
+              </a:spcAft>
+            </a:pPr>
+            <a:r>
+              <a:rPr sz="1300" b="1">
+                <a:cs typeface="Helvetica"/>
+                <a:ea typeface="Helvetica"/>
+                <a:solidFill>
+                  <a:srgbClr val="E8F0EB"/>
+                </a:solidFill>
+                <a:latin typeface="Helvetica"/>
+              </a:rPr>
+              <a:t>Whole file</a:t>
+            </a:r>
+          </a:p>
+        </p:txBody>
+      </p:sp>
+      <p:sp>
+        <p:nvSpPr>
+          <p:cNvPr id="11" name="TextBox 10"/>
+          <p:cNvSpPr txBox="1"/>
+          <p:nvPr/>
+        </p:nvSpPr>
+        <p:spPr>
+          <a:xfrm>
+            <a:off x="9692640" y="2286000"/>
+            <a:ext cx="1554480" cy="274320"/>
+          </a:xfrm>
+          <a:prstGeom prst="rect">
+            <a:avLst/>
+          </a:prstGeom>
+          <a:noFill/>
+        </p:spPr>
+        <p:txBody>
+          <a:bodyPr wrap="square" anchor="t"/>
+          <a:lstStyle/>
+          <a:p>
+            <a:pPr algn="r">
+              <a:spcBef>
+                <a:spcPts val="0"/>
+              </a:spcBef>
+              <a:spcAft>
+                <a:spcPts val="0"/>
+              </a:spcAft>
+            </a:pPr>
+            <a:r>
+              <a:rPr sz="1200" b="0">
+                <a:cs typeface="Menlo"/>
+                <a:ea typeface="Menlo"/>
+                <a:solidFill>
+                  <a:srgbClr val="E8F0EB"/>
+                </a:solidFill>
+                <a:latin typeface="Menlo"/>
+              </a:rPr>
+              <a:t>20,364 tokens</a:t>
+            </a:r>
+          </a:p>
+        </p:txBody>
+      </p:sp>
+      <p:sp>
+        <p:nvSpPr>
+          <p:cNvPr id="12" name="Rectangle 11"/>
           <p:cNvSpPr/>
           <p:nvPr/>
         </p:nvSpPr>
         <p:spPr>
           <a:xfrm>
-            <a:off x="7680960" y="3246120"/>
-            <a:ext cx="411480" cy="457200"/>
+            <a:off x="7635240" y="2606040"/>
+            <a:ext cx="3611880" cy="128016"/>
           </a:xfrm>
           <a:prstGeom prst="rect">
             <a:avLst/>
           </a:prstGeom>
           <a:solidFill>
-            <a:srgbClr val="4ADE80"/>
+            <a:srgbClr val="2A4A3A"/>
           </a:solidFill>
           <a:ln>
             <a:noFill/>
@@ -3404,14 +3565,57 @@
       </p:sp>
       <p:sp>
         <p:nvSpPr>
-          <p:cNvPr id="10" name="Text 7"/>
+          <p:cNvPr id="13" name="Rectangle 12"/>
+          <p:cNvSpPr/>
+          <p:nvPr/>
+        </p:nvSpPr>
+        <p:spPr>
+          <a:xfrm>
+            <a:off x="7635240" y="2606040"/>
+            <a:ext cx="3611880" cy="128016"/>
+          </a:xfrm>
+          <a:prstGeom prst="rect">
+            <a:avLst/>
+          </a:prstGeom>
+          <a:solidFill>
+            <a:srgbClr val="9AAB9F"/>
+          </a:solidFill>
+          <a:ln>
+            <a:noFill/>
+          </a:ln>
+        </p:spPr>
+        <p:style>
+          <a:lnRef idx="1">
+            <a:schemeClr val="accent1"/>
+          </a:lnRef>
+          <a:fillRef idx="3">
+            <a:schemeClr val="accent1"/>
+          </a:fillRef>
+          <a:effectRef idx="2">
+            <a:schemeClr val="accent1"/>
+          </a:effectRef>
+          <a:fontRef idx="minor">
+            <a:schemeClr val="lt1"/>
+          </a:fontRef>
+        </p:style>
+        <p:txBody>
+          <a:bodyPr rtlCol="0" anchor="ctr"/>
+          <a:lstStyle/>
+          <a:p>
+            <a:pPr algn="ctr"/>
+          </a:p>
+        </p:txBody>
+      </p:sp>
+      <p:sp>
+        <p:nvSpPr>
+          <p:cNvPr id="14" name="TextBox 13"/>
           <p:cNvSpPr txBox="1"/>
           <p:nvPr/>
         </p:nvSpPr>
         <p:spPr>
           <a:xfrm>
-            <a:off x="8229600" y="3246120"/>
-            <a:ext cx="3200400" cy="457200"/>
+            <a:off x="7635240" y="3017520"/>
+            <a:ext cx="3657600" cy="274320"/>
           </a:xfrm>
           <a:prstGeom prst="rect">
             <a:avLst/>
@@ -3419,33 +3623,41 @@
           <a:noFill/>
         </p:spPr>
         <p:txBody>
-          <a:bodyPr wrap="square">
-            <a:spAutoFit/>
-          </a:bodyPr>
-          <a:lstStyle/>
-          <a:p>
-            <a:r>
-              <a:rPr sz="1200" b="1">
-                <a:solidFill>
-                  <a:srgbClr val="4ADE80"/>
-                </a:solidFill>
-                <a:latin typeface="Calibri"/>
+          <a:bodyPr wrap="square" anchor="t"/>
+          <a:lstStyle/>
+          <a:p>
+            <a:pPr algn="l">
+              <a:spcBef>
+                <a:spcPts val="0"/>
+              </a:spcBef>
+              <a:spcAft>
+                <a:spcPts val="0"/>
+              </a:spcAft>
+            </a:pPr>
+            <a:r>
+              <a:rPr sz="1300" b="1">
+                <a:cs typeface="Helvetica"/>
+                <a:ea typeface="Helvetica"/>
+                <a:solidFill>
+                  <a:srgbClr val="E8F0EB"/>
+                </a:solidFill>
+                <a:latin typeface="Helvetica"/>
               </a:rPr>
-              <a:t>compiled — 591 tokens (97% less)</a:t>
-            </a:r>
-          </a:p>
-        </p:txBody>
-      </p:sp>
-      <p:sp>
-        <p:nvSpPr>
-          <p:cNvPr id="11" name="Text 8"/>
+              <a:t>Compiled</a:t>
+            </a:r>
+          </a:p>
+        </p:txBody>
+      </p:sp>
+      <p:sp>
+        <p:nvSpPr>
+          <p:cNvPr id="15" name="TextBox 14"/>
           <p:cNvSpPr txBox="1"/>
           <p:nvPr/>
         </p:nvSpPr>
         <p:spPr>
           <a:xfrm>
-            <a:off x="7680960" y="3931920"/>
-            <a:ext cx="3657600" cy="274320"/>
+            <a:off x="9692640" y="3017520"/>
+            <a:ext cx="1554480" cy="274320"/>
           </a:xfrm>
           <a:prstGeom prst="rect">
             <a:avLst/>
@@ -3453,53 +3665,197 @@
           <a:noFill/>
         </p:spPr>
         <p:txBody>
-          <a:bodyPr wrap="square">
-            <a:spAutoFit/>
-          </a:bodyPr>
-          <a:lstStyle/>
-          <a:p>
+          <a:bodyPr wrap="square" anchor="t"/>
+          <a:lstStyle/>
+          <a:p>
+            <a:pPr algn="r">
+              <a:spcBef>
+                <a:spcPts val="0"/>
+              </a:spcBef>
+              <a:spcAft>
+                <a:spcPts val="0"/>
+              </a:spcAft>
+            </a:pPr>
+            <a:r>
+              <a:rPr sz="1200" b="0">
+                <a:cs typeface="Menlo"/>
+                <a:ea typeface="Menlo"/>
+                <a:solidFill>
+                  <a:srgbClr val="E8F0EB"/>
+                </a:solidFill>
+                <a:latin typeface="Menlo"/>
+              </a:rPr>
+              <a:t>591 tokens</a:t>
+            </a:r>
+          </a:p>
+        </p:txBody>
+      </p:sp>
+      <p:sp>
+        <p:nvSpPr>
+          <p:cNvPr id="16" name="Rectangle 15"/>
+          <p:cNvSpPr/>
+          <p:nvPr/>
+        </p:nvSpPr>
+        <p:spPr>
+          <a:xfrm>
+            <a:off x="7635240" y="3337560"/>
+            <a:ext cx="3611880" cy="128016"/>
+          </a:xfrm>
+          <a:prstGeom prst="rect">
+            <a:avLst/>
+          </a:prstGeom>
+          <a:solidFill>
+            <a:srgbClr val="2A4A3A"/>
+          </a:solidFill>
+          <a:ln>
+            <a:noFill/>
+          </a:ln>
+        </p:spPr>
+        <p:style>
+          <a:lnRef idx="1">
+            <a:schemeClr val="accent1"/>
+          </a:lnRef>
+          <a:fillRef idx="3">
+            <a:schemeClr val="accent1"/>
+          </a:fillRef>
+          <a:effectRef idx="2">
+            <a:schemeClr val="accent1"/>
+          </a:effectRef>
+          <a:fontRef idx="minor">
+            <a:schemeClr val="lt1"/>
+          </a:fontRef>
+        </p:style>
+        <p:txBody>
+          <a:bodyPr rtlCol="0" anchor="ctr"/>
+          <a:lstStyle/>
+          <a:p>
+            <a:pPr algn="ctr"/>
+          </a:p>
+        </p:txBody>
+      </p:sp>
+      <p:sp>
+        <p:nvSpPr>
+          <p:cNvPr id="17" name="Rectangle 16"/>
+          <p:cNvSpPr/>
+          <p:nvPr/>
+        </p:nvSpPr>
+        <p:spPr>
+          <a:xfrm>
+            <a:off x="7635240" y="3337560"/>
+            <a:ext cx="146304" cy="128016"/>
+          </a:xfrm>
+          <a:prstGeom prst="rect">
+            <a:avLst/>
+          </a:prstGeom>
+          <a:solidFill>
+            <a:srgbClr val="8FCEB0"/>
+          </a:solidFill>
+          <a:ln>
+            <a:noFill/>
+          </a:ln>
+        </p:spPr>
+        <p:style>
+          <a:lnRef idx="1">
+            <a:schemeClr val="accent1"/>
+          </a:lnRef>
+          <a:fillRef idx="3">
+            <a:schemeClr val="accent1"/>
+          </a:fillRef>
+          <a:effectRef idx="2">
+            <a:schemeClr val="accent1"/>
+          </a:effectRef>
+          <a:fontRef idx="minor">
+            <a:schemeClr val="lt1"/>
+          </a:fontRef>
+        </p:style>
+        <p:txBody>
+          <a:bodyPr rtlCol="0" anchor="ctr"/>
+          <a:lstStyle/>
+          <a:p>
+            <a:pPr algn="ctr"/>
+          </a:p>
+        </p:txBody>
+      </p:sp>
+      <p:sp>
+        <p:nvSpPr>
+          <p:cNvPr id="18" name="TextBox 17"/>
+          <p:cNvSpPr txBox="1"/>
+          <p:nvPr/>
+        </p:nvSpPr>
+        <p:spPr>
+          <a:xfrm>
+            <a:off x="7635240" y="3794760"/>
+            <a:ext cx="3657600" cy="822960"/>
+          </a:xfrm>
+          <a:prstGeom prst="rect">
+            <a:avLst/>
+          </a:prstGeom>
+          <a:noFill/>
+        </p:spPr>
+        <p:txBody>
+          <a:bodyPr wrap="square" anchor="t"/>
+          <a:lstStyle/>
+          <a:p>
+            <a:pPr algn="l">
+              <a:spcBef>
+                <a:spcPts val="0"/>
+              </a:spcBef>
+              <a:spcAft>
+                <a:spcPts val="0"/>
+              </a:spcAft>
+            </a:pPr>
+            <a:r>
+              <a:rPr sz="1800" b="1">
+                <a:cs typeface="Helvetica"/>
+                <a:ea typeface="Helvetica"/>
+                <a:solidFill>
+                  <a:srgbClr val="E8F0EB"/>
+                </a:solidFill>
+                <a:latin typeface="Helvetica"/>
+              </a:rPr>
+              <a:t>97% fewer tokens</a:t>
+            </a:r>
+          </a:p>
+          <a:p>
+            <a:pPr algn="l">
+              <a:spcBef>
+                <a:spcPts val="600"/>
+              </a:spcBef>
+              <a:spcAft>
+                <a:spcPts val="0"/>
+              </a:spcAft>
+            </a:pPr>
+            <a:r>
+              <a:rPr sz="1300" b="0">
+                <a:cs typeface="Helvetica"/>
+                <a:ea typeface="Helvetica"/>
+                <a:solidFill>
+                  <a:srgbClr val="B8D0C4"/>
+                </a:solidFill>
+                <a:latin typeface="Helvetica"/>
+              </a:rPr>
+              <a:t>Same facts. Every read.</a:t>
+            </a:r>
+          </a:p>
+          <a:p>
+            <a:pPr algn="l">
+              <a:spcBef>
+                <a:spcPts val="1000"/>
+              </a:spcBef>
+              <a:spcAft>
+                <a:spcPts val="0"/>
+              </a:spcAft>
+            </a:pPr>
             <a:r>
               <a:rPr sz="1000" b="0">
-                <a:solidFill>
-                  <a:srgbClr val="9AA0B0"/>
-                </a:solidFill>
-                <a:latin typeface="Calibri"/>
+                <a:cs typeface="Menlo"/>
+                <a:ea typeface="Menlo"/>
+                <a:solidFill>
+                  <a:srgbClr val="B8D0C4"/>
+                </a:solidFill>
+                <a:latin typeface="Menlo"/>
               </a:rPr>
               <a:t>verified: unit tests + recall eval + live runs</a:t>
-            </a:r>
-          </a:p>
-        </p:txBody>
-      </p:sp>
-      <p:sp>
-        <p:nvSpPr>
-          <p:cNvPr id="12" name="Text 9"/>
-          <p:cNvSpPr txBox="1"/>
-          <p:nvPr/>
-        </p:nvSpPr>
-        <p:spPr>
-          <a:xfrm>
-            <a:off x="640080" y="6263640"/>
-            <a:ext cx="10972800" cy="274320"/>
-          </a:xfrm>
-          <a:prstGeom prst="rect">
-            <a:avLst/>
-          </a:prstGeom>
-          <a:noFill/>
-        </p:spPr>
-        <p:txBody>
-          <a:bodyPr wrap="square">
-            <a:spAutoFit/>
-          </a:bodyPr>
-          <a:lstStyle/>
-          <a:p>
-            <a:r>
-              <a:rPr sz="1100" b="0">
-                <a:solidFill>
-                  <a:srgbClr val="9AA0B0"/>
-                </a:solidFill>
-                <a:latin typeface="Calibri"/>
-              </a:rPr>
-              <a:t>OpenAI × NamasteDev Codex Hackathon · July 2026 · solo build</a:t>
             </a:r>
           </a:p>
         </p:txBody>
@@ -3515,14 +3871,6 @@
 <file path=ppt/slides/slide2.xml><?xml version="1.0" encoding="utf-8"?>
 <p:sld xmlns:a="http://schemas.openxmlformats.org/drawingml/2006/main" xmlns:p="http://schemas.openxmlformats.org/presentationml/2006/main" xmlns:r="http://schemas.openxmlformats.org/officeDocument/2006/relationships">
   <p:cSld>
-    <p:bg>
-      <p:bgPr>
-        <a:solidFill>
-          <a:srgbClr val="0F1117"/>
-        </a:solidFill>
-        <a:effectLst/>
-      </p:bgPr>
-    </p:bg>
     <p:spTree>
       <p:nvGrpSpPr>
         <p:cNvPr id="1" name=""/>
@@ -3532,56 +3880,20 @@
       <p:grpSpPr/>
       <p:sp>
         <p:nvSpPr>
-          <p:cNvPr id="2" name="Text 0"/>
-          <p:cNvSpPr txBox="1"/>
-          <p:nvPr/>
-        </p:nvSpPr>
-        <p:spPr>
-          <a:xfrm>
-            <a:off x="548640" y="457200"/>
-            <a:ext cx="11064240" cy="640080"/>
-          </a:xfrm>
-          <a:prstGeom prst="rect">
-            <a:avLst/>
-          </a:prstGeom>
-          <a:noFill/>
-        </p:spPr>
-        <p:txBody>
-          <a:bodyPr wrap="square">
-            <a:spAutoFit/>
-          </a:bodyPr>
-          <a:lstStyle/>
-          <a:p>
-            <a:r>
-              <a:rPr sz="3200" b="1">
-                <a:solidFill>
-                  <a:srgbClr val="E8EAF0"/>
-                </a:solidFill>
-                <a:latin typeface="Calibri"/>
-              </a:rPr>
-              <a:t>Agents pay to read pages they don't need</a:t>
-            </a:r>
-          </a:p>
-        </p:txBody>
-      </p:sp>
-      <p:sp>
-        <p:nvSpPr>
-          <p:cNvPr id="3" name="Shape"/>
+          <p:cNvPr id="2" name="Rectangle 1"/>
           <p:cNvSpPr/>
           <p:nvPr/>
         </p:nvSpPr>
         <p:spPr>
           <a:xfrm>
-            <a:off x="640080" y="1600200"/>
-            <a:ext cx="502920" cy="502920"/>
-          </a:xfrm>
-          <a:prstGeom prst="roundRect">
-            <a:avLst>
-              <a:gd name="adj" fmla="val 20000"/>
-            </a:avLst>
+            <a:off x="0" y="0"/>
+            <a:ext cx="12191695" cy="6858000"/>
+          </a:xfrm>
+          <a:prstGeom prst="rect">
+            <a:avLst/>
           </a:prstGeom>
           <a:solidFill>
-            <a:srgbClr val="6EA8FE"/>
+            <a:srgbClr val="E8ECE9"/>
           </a:solidFill>
           <a:ln>
             <a:noFill/>
@@ -3609,40 +3921,16 @@
           </a:p>
         </p:txBody>
       </p:sp>
-      <p:pic>
-        <p:nvPicPr>
-          <p:cNvPr id="4" name="Picture 3" descr="icon_1_e5d1b2f4.png"/>
-          <p:cNvPicPr>
-            <a:picLocks noChangeAspect="1"/>
-          </p:cNvPicPr>
-          <p:nvPr/>
-        </p:nvPicPr>
-        <p:blipFill>
-          <a:blip r:embed="rId2"/>
-          <a:stretch>
-            <a:fillRect/>
-          </a:stretch>
-        </p:blipFill>
-        <p:spPr>
-          <a:xfrm>
-            <a:off x="760781" y="1720901"/>
-            <a:ext cx="261518" cy="261518"/>
-          </a:xfrm>
-          <a:prstGeom prst="rect">
-            <a:avLst/>
-          </a:prstGeom>
-        </p:spPr>
-      </p:pic>
-      <p:sp>
-        <p:nvSpPr>
-          <p:cNvPr id="5" name="Text"/>
+      <p:sp>
+        <p:nvSpPr>
+          <p:cNvPr id="3" name="TextBox 2"/>
           <p:cNvSpPr txBox="1"/>
           <p:nvPr/>
         </p:nvSpPr>
         <p:spPr>
           <a:xfrm>
-            <a:off x="1417320" y="1527048"/>
-            <a:ext cx="5212080" cy="365760"/>
+            <a:off x="640080" y="411480"/>
+            <a:ext cx="10972800" cy="640080"/>
           </a:xfrm>
           <a:prstGeom prst="rect">
             <a:avLst/>
@@ -3650,75 +3938,47 @@
           <a:noFill/>
         </p:spPr>
         <p:txBody>
-          <a:bodyPr wrap="square">
-            <a:spAutoFit/>
-          </a:bodyPr>
-          <a:lstStyle/>
-          <a:p>
-            <a:r>
-              <a:rPr sz="1600" b="1">
-                <a:solidFill>
-                  <a:srgbClr val="E8EAF0"/>
-                </a:solidFill>
-                <a:latin typeface="Calibri"/>
+          <a:bodyPr wrap="square" anchor="t"/>
+          <a:lstStyle/>
+          <a:p>
+            <a:pPr algn="l">
+              <a:spcBef>
+                <a:spcPts val="0"/>
+              </a:spcBef>
+              <a:spcAft>
+                <a:spcPts val="0"/>
+              </a:spcAft>
+            </a:pPr>
+            <a:r>
+              <a:rPr sz="2800" b="1">
+                <a:cs typeface="Georgia"/>
+                <a:ea typeface="Georgia"/>
+                <a:solidFill>
+                  <a:srgbClr val="1A221E"/>
+                </a:solidFill>
+                <a:latin typeface="Georgia"/>
               </a:rPr>
-              <a:t>Whole-file reads</a:t>
-            </a:r>
-          </a:p>
-        </p:txBody>
-      </p:sp>
-      <p:sp>
-        <p:nvSpPr>
-          <p:cNvPr id="6" name="Text"/>
-          <p:cNvSpPr txBox="1"/>
-          <p:nvPr/>
-        </p:nvSpPr>
-        <p:spPr>
-          <a:xfrm>
-            <a:off x="1417320" y="1901952"/>
-            <a:ext cx="5212080" cy="777240"/>
-          </a:xfrm>
-          <a:prstGeom prst="rect">
-            <a:avLst/>
-          </a:prstGeom>
-          <a:noFill/>
-        </p:spPr>
-        <p:txBody>
-          <a:bodyPr wrap="square">
-            <a:spAutoFit/>
-          </a:bodyPr>
-          <a:lstStyle/>
-          <a:p>
-            <a:r>
-              <a:rPr sz="1300" b="0">
-                <a:solidFill>
-                  <a:srgbClr val="9AA0B0"/>
-                </a:solidFill>
-                <a:latin typeface="Calibri"/>
-              </a:rPr>
-              <a:t>Agents convert and ingest entire documents to answer a single question — every time.</a:t>
-            </a:r>
-          </a:p>
-        </p:txBody>
-      </p:sp>
-      <p:sp>
-        <p:nvSpPr>
-          <p:cNvPr id="7" name="Shape"/>
+              <a:t>Agents pay to read pages they don’t need</a:t>
+            </a:r>
+          </a:p>
+        </p:txBody>
+      </p:sp>
+      <p:sp>
+        <p:nvSpPr>
+          <p:cNvPr id="4" name="Rectangle 3"/>
           <p:cNvSpPr/>
           <p:nvPr/>
         </p:nvSpPr>
         <p:spPr>
           <a:xfrm>
-            <a:off x="640080" y="2971800"/>
-            <a:ext cx="502920" cy="502920"/>
-          </a:xfrm>
-          <a:prstGeom prst="roundRect">
-            <a:avLst>
-              <a:gd name="adj" fmla="val 20000"/>
-            </a:avLst>
+            <a:off x="640080" y="1280160"/>
+            <a:ext cx="73152" cy="1005840"/>
+          </a:xfrm>
+          <a:prstGeom prst="rect">
+            <a:avLst/>
           </a:prstGeom>
           <a:solidFill>
-            <a:srgbClr val="F87171"/>
+            <a:srgbClr val="1F5C42"/>
           </a:solidFill>
           <a:ln>
             <a:noFill/>
@@ -3746,40 +4006,16 @@
           </a:p>
         </p:txBody>
       </p:sp>
-      <p:pic>
-        <p:nvPicPr>
-          <p:cNvPr id="8" name="Picture 7" descr="icon_1_4f8fc5dc.png"/>
-          <p:cNvPicPr>
-            <a:picLocks noChangeAspect="1"/>
-          </p:cNvPicPr>
-          <p:nvPr/>
-        </p:nvPicPr>
-        <p:blipFill>
-          <a:blip r:embed="rId3"/>
-          <a:stretch>
-            <a:fillRect/>
-          </a:stretch>
-        </p:blipFill>
-        <p:spPr>
-          <a:xfrm>
-            <a:off x="760781" y="3092501"/>
-            <a:ext cx="261518" cy="261518"/>
-          </a:xfrm>
-          <a:prstGeom prst="rect">
-            <a:avLst/>
-          </a:prstGeom>
-        </p:spPr>
-      </p:pic>
-      <p:sp>
-        <p:nvSpPr>
-          <p:cNvPr id="9" name="Text"/>
+      <p:sp>
+        <p:nvSpPr>
+          <p:cNvPr id="5" name="TextBox 4"/>
           <p:cNvSpPr txBox="1"/>
           <p:nvPr/>
         </p:nvSpPr>
         <p:spPr>
           <a:xfrm>
-            <a:off x="1417320" y="2898648"/>
-            <a:ext cx="5212080" cy="365760"/>
+            <a:off x="960120" y="1280160"/>
+            <a:ext cx="5669280" cy="365760"/>
           </a:xfrm>
           <a:prstGeom prst="rect">
             <a:avLst/>
@@ -3787,33 +4023,41 @@
           <a:noFill/>
         </p:spPr>
         <p:txBody>
-          <a:bodyPr wrap="square">
-            <a:spAutoFit/>
-          </a:bodyPr>
-          <a:lstStyle/>
-          <a:p>
-            <a:r>
-              <a:rPr sz="1600" b="1">
-                <a:solidFill>
-                  <a:srgbClr val="E8EAF0"/>
-                </a:solidFill>
-                <a:latin typeface="Calibri"/>
+          <a:bodyPr wrap="square" anchor="t"/>
+          <a:lstStyle/>
+          <a:p>
+            <a:pPr algn="l">
+              <a:spcBef>
+                <a:spcPts val="0"/>
+              </a:spcBef>
+              <a:spcAft>
+                <a:spcPts val="0"/>
+              </a:spcAft>
+            </a:pPr>
+            <a:r>
+              <a:rPr sz="1800" b="1">
+                <a:cs typeface="Helvetica"/>
+                <a:ea typeface="Helvetica"/>
+                <a:solidFill>
+                  <a:srgbClr val="1A221E"/>
+                </a:solidFill>
+                <a:latin typeface="Helvetica"/>
               </a:rPr>
-              <a:t>95%+ never touches the answer</a:t>
-            </a:r>
-          </a:p>
-        </p:txBody>
-      </p:sp>
-      <p:sp>
-        <p:nvSpPr>
-          <p:cNvPr id="10" name="Text"/>
+              <a:t>Whole-file reads</a:t>
+            </a:r>
+          </a:p>
+        </p:txBody>
+      </p:sp>
+      <p:sp>
+        <p:nvSpPr>
+          <p:cNvPr id="6" name="TextBox 5"/>
           <p:cNvSpPr txBox="1"/>
           <p:nvPr/>
         </p:nvSpPr>
         <p:spPr>
           <a:xfrm>
-            <a:off x="1417320" y="3273552"/>
-            <a:ext cx="5212080" cy="777240"/>
+            <a:off x="960120" y="1645920"/>
+            <a:ext cx="5669280" cy="640080"/>
           </a:xfrm>
           <a:prstGeom prst="rect">
             <a:avLst/>
@@ -3821,41 +4065,47 @@
           <a:noFill/>
         </p:spPr>
         <p:txBody>
-          <a:bodyPr wrap="square">
-            <a:spAutoFit/>
-          </a:bodyPr>
-          <a:lstStyle/>
-          <a:p>
-            <a:r>
-              <a:rPr sz="1300" b="0">
-                <a:solidFill>
-                  <a:srgbClr val="9AA0B0"/>
-                </a:solidFill>
-                <a:latin typeface="Calibri"/>
+          <a:bodyPr wrap="square" anchor="t"/>
+          <a:lstStyle/>
+          <a:p>
+            <a:pPr algn="l">
+              <a:spcBef>
+                <a:spcPts val="0"/>
+              </a:spcBef>
+              <a:spcAft>
+                <a:spcPts val="0"/>
+              </a:spcAft>
+            </a:pPr>
+            <a:r>
+              <a:rPr sz="1400" b="0">
+                <a:cs typeface="Helvetica"/>
+                <a:ea typeface="Helvetica"/>
+                <a:solidFill>
+                  <a:srgbClr val="4A5850"/>
+                </a:solidFill>
+                <a:latin typeface="Helvetica"/>
               </a:rPr>
-              <a:t>The relevant clause is 2 pages of 100. The other 98 are pure token spend.</a:t>
-            </a:r>
-          </a:p>
-        </p:txBody>
-      </p:sp>
-      <p:sp>
-        <p:nvSpPr>
-          <p:cNvPr id="11" name="Shape"/>
+              <a:t>Agents convert and ingest entire documents to answer a single question — every time.</a:t>
+            </a:r>
+          </a:p>
+        </p:txBody>
+      </p:sp>
+      <p:sp>
+        <p:nvSpPr>
+          <p:cNvPr id="7" name="Rectangle 6"/>
           <p:cNvSpPr/>
           <p:nvPr/>
         </p:nvSpPr>
         <p:spPr>
           <a:xfrm>
-            <a:off x="640080" y="4343400"/>
-            <a:ext cx="502920" cy="502920"/>
-          </a:xfrm>
-          <a:prstGeom prst="roundRect">
-            <a:avLst>
-              <a:gd name="adj" fmla="val 20000"/>
-            </a:avLst>
+            <a:off x="640080" y="2651760"/>
+            <a:ext cx="73152" cy="1005840"/>
+          </a:xfrm>
+          <a:prstGeom prst="rect">
+            <a:avLst/>
           </a:prstGeom>
           <a:solidFill>
-            <a:srgbClr val="4ADE80"/>
+            <a:srgbClr val="1F5C42"/>
           </a:solidFill>
           <a:ln>
             <a:noFill/>
@@ -3883,40 +4133,16 @@
           </a:p>
         </p:txBody>
       </p:sp>
-      <p:pic>
-        <p:nvPicPr>
-          <p:cNvPr id="12" name="Picture 11" descr="icon_1_e78cfa03.png"/>
-          <p:cNvPicPr>
-            <a:picLocks noChangeAspect="1"/>
-          </p:cNvPicPr>
-          <p:nvPr/>
-        </p:nvPicPr>
-        <p:blipFill>
-          <a:blip r:embed="rId4"/>
-          <a:stretch>
-            <a:fillRect/>
-          </a:stretch>
-        </p:blipFill>
-        <p:spPr>
-          <a:xfrm>
-            <a:off x="760781" y="4464101"/>
-            <a:ext cx="261518" cy="261518"/>
-          </a:xfrm>
-          <a:prstGeom prst="rect">
-            <a:avLst/>
-          </a:prstGeom>
-        </p:spPr>
-      </p:pic>
-      <p:sp>
-        <p:nvSpPr>
-          <p:cNvPr id="13" name="Text"/>
+      <p:sp>
+        <p:nvSpPr>
+          <p:cNvPr id="8" name="TextBox 7"/>
           <p:cNvSpPr txBox="1"/>
           <p:nvPr/>
         </p:nvSpPr>
         <p:spPr>
           <a:xfrm>
-            <a:off x="1417320" y="4270248"/>
-            <a:ext cx="5212080" cy="365760"/>
+            <a:off x="960120" y="2651760"/>
+            <a:ext cx="5669280" cy="365760"/>
           </a:xfrm>
           <a:prstGeom prst="rect">
             <a:avLst/>
@@ -3924,33 +4150,41 @@
           <a:noFill/>
         </p:spPr>
         <p:txBody>
-          <a:bodyPr wrap="square">
-            <a:spAutoFit/>
-          </a:bodyPr>
-          <a:lstStyle/>
-          <a:p>
-            <a:r>
-              <a:rPr sz="1600" b="1">
-                <a:solidFill>
-                  <a:srgbClr val="E8EAF0"/>
-                </a:solidFill>
-                <a:latin typeface="Calibri"/>
+          <a:bodyPr wrap="square" anchor="t"/>
+          <a:lstStyle/>
+          <a:p>
+            <a:pPr algn="l">
+              <a:spcBef>
+                <a:spcPts val="0"/>
+              </a:spcBef>
+              <a:spcAft>
+                <a:spcPts val="0"/>
+              </a:spcAft>
+            </a:pPr>
+            <a:r>
+              <a:rPr sz="1800" b="1">
+                <a:cs typeface="Helvetica"/>
+                <a:ea typeface="Helvetica"/>
+                <a:solidFill>
+                  <a:srgbClr val="1A221E"/>
+                </a:solidFill>
+                <a:latin typeface="Helvetica"/>
               </a:rPr>
-              <a:t>And it compounds</a:t>
-            </a:r>
-          </a:p>
-        </p:txBody>
-      </p:sp>
-      <p:sp>
-        <p:nvSpPr>
-          <p:cNvPr id="14" name="Text"/>
+              <a:t>95%+ never touches the answer</a:t>
+            </a:r>
+          </a:p>
+        </p:txBody>
+      </p:sp>
+      <p:sp>
+        <p:nvSpPr>
+          <p:cNvPr id="9" name="TextBox 8"/>
           <p:cNvSpPr txBox="1"/>
           <p:nvPr/>
         </p:nvSpPr>
         <p:spPr>
           <a:xfrm>
-            <a:off x="1417320" y="4645152"/>
-            <a:ext cx="5212080" cy="777240"/>
+            <a:off x="960120" y="3017520"/>
+            <a:ext cx="5669280" cy="640080"/>
           </a:xfrm>
           <a:prstGeom prst="rect">
             <a:avLst/>
@@ -3958,41 +4192,47 @@
           <a:noFill/>
         </p:spPr>
         <p:txBody>
-          <a:bodyPr wrap="square">
-            <a:spAutoFit/>
-          </a:bodyPr>
-          <a:lstStyle/>
-          <a:p>
-            <a:r>
-              <a:rPr sz="1300" b="0">
-                <a:solidFill>
-                  <a:srgbClr val="9AA0B0"/>
-                </a:solidFill>
-                <a:latin typeface="Calibri"/>
+          <a:bodyPr wrap="square" anchor="t"/>
+          <a:lstStyle/>
+          <a:p>
+            <a:pPr algn="l">
+              <a:spcBef>
+                <a:spcPts val="0"/>
+              </a:spcBef>
+              <a:spcAft>
+                <a:spcPts val="0"/>
+              </a:spcAft>
+            </a:pPr>
+            <a:r>
+              <a:rPr sz="1400" b="0">
+                <a:cs typeface="Helvetica"/>
+                <a:ea typeface="Helvetica"/>
+                <a:solidFill>
+                  <a:srgbClr val="4A5850"/>
+                </a:solidFill>
+                <a:latin typeface="Helvetica"/>
               </a:rPr>
-              <a:t>Every file × every question × every agent × every day. Context windows fill, latency and cost climb.</a:t>
-            </a:r>
-          </a:p>
-        </p:txBody>
-      </p:sp>
-      <p:sp>
-        <p:nvSpPr>
-          <p:cNvPr id="15" name="Shape"/>
+              <a:t>The relevant clause is 2 pages of 100. The other 98 are pure token spend.</a:t>
+            </a:r>
+          </a:p>
+        </p:txBody>
+      </p:sp>
+      <p:sp>
+        <p:nvSpPr>
+          <p:cNvPr id="10" name="Rectangle 9"/>
           <p:cNvSpPr/>
           <p:nvPr/>
         </p:nvSpPr>
         <p:spPr>
           <a:xfrm>
-            <a:off x="7223760" y="1600200"/>
-            <a:ext cx="4297680" cy="1920240"/>
-          </a:xfrm>
-          <a:prstGeom prst="roundRect">
-            <a:avLst>
-              <a:gd name="adj" fmla="val 8000"/>
-            </a:avLst>
+            <a:off x="640080" y="4023360"/>
+            <a:ext cx="73152" cy="1005840"/>
+          </a:xfrm>
+          <a:prstGeom prst="rect">
+            <a:avLst/>
           </a:prstGeom>
           <a:solidFill>
-            <a:srgbClr val="181B23"/>
+            <a:srgbClr val="1F5C42"/>
           </a:solidFill>
           <a:ln>
             <a:noFill/>
@@ -4022,14 +4262,14 @@
       </p:sp>
       <p:sp>
         <p:nvSpPr>
-          <p:cNvPr id="16" name="Text"/>
+          <p:cNvPr id="11" name="TextBox 10"/>
           <p:cNvSpPr txBox="1"/>
           <p:nvPr/>
         </p:nvSpPr>
         <p:spPr>
           <a:xfrm>
-            <a:off x="7498080" y="1828800"/>
-            <a:ext cx="3749040" cy="731520"/>
+            <a:off x="960120" y="4023360"/>
+            <a:ext cx="5669280" cy="365760"/>
           </a:xfrm>
           <a:prstGeom prst="rect">
             <a:avLst/>
@@ -4037,33 +4277,41 @@
           <a:noFill/>
         </p:spPr>
         <p:txBody>
-          <a:bodyPr wrap="square">
-            <a:spAutoFit/>
-          </a:bodyPr>
-          <a:lstStyle/>
-          <a:p>
-            <a:r>
-              <a:rPr sz="4000" b="1">
-                <a:solidFill>
-                  <a:srgbClr val="F87171"/>
-                </a:solidFill>
-                <a:latin typeface="Calibri"/>
+          <a:bodyPr wrap="square" anchor="t"/>
+          <a:lstStyle/>
+          <a:p>
+            <a:pPr algn="l">
+              <a:spcBef>
+                <a:spcPts val="0"/>
+              </a:spcBef>
+              <a:spcAft>
+                <a:spcPts val="0"/>
+              </a:spcAft>
+            </a:pPr>
+            <a:r>
+              <a:rPr sz="1800" b="1">
+                <a:cs typeface="Helvetica"/>
+                <a:ea typeface="Helvetica"/>
+                <a:solidFill>
+                  <a:srgbClr val="1A221E"/>
+                </a:solidFill>
+                <a:latin typeface="Helvetica"/>
               </a:rPr>
-              <a:t>$61 → $2</a:t>
-            </a:r>
-          </a:p>
-        </p:txBody>
-      </p:sp>
-      <p:sp>
-        <p:nvSpPr>
-          <p:cNvPr id="17" name="Text"/>
+              <a:t>And it compounds</a:t>
+            </a:r>
+          </a:p>
+        </p:txBody>
+      </p:sp>
+      <p:sp>
+        <p:nvSpPr>
+          <p:cNvPr id="12" name="TextBox 11"/>
           <p:cNvSpPr txBox="1"/>
           <p:nvPr/>
         </p:nvSpPr>
         <p:spPr>
           <a:xfrm>
-            <a:off x="7498080" y="2606040"/>
-            <a:ext cx="3749040" cy="731520"/>
+            <a:off x="960120" y="4389120"/>
+            <a:ext cx="5669280" cy="640080"/>
           </a:xfrm>
           <a:prstGeom prst="rect">
             <a:avLst/>
@@ -4071,55 +4319,52 @@
           <a:noFill/>
         </p:spPr>
         <p:txBody>
-          <a:bodyPr wrap="square">
-            <a:spAutoFit/>
-          </a:bodyPr>
-          <a:lstStyle/>
-          <a:p>
-            <a:r>
-              <a:rPr sz="1200" b="0">
-                <a:solidFill>
-                  <a:srgbClr val="9AA0B0"/>
-                </a:solidFill>
-                <a:latin typeface="Calibri"/>
+          <a:bodyPr wrap="square" anchor="t"/>
+          <a:lstStyle/>
+          <a:p>
+            <a:pPr algn="l">
+              <a:spcBef>
+                <a:spcPts val="0"/>
+              </a:spcBef>
+              <a:spcAft>
+                <a:spcPts val="0"/>
+              </a:spcAft>
+            </a:pPr>
+            <a:r>
+              <a:rPr sz="1400" b="0">
+                <a:cs typeface="Helvetica"/>
+                <a:ea typeface="Helvetica"/>
+                <a:solidFill>
+                  <a:srgbClr val="4A5850"/>
+                </a:solidFill>
+                <a:latin typeface="Helvetica"/>
               </a:rPr>
-              <a:t>per 1,000 reads of one 100-page document</a:t>
-            </a:r>
-          </a:p>
-          <a:p>
-            <a:r>
-              <a:rPr sz="1200" b="0">
-                <a:solidFill>
-                  <a:srgbClr val="9AA0B0"/>
-                </a:solidFill>
-                <a:latin typeface="Calibri"/>
-              </a:rPr>
-              <a:t>(at $3/Mtok input — demo cost meter default)</a:t>
-            </a:r>
-          </a:p>
-        </p:txBody>
-      </p:sp>
-      <p:sp>
-        <p:nvSpPr>
-          <p:cNvPr id="18" name="Shape"/>
+              <a:t>Every file × every question × every agent × every day. Context windows fill, latency and cost climb.</a:t>
+            </a:r>
+          </a:p>
+        </p:txBody>
+      </p:sp>
+      <p:sp>
+        <p:nvSpPr>
+          <p:cNvPr id="13" name="Rectangle 12"/>
           <p:cNvSpPr/>
           <p:nvPr/>
         </p:nvSpPr>
         <p:spPr>
           <a:xfrm>
-            <a:off x="7223760" y="3794760"/>
-            <a:ext cx="4297680" cy="1920240"/>
-          </a:xfrm>
-          <a:prstGeom prst="roundRect">
-            <a:avLst>
-              <a:gd name="adj" fmla="val 8000"/>
-            </a:avLst>
+            <a:off x="7315200" y="1280160"/>
+            <a:ext cx="4206240" cy="1965960"/>
+          </a:xfrm>
+          <a:prstGeom prst="rect">
+            <a:avLst/>
           </a:prstGeom>
           <a:solidFill>
-            <a:srgbClr val="181B23"/>
+            <a:srgbClr val="F3F6F4"/>
           </a:solidFill>
-          <a:ln>
-            <a:noFill/>
+          <a:ln w="12700">
+            <a:solidFill>
+              <a:srgbClr val="C8D2CB"/>
+            </a:solidFill>
           </a:ln>
         </p:spPr>
         <p:style>
@@ -4146,14 +4391,57 @@
       </p:sp>
       <p:sp>
         <p:nvSpPr>
-          <p:cNvPr id="19" name="Text"/>
+          <p:cNvPr id="14" name="Rectangle 13"/>
+          <p:cNvSpPr/>
+          <p:nvPr/>
+        </p:nvSpPr>
+        <p:spPr>
+          <a:xfrm>
+            <a:off x="7315200" y="1280160"/>
+            <a:ext cx="4206240" cy="45720"/>
+          </a:xfrm>
+          <a:prstGeom prst="rect">
+            <a:avLst/>
+          </a:prstGeom>
+          <a:solidFill>
+            <a:srgbClr val="1F5C42"/>
+          </a:solidFill>
+          <a:ln>
+            <a:noFill/>
+          </a:ln>
+        </p:spPr>
+        <p:style>
+          <a:lnRef idx="1">
+            <a:schemeClr val="accent1"/>
+          </a:lnRef>
+          <a:fillRef idx="3">
+            <a:schemeClr val="accent1"/>
+          </a:fillRef>
+          <a:effectRef idx="2">
+            <a:schemeClr val="accent1"/>
+          </a:effectRef>
+          <a:fontRef idx="minor">
+            <a:schemeClr val="lt1"/>
+          </a:fontRef>
+        </p:style>
+        <p:txBody>
+          <a:bodyPr rtlCol="0" anchor="ctr"/>
+          <a:lstStyle/>
+          <a:p>
+            <a:pPr algn="ctr"/>
+          </a:p>
+        </p:txBody>
+      </p:sp>
+      <p:sp>
+        <p:nvSpPr>
+          <p:cNvPr id="15" name="TextBox 14"/>
           <p:cNvSpPr txBox="1"/>
           <p:nvPr/>
         </p:nvSpPr>
         <p:spPr>
           <a:xfrm>
-            <a:off x="7498080" y="4023360"/>
-            <a:ext cx="3749040" cy="731520"/>
+            <a:off x="7589520" y="1600200"/>
+            <a:ext cx="3657600" cy="640080"/>
           </a:xfrm>
           <a:prstGeom prst="rect">
             <a:avLst/>
@@ -4161,17 +4449,197 @@
           <a:noFill/>
         </p:spPr>
         <p:txBody>
-          <a:bodyPr wrap="square">
-            <a:spAutoFit/>
-          </a:bodyPr>
-          <a:lstStyle/>
-          <a:p>
-            <a:r>
-              <a:rPr sz="4400" b="1">
-                <a:solidFill>
-                  <a:srgbClr val="F87171"/>
-                </a:solidFill>
-                <a:latin typeface="Calibri"/>
+          <a:bodyPr wrap="square" anchor="t"/>
+          <a:lstStyle/>
+          <a:p>
+            <a:pPr algn="l">
+              <a:spcBef>
+                <a:spcPts val="0"/>
+              </a:spcBef>
+              <a:spcAft>
+                <a:spcPts val="0"/>
+              </a:spcAft>
+            </a:pPr>
+            <a:r>
+              <a:rPr sz="3200" b="1">
+                <a:cs typeface="Georgia"/>
+                <a:ea typeface="Georgia"/>
+                <a:solidFill>
+                  <a:srgbClr val="1F5C42"/>
+                </a:solidFill>
+                <a:latin typeface="Georgia"/>
+              </a:rPr>
+              <a:t>$61 → $2</a:t>
+            </a:r>
+          </a:p>
+        </p:txBody>
+      </p:sp>
+      <p:sp>
+        <p:nvSpPr>
+          <p:cNvPr id="16" name="TextBox 15"/>
+          <p:cNvSpPr txBox="1"/>
+          <p:nvPr/>
+        </p:nvSpPr>
+        <p:spPr>
+          <a:xfrm>
+            <a:off x="7589520" y="2331720"/>
+            <a:ext cx="3657600" cy="731520"/>
+          </a:xfrm>
+          <a:prstGeom prst="rect">
+            <a:avLst/>
+          </a:prstGeom>
+          <a:noFill/>
+        </p:spPr>
+        <p:txBody>
+          <a:bodyPr wrap="square" anchor="t"/>
+          <a:lstStyle/>
+          <a:p>
+            <a:pPr algn="l">
+              <a:spcBef>
+                <a:spcPts val="0"/>
+              </a:spcBef>
+              <a:spcAft>
+                <a:spcPts val="0"/>
+              </a:spcAft>
+            </a:pPr>
+            <a:r>
+              <a:rPr sz="1300" b="0">
+                <a:cs typeface="Helvetica"/>
+                <a:ea typeface="Helvetica"/>
+                <a:solidFill>
+                  <a:srgbClr val="4A5850"/>
+                </a:solidFill>
+                <a:latin typeface="Helvetica"/>
+              </a:rPr>
+              <a:t>per 1,000 reads of one 100-page document (at $3/Mtok input — demo cost meter default)</a:t>
+            </a:r>
+          </a:p>
+        </p:txBody>
+      </p:sp>
+      <p:sp>
+        <p:nvSpPr>
+          <p:cNvPr id="17" name="Rectangle 16"/>
+          <p:cNvSpPr/>
+          <p:nvPr/>
+        </p:nvSpPr>
+        <p:spPr>
+          <a:xfrm>
+            <a:off x="7315200" y="3474720"/>
+            <a:ext cx="4206240" cy="1965960"/>
+          </a:xfrm>
+          <a:prstGeom prst="rect">
+            <a:avLst/>
+          </a:prstGeom>
+          <a:solidFill>
+            <a:srgbClr val="F3F6F4"/>
+          </a:solidFill>
+          <a:ln w="12700">
+            <a:solidFill>
+              <a:srgbClr val="C8D2CB"/>
+            </a:solidFill>
+          </a:ln>
+        </p:spPr>
+        <p:style>
+          <a:lnRef idx="1">
+            <a:schemeClr val="accent1"/>
+          </a:lnRef>
+          <a:fillRef idx="3">
+            <a:schemeClr val="accent1"/>
+          </a:fillRef>
+          <a:effectRef idx="2">
+            <a:schemeClr val="accent1"/>
+          </a:effectRef>
+          <a:fontRef idx="minor">
+            <a:schemeClr val="lt1"/>
+          </a:fontRef>
+        </p:style>
+        <p:txBody>
+          <a:bodyPr rtlCol="0" anchor="ctr"/>
+          <a:lstStyle/>
+          <a:p>
+            <a:pPr algn="ctr"/>
+          </a:p>
+        </p:txBody>
+      </p:sp>
+      <p:sp>
+        <p:nvSpPr>
+          <p:cNvPr id="18" name="Rectangle 17"/>
+          <p:cNvSpPr/>
+          <p:nvPr/>
+        </p:nvSpPr>
+        <p:spPr>
+          <a:xfrm>
+            <a:off x="7315200" y="3474720"/>
+            <a:ext cx="4206240" cy="45720"/>
+          </a:xfrm>
+          <a:prstGeom prst="rect">
+            <a:avLst/>
+          </a:prstGeom>
+          <a:solidFill>
+            <a:srgbClr val="1F5C42"/>
+          </a:solidFill>
+          <a:ln>
+            <a:noFill/>
+          </a:ln>
+        </p:spPr>
+        <p:style>
+          <a:lnRef idx="1">
+            <a:schemeClr val="accent1"/>
+          </a:lnRef>
+          <a:fillRef idx="3">
+            <a:schemeClr val="accent1"/>
+          </a:fillRef>
+          <a:effectRef idx="2">
+            <a:schemeClr val="accent1"/>
+          </a:effectRef>
+          <a:fontRef idx="minor">
+            <a:schemeClr val="lt1"/>
+          </a:fontRef>
+        </p:style>
+        <p:txBody>
+          <a:bodyPr rtlCol="0" anchor="ctr"/>
+          <a:lstStyle/>
+          <a:p>
+            <a:pPr algn="ctr"/>
+          </a:p>
+        </p:txBody>
+      </p:sp>
+      <p:sp>
+        <p:nvSpPr>
+          <p:cNvPr id="19" name="TextBox 18"/>
+          <p:cNvSpPr txBox="1"/>
+          <p:nvPr/>
+        </p:nvSpPr>
+        <p:spPr>
+          <a:xfrm>
+            <a:off x="7589520" y="3794760"/>
+            <a:ext cx="3657600" cy="640080"/>
+          </a:xfrm>
+          <a:prstGeom prst="rect">
+            <a:avLst/>
+          </a:prstGeom>
+          <a:noFill/>
+        </p:spPr>
+        <p:txBody>
+          <a:bodyPr wrap="square" anchor="t"/>
+          <a:lstStyle/>
+          <a:p>
+            <a:pPr algn="l">
+              <a:spcBef>
+                <a:spcPts val="0"/>
+              </a:spcBef>
+              <a:spcAft>
+                <a:spcPts val="0"/>
+              </a:spcAft>
+            </a:pPr>
+            <a:r>
+              <a:rPr sz="3200" b="1">
+                <a:cs typeface="Georgia"/>
+                <a:ea typeface="Georgia"/>
+                <a:solidFill>
+                  <a:srgbClr val="1F5C42"/>
+                </a:solidFill>
+                <a:latin typeface="Georgia"/>
               </a:rPr>
               <a:t>95%</a:t>
             </a:r>
@@ -4180,14 +4648,14 @@
       </p:sp>
       <p:sp>
         <p:nvSpPr>
-          <p:cNvPr id="20" name="Text"/>
+          <p:cNvPr id="20" name="TextBox 19"/>
           <p:cNvSpPr txBox="1"/>
           <p:nvPr/>
         </p:nvSpPr>
         <p:spPr>
           <a:xfrm>
-            <a:off x="7498080" y="4800600"/>
-            <a:ext cx="3749040" cy="731520"/>
+            <a:off x="7589520" y="4526280"/>
+            <a:ext cx="3657600" cy="731520"/>
           </a:xfrm>
           <a:prstGeom prst="rect">
             <a:avLst/>
@@ -4195,30 +4663,27 @@
           <a:noFill/>
         </p:spPr>
         <p:txBody>
-          <a:bodyPr wrap="square">
-            <a:spAutoFit/>
-          </a:bodyPr>
-          <a:lstStyle/>
-          <a:p>
-            <a:r>
-              <a:rPr sz="1200" b="0">
-                <a:solidFill>
-                  <a:srgbClr val="9AA0B0"/>
-                </a:solidFill>
-                <a:latin typeface="Calibri"/>
+          <a:bodyPr wrap="square" anchor="t"/>
+          <a:lstStyle/>
+          <a:p>
+            <a:pPr algn="l">
+              <a:spcBef>
+                <a:spcPts val="0"/>
+              </a:spcBef>
+              <a:spcAft>
+                <a:spcPts val="0"/>
+              </a:spcAft>
+            </a:pPr>
+            <a:r>
+              <a:rPr sz="1300" b="0">
+                <a:cs typeface="Helvetica"/>
+                <a:ea typeface="Helvetica"/>
+                <a:solidFill>
+                  <a:srgbClr val="4A5850"/>
+                </a:solidFill>
+                <a:latin typeface="Helvetica"/>
               </a:rPr>
-              <a:t>of file tokens are wasted per task —</a:t>
-            </a:r>
-          </a:p>
-          <a:p>
-            <a:r>
-              <a:rPr sz="1200" b="0">
-                <a:solidFill>
-                  <a:srgbClr val="9AA0B0"/>
-                </a:solidFill>
-                <a:latin typeface="Calibri"/>
-              </a:rPr>
-              <a:t>across pdf, docx, xlsx, pptx, images</a:t>
+              <a:t>of file tokens are wasted per task — across pdf, docx, xlsx, pptx, images</a:t>
             </a:r>
           </a:p>
         </p:txBody>
@@ -4234,14 +4699,6 @@
 <file path=ppt/slides/slide3.xml><?xml version="1.0" encoding="utf-8"?>
 <p:sld xmlns:a="http://schemas.openxmlformats.org/drawingml/2006/main" xmlns:p="http://schemas.openxmlformats.org/presentationml/2006/main" xmlns:r="http://schemas.openxmlformats.org/officeDocument/2006/relationships">
   <p:cSld>
-    <p:bg>
-      <p:bgPr>
-        <a:solidFill>
-          <a:srgbClr val="0F1117"/>
-        </a:solidFill>
-        <a:effectLst/>
-      </p:bgPr>
-    </p:bg>
     <p:spTree>
       <p:nvGrpSpPr>
         <p:cNvPr id="1" name=""/>
@@ -4251,56 +4708,20 @@
       <p:grpSpPr/>
       <p:sp>
         <p:nvSpPr>
-          <p:cNvPr id="2" name="Text 0"/>
-          <p:cNvSpPr txBox="1"/>
-          <p:nvPr/>
-        </p:nvSpPr>
-        <p:spPr>
-          <a:xfrm>
-            <a:off x="548640" y="457200"/>
-            <a:ext cx="11064240" cy="640080"/>
-          </a:xfrm>
-          <a:prstGeom prst="rect">
-            <a:avLst/>
-          </a:prstGeom>
-          <a:noFill/>
-        </p:spPr>
-        <p:txBody>
-          <a:bodyPr wrap="square">
-            <a:spAutoFit/>
-          </a:bodyPr>
-          <a:lstStyle/>
-          <a:p>
-            <a:r>
-              <a:rPr sz="3200" b="1">
-                <a:solidFill>
-                  <a:srgbClr val="E8EAF0"/>
-                </a:solidFill>
-                <a:latin typeface="Calibri"/>
-              </a:rPr>
-              <a:t>Who buys, why now, where we wedge</a:t>
-            </a:r>
-          </a:p>
-        </p:txBody>
-      </p:sp>
-      <p:sp>
-        <p:nvSpPr>
-          <p:cNvPr id="3" name="Shape"/>
+          <p:cNvPr id="2" name="Rectangle 1"/>
           <p:cNvSpPr/>
           <p:nvPr/>
         </p:nvSpPr>
         <p:spPr>
           <a:xfrm>
-            <a:off x="640080" y="1371600"/>
-            <a:ext cx="5394960" cy="2286000"/>
-          </a:xfrm>
-          <a:prstGeom prst="roundRect">
-            <a:avLst>
-              <a:gd name="adj" fmla="val 8000"/>
-            </a:avLst>
+            <a:off x="0" y="0"/>
+            <a:ext cx="12191695" cy="6858000"/>
+          </a:xfrm>
+          <a:prstGeom prst="rect">
+            <a:avLst/>
           </a:prstGeom>
           <a:solidFill>
-            <a:srgbClr val="181B23"/>
+            <a:srgbClr val="E8ECE9"/>
           </a:solidFill>
           <a:ln>
             <a:noFill/>
@@ -4330,23 +4751,67 @@
       </p:sp>
       <p:sp>
         <p:nvSpPr>
-          <p:cNvPr id="4" name="Bar"/>
+          <p:cNvPr id="3" name="TextBox 2"/>
+          <p:cNvSpPr txBox="1"/>
+          <p:nvPr/>
+        </p:nvSpPr>
+        <p:spPr>
+          <a:xfrm>
+            <a:off x="640080" y="411480"/>
+            <a:ext cx="10972800" cy="640080"/>
+          </a:xfrm>
+          <a:prstGeom prst="rect">
+            <a:avLst/>
+          </a:prstGeom>
+          <a:noFill/>
+        </p:spPr>
+        <p:txBody>
+          <a:bodyPr wrap="square" anchor="t"/>
+          <a:lstStyle/>
+          <a:p>
+            <a:pPr algn="l">
+              <a:spcBef>
+                <a:spcPts val="0"/>
+              </a:spcBef>
+              <a:spcAft>
+                <a:spcPts val="0"/>
+              </a:spcAft>
+            </a:pPr>
+            <a:r>
+              <a:rPr sz="2800" b="1">
+                <a:cs typeface="Georgia"/>
+                <a:ea typeface="Georgia"/>
+                <a:solidFill>
+                  <a:srgbClr val="1A221E"/>
+                </a:solidFill>
+                <a:latin typeface="Georgia"/>
+              </a:rPr>
+              <a:t>Who buys, why now, where we wedge</a:t>
+            </a:r>
+          </a:p>
+        </p:txBody>
+      </p:sp>
+      <p:sp>
+        <p:nvSpPr>
+          <p:cNvPr id="4" name="Rectangle 3"/>
           <p:cNvSpPr/>
           <p:nvPr/>
         </p:nvSpPr>
         <p:spPr>
           <a:xfrm>
-            <a:off x="640080" y="1371600"/>
-            <a:ext cx="5394960" cy="45720"/>
+            <a:off x="640080" y="1280160"/>
+            <a:ext cx="5303520" cy="2194560"/>
           </a:xfrm>
           <a:prstGeom prst="rect">
             <a:avLst/>
           </a:prstGeom>
           <a:solidFill>
-            <a:srgbClr val="6EA8FE"/>
+            <a:srgbClr val="F3F6F4"/>
           </a:solidFill>
-          <a:ln>
-            <a:noFill/>
+          <a:ln w="12700">
+            <a:solidFill>
+              <a:srgbClr val="C8D2CB"/>
+            </a:solidFill>
           </a:ln>
         </p:spPr>
         <p:style>
@@ -4373,90 +4838,20 @@
       </p:sp>
       <p:sp>
         <p:nvSpPr>
-          <p:cNvPr id="5" name="Text"/>
-          <p:cNvSpPr txBox="1"/>
-          <p:nvPr/>
-        </p:nvSpPr>
-        <p:spPr>
-          <a:xfrm>
-            <a:off x="914400" y="1600200"/>
-            <a:ext cx="4846320" cy="411480"/>
-          </a:xfrm>
-          <a:prstGeom prst="rect">
-            <a:avLst/>
-          </a:prstGeom>
-          <a:noFill/>
-        </p:spPr>
-        <p:txBody>
-          <a:bodyPr wrap="square">
-            <a:spAutoFit/>
-          </a:bodyPr>
-          <a:lstStyle/>
-          <a:p>
-            <a:r>
-              <a:rPr sz="1700" b="1">
-                <a:solidFill>
-                  <a:srgbClr val="6EA8FE"/>
-                </a:solidFill>
-                <a:latin typeface="Calibri"/>
-              </a:rPr>
-              <a:t>Who buys</a:t>
-            </a:r>
-          </a:p>
-        </p:txBody>
-      </p:sp>
-      <p:sp>
-        <p:nvSpPr>
-          <p:cNvPr id="6" name="Text"/>
-          <p:cNvSpPr txBox="1"/>
-          <p:nvPr/>
-        </p:nvSpPr>
-        <p:spPr>
-          <a:xfrm>
-            <a:off x="914400" y="2103120"/>
-            <a:ext cx="4846320" cy="1371600"/>
-          </a:xfrm>
-          <a:prstGeom prst="rect">
-            <a:avLst/>
-          </a:prstGeom>
-          <a:noFill/>
-        </p:spPr>
-        <p:txBody>
-          <a:bodyPr wrap="square">
-            <a:spAutoFit/>
-          </a:bodyPr>
-          <a:lstStyle/>
-          <a:p>
-            <a:r>
-              <a:rPr sz="1400" b="0">
-                <a:solidFill>
-                  <a:srgbClr val="E8EAF0"/>
-                </a:solidFill>
-                <a:latin typeface="Calibri"/>
-              </a:rPr>
-              <a:t>Teams wiring coding and document agents — Cursor, Claude Code, Codex, and internal agent platforms.</a:t>
-            </a:r>
-          </a:p>
-        </p:txBody>
-      </p:sp>
-      <p:sp>
-        <p:nvSpPr>
-          <p:cNvPr id="7" name="Shape"/>
+          <p:cNvPr id="5" name="Rectangle 4"/>
           <p:cNvSpPr/>
           <p:nvPr/>
         </p:nvSpPr>
         <p:spPr>
           <a:xfrm>
-            <a:off x="6309360" y="1371600"/>
-            <a:ext cx="5394960" cy="2286000"/>
-          </a:xfrm>
-          <a:prstGeom prst="roundRect">
-            <a:avLst>
-              <a:gd name="adj" fmla="val 8000"/>
-            </a:avLst>
+            <a:off x="640080" y="1280160"/>
+            <a:ext cx="5303520" cy="45720"/>
+          </a:xfrm>
+          <a:prstGeom prst="rect">
+            <a:avLst/>
           </a:prstGeom>
           <a:solidFill>
-            <a:srgbClr val="181B23"/>
+            <a:srgbClr val="1F5C42"/>
           </a:solidFill>
           <a:ln>
             <a:noFill/>
@@ -4486,23 +4881,109 @@
       </p:sp>
       <p:sp>
         <p:nvSpPr>
-          <p:cNvPr id="8" name="Bar"/>
+          <p:cNvPr id="6" name="TextBox 5"/>
+          <p:cNvSpPr txBox="1"/>
+          <p:nvPr/>
+        </p:nvSpPr>
+        <p:spPr>
+          <a:xfrm>
+            <a:off x="914400" y="1600200"/>
+            <a:ext cx="4754880" cy="411480"/>
+          </a:xfrm>
+          <a:prstGeom prst="rect">
+            <a:avLst/>
+          </a:prstGeom>
+          <a:noFill/>
+        </p:spPr>
+        <p:txBody>
+          <a:bodyPr wrap="square" anchor="t"/>
+          <a:lstStyle/>
+          <a:p>
+            <a:pPr algn="l">
+              <a:spcBef>
+                <a:spcPts val="0"/>
+              </a:spcBef>
+              <a:spcAft>
+                <a:spcPts val="0"/>
+              </a:spcAft>
+            </a:pPr>
+            <a:r>
+              <a:rPr sz="1800" b="1">
+                <a:cs typeface="Helvetica"/>
+                <a:ea typeface="Helvetica"/>
+                <a:solidFill>
+                  <a:srgbClr val="1F5C42"/>
+                </a:solidFill>
+                <a:latin typeface="Helvetica"/>
+              </a:rPr>
+              <a:t>Who buys</a:t>
+            </a:r>
+          </a:p>
+        </p:txBody>
+      </p:sp>
+      <p:sp>
+        <p:nvSpPr>
+          <p:cNvPr id="7" name="TextBox 6"/>
+          <p:cNvSpPr txBox="1"/>
+          <p:nvPr/>
+        </p:nvSpPr>
+        <p:spPr>
+          <a:xfrm>
+            <a:off x="914400" y="2103120"/>
+            <a:ext cx="4754880" cy="1188720"/>
+          </a:xfrm>
+          <a:prstGeom prst="rect">
+            <a:avLst/>
+          </a:prstGeom>
+          <a:noFill/>
+        </p:spPr>
+        <p:txBody>
+          <a:bodyPr wrap="square" anchor="t"/>
+          <a:lstStyle/>
+          <a:p>
+            <a:pPr algn="l">
+              <a:spcBef>
+                <a:spcPts val="0"/>
+              </a:spcBef>
+              <a:spcAft>
+                <a:spcPts val="0"/>
+              </a:spcAft>
+            </a:pPr>
+            <a:r>
+              <a:rPr sz="1400" b="0">
+                <a:cs typeface="Helvetica"/>
+                <a:ea typeface="Helvetica"/>
+                <a:solidFill>
+                  <a:srgbClr val="4A5850"/>
+                </a:solidFill>
+                <a:latin typeface="Helvetica"/>
+              </a:rPr>
+              <a:t>Teams wiring coding and document agents — Cursor, Claude Code, Codex, and internal agent platforms.</a:t>
+            </a:r>
+          </a:p>
+        </p:txBody>
+      </p:sp>
+      <p:sp>
+        <p:nvSpPr>
+          <p:cNvPr id="8" name="Rectangle 7"/>
           <p:cNvSpPr/>
           <p:nvPr/>
         </p:nvSpPr>
         <p:spPr>
           <a:xfrm>
-            <a:off x="6309360" y="1371600"/>
-            <a:ext cx="5394960" cy="45720"/>
+            <a:off x="6263640" y="1280160"/>
+            <a:ext cx="5303520" cy="2194560"/>
           </a:xfrm>
           <a:prstGeom prst="rect">
             <a:avLst/>
           </a:prstGeom>
           <a:solidFill>
-            <a:srgbClr val="4ADE80"/>
+            <a:srgbClr val="F3F6F4"/>
           </a:solidFill>
-          <a:ln>
-            <a:noFill/>
+          <a:ln w="12700">
+            <a:solidFill>
+              <a:srgbClr val="C8D2CB"/>
+            </a:solidFill>
           </a:ln>
         </p:spPr>
         <p:style>
@@ -4529,90 +5010,20 @@
       </p:sp>
       <p:sp>
         <p:nvSpPr>
-          <p:cNvPr id="9" name="Text"/>
-          <p:cNvSpPr txBox="1"/>
-          <p:nvPr/>
-        </p:nvSpPr>
-        <p:spPr>
-          <a:xfrm>
-            <a:off x="6583680" y="1600200"/>
-            <a:ext cx="4846320" cy="411480"/>
-          </a:xfrm>
-          <a:prstGeom prst="rect">
-            <a:avLst/>
-          </a:prstGeom>
-          <a:noFill/>
-        </p:spPr>
-        <p:txBody>
-          <a:bodyPr wrap="square">
-            <a:spAutoFit/>
-          </a:bodyPr>
-          <a:lstStyle/>
-          <a:p>
-            <a:r>
-              <a:rPr sz="1700" b="1">
-                <a:solidFill>
-                  <a:srgbClr val="4ADE80"/>
-                </a:solidFill>
-                <a:latin typeface="Calibri"/>
-              </a:rPr>
-              <a:t>Why now</a:t>
-            </a:r>
-          </a:p>
-        </p:txBody>
-      </p:sp>
-      <p:sp>
-        <p:nvSpPr>
-          <p:cNvPr id="10" name="Text"/>
-          <p:cNvSpPr txBox="1"/>
-          <p:nvPr/>
-        </p:nvSpPr>
-        <p:spPr>
-          <a:xfrm>
-            <a:off x="6583680" y="2103120"/>
-            <a:ext cx="4846320" cy="1371600"/>
-          </a:xfrm>
-          <a:prstGeom prst="rect">
-            <a:avLst/>
-          </a:prstGeom>
-          <a:noFill/>
-        </p:spPr>
-        <p:txBody>
-          <a:bodyPr wrap="square">
-            <a:spAutoFit/>
-          </a:bodyPr>
-          <a:lstStyle/>
-          <a:p>
-            <a:r>
-              <a:rPr sz="1400" b="0">
-                <a:solidFill>
-                  <a:srgbClr val="E8EAF0"/>
-                </a:solidFill>
-                <a:latin typeface="Calibri"/>
-              </a:rPr>
-              <a:t>MCP is the distribution rail. Context windows + $/Mtok make whole-file reads expensive. Agents re-read the same docs across tasks.</a:t>
-            </a:r>
-          </a:p>
-        </p:txBody>
-      </p:sp>
-      <p:sp>
-        <p:nvSpPr>
-          <p:cNvPr id="11" name="Shape"/>
+          <p:cNvPr id="9" name="Rectangle 8"/>
           <p:cNvSpPr/>
           <p:nvPr/>
         </p:nvSpPr>
         <p:spPr>
           <a:xfrm>
-            <a:off x="640080" y="3886200"/>
-            <a:ext cx="5394960" cy="2286000"/>
-          </a:xfrm>
-          <a:prstGeom prst="roundRect">
-            <a:avLst>
-              <a:gd name="adj" fmla="val 8000"/>
-            </a:avLst>
+            <a:off x="6263640" y="1280160"/>
+            <a:ext cx="5303520" cy="45720"/>
+          </a:xfrm>
+          <a:prstGeom prst="rect">
+            <a:avLst/>
           </a:prstGeom>
           <a:solidFill>
-            <a:srgbClr val="181B23"/>
+            <a:srgbClr val="1F5C42"/>
           </a:solidFill>
           <a:ln>
             <a:noFill/>
@@ -4642,23 +5053,109 @@
       </p:sp>
       <p:sp>
         <p:nvSpPr>
-          <p:cNvPr id="12" name="Bar"/>
+          <p:cNvPr id="10" name="TextBox 9"/>
+          <p:cNvSpPr txBox="1"/>
+          <p:nvPr/>
+        </p:nvSpPr>
+        <p:spPr>
+          <a:xfrm>
+            <a:off x="6537960" y="1600200"/>
+            <a:ext cx="4754880" cy="411480"/>
+          </a:xfrm>
+          <a:prstGeom prst="rect">
+            <a:avLst/>
+          </a:prstGeom>
+          <a:noFill/>
+        </p:spPr>
+        <p:txBody>
+          <a:bodyPr wrap="square" anchor="t"/>
+          <a:lstStyle/>
+          <a:p>
+            <a:pPr algn="l">
+              <a:spcBef>
+                <a:spcPts val="0"/>
+              </a:spcBef>
+              <a:spcAft>
+                <a:spcPts val="0"/>
+              </a:spcAft>
+            </a:pPr>
+            <a:r>
+              <a:rPr sz="1800" b="1">
+                <a:cs typeface="Helvetica"/>
+                <a:ea typeface="Helvetica"/>
+                <a:solidFill>
+                  <a:srgbClr val="1F5C42"/>
+                </a:solidFill>
+                <a:latin typeface="Helvetica"/>
+              </a:rPr>
+              <a:t>Why now</a:t>
+            </a:r>
+          </a:p>
+        </p:txBody>
+      </p:sp>
+      <p:sp>
+        <p:nvSpPr>
+          <p:cNvPr id="11" name="TextBox 10"/>
+          <p:cNvSpPr txBox="1"/>
+          <p:nvPr/>
+        </p:nvSpPr>
+        <p:spPr>
+          <a:xfrm>
+            <a:off x="6537960" y="2103120"/>
+            <a:ext cx="4754880" cy="1188720"/>
+          </a:xfrm>
+          <a:prstGeom prst="rect">
+            <a:avLst/>
+          </a:prstGeom>
+          <a:noFill/>
+        </p:spPr>
+        <p:txBody>
+          <a:bodyPr wrap="square" anchor="t"/>
+          <a:lstStyle/>
+          <a:p>
+            <a:pPr algn="l">
+              <a:spcBef>
+                <a:spcPts val="0"/>
+              </a:spcBef>
+              <a:spcAft>
+                <a:spcPts val="0"/>
+              </a:spcAft>
+            </a:pPr>
+            <a:r>
+              <a:rPr sz="1400" b="0">
+                <a:cs typeface="Helvetica"/>
+                <a:ea typeface="Helvetica"/>
+                <a:solidFill>
+                  <a:srgbClr val="4A5850"/>
+                </a:solidFill>
+                <a:latin typeface="Helvetica"/>
+              </a:rPr>
+              <a:t>MCP is the distribution rail. Context windows + $/Mtok make whole-file reads expensive. Agents re-read the same docs across tasks.</a:t>
+            </a:r>
+          </a:p>
+        </p:txBody>
+      </p:sp>
+      <p:sp>
+        <p:nvSpPr>
+          <p:cNvPr id="12" name="Rectangle 11"/>
           <p:cNvSpPr/>
           <p:nvPr/>
         </p:nvSpPr>
         <p:spPr>
           <a:xfrm>
-            <a:off x="640080" y="3886200"/>
-            <a:ext cx="5394960" cy="45720"/>
+            <a:off x="640080" y="3794760"/>
+            <a:ext cx="5303520" cy="2194560"/>
           </a:xfrm>
           <a:prstGeom prst="rect">
             <a:avLst/>
           </a:prstGeom>
           <a:solidFill>
-            <a:srgbClr val="6EA8FE"/>
+            <a:srgbClr val="F3F6F4"/>
           </a:solidFill>
-          <a:ln>
-            <a:noFill/>
+          <a:ln w="12700">
+            <a:solidFill>
+              <a:srgbClr val="C8D2CB"/>
+            </a:solidFill>
           </a:ln>
         </p:spPr>
         <p:style>
@@ -4685,90 +5182,20 @@
       </p:sp>
       <p:sp>
         <p:nvSpPr>
-          <p:cNvPr id="13" name="Text"/>
-          <p:cNvSpPr txBox="1"/>
-          <p:nvPr/>
-        </p:nvSpPr>
-        <p:spPr>
-          <a:xfrm>
-            <a:off x="914400" y="4114800"/>
-            <a:ext cx="4846320" cy="411480"/>
-          </a:xfrm>
-          <a:prstGeom prst="rect">
-            <a:avLst/>
-          </a:prstGeom>
-          <a:noFill/>
-        </p:spPr>
-        <p:txBody>
-          <a:bodyPr wrap="square">
-            <a:spAutoFit/>
-          </a:bodyPr>
-          <a:lstStyle/>
-          <a:p>
-            <a:r>
-              <a:rPr sz="1700" b="1">
-                <a:solidFill>
-                  <a:srgbClr val="6EA8FE"/>
-                </a:solidFill>
-                <a:latin typeface="Calibri"/>
-              </a:rPr>
-              <a:t>Wedge</a:t>
-            </a:r>
-          </a:p>
-        </p:txBody>
-      </p:sp>
-      <p:sp>
-        <p:nvSpPr>
-          <p:cNvPr id="14" name="Text"/>
-          <p:cNvSpPr txBox="1"/>
-          <p:nvPr/>
-        </p:nvSpPr>
-        <p:spPr>
-          <a:xfrm>
-            <a:off x="914400" y="4617720"/>
-            <a:ext cx="4846320" cy="1371600"/>
-          </a:xfrm>
-          <a:prstGeom prst="rect">
-            <a:avLst/>
-          </a:prstGeom>
-          <a:noFill/>
-        </p:spPr>
-        <p:txBody>
-          <a:bodyPr wrap="square">
-            <a:spAutoFit/>
-          </a:bodyPr>
-          <a:lstStyle/>
-          <a:p>
-            <a:r>
-              <a:rPr sz="1400" b="0">
-                <a:solidFill>
-                  <a:srgbClr val="E8EAF0"/>
-                </a:solidFill>
-                <a:latin typeface="Calibri"/>
-              </a:rPr>
-              <a:t>A task-budgeted file prep layer — not a full RAG platform. One job: select what the agent needs under a hard token budget.</a:t>
-            </a:r>
-          </a:p>
-        </p:txBody>
-      </p:sp>
-      <p:sp>
-        <p:nvSpPr>
-          <p:cNvPr id="15" name="Shape"/>
+          <p:cNvPr id="13" name="Rectangle 12"/>
           <p:cNvSpPr/>
           <p:nvPr/>
         </p:nvSpPr>
         <p:spPr>
           <a:xfrm>
-            <a:off x="6309360" y="3886200"/>
-            <a:ext cx="5394960" cy="2286000"/>
-          </a:xfrm>
-          <a:prstGeom prst="roundRect">
-            <a:avLst>
-              <a:gd name="adj" fmla="val 8000"/>
-            </a:avLst>
+            <a:off x="640080" y="3794760"/>
+            <a:ext cx="5303520" cy="45720"/>
+          </a:xfrm>
+          <a:prstGeom prst="rect">
+            <a:avLst/>
           </a:prstGeom>
           <a:solidFill>
-            <a:srgbClr val="181B23"/>
+            <a:srgbClr val="1F5C42"/>
           </a:solidFill>
           <a:ln>
             <a:noFill/>
@@ -4798,23 +5225,109 @@
       </p:sp>
       <p:sp>
         <p:nvSpPr>
-          <p:cNvPr id="16" name="Bar"/>
+          <p:cNvPr id="14" name="TextBox 13"/>
+          <p:cNvSpPr txBox="1"/>
+          <p:nvPr/>
+        </p:nvSpPr>
+        <p:spPr>
+          <a:xfrm>
+            <a:off x="914400" y="4114800"/>
+            <a:ext cx="4754880" cy="411480"/>
+          </a:xfrm>
+          <a:prstGeom prst="rect">
+            <a:avLst/>
+          </a:prstGeom>
+          <a:noFill/>
+        </p:spPr>
+        <p:txBody>
+          <a:bodyPr wrap="square" anchor="t"/>
+          <a:lstStyle/>
+          <a:p>
+            <a:pPr algn="l">
+              <a:spcBef>
+                <a:spcPts val="0"/>
+              </a:spcBef>
+              <a:spcAft>
+                <a:spcPts val="0"/>
+              </a:spcAft>
+            </a:pPr>
+            <a:r>
+              <a:rPr sz="1800" b="1">
+                <a:cs typeface="Helvetica"/>
+                <a:ea typeface="Helvetica"/>
+                <a:solidFill>
+                  <a:srgbClr val="1F5C42"/>
+                </a:solidFill>
+                <a:latin typeface="Helvetica"/>
+              </a:rPr>
+              <a:t>Wedge</a:t>
+            </a:r>
+          </a:p>
+        </p:txBody>
+      </p:sp>
+      <p:sp>
+        <p:nvSpPr>
+          <p:cNvPr id="15" name="TextBox 14"/>
+          <p:cNvSpPr txBox="1"/>
+          <p:nvPr/>
+        </p:nvSpPr>
+        <p:spPr>
+          <a:xfrm>
+            <a:off x="914400" y="4617720"/>
+            <a:ext cx="4754880" cy="1188720"/>
+          </a:xfrm>
+          <a:prstGeom prst="rect">
+            <a:avLst/>
+          </a:prstGeom>
+          <a:noFill/>
+        </p:spPr>
+        <p:txBody>
+          <a:bodyPr wrap="square" anchor="t"/>
+          <a:lstStyle/>
+          <a:p>
+            <a:pPr algn="l">
+              <a:spcBef>
+                <a:spcPts val="0"/>
+              </a:spcBef>
+              <a:spcAft>
+                <a:spcPts val="0"/>
+              </a:spcAft>
+            </a:pPr>
+            <a:r>
+              <a:rPr sz="1400" b="0">
+                <a:cs typeface="Helvetica"/>
+                <a:ea typeface="Helvetica"/>
+                <a:solidFill>
+                  <a:srgbClr val="4A5850"/>
+                </a:solidFill>
+                <a:latin typeface="Helvetica"/>
+              </a:rPr>
+              <a:t>A task-budgeted file prep layer — not a full RAG platform. One job: select what the agent needs under a hard token budget.</a:t>
+            </a:r>
+          </a:p>
+        </p:txBody>
+      </p:sp>
+      <p:sp>
+        <p:nvSpPr>
+          <p:cNvPr id="16" name="Rectangle 15"/>
           <p:cNvSpPr/>
           <p:nvPr/>
         </p:nvSpPr>
         <p:spPr>
           <a:xfrm>
-            <a:off x="6309360" y="3886200"/>
-            <a:ext cx="5394960" cy="45720"/>
+            <a:off x="6263640" y="3794760"/>
+            <a:ext cx="5303520" cy="2194560"/>
           </a:xfrm>
           <a:prstGeom prst="rect">
             <a:avLst/>
           </a:prstGeom>
           <a:solidFill>
-            <a:srgbClr val="F87171"/>
+            <a:srgbClr val="F3F6F4"/>
           </a:solidFill>
-          <a:ln>
-            <a:noFill/>
+          <a:ln w="12700">
+            <a:solidFill>
+              <a:srgbClr val="C8D2CB"/>
+            </a:solidFill>
           </a:ln>
         </p:spPr>
         <p:style>
@@ -4841,14 +5354,57 @@
       </p:sp>
       <p:sp>
         <p:nvSpPr>
-          <p:cNvPr id="17" name="Text"/>
+          <p:cNvPr id="17" name="Rectangle 16"/>
+          <p:cNvSpPr/>
+          <p:nvPr/>
+        </p:nvSpPr>
+        <p:spPr>
+          <a:xfrm>
+            <a:off x="6263640" y="3794760"/>
+            <a:ext cx="5303520" cy="45720"/>
+          </a:xfrm>
+          <a:prstGeom prst="rect">
+            <a:avLst/>
+          </a:prstGeom>
+          <a:solidFill>
+            <a:srgbClr val="1F5C42"/>
+          </a:solidFill>
+          <a:ln>
+            <a:noFill/>
+          </a:ln>
+        </p:spPr>
+        <p:style>
+          <a:lnRef idx="1">
+            <a:schemeClr val="accent1"/>
+          </a:lnRef>
+          <a:fillRef idx="3">
+            <a:schemeClr val="accent1"/>
+          </a:fillRef>
+          <a:effectRef idx="2">
+            <a:schemeClr val="accent1"/>
+          </a:effectRef>
+          <a:fontRef idx="minor">
+            <a:schemeClr val="lt1"/>
+          </a:fontRef>
+        </p:style>
+        <p:txBody>
+          <a:bodyPr rtlCol="0" anchor="ctr"/>
+          <a:lstStyle/>
+          <a:p>
+            <a:pPr algn="ctr"/>
+          </a:p>
+        </p:txBody>
+      </p:sp>
+      <p:sp>
+        <p:nvSpPr>
+          <p:cNvPr id="18" name="TextBox 17"/>
           <p:cNvSpPr txBox="1"/>
           <p:nvPr/>
         </p:nvSpPr>
         <p:spPr>
           <a:xfrm>
-            <a:off x="6583680" y="4114800"/>
-            <a:ext cx="4846320" cy="411480"/>
+            <a:off x="6537960" y="4114800"/>
+            <a:ext cx="4754880" cy="411480"/>
           </a:xfrm>
           <a:prstGeom prst="rect">
             <a:avLst/>
@@ -4856,17 +5412,25 @@
           <a:noFill/>
         </p:spPr>
         <p:txBody>
-          <a:bodyPr wrap="square">
-            <a:spAutoFit/>
-          </a:bodyPr>
-          <a:lstStyle/>
-          <a:p>
-            <a:r>
-              <a:rPr sz="1700" b="1">
-                <a:solidFill>
-                  <a:srgbClr val="F87171"/>
-                </a:solidFill>
-                <a:latin typeface="Calibri"/>
+          <a:bodyPr wrap="square" anchor="t"/>
+          <a:lstStyle/>
+          <a:p>
+            <a:pPr algn="l">
+              <a:spcBef>
+                <a:spcPts val="0"/>
+              </a:spcBef>
+              <a:spcAft>
+                <a:spcPts val="0"/>
+              </a:spcAft>
+            </a:pPr>
+            <a:r>
+              <a:rPr sz="1800" b="1">
+                <a:cs typeface="Helvetica"/>
+                <a:ea typeface="Helvetica"/>
+                <a:solidFill>
+                  <a:srgbClr val="1F5C42"/>
+                </a:solidFill>
+                <a:latin typeface="Helvetica"/>
               </a:rPr>
               <a:t>Vs converters</a:t>
             </a:r>
@@ -4875,14 +5439,14 @@
       </p:sp>
       <p:sp>
         <p:nvSpPr>
-          <p:cNvPr id="18" name="Text"/>
+          <p:cNvPr id="19" name="TextBox 18"/>
           <p:cNvSpPr txBox="1"/>
           <p:nvPr/>
         </p:nvSpPr>
         <p:spPr>
           <a:xfrm>
-            <a:off x="6583680" y="4617720"/>
-            <a:ext cx="4846320" cy="1371600"/>
+            <a:off x="6537960" y="4617720"/>
+            <a:ext cx="4754880" cy="1188720"/>
           </a:xfrm>
           <a:prstGeom prst="rect">
             <a:avLst/>
@@ -4890,17 +5454,25 @@
           <a:noFill/>
         </p:spPr>
         <p:txBody>
-          <a:bodyPr wrap="square">
-            <a:spAutoFit/>
-          </a:bodyPr>
-          <a:lstStyle/>
-          <a:p>
+          <a:bodyPr wrap="square" anchor="t"/>
+          <a:lstStyle/>
+          <a:p>
+            <a:pPr algn="l">
+              <a:spcBef>
+                <a:spcPts val="0"/>
+              </a:spcBef>
+              <a:spcAft>
+                <a:spcPts val="0"/>
+              </a:spcAft>
+            </a:pPr>
             <a:r>
               <a:rPr sz="1400" b="0">
-                <a:solidFill>
-                  <a:srgbClr val="E8EAF0"/>
-                </a:solidFill>
-                <a:latin typeface="Calibri"/>
+                <a:cs typeface="Helvetica"/>
+                <a:ea typeface="Helvetica"/>
+                <a:solidFill>
+                  <a:srgbClr val="4A5850"/>
+                </a:solidFill>
+                <a:latin typeface="Helvetica"/>
               </a:rPr>
               <a:t>Converters: format-in → whole-file-out. We select under budget and return a recoverable omitted-sections manifest.</a:t>
             </a:r>
@@ -4918,14 +5490,6 @@
 <file path=ppt/slides/slide4.xml><?xml version="1.0" encoding="utf-8"?>
 <p:sld xmlns:a="http://schemas.openxmlformats.org/drawingml/2006/main" xmlns:p="http://schemas.openxmlformats.org/presentationml/2006/main" xmlns:r="http://schemas.openxmlformats.org/officeDocument/2006/relationships">
   <p:cSld>
-    <p:bg>
-      <p:bgPr>
-        <a:solidFill>
-          <a:srgbClr val="0F1117"/>
-        </a:solidFill>
-        <a:effectLst/>
-      </p:bgPr>
-    </p:bg>
     <p:spTree>
       <p:nvGrpSpPr>
         <p:cNvPr id="1" name=""/>
@@ -4935,90 +5499,20 @@
       <p:grpSpPr/>
       <p:sp>
         <p:nvSpPr>
-          <p:cNvPr id="2" name="Text 0"/>
-          <p:cNvSpPr txBox="1"/>
-          <p:nvPr/>
-        </p:nvSpPr>
-        <p:spPr>
-          <a:xfrm>
-            <a:off x="548640" y="457200"/>
-            <a:ext cx="11064240" cy="594360"/>
-          </a:xfrm>
-          <a:prstGeom prst="rect">
-            <a:avLst/>
-          </a:prstGeom>
-          <a:noFill/>
-        </p:spPr>
-        <p:txBody>
-          <a:bodyPr wrap="square">
-            <a:spAutoFit/>
-          </a:bodyPr>
-          <a:lstStyle/>
-          <a:p>
-            <a:r>
-              <a:rPr sz="2800" b="1">
-                <a:solidFill>
-                  <a:srgbClr val="E8EAF0"/>
-                </a:solidFill>
-                <a:latin typeface="Courier New"/>
-              </a:rPr>
-              <a:t>compile_context(file, task, budget)</a:t>
-            </a:r>
-          </a:p>
-        </p:txBody>
-      </p:sp>
-      <p:sp>
-        <p:nvSpPr>
-          <p:cNvPr id="3" name="Text 1"/>
-          <p:cNvSpPr txBox="1"/>
-          <p:nvPr/>
-        </p:nvSpPr>
-        <p:spPr>
-          <a:xfrm>
-            <a:off x="548640" y="1097280"/>
-            <a:ext cx="11064240" cy="365760"/>
-          </a:xfrm>
-          <a:prstGeom prst="rect">
-            <a:avLst/>
-          </a:prstGeom>
-          <a:noFill/>
-        </p:spPr>
-        <p:txBody>
-          <a:bodyPr wrap="square">
-            <a:spAutoFit/>
-          </a:bodyPr>
-          <a:lstStyle/>
-          <a:p>
-            <a:r>
-              <a:rPr sz="1400" b="0">
-                <a:solidFill>
-                  <a:srgbClr val="9AA0B0"/>
-                </a:solidFill>
-                <a:latin typeface="Calibri"/>
-              </a:rPr>
-              <a:t>One tool call in — guaranteed-size, task-relevant markdown out.</a:t>
-            </a:r>
-          </a:p>
-        </p:txBody>
-      </p:sp>
-      <p:sp>
-        <p:nvSpPr>
-          <p:cNvPr id="4" name="Shape"/>
+          <p:cNvPr id="2" name="Rectangle 1"/>
           <p:cNvSpPr/>
           <p:nvPr/>
         </p:nvSpPr>
         <p:spPr>
           <a:xfrm>
-            <a:off x="640080" y="1874520"/>
-            <a:ext cx="2423160" cy="1371600"/>
-          </a:xfrm>
-          <a:prstGeom prst="roundRect">
-            <a:avLst>
-              <a:gd name="adj" fmla="val 8000"/>
-            </a:avLst>
+            <a:off x="0" y="0"/>
+            <a:ext cx="12191695" cy="6858000"/>
+          </a:xfrm>
+          <a:prstGeom prst="rect">
+            <a:avLst/>
           </a:prstGeom>
           <a:solidFill>
-            <a:srgbClr val="181B23"/>
+            <a:srgbClr val="E8ECE9"/>
           </a:solidFill>
           <a:ln>
             <a:noFill/>
@@ -5048,14 +5542,14 @@
       </p:sp>
       <p:sp>
         <p:nvSpPr>
-          <p:cNvPr id="5" name="Text"/>
+          <p:cNvPr id="3" name="TextBox 2"/>
           <p:cNvSpPr txBox="1"/>
           <p:nvPr/>
         </p:nvSpPr>
         <p:spPr>
           <a:xfrm>
-            <a:off x="822960" y="2057400"/>
-            <a:ext cx="2057400" cy="365760"/>
+            <a:off x="640080" y="365760"/>
+            <a:ext cx="10972800" cy="502920"/>
           </a:xfrm>
           <a:prstGeom prst="rect">
             <a:avLst/>
@@ -5063,33 +5557,41 @@
           <a:noFill/>
         </p:spPr>
         <p:txBody>
-          <a:bodyPr wrap="square">
-            <a:spAutoFit/>
-          </a:bodyPr>
-          <a:lstStyle/>
-          <a:p>
-            <a:r>
-              <a:rPr sz="1700" b="1">
-                <a:solidFill>
-                  <a:srgbClr val="6EA8FE"/>
-                </a:solidFill>
-                <a:latin typeface="Calibri"/>
+          <a:bodyPr wrap="square" anchor="t"/>
+          <a:lstStyle/>
+          <a:p>
+            <a:pPr algn="l">
+              <a:spcBef>
+                <a:spcPts val="0"/>
+              </a:spcBef>
+              <a:spcAft>
+                <a:spcPts val="0"/>
+              </a:spcAft>
+            </a:pPr>
+            <a:r>
+              <a:rPr sz="2600" b="1">
+                <a:cs typeface="Menlo"/>
+                <a:ea typeface="Menlo"/>
+                <a:solidFill>
+                  <a:srgbClr val="1A221E"/>
+                </a:solidFill>
+                <a:latin typeface="Menlo"/>
               </a:rPr>
-              <a:t>Convert</a:t>
-            </a:r>
-          </a:p>
-        </p:txBody>
-      </p:sp>
-      <p:sp>
-        <p:nvSpPr>
-          <p:cNvPr id="6" name="Text"/>
+              <a:t>compile_context(file, task, budget)</a:t>
+            </a:r>
+          </a:p>
+        </p:txBody>
+      </p:sp>
+      <p:sp>
+        <p:nvSpPr>
+          <p:cNvPr id="4" name="TextBox 3"/>
           <p:cNvSpPr txBox="1"/>
           <p:nvPr/>
         </p:nvSpPr>
         <p:spPr>
           <a:xfrm>
-            <a:off x="822960" y="2468880"/>
-            <a:ext cx="2057400" cy="640080"/>
+            <a:off x="640080" y="914400"/>
+            <a:ext cx="10972800" cy="365760"/>
           </a:xfrm>
           <a:prstGeom prst="rect">
             <a:avLst/>
@@ -5097,53 +5599,52 @@
           <a:noFill/>
         </p:spPr>
         <p:txBody>
-          <a:bodyPr wrap="square">
-            <a:spAutoFit/>
-          </a:bodyPr>
-          <a:lstStyle/>
-          <a:p>
-            <a:r>
-              <a:rPr sz="1150" b="0">
-                <a:solidFill>
-                  <a:srgbClr val="9AA0B0"/>
-                </a:solidFill>
-                <a:latin typeface="Calibri"/>
+          <a:bodyPr wrap="square" anchor="t"/>
+          <a:lstStyle/>
+          <a:p>
+            <a:pPr algn="l">
+              <a:spcBef>
+                <a:spcPts val="0"/>
+              </a:spcBef>
+              <a:spcAft>
+                <a:spcPts val="0"/>
+              </a:spcAft>
+            </a:pPr>
+            <a:r>
+              <a:rPr sz="1500" b="0">
+                <a:cs typeface="Helvetica"/>
+                <a:ea typeface="Helvetica"/>
+                <a:solidFill>
+                  <a:srgbClr val="4A5850"/>
+                </a:solidFill>
+                <a:latin typeface="Helvetica"/>
               </a:rPr>
-              <a:t>markitdown subprocess</a:t>
-            </a:r>
-          </a:p>
-          <a:p>
-            <a:r>
-              <a:rPr sz="1150" b="0">
-                <a:solidFill>
-                  <a:srgbClr val="9AA0B0"/>
-                </a:solidFill>
-                <a:latin typeface="Calibri"/>
-              </a:rPr>
-              <a:t>content-hash cache</a:t>
-            </a:r>
-          </a:p>
-        </p:txBody>
-      </p:sp>
-      <p:sp>
-        <p:nvSpPr>
-          <p:cNvPr id="7" name="Rectangle 6"/>
+              <a:t>One tool call in — guaranteed-size, task-relevant markdown out.</a:t>
+            </a:r>
+          </a:p>
+        </p:txBody>
+      </p:sp>
+      <p:sp>
+        <p:nvSpPr>
+          <p:cNvPr id="5" name="Rectangle 4"/>
           <p:cNvSpPr/>
           <p:nvPr/>
         </p:nvSpPr>
         <p:spPr>
           <a:xfrm>
-            <a:off x="3063240" y="2560320"/>
-            <a:ext cx="320040" cy="19050"/>
+            <a:off x="640080" y="1508760"/>
+            <a:ext cx="2468880" cy="1554480"/>
           </a:xfrm>
           <a:prstGeom prst="rect">
             <a:avLst/>
           </a:prstGeom>
           <a:solidFill>
-            <a:srgbClr val="9AA0B0"/>
+            <a:srgbClr val="F3F6F4"/>
           </a:solidFill>
-          <a:ln>
-            <a:noFill/>
+          <a:ln w="12700">
+            <a:solidFill>
+              <a:srgbClr val="C8D2CB"/>
+            </a:solidFill>
           </a:ln>
         </p:spPr>
         <p:style>
@@ -5170,22 +5671,20 @@
       </p:sp>
       <p:sp>
         <p:nvSpPr>
-          <p:cNvPr id="8" name="Shape"/>
+          <p:cNvPr id="6" name="Rectangle 5"/>
           <p:cNvSpPr/>
           <p:nvPr/>
         </p:nvSpPr>
         <p:spPr>
           <a:xfrm>
-            <a:off x="3474720" y="1874520"/>
-            <a:ext cx="2423160" cy="1371600"/>
-          </a:xfrm>
-          <a:prstGeom prst="roundRect">
-            <a:avLst>
-              <a:gd name="adj" fmla="val 8000"/>
-            </a:avLst>
+            <a:off x="640080" y="1508760"/>
+            <a:ext cx="2468880" cy="45720"/>
+          </a:xfrm>
+          <a:prstGeom prst="rect">
+            <a:avLst/>
           </a:prstGeom>
           <a:solidFill>
-            <a:srgbClr val="181B23"/>
+            <a:srgbClr val="1F5C42"/>
           </a:solidFill>
           <a:ln>
             <a:noFill/>
@@ -5215,14 +5714,14 @@
       </p:sp>
       <p:sp>
         <p:nvSpPr>
-          <p:cNvPr id="9" name="Text"/>
+          <p:cNvPr id="7" name="TextBox 6"/>
           <p:cNvSpPr txBox="1"/>
           <p:nvPr/>
         </p:nvSpPr>
         <p:spPr>
           <a:xfrm>
-            <a:off x="3657600" y="2057400"/>
-            <a:ext cx="2057400" cy="365760"/>
+            <a:off x="804672" y="1737360"/>
+            <a:ext cx="2194560" cy="365760"/>
           </a:xfrm>
           <a:prstGeom prst="rect">
             <a:avLst/>
@@ -5230,33 +5729,41 @@
           <a:noFill/>
         </p:spPr>
         <p:txBody>
-          <a:bodyPr wrap="square">
-            <a:spAutoFit/>
-          </a:bodyPr>
-          <a:lstStyle/>
-          <a:p>
-            <a:r>
-              <a:rPr sz="1700" b="1">
-                <a:solidFill>
-                  <a:srgbClr val="6EA8FE"/>
-                </a:solidFill>
-                <a:latin typeface="Calibri"/>
+          <a:bodyPr wrap="square" anchor="t"/>
+          <a:lstStyle/>
+          <a:p>
+            <a:pPr algn="l">
+              <a:spcBef>
+                <a:spcPts val="0"/>
+              </a:spcBef>
+              <a:spcAft>
+                <a:spcPts val="0"/>
+              </a:spcAft>
+            </a:pPr>
+            <a:r>
+              <a:rPr sz="1500" b="1">
+                <a:cs typeface="Menlo"/>
+                <a:ea typeface="Menlo"/>
+                <a:solidFill>
+                  <a:srgbClr val="1F5C42"/>
+                </a:solidFill>
+                <a:latin typeface="Menlo"/>
               </a:rPr>
-              <a:t>Chunk</a:t>
-            </a:r>
-          </a:p>
-        </p:txBody>
-      </p:sp>
-      <p:sp>
-        <p:nvSpPr>
-          <p:cNvPr id="10" name="Text"/>
+              <a:t>1 · Convert</a:t>
+            </a:r>
+          </a:p>
+        </p:txBody>
+      </p:sp>
+      <p:sp>
+        <p:nvSpPr>
+          <p:cNvPr id="8" name="TextBox 7"/>
           <p:cNvSpPr txBox="1"/>
           <p:nvPr/>
         </p:nvSpPr>
         <p:spPr>
           <a:xfrm>
-            <a:off x="3657600" y="2468880"/>
-            <a:ext cx="2057400" cy="640080"/>
+            <a:off x="804672" y="2194560"/>
+            <a:ext cx="2194560" cy="731520"/>
           </a:xfrm>
           <a:prstGeom prst="rect">
             <a:avLst/>
@@ -5264,50 +5771,47 @@
           <a:noFill/>
         </p:spPr>
         <p:txBody>
-          <a:bodyPr wrap="square">
-            <a:spAutoFit/>
-          </a:bodyPr>
-          <a:lstStyle/>
-          <a:p>
-            <a:r>
-              <a:rPr sz="1150" b="0">
-                <a:solidFill>
-                  <a:srgbClr val="9AA0B0"/>
-                </a:solidFill>
-                <a:latin typeface="Calibri"/>
+          <a:bodyPr wrap="square" anchor="t"/>
+          <a:lstStyle/>
+          <a:p>
+            <a:pPr algn="l">
+              <a:spcBef>
+                <a:spcPts val="0"/>
+              </a:spcBef>
+              <a:spcAft>
+                <a:spcPts val="0"/>
+              </a:spcAft>
+            </a:pPr>
+            <a:r>
+              <a:rPr sz="1300" b="0">
+                <a:cs typeface="Helvetica"/>
+                <a:ea typeface="Helvetica"/>
+                <a:solidFill>
+                  <a:srgbClr val="4A5850"/>
+                </a:solidFill>
+                <a:latin typeface="Helvetica"/>
               </a:rPr>
-              <a:t>heading-aware</a:t>
-            </a:r>
-          </a:p>
-          <a:p>
-            <a:r>
-              <a:rPr sz="1150" b="0">
-                <a:solidFill>
-                  <a:srgbClr val="9AA0B0"/>
-                </a:solidFill>
-                <a:latin typeface="Calibri"/>
-              </a:rPr>
-              <a:t>tables never split</a:t>
-            </a:r>
-          </a:p>
-        </p:txBody>
-      </p:sp>
-      <p:sp>
-        <p:nvSpPr>
-          <p:cNvPr id="11" name="Rectangle 10"/>
+              <a:t>markitdown + content-hash cache</a:t>
+            </a:r>
+          </a:p>
+        </p:txBody>
+      </p:sp>
+      <p:sp>
+        <p:nvSpPr>
+          <p:cNvPr id="9" name="Rectangle 8"/>
           <p:cNvSpPr/>
           <p:nvPr/>
         </p:nvSpPr>
         <p:spPr>
           <a:xfrm>
-            <a:off x="5897880" y="2560320"/>
-            <a:ext cx="320040" cy="19050"/>
+            <a:off x="3127248" y="2194560"/>
+            <a:ext cx="164592" cy="36576"/>
           </a:xfrm>
           <a:prstGeom prst="rect">
             <a:avLst/>
           </a:prstGeom>
           <a:solidFill>
-            <a:srgbClr val="9AA0B0"/>
+            <a:srgbClr val="A8B9AF"/>
           </a:solidFill>
           <a:ln>
             <a:noFill/>
@@ -5337,25 +5841,25 @@
       </p:sp>
       <p:sp>
         <p:nvSpPr>
-          <p:cNvPr id="12" name="Shape"/>
+          <p:cNvPr id="10" name="Rectangle 9"/>
           <p:cNvSpPr/>
           <p:nvPr/>
         </p:nvSpPr>
         <p:spPr>
           <a:xfrm>
-            <a:off x="6309360" y="1874520"/>
-            <a:ext cx="2423160" cy="1371600"/>
-          </a:xfrm>
-          <a:prstGeom prst="roundRect">
-            <a:avLst>
-              <a:gd name="adj" fmla="val 8000"/>
-            </a:avLst>
+            <a:off x="3310128" y="1508760"/>
+            <a:ext cx="2468880" cy="1554480"/>
+          </a:xfrm>
+          <a:prstGeom prst="rect">
+            <a:avLst/>
           </a:prstGeom>
           <a:solidFill>
-            <a:srgbClr val="181B23"/>
+            <a:srgbClr val="F3F6F4"/>
           </a:solidFill>
-          <a:ln>
-            <a:noFill/>
+          <a:ln w="12700">
+            <a:solidFill>
+              <a:srgbClr val="C8D2CB"/>
+            </a:solidFill>
           </a:ln>
         </p:spPr>
         <p:style>
@@ -5382,99 +5886,20 @@
       </p:sp>
       <p:sp>
         <p:nvSpPr>
-          <p:cNvPr id="13" name="Text"/>
-          <p:cNvSpPr txBox="1"/>
-          <p:nvPr/>
-        </p:nvSpPr>
-        <p:spPr>
-          <a:xfrm>
-            <a:off x="6492240" y="2057400"/>
-            <a:ext cx="2057400" cy="365760"/>
-          </a:xfrm>
-          <a:prstGeom prst="rect">
-            <a:avLst/>
-          </a:prstGeom>
-          <a:noFill/>
-        </p:spPr>
-        <p:txBody>
-          <a:bodyPr wrap="square">
-            <a:spAutoFit/>
-          </a:bodyPr>
-          <a:lstStyle/>
-          <a:p>
-            <a:r>
-              <a:rPr sz="1700" b="1">
-                <a:solidFill>
-                  <a:srgbClr val="6EA8FE"/>
-                </a:solidFill>
-                <a:latin typeface="Calibri"/>
-              </a:rPr>
-              <a:t>Rank</a:t>
-            </a:r>
-          </a:p>
-        </p:txBody>
-      </p:sp>
-      <p:sp>
-        <p:nvSpPr>
-          <p:cNvPr id="14" name="Text"/>
-          <p:cNvSpPr txBox="1"/>
-          <p:nvPr/>
-        </p:nvSpPr>
-        <p:spPr>
-          <a:xfrm>
-            <a:off x="6492240" y="2468880"/>
-            <a:ext cx="2057400" cy="640080"/>
-          </a:xfrm>
-          <a:prstGeom prst="rect">
-            <a:avLst/>
-          </a:prstGeom>
-          <a:noFill/>
-        </p:spPr>
-        <p:txBody>
-          <a:bodyPr wrap="square">
-            <a:spAutoFit/>
-          </a:bodyPr>
-          <a:lstStyle/>
-          <a:p>
-            <a:r>
-              <a:rPr sz="1150" b="0">
-                <a:solidFill>
-                  <a:srgbClr val="9AA0B0"/>
-                </a:solidFill>
-                <a:latin typeface="Calibri"/>
-              </a:rPr>
-              <a:t>BM25 + query cleanup</a:t>
-            </a:r>
-          </a:p>
-          <a:p>
-            <a:r>
-              <a:rPr sz="1150" b="0">
-                <a:solidFill>
-                  <a:srgbClr val="9AA0B0"/>
-                </a:solidFill>
-                <a:latin typeface="Calibri"/>
-              </a:rPr>
-              <a:t>stopwords / honorifics</a:t>
-            </a:r>
-          </a:p>
-        </p:txBody>
-      </p:sp>
-      <p:sp>
-        <p:nvSpPr>
-          <p:cNvPr id="15" name="Rectangle 14"/>
+          <p:cNvPr id="11" name="Rectangle 10"/>
           <p:cNvSpPr/>
           <p:nvPr/>
         </p:nvSpPr>
         <p:spPr>
           <a:xfrm>
-            <a:off x="8732520" y="2560320"/>
-            <a:ext cx="320040" cy="19050"/>
+            <a:off x="3310128" y="1508760"/>
+            <a:ext cx="2468880" cy="45720"/>
           </a:xfrm>
           <a:prstGeom prst="rect">
             <a:avLst/>
           </a:prstGeom>
           <a:solidFill>
-            <a:srgbClr val="9AA0B0"/>
+            <a:srgbClr val="1F5C42"/>
           </a:solidFill>
           <a:ln>
             <a:noFill/>
@@ -5504,22 +5929,104 @@
       </p:sp>
       <p:sp>
         <p:nvSpPr>
-          <p:cNvPr id="16" name="Shape"/>
+          <p:cNvPr id="12" name="TextBox 11"/>
+          <p:cNvSpPr txBox="1"/>
+          <p:nvPr/>
+        </p:nvSpPr>
+        <p:spPr>
+          <a:xfrm>
+            <a:off x="3474720" y="1737360"/>
+            <a:ext cx="2194560" cy="365760"/>
+          </a:xfrm>
+          <a:prstGeom prst="rect">
+            <a:avLst/>
+          </a:prstGeom>
+          <a:noFill/>
+        </p:spPr>
+        <p:txBody>
+          <a:bodyPr wrap="square" anchor="t"/>
+          <a:lstStyle/>
+          <a:p>
+            <a:pPr algn="l">
+              <a:spcBef>
+                <a:spcPts val="0"/>
+              </a:spcBef>
+              <a:spcAft>
+                <a:spcPts val="0"/>
+              </a:spcAft>
+            </a:pPr>
+            <a:r>
+              <a:rPr sz="1500" b="1">
+                <a:cs typeface="Menlo"/>
+                <a:ea typeface="Menlo"/>
+                <a:solidFill>
+                  <a:srgbClr val="1F5C42"/>
+                </a:solidFill>
+                <a:latin typeface="Menlo"/>
+              </a:rPr>
+              <a:t>2 · Chunk</a:t>
+            </a:r>
+          </a:p>
+        </p:txBody>
+      </p:sp>
+      <p:sp>
+        <p:nvSpPr>
+          <p:cNvPr id="13" name="TextBox 12"/>
+          <p:cNvSpPr txBox="1"/>
+          <p:nvPr/>
+        </p:nvSpPr>
+        <p:spPr>
+          <a:xfrm>
+            <a:off x="3474720" y="2194560"/>
+            <a:ext cx="2194560" cy="731520"/>
+          </a:xfrm>
+          <a:prstGeom prst="rect">
+            <a:avLst/>
+          </a:prstGeom>
+          <a:noFill/>
+        </p:spPr>
+        <p:txBody>
+          <a:bodyPr wrap="square" anchor="t"/>
+          <a:lstStyle/>
+          <a:p>
+            <a:pPr algn="l">
+              <a:spcBef>
+                <a:spcPts val="0"/>
+              </a:spcBef>
+              <a:spcAft>
+                <a:spcPts val="0"/>
+              </a:spcAft>
+            </a:pPr>
+            <a:r>
+              <a:rPr sz="1300" b="0">
+                <a:cs typeface="Helvetica"/>
+                <a:ea typeface="Helvetica"/>
+                <a:solidFill>
+                  <a:srgbClr val="4A5850"/>
+                </a:solidFill>
+                <a:latin typeface="Helvetica"/>
+              </a:rPr>
+              <a:t>heading-aware; tables never split</a:t>
+            </a:r>
+          </a:p>
+        </p:txBody>
+      </p:sp>
+      <p:sp>
+        <p:nvSpPr>
+          <p:cNvPr id="14" name="Rectangle 13"/>
           <p:cNvSpPr/>
           <p:nvPr/>
         </p:nvSpPr>
         <p:spPr>
           <a:xfrm>
-            <a:off x="9144000" y="1874520"/>
-            <a:ext cx="2423160" cy="1371600"/>
-          </a:xfrm>
-          <a:prstGeom prst="roundRect">
-            <a:avLst>
-              <a:gd name="adj" fmla="val 8000"/>
-            </a:avLst>
+            <a:off x="5797296" y="2194560"/>
+            <a:ext cx="164592" cy="36576"/>
+          </a:xfrm>
+          <a:prstGeom prst="rect">
+            <a:avLst/>
           </a:prstGeom>
           <a:solidFill>
-            <a:srgbClr val="181B23"/>
+            <a:srgbClr val="A8B9AF"/>
           </a:solidFill>
           <a:ln>
             <a:noFill/>
@@ -5549,104 +6056,25 @@
       </p:sp>
       <p:sp>
         <p:nvSpPr>
-          <p:cNvPr id="17" name="Text"/>
-          <p:cNvSpPr txBox="1"/>
-          <p:nvPr/>
-        </p:nvSpPr>
-        <p:spPr>
-          <a:xfrm>
-            <a:off x="9326880" y="2057400"/>
-            <a:ext cx="2057400" cy="365760"/>
-          </a:xfrm>
-          <a:prstGeom prst="rect">
-            <a:avLst/>
-          </a:prstGeom>
-          <a:noFill/>
-        </p:spPr>
-        <p:txBody>
-          <a:bodyPr wrap="square">
-            <a:spAutoFit/>
-          </a:bodyPr>
-          <a:lstStyle/>
-          <a:p>
-            <a:r>
-              <a:rPr sz="1700" b="1">
-                <a:solidFill>
-                  <a:srgbClr val="6EA8FE"/>
-                </a:solidFill>
-                <a:latin typeface="Calibri"/>
-              </a:rPr>
-              <a:t>Pack</a:t>
-            </a:r>
-          </a:p>
-        </p:txBody>
-      </p:sp>
-      <p:sp>
-        <p:nvSpPr>
-          <p:cNvPr id="18" name="Text"/>
-          <p:cNvSpPr txBox="1"/>
-          <p:nvPr/>
-        </p:nvSpPr>
-        <p:spPr>
-          <a:xfrm>
-            <a:off x="9326880" y="2468880"/>
-            <a:ext cx="2057400" cy="640080"/>
-          </a:xfrm>
-          <a:prstGeom prst="rect">
-            <a:avLst/>
-          </a:prstGeom>
-          <a:noFill/>
-        </p:spPr>
-        <p:txBody>
-          <a:bodyPr wrap="square">
-            <a:spAutoFit/>
-          </a:bodyPr>
-          <a:lstStyle/>
-          <a:p>
-            <a:r>
-              <a:rPr sz="1150" b="0">
-                <a:solidFill>
-                  <a:srgbClr val="9AA0B0"/>
-                </a:solidFill>
-                <a:latin typeface="Calibri"/>
-              </a:rPr>
-              <a:t>hard pack under budget</a:t>
-            </a:r>
-          </a:p>
-          <a:p>
-            <a:r>
-              <a:rPr sz="1150" b="0">
-                <a:solidFill>
-                  <a:srgbClr val="9AA0B0"/>
-                </a:solidFill>
-                <a:latin typeface="Calibri"/>
-              </a:rPr>
-              <a:t>relevance floor</a:t>
-            </a:r>
-          </a:p>
-        </p:txBody>
-      </p:sp>
-      <p:sp>
-        <p:nvSpPr>
-          <p:cNvPr id="19" name="Shape"/>
+          <p:cNvPr id="15" name="Rectangle 14"/>
           <p:cNvSpPr/>
           <p:nvPr/>
         </p:nvSpPr>
         <p:spPr>
           <a:xfrm>
-            <a:off x="640080" y="3794760"/>
-            <a:ext cx="5394960" cy="2103120"/>
-          </a:xfrm>
-          <a:prstGeom prst="roundRect">
-            <a:avLst>
-              <a:gd name="adj" fmla="val 8000"/>
-            </a:avLst>
+            <a:off x="5980176" y="1508760"/>
+            <a:ext cx="2468880" cy="1554480"/>
+          </a:xfrm>
+          <a:prstGeom prst="rect">
+            <a:avLst/>
           </a:prstGeom>
           <a:solidFill>
-            <a:srgbClr val="181B23"/>
+            <a:srgbClr val="F3F6F4"/>
           </a:solidFill>
-          <a:ln>
-            <a:noFill/>
+          <a:ln w="12700">
+            <a:solidFill>
+              <a:srgbClr val="C8D2CB"/>
+            </a:solidFill>
           </a:ln>
         </p:spPr>
         <p:style>
@@ -5673,22 +6101,20 @@
       </p:sp>
       <p:sp>
         <p:nvSpPr>
-          <p:cNvPr id="20" name="Shape"/>
+          <p:cNvPr id="16" name="Rectangle 15"/>
           <p:cNvSpPr/>
           <p:nvPr/>
         </p:nvSpPr>
         <p:spPr>
           <a:xfrm>
-            <a:off x="914400" y="4069080"/>
-            <a:ext cx="457200" cy="457200"/>
-          </a:xfrm>
-          <a:prstGeom prst="roundRect">
-            <a:avLst>
-              <a:gd name="adj" fmla="val 20000"/>
-            </a:avLst>
+            <a:off x="5980176" y="1508760"/>
+            <a:ext cx="2468880" cy="45720"/>
+          </a:xfrm>
+          <a:prstGeom prst="rect">
+            <a:avLst/>
           </a:prstGeom>
           <a:solidFill>
-            <a:srgbClr val="6EA8FE"/>
+            <a:srgbClr val="1F5C42"/>
           </a:solidFill>
           <a:ln>
             <a:noFill/>
@@ -5716,40 +6142,16 @@
           </a:p>
         </p:txBody>
       </p:sp>
-      <p:pic>
-        <p:nvPicPr>
-          <p:cNvPr id="21" name="Picture 20" descr="icon_2_8fcdbad7.png"/>
-          <p:cNvPicPr>
-            <a:picLocks noChangeAspect="1"/>
-          </p:cNvPicPr>
-          <p:nvPr/>
-        </p:nvPicPr>
-        <p:blipFill>
-          <a:blip r:embed="rId2"/>
-          <a:stretch>
-            <a:fillRect/>
-          </a:stretch>
-        </p:blipFill>
-        <p:spPr>
-          <a:xfrm>
-            <a:off x="1024128" y="4178808"/>
-            <a:ext cx="237744" cy="237744"/>
-          </a:xfrm>
-          <a:prstGeom prst="rect">
-            <a:avLst/>
-          </a:prstGeom>
-        </p:spPr>
-      </p:pic>
-      <p:sp>
-        <p:nvSpPr>
-          <p:cNvPr id="22" name="Text"/>
+      <p:sp>
+        <p:nvSpPr>
+          <p:cNvPr id="17" name="TextBox 16"/>
           <p:cNvSpPr txBox="1"/>
           <p:nvPr/>
         </p:nvSpPr>
         <p:spPr>
           <a:xfrm>
-            <a:off x="1554480" y="4069080"/>
-            <a:ext cx="4206240" cy="365760"/>
+            <a:off x="6144768" y="1737360"/>
+            <a:ext cx="2194560" cy="365760"/>
           </a:xfrm>
           <a:prstGeom prst="rect">
             <a:avLst/>
@@ -5757,33 +6159,41 @@
           <a:noFill/>
         </p:spPr>
         <p:txBody>
-          <a:bodyPr wrap="square">
-            <a:spAutoFit/>
-          </a:bodyPr>
-          <a:lstStyle/>
-          <a:p>
-            <a:r>
-              <a:rPr sz="1600" b="1">
-                <a:solidFill>
-                  <a:srgbClr val="E8EAF0"/>
-                </a:solidFill>
-                <a:latin typeface="Calibri"/>
+          <a:bodyPr wrap="square" anchor="t"/>
+          <a:lstStyle/>
+          <a:p>
+            <a:pPr algn="l">
+              <a:spcBef>
+                <a:spcPts val="0"/>
+              </a:spcBef>
+              <a:spcAft>
+                <a:spcPts val="0"/>
+              </a:spcAft>
+            </a:pPr>
+            <a:r>
+              <a:rPr sz="1500" b="1">
+                <a:cs typeface="Menlo"/>
+                <a:ea typeface="Menlo"/>
+                <a:solidFill>
+                  <a:srgbClr val="1F5C42"/>
+                </a:solidFill>
+                <a:latin typeface="Menlo"/>
               </a:rPr>
-              <a:t>Plugs into any agent</a:t>
-            </a:r>
-          </a:p>
-        </p:txBody>
-      </p:sp>
-      <p:sp>
-        <p:nvSpPr>
-          <p:cNvPr id="23" name="Text"/>
+              <a:t>3 · Rank</a:t>
+            </a:r>
+          </a:p>
+        </p:txBody>
+      </p:sp>
+      <p:sp>
+        <p:nvSpPr>
+          <p:cNvPr id="18" name="TextBox 17"/>
           <p:cNvSpPr txBox="1"/>
           <p:nvPr/>
         </p:nvSpPr>
         <p:spPr>
           <a:xfrm>
-            <a:off x="1554480" y="4480560"/>
-            <a:ext cx="4206240" cy="1280160"/>
+            <a:off x="6144768" y="2194560"/>
+            <a:ext cx="2194560" cy="731520"/>
           </a:xfrm>
           <a:prstGeom prst="rect">
             <a:avLst/>
@@ -5791,41 +6201,47 @@
           <a:noFill/>
         </p:spPr>
         <p:txBody>
-          <a:bodyPr wrap="square">
-            <a:spAutoFit/>
-          </a:bodyPr>
-          <a:lstStyle/>
-          <a:p>
-            <a:r>
-              <a:rPr sz="1250" b="0">
-                <a:solidFill>
-                  <a:srgbClr val="9AA0B0"/>
-                </a:solidFill>
-                <a:latin typeface="Calibri"/>
+          <a:bodyPr wrap="square" anchor="t"/>
+          <a:lstStyle/>
+          <a:p>
+            <a:pPr algn="l">
+              <a:spcBef>
+                <a:spcPts val="0"/>
+              </a:spcBef>
+              <a:spcAft>
+                <a:spcPts val="0"/>
+              </a:spcAft>
+            </a:pPr>
+            <a:r>
+              <a:rPr sz="1300" b="0">
+                <a:cs typeface="Helvetica"/>
+                <a:ea typeface="Helvetica"/>
+                <a:solidFill>
+                  <a:srgbClr val="4A5850"/>
+                </a:solidFill>
+                <a:latin typeface="Helvetica"/>
               </a:rPr>
-              <a:t>MCP server with two tools: compile_context + expand_section. Two lines of config in Cursor, Claude Code, Codex, or Claude Desktop — plus the web demo.</a:t>
-            </a:r>
-          </a:p>
-        </p:txBody>
-      </p:sp>
-      <p:sp>
-        <p:nvSpPr>
-          <p:cNvPr id="24" name="Shape"/>
+              <a:t>BM25 + query cleanup — local, no LLM</a:t>
+            </a:r>
+          </a:p>
+        </p:txBody>
+      </p:sp>
+      <p:sp>
+        <p:nvSpPr>
+          <p:cNvPr id="19" name="Rectangle 18"/>
           <p:cNvSpPr/>
           <p:nvPr/>
         </p:nvSpPr>
         <p:spPr>
           <a:xfrm>
-            <a:off x="6309360" y="3794760"/>
-            <a:ext cx="5394960" cy="2103120"/>
-          </a:xfrm>
-          <a:prstGeom prst="roundRect">
-            <a:avLst>
-              <a:gd name="adj" fmla="val 8000"/>
-            </a:avLst>
+            <a:off x="8467344" y="2194560"/>
+            <a:ext cx="164592" cy="36576"/>
+          </a:xfrm>
+          <a:prstGeom prst="rect">
+            <a:avLst/>
           </a:prstGeom>
           <a:solidFill>
-            <a:srgbClr val="181B23"/>
+            <a:srgbClr val="A8B9AF"/>
           </a:solidFill>
           <a:ln>
             <a:noFill/>
@@ -5855,25 +6271,25 @@
       </p:sp>
       <p:sp>
         <p:nvSpPr>
-          <p:cNvPr id="25" name="Shape"/>
+          <p:cNvPr id="20" name="Rectangle 19"/>
           <p:cNvSpPr/>
           <p:nvPr/>
         </p:nvSpPr>
         <p:spPr>
           <a:xfrm>
-            <a:off x="6583680" y="4069080"/>
-            <a:ext cx="457200" cy="457200"/>
-          </a:xfrm>
-          <a:prstGeom prst="roundRect">
-            <a:avLst>
-              <a:gd name="adj" fmla="val 20000"/>
-            </a:avLst>
+            <a:off x="8650224" y="1508760"/>
+            <a:ext cx="2468880" cy="1554480"/>
+          </a:xfrm>
+          <a:prstGeom prst="rect">
+            <a:avLst/>
           </a:prstGeom>
           <a:solidFill>
-            <a:srgbClr val="4ADE80"/>
+            <a:srgbClr val="F3F6F4"/>
           </a:solidFill>
-          <a:ln>
-            <a:noFill/>
+          <a:ln w="12700">
+            <a:solidFill>
+              <a:srgbClr val="C8D2CB"/>
+            </a:solidFill>
           </a:ln>
         </p:spPr>
         <p:style>
@@ -5898,40 +6314,59 @@
           </a:p>
         </p:txBody>
       </p:sp>
-      <p:pic>
-        <p:nvPicPr>
-          <p:cNvPr id="26" name="Picture 25" descr="icon_2_f964189d.png"/>
-          <p:cNvPicPr>
-            <a:picLocks noChangeAspect="1"/>
-          </p:cNvPicPr>
-          <p:nvPr/>
-        </p:nvPicPr>
-        <p:blipFill>
-          <a:blip r:embed="rId3"/>
-          <a:stretch>
-            <a:fillRect/>
-          </a:stretch>
-        </p:blipFill>
-        <p:spPr>
-          <a:xfrm>
-            <a:off x="6693408" y="4178808"/>
-            <a:ext cx="237744" cy="237744"/>
-          </a:xfrm>
-          <a:prstGeom prst="rect">
-            <a:avLst/>
-          </a:prstGeom>
-        </p:spPr>
-      </p:pic>
-      <p:sp>
-        <p:nvSpPr>
-          <p:cNvPr id="27" name="Text"/>
+      <p:sp>
+        <p:nvSpPr>
+          <p:cNvPr id="21" name="Rectangle 20"/>
+          <p:cNvSpPr/>
+          <p:nvPr/>
+        </p:nvSpPr>
+        <p:spPr>
+          <a:xfrm>
+            <a:off x="8650224" y="1508760"/>
+            <a:ext cx="2468880" cy="45720"/>
+          </a:xfrm>
+          <a:prstGeom prst="rect">
+            <a:avLst/>
+          </a:prstGeom>
+          <a:solidFill>
+            <a:srgbClr val="1F5C42"/>
+          </a:solidFill>
+          <a:ln>
+            <a:noFill/>
+          </a:ln>
+        </p:spPr>
+        <p:style>
+          <a:lnRef idx="1">
+            <a:schemeClr val="accent1"/>
+          </a:lnRef>
+          <a:fillRef idx="3">
+            <a:schemeClr val="accent1"/>
+          </a:fillRef>
+          <a:effectRef idx="2">
+            <a:schemeClr val="accent1"/>
+          </a:effectRef>
+          <a:fontRef idx="minor">
+            <a:schemeClr val="lt1"/>
+          </a:fontRef>
+        </p:style>
+        <p:txBody>
+          <a:bodyPr rtlCol="0" anchor="ctr"/>
+          <a:lstStyle/>
+          <a:p>
+            <a:pPr algn="ctr"/>
+          </a:p>
+        </p:txBody>
+      </p:sp>
+      <p:sp>
+        <p:nvSpPr>
+          <p:cNvPr id="22" name="TextBox 21"/>
           <p:cNvSpPr txBox="1"/>
           <p:nvPr/>
         </p:nvSpPr>
         <p:spPr>
           <a:xfrm>
-            <a:off x="7223760" y="4069080"/>
-            <a:ext cx="4206240" cy="365760"/>
+            <a:off x="8814816" y="1737360"/>
+            <a:ext cx="2194560" cy="365760"/>
           </a:xfrm>
           <a:prstGeom prst="rect">
             <a:avLst/>
@@ -5939,33 +6374,41 @@
           <a:noFill/>
         </p:spPr>
         <p:txBody>
-          <a:bodyPr wrap="square">
-            <a:spAutoFit/>
-          </a:bodyPr>
-          <a:lstStyle/>
-          <a:p>
-            <a:r>
-              <a:rPr sz="1600" b="1">
-                <a:solidFill>
-                  <a:srgbClr val="E8EAF0"/>
-                </a:solidFill>
-                <a:latin typeface="Calibri"/>
+          <a:bodyPr wrap="square" anchor="t"/>
+          <a:lstStyle/>
+          <a:p>
+            <a:pPr algn="l">
+              <a:spcBef>
+                <a:spcPts val="0"/>
+              </a:spcBef>
+              <a:spcAft>
+                <a:spcPts val="0"/>
+              </a:spcAft>
+            </a:pPr>
+            <a:r>
+              <a:rPr sz="1500" b="1">
+                <a:cs typeface="Menlo"/>
+                <a:ea typeface="Menlo"/>
+                <a:solidFill>
+                  <a:srgbClr val="1F5C42"/>
+                </a:solidFill>
+                <a:latin typeface="Menlo"/>
               </a:rPr>
-              <a:t>Honest about recall</a:t>
-            </a:r>
-          </a:p>
-        </p:txBody>
-      </p:sp>
-      <p:sp>
-        <p:nvSpPr>
-          <p:cNvPr id="28" name="Text"/>
+              <a:t>4 · Pack</a:t>
+            </a:r>
+          </a:p>
+        </p:txBody>
+      </p:sp>
+      <p:sp>
+        <p:nvSpPr>
+          <p:cNvPr id="23" name="TextBox 22"/>
           <p:cNvSpPr txBox="1"/>
           <p:nvPr/>
         </p:nvSpPr>
         <p:spPr>
           <a:xfrm>
-            <a:off x="7223760" y="4480560"/>
-            <a:ext cx="4206240" cy="1280160"/>
+            <a:off x="8814816" y="2194560"/>
+            <a:ext cx="2194560" cy="731520"/>
           </a:xfrm>
           <a:prstGeom prst="rect">
             <a:avLst/>
@@ -5973,19 +6416,371 @@
           <a:noFill/>
         </p:spPr>
         <p:txBody>
-          <a:bodyPr wrap="square">
-            <a:spAutoFit/>
-          </a:bodyPr>
-          <a:lstStyle/>
-          <a:p>
-            <a:r>
-              <a:rPr sz="1250" b="0">
-                <a:solidFill>
-                  <a:srgbClr val="9AA0B0"/>
-                </a:solidFill>
-                <a:latin typeface="Calibri"/>
+          <a:bodyPr wrap="square" anchor="t"/>
+          <a:lstStyle/>
+          <a:p>
+            <a:pPr algn="l">
+              <a:spcBef>
+                <a:spcPts val="0"/>
+              </a:spcBef>
+              <a:spcAft>
+                <a:spcPts val="0"/>
+              </a:spcAft>
+            </a:pPr>
+            <a:r>
+              <a:rPr sz="1300" b="0">
+                <a:cs typeface="Helvetica"/>
+                <a:ea typeface="Helvetica"/>
+                <a:solidFill>
+                  <a:srgbClr val="4A5850"/>
+                </a:solidFill>
+                <a:latin typeface="Helvetica"/>
               </a:rPr>
-              <a:t>Every response ends with a manifest of omitted sections — the agent always knows what it didn't see, and can fetch any section by id via expand_section. Trimming is never silent.</a:t>
+              <a:t>coverage-first under budget; content before manifest; relevance floor</a:t>
+            </a:r>
+          </a:p>
+        </p:txBody>
+      </p:sp>
+      <p:sp>
+        <p:nvSpPr>
+          <p:cNvPr id="24" name="Rectangle 23"/>
+          <p:cNvSpPr/>
+          <p:nvPr/>
+        </p:nvSpPr>
+        <p:spPr>
+          <a:xfrm>
+            <a:off x="640080" y="3520440"/>
+            <a:ext cx="5303520" cy="2606040"/>
+          </a:xfrm>
+          <a:prstGeom prst="rect">
+            <a:avLst/>
+          </a:prstGeom>
+          <a:solidFill>
+            <a:srgbClr val="F3F6F4"/>
+          </a:solidFill>
+          <a:ln w="12700">
+            <a:solidFill>
+              <a:srgbClr val="C8D2CB"/>
+            </a:solidFill>
+          </a:ln>
+        </p:spPr>
+        <p:style>
+          <a:lnRef idx="1">
+            <a:schemeClr val="accent1"/>
+          </a:lnRef>
+          <a:fillRef idx="3">
+            <a:schemeClr val="accent1"/>
+          </a:fillRef>
+          <a:effectRef idx="2">
+            <a:schemeClr val="accent1"/>
+          </a:effectRef>
+          <a:fontRef idx="minor">
+            <a:schemeClr val="lt1"/>
+          </a:fontRef>
+        </p:style>
+        <p:txBody>
+          <a:bodyPr rtlCol="0" anchor="ctr"/>
+          <a:lstStyle/>
+          <a:p>
+            <a:pPr algn="ctr"/>
+          </a:p>
+        </p:txBody>
+      </p:sp>
+      <p:sp>
+        <p:nvSpPr>
+          <p:cNvPr id="25" name="Rectangle 24"/>
+          <p:cNvSpPr/>
+          <p:nvPr/>
+        </p:nvSpPr>
+        <p:spPr>
+          <a:xfrm>
+            <a:off x="640080" y="3520440"/>
+            <a:ext cx="91440" cy="2606040"/>
+          </a:xfrm>
+          <a:prstGeom prst="rect">
+            <a:avLst/>
+          </a:prstGeom>
+          <a:solidFill>
+            <a:srgbClr val="1F5C42"/>
+          </a:solidFill>
+          <a:ln>
+            <a:noFill/>
+          </a:ln>
+        </p:spPr>
+        <p:style>
+          <a:lnRef idx="1">
+            <a:schemeClr val="accent1"/>
+          </a:lnRef>
+          <a:fillRef idx="3">
+            <a:schemeClr val="accent1"/>
+          </a:fillRef>
+          <a:effectRef idx="2">
+            <a:schemeClr val="accent1"/>
+          </a:effectRef>
+          <a:fontRef idx="minor">
+            <a:schemeClr val="lt1"/>
+          </a:fontRef>
+        </p:style>
+        <p:txBody>
+          <a:bodyPr rtlCol="0" anchor="ctr"/>
+          <a:lstStyle/>
+          <a:p>
+            <a:pPr algn="ctr"/>
+          </a:p>
+        </p:txBody>
+      </p:sp>
+      <p:sp>
+        <p:nvSpPr>
+          <p:cNvPr id="26" name="TextBox 25"/>
+          <p:cNvSpPr txBox="1"/>
+          <p:nvPr/>
+        </p:nvSpPr>
+        <p:spPr>
+          <a:xfrm>
+            <a:off x="1005840" y="3794760"/>
+            <a:ext cx="4663440" cy="411480"/>
+          </a:xfrm>
+          <a:prstGeom prst="rect">
+            <a:avLst/>
+          </a:prstGeom>
+          <a:noFill/>
+        </p:spPr>
+        <p:txBody>
+          <a:bodyPr wrap="square" anchor="t"/>
+          <a:lstStyle/>
+          <a:p>
+            <a:pPr algn="l">
+              <a:spcBef>
+                <a:spcPts val="0"/>
+              </a:spcBef>
+              <a:spcAft>
+                <a:spcPts val="0"/>
+              </a:spcAft>
+            </a:pPr>
+            <a:r>
+              <a:rPr sz="1800" b="1">
+                <a:cs typeface="Helvetica"/>
+                <a:ea typeface="Helvetica"/>
+                <a:solidFill>
+                  <a:srgbClr val="1A221E"/>
+                </a:solidFill>
+                <a:latin typeface="Helvetica"/>
+              </a:rPr>
+              <a:t>MCP + web demo</a:t>
+            </a:r>
+          </a:p>
+        </p:txBody>
+      </p:sp>
+      <p:sp>
+        <p:nvSpPr>
+          <p:cNvPr id="27" name="TextBox 26"/>
+          <p:cNvSpPr txBox="1"/>
+          <p:nvPr/>
+        </p:nvSpPr>
+        <p:spPr>
+          <a:xfrm>
+            <a:off x="1005840" y="4297680"/>
+            <a:ext cx="4663440" cy="1463040"/>
+          </a:xfrm>
+          <a:prstGeom prst="rect">
+            <a:avLst/>
+          </a:prstGeom>
+          <a:noFill/>
+        </p:spPr>
+        <p:txBody>
+          <a:bodyPr wrap="square" anchor="t"/>
+          <a:lstStyle/>
+          <a:p>
+            <a:pPr algn="l">
+              <a:spcBef>
+                <a:spcPts val="0"/>
+              </a:spcBef>
+              <a:spcAft>
+                <a:spcPts val="0"/>
+              </a:spcAft>
+            </a:pPr>
+            <a:r>
+              <a:rPr sz="1400" b="0">
+                <a:cs typeface="Helvetica"/>
+                <a:ea typeface="Helvetica"/>
+                <a:solidFill>
+                  <a:srgbClr val="4A5850"/>
+                </a:solidFill>
+                <a:latin typeface="Helvetica"/>
+              </a:rPr>
+              <a:t>Two tools: compile_context + expand_section. Cursor, Claude Code, Codex, Claude Desktop — plus the hosted demo. No API key for compile.</a:t>
+            </a:r>
+          </a:p>
+        </p:txBody>
+      </p:sp>
+      <p:sp>
+        <p:nvSpPr>
+          <p:cNvPr id="28" name="Rectangle 27"/>
+          <p:cNvSpPr/>
+          <p:nvPr/>
+        </p:nvSpPr>
+        <p:spPr>
+          <a:xfrm>
+            <a:off x="6263640" y="3520440"/>
+            <a:ext cx="5303520" cy="2606040"/>
+          </a:xfrm>
+          <a:prstGeom prst="rect">
+            <a:avLst/>
+          </a:prstGeom>
+          <a:solidFill>
+            <a:srgbClr val="F3F6F4"/>
+          </a:solidFill>
+          <a:ln w="12700">
+            <a:solidFill>
+              <a:srgbClr val="C8D2CB"/>
+            </a:solidFill>
+          </a:ln>
+        </p:spPr>
+        <p:style>
+          <a:lnRef idx="1">
+            <a:schemeClr val="accent1"/>
+          </a:lnRef>
+          <a:fillRef idx="3">
+            <a:schemeClr val="accent1"/>
+          </a:fillRef>
+          <a:effectRef idx="2">
+            <a:schemeClr val="accent1"/>
+          </a:effectRef>
+          <a:fontRef idx="minor">
+            <a:schemeClr val="lt1"/>
+          </a:fontRef>
+        </p:style>
+        <p:txBody>
+          <a:bodyPr rtlCol="0" anchor="ctr"/>
+          <a:lstStyle/>
+          <a:p>
+            <a:pPr algn="ctr"/>
+          </a:p>
+        </p:txBody>
+      </p:sp>
+      <p:sp>
+        <p:nvSpPr>
+          <p:cNvPr id="29" name="Rectangle 28"/>
+          <p:cNvSpPr/>
+          <p:nvPr/>
+        </p:nvSpPr>
+        <p:spPr>
+          <a:xfrm>
+            <a:off x="6263640" y="3520440"/>
+            <a:ext cx="91440" cy="2606040"/>
+          </a:xfrm>
+          <a:prstGeom prst="rect">
+            <a:avLst/>
+          </a:prstGeom>
+          <a:solidFill>
+            <a:srgbClr val="1F5C42"/>
+          </a:solidFill>
+          <a:ln>
+            <a:noFill/>
+          </a:ln>
+        </p:spPr>
+        <p:style>
+          <a:lnRef idx="1">
+            <a:schemeClr val="accent1"/>
+          </a:lnRef>
+          <a:fillRef idx="3">
+            <a:schemeClr val="accent1"/>
+          </a:fillRef>
+          <a:effectRef idx="2">
+            <a:schemeClr val="accent1"/>
+          </a:effectRef>
+          <a:fontRef idx="minor">
+            <a:schemeClr val="lt1"/>
+          </a:fontRef>
+        </p:style>
+        <p:txBody>
+          <a:bodyPr rtlCol="0" anchor="ctr"/>
+          <a:lstStyle/>
+          <a:p>
+            <a:pPr algn="ctr"/>
+          </a:p>
+        </p:txBody>
+      </p:sp>
+      <p:sp>
+        <p:nvSpPr>
+          <p:cNvPr id="30" name="TextBox 29"/>
+          <p:cNvSpPr txBox="1"/>
+          <p:nvPr/>
+        </p:nvSpPr>
+        <p:spPr>
+          <a:xfrm>
+            <a:off x="6629400" y="3794760"/>
+            <a:ext cx="4663440" cy="411480"/>
+          </a:xfrm>
+          <a:prstGeom prst="rect">
+            <a:avLst/>
+          </a:prstGeom>
+          <a:noFill/>
+        </p:spPr>
+        <p:txBody>
+          <a:bodyPr wrap="square" anchor="t"/>
+          <a:lstStyle/>
+          <a:p>
+            <a:pPr algn="l">
+              <a:spcBef>
+                <a:spcPts val="0"/>
+              </a:spcBef>
+              <a:spcAft>
+                <a:spcPts val="0"/>
+              </a:spcAft>
+            </a:pPr>
+            <a:r>
+              <a:rPr sz="1800" b="1">
+                <a:cs typeface="Helvetica"/>
+                <a:ea typeface="Helvetica"/>
+                <a:solidFill>
+                  <a:srgbClr val="1A221E"/>
+                </a:solidFill>
+                <a:latin typeface="Helvetica"/>
+              </a:rPr>
+              <a:t>Omit honesty</a:t>
+            </a:r>
+          </a:p>
+        </p:txBody>
+      </p:sp>
+      <p:sp>
+        <p:nvSpPr>
+          <p:cNvPr id="31" name="TextBox 30"/>
+          <p:cNvSpPr txBox="1"/>
+          <p:nvPr/>
+        </p:nvSpPr>
+        <p:spPr>
+          <a:xfrm>
+            <a:off x="6629400" y="4297680"/>
+            <a:ext cx="4663440" cy="1463040"/>
+          </a:xfrm>
+          <a:prstGeom prst="rect">
+            <a:avLst/>
+          </a:prstGeom>
+          <a:noFill/>
+        </p:spPr>
+        <p:txBody>
+          <a:bodyPr wrap="square" anchor="t"/>
+          <a:lstStyle/>
+          <a:p>
+            <a:pPr algn="l">
+              <a:spcBef>
+                <a:spcPts val="0"/>
+              </a:spcBef>
+              <a:spcAft>
+                <a:spcPts val="0"/>
+              </a:spcAft>
+            </a:pPr>
+            <a:r>
+              <a:rPr sz="1400" b="0">
+                <a:cs typeface="Helvetica"/>
+                <a:ea typeface="Helvetica"/>
+                <a:solidFill>
+                  <a:srgbClr val="4A5850"/>
+                </a:solidFill>
+                <a:latin typeface="Helvetica"/>
+              </a:rPr>
+              <a:t>Every response ends with an omitted-sections manifest. Fetch any section by id via expand_section. Trimming is never silent.</a:t>
             </a:r>
           </a:p>
         </p:txBody>
@@ -6001,14 +6796,6 @@
 <file path=ppt/slides/slide5.xml><?xml version="1.0" encoding="utf-8"?>
 <p:sld xmlns:a="http://schemas.openxmlformats.org/drawingml/2006/main" xmlns:p="http://schemas.openxmlformats.org/presentationml/2006/main" xmlns:r="http://schemas.openxmlformats.org/officeDocument/2006/relationships">
   <p:cSld>
-    <p:bg>
-      <p:bgPr>
-        <a:solidFill>
-          <a:srgbClr val="0F1117"/>
-        </a:solidFill>
-        <a:effectLst/>
-      </p:bgPr>
-    </p:bg>
     <p:spTree>
       <p:nvGrpSpPr>
         <p:cNvPr id="1" name=""/>
@@ -6018,56 +6805,20 @@
       <p:grpSpPr/>
       <p:sp>
         <p:nvSpPr>
-          <p:cNvPr id="2" name="Text 0"/>
-          <p:cNvSpPr txBox="1"/>
-          <p:nvPr/>
-        </p:nvSpPr>
-        <p:spPr>
-          <a:xfrm>
-            <a:off x="548640" y="457200"/>
-            <a:ext cx="11064240" cy="640080"/>
-          </a:xfrm>
-          <a:prstGeom prst="rect">
-            <a:avLst/>
-          </a:prstGeom>
-          <a:noFill/>
-        </p:spPr>
-        <p:txBody>
-          <a:bodyPr wrap="square">
-            <a:spAutoFit/>
-          </a:bodyPr>
-          <a:lstStyle/>
-          <a:p>
-            <a:r>
-              <a:rPr sz="3200" b="1">
-                <a:solidFill>
-                  <a:srgbClr val="E8EAF0"/>
-                </a:solidFill>
-                <a:latin typeface="Calibri"/>
-              </a:rPr>
-              <a:t>Measured, not promised</a:t>
-            </a:r>
-          </a:p>
-        </p:txBody>
-      </p:sp>
-      <p:sp>
-        <p:nvSpPr>
-          <p:cNvPr id="3" name="Shape"/>
+          <p:cNvPr id="2" name="Rectangle 1"/>
           <p:cNvSpPr/>
           <p:nvPr/>
         </p:nvSpPr>
         <p:spPr>
           <a:xfrm>
-            <a:off x="640080" y="1554480"/>
-            <a:ext cx="3429000" cy="2011680"/>
-          </a:xfrm>
-          <a:prstGeom prst="roundRect">
-            <a:avLst>
-              <a:gd name="adj" fmla="val 8000"/>
-            </a:avLst>
+            <a:off x="0" y="0"/>
+            <a:ext cx="12191695" cy="6858000"/>
+          </a:xfrm>
+          <a:prstGeom prst="rect">
+            <a:avLst/>
           </a:prstGeom>
           <a:solidFill>
-            <a:srgbClr val="181B23"/>
+            <a:srgbClr val="E8ECE9"/>
           </a:solidFill>
           <a:ln>
             <a:noFill/>
@@ -6097,14 +6848,14 @@
       </p:sp>
       <p:sp>
         <p:nvSpPr>
-          <p:cNvPr id="4" name="Text"/>
+          <p:cNvPr id="3" name="TextBox 2"/>
           <p:cNvSpPr txBox="1"/>
           <p:nvPr/>
         </p:nvSpPr>
         <p:spPr>
           <a:xfrm>
-            <a:off x="868680" y="1783080"/>
-            <a:ext cx="2971800" cy="822960"/>
+            <a:off x="640080" y="411480"/>
+            <a:ext cx="10972800" cy="640080"/>
           </a:xfrm>
           <a:prstGeom prst="rect">
             <a:avLst/>
@@ -6112,78 +6863,52 @@
           <a:noFill/>
         </p:spPr>
         <p:txBody>
-          <a:bodyPr wrap="square">
-            <a:spAutoFit/>
-          </a:bodyPr>
-          <a:lstStyle/>
-          <a:p>
-            <a:r>
-              <a:rPr sz="4400" b="1">
-                <a:solidFill>
-                  <a:srgbClr val="4ADE80"/>
-                </a:solidFill>
-                <a:latin typeface="Calibri"/>
+          <a:bodyPr wrap="square" anchor="t"/>
+          <a:lstStyle/>
+          <a:p>
+            <a:pPr algn="l">
+              <a:spcBef>
+                <a:spcPts val="0"/>
+              </a:spcBef>
+              <a:spcAft>
+                <a:spcPts val="0"/>
+              </a:spcAft>
+            </a:pPr>
+            <a:r>
+              <a:rPr sz="2800" b="1">
+                <a:cs typeface="Georgia"/>
+                <a:ea typeface="Georgia"/>
+                <a:solidFill>
+                  <a:srgbClr val="1A221E"/>
+                </a:solidFill>
+                <a:latin typeface="Georgia"/>
               </a:rPr>
-              <a:t>97.1%</a:t>
-            </a:r>
-          </a:p>
-        </p:txBody>
-      </p:sp>
-      <p:sp>
-        <p:nvSpPr>
-          <p:cNvPr id="5" name="Text"/>
-          <p:cNvSpPr txBox="1"/>
-          <p:nvPr/>
-        </p:nvSpPr>
-        <p:spPr>
-          <a:xfrm>
-            <a:off x="960120" y="2697480"/>
-            <a:ext cx="2788920" cy="731520"/>
-          </a:xfrm>
-          <a:prstGeom prst="rect">
-            <a:avLst/>
-          </a:prstGeom>
-          <a:noFill/>
-        </p:spPr>
-        <p:txBody>
-          <a:bodyPr wrap="square">
-            <a:spAutoFit/>
-          </a:bodyPr>
-          <a:lstStyle/>
-          <a:p>
-            <a:r>
-              <a:rPr sz="1200" b="0">
-                <a:solidFill>
-                  <a:srgbClr val="9AA0B0"/>
-                </a:solidFill>
-                <a:latin typeface="Calibri"/>
-              </a:rPr>
-              <a:t>token reduction on a real 78-section docx, answer intact</a:t>
-            </a:r>
-          </a:p>
-        </p:txBody>
-      </p:sp>
-      <p:sp>
-        <p:nvSpPr>
-          <p:cNvPr id="6" name="Shape"/>
+              <a:t>Measured, not promised</a:t>
+            </a:r>
+          </a:p>
+        </p:txBody>
+      </p:sp>
+      <p:sp>
+        <p:nvSpPr>
+          <p:cNvPr id="4" name="Rectangle 3"/>
           <p:cNvSpPr/>
           <p:nvPr/>
         </p:nvSpPr>
         <p:spPr>
           <a:xfrm>
-            <a:off x="4343400" y="1554480"/>
-            <a:ext cx="3429000" cy="2011680"/>
-          </a:xfrm>
-          <a:prstGeom prst="roundRect">
-            <a:avLst>
-              <a:gd name="adj" fmla="val 8000"/>
-            </a:avLst>
+            <a:off x="640080" y="1280160"/>
+            <a:ext cx="3520440" cy="2148840"/>
+          </a:xfrm>
+          <a:prstGeom prst="rect">
+            <a:avLst/>
           </a:prstGeom>
           <a:solidFill>
-            <a:srgbClr val="181B23"/>
+            <a:srgbClr val="F3F6F4"/>
           </a:solidFill>
-          <a:ln>
-            <a:noFill/>
+          <a:ln w="12700">
+            <a:solidFill>
+              <a:srgbClr val="C8D2CB"/>
+            </a:solidFill>
           </a:ln>
         </p:spPr>
         <p:style>
@@ -6210,90 +6935,20 @@
       </p:sp>
       <p:sp>
         <p:nvSpPr>
-          <p:cNvPr id="7" name="Text"/>
-          <p:cNvSpPr txBox="1"/>
-          <p:nvPr/>
-        </p:nvSpPr>
-        <p:spPr>
-          <a:xfrm>
-            <a:off x="4572000" y="1783080"/>
-            <a:ext cx="2971800" cy="822960"/>
-          </a:xfrm>
-          <a:prstGeom prst="rect">
-            <a:avLst/>
-          </a:prstGeom>
-          <a:noFill/>
-        </p:spPr>
-        <p:txBody>
-          <a:bodyPr wrap="square">
-            <a:spAutoFit/>
-          </a:bodyPr>
-          <a:lstStyle/>
-          <a:p>
-            <a:r>
-              <a:rPr sz="4400" b="1">
-                <a:solidFill>
-                  <a:srgbClr val="6EA8FE"/>
-                </a:solidFill>
-                <a:latin typeface="Calibri"/>
-              </a:rPr>
-              <a:t>34×</a:t>
-            </a:r>
-          </a:p>
-        </p:txBody>
-      </p:sp>
-      <p:sp>
-        <p:nvSpPr>
-          <p:cNvPr id="8" name="Text"/>
-          <p:cNvSpPr txBox="1"/>
-          <p:nvPr/>
-        </p:nvSpPr>
-        <p:spPr>
-          <a:xfrm>
-            <a:off x="4663440" y="2697480"/>
-            <a:ext cx="2788920" cy="731520"/>
-          </a:xfrm>
-          <a:prstGeom prst="rect">
-            <a:avLst/>
-          </a:prstGeom>
-          <a:noFill/>
-        </p:spPr>
-        <p:txBody>
-          <a:bodyPr wrap="square">
-            <a:spAutoFit/>
-          </a:bodyPr>
-          <a:lstStyle/>
-          <a:p>
-            <a:r>
-              <a:rPr sz="1200" b="0">
-                <a:solidFill>
-                  <a:srgbClr val="9AA0B0"/>
-                </a:solidFill>
-                <a:latin typeface="Calibri"/>
-              </a:rPr>
-              <a:t>cheaper per read — and cached, so repeat reads are instant</a:t>
-            </a:r>
-          </a:p>
-        </p:txBody>
-      </p:sp>
-      <p:sp>
-        <p:nvSpPr>
-          <p:cNvPr id="9" name="Shape"/>
+          <p:cNvPr id="5" name="Rectangle 4"/>
           <p:cNvSpPr/>
           <p:nvPr/>
         </p:nvSpPr>
         <p:spPr>
           <a:xfrm>
-            <a:off x="8046720" y="1554480"/>
-            <a:ext cx="3429000" cy="2011680"/>
-          </a:xfrm>
-          <a:prstGeom prst="roundRect">
-            <a:avLst>
-              <a:gd name="adj" fmla="val 8000"/>
-            </a:avLst>
+            <a:off x="640080" y="1280160"/>
+            <a:ext cx="3520440" cy="45720"/>
+          </a:xfrm>
+          <a:prstGeom prst="rect">
+            <a:avLst/>
           </a:prstGeom>
           <a:solidFill>
-            <a:srgbClr val="181B23"/>
+            <a:srgbClr val="1F5C42"/>
           </a:solidFill>
           <a:ln>
             <a:noFill/>
@@ -6323,14 +6978,14 @@
       </p:sp>
       <p:sp>
         <p:nvSpPr>
-          <p:cNvPr id="10" name="Text"/>
+          <p:cNvPr id="6" name="TextBox 5"/>
           <p:cNvSpPr txBox="1"/>
           <p:nvPr/>
         </p:nvSpPr>
         <p:spPr>
           <a:xfrm>
-            <a:off x="8275320" y="1783080"/>
-            <a:ext cx="2971800" cy="822960"/>
+            <a:off x="868680" y="1600200"/>
+            <a:ext cx="3154680" cy="640080"/>
           </a:xfrm>
           <a:prstGeom prst="rect">
             <a:avLst/>
@@ -6338,33 +6993,41 @@
           <a:noFill/>
         </p:spPr>
         <p:txBody>
-          <a:bodyPr wrap="square">
-            <a:spAutoFit/>
-          </a:bodyPr>
-          <a:lstStyle/>
-          <a:p>
-            <a:r>
-              <a:rPr sz="4400" b="1">
-                <a:solidFill>
-                  <a:srgbClr val="E8EAF0"/>
-                </a:solidFill>
-                <a:latin typeface="Calibri"/>
+          <a:bodyPr wrap="square" anchor="t"/>
+          <a:lstStyle/>
+          <a:p>
+            <a:pPr algn="l">
+              <a:spcBef>
+                <a:spcPts val="0"/>
+              </a:spcBef>
+              <a:spcAft>
+                <a:spcPts val="0"/>
+              </a:spcAft>
+            </a:pPr>
+            <a:r>
+              <a:rPr sz="3200" b="1">
+                <a:cs typeface="Georgia"/>
+                <a:ea typeface="Georgia"/>
+                <a:solidFill>
+                  <a:srgbClr val="1F5C42"/>
+                </a:solidFill>
+                <a:latin typeface="Georgia"/>
               </a:rPr>
-              <a:t>Parity</a:t>
-            </a:r>
-          </a:p>
-        </p:txBody>
-      </p:sp>
-      <p:sp>
-        <p:nvSpPr>
-          <p:cNvPr id="11" name="Text"/>
+              <a:t>97.1%</a:t>
+            </a:r>
+          </a:p>
+        </p:txBody>
+      </p:sp>
+      <p:sp>
+        <p:nvSpPr>
+          <p:cNvPr id="7" name="TextBox 6"/>
           <p:cNvSpPr txBox="1"/>
           <p:nvPr/>
         </p:nvSpPr>
         <p:spPr>
           <a:xfrm>
-            <a:off x="8366760" y="2697480"/>
-            <a:ext cx="2788920" cy="731520"/>
+            <a:off x="868680" y="2331720"/>
+            <a:ext cx="3154680" cy="868680"/>
           </a:xfrm>
           <a:prstGeom prst="rect">
             <a:avLst/>
@@ -6372,44 +7035,52 @@
           <a:noFill/>
         </p:spPr>
         <p:txBody>
-          <a:bodyPr wrap="square">
-            <a:spAutoFit/>
-          </a:bodyPr>
-          <a:lstStyle/>
-          <a:p>
-            <a:r>
-              <a:rPr sz="1200" b="0">
-                <a:solidFill>
-                  <a:srgbClr val="9AA0B0"/>
-                </a:solidFill>
-                <a:latin typeface="Calibri"/>
+          <a:bodyPr wrap="square" anchor="t"/>
+          <a:lstStyle/>
+          <a:p>
+            <a:pPr algn="l">
+              <a:spcBef>
+                <a:spcPts val="0"/>
+              </a:spcBef>
+              <a:spcAft>
+                <a:spcPts val="0"/>
+              </a:spcAft>
+            </a:pPr>
+            <a:r>
+              <a:rPr sz="1300" b="0">
+                <a:cs typeface="Helvetica"/>
+                <a:ea typeface="Helvetica"/>
+                <a:solidFill>
+                  <a:srgbClr val="4A5850"/>
+                </a:solidFill>
+                <a:latin typeface="Helvetica"/>
               </a:rPr>
-              <a:t>Full file vs compile (+ Include in Prove expands) — dual buttons; not an Agent run</a:t>
-            </a:r>
-          </a:p>
-        </p:txBody>
-      </p:sp>
-      <p:sp>
-        <p:nvSpPr>
-          <p:cNvPr id="12" name="Shape"/>
+              <a:t>token reduction on a real 78-section docx, answer intact</a:t>
+            </a:r>
+          </a:p>
+        </p:txBody>
+      </p:sp>
+      <p:sp>
+        <p:nvSpPr>
+          <p:cNvPr id="8" name="Rectangle 7"/>
           <p:cNvSpPr/>
           <p:nvPr/>
         </p:nvSpPr>
         <p:spPr>
           <a:xfrm>
-            <a:off x="640080" y="3977640"/>
-            <a:ext cx="10972800" cy="2057400"/>
-          </a:xfrm>
-          <a:prstGeom prst="roundRect">
-            <a:avLst>
-              <a:gd name="adj" fmla="val 8000"/>
-            </a:avLst>
+            <a:off x="4343400" y="1280160"/>
+            <a:ext cx="3520440" cy="2148840"/>
+          </a:xfrm>
+          <a:prstGeom prst="rect">
+            <a:avLst/>
           </a:prstGeom>
           <a:solidFill>
-            <a:srgbClr val="181B23"/>
+            <a:srgbClr val="F3F6F4"/>
           </a:solidFill>
-          <a:ln>
-            <a:noFill/>
+          <a:ln w="12700">
+            <a:solidFill>
+              <a:srgbClr val="C8D2CB"/>
+            </a:solidFill>
           </a:ln>
         </p:spPr>
         <p:style>
@@ -6436,54 +7107,20 @@
       </p:sp>
       <p:sp>
         <p:nvSpPr>
-          <p:cNvPr id="13" name="Text"/>
-          <p:cNvSpPr txBox="1"/>
-          <p:nvPr/>
-        </p:nvSpPr>
-        <p:spPr>
-          <a:xfrm>
-            <a:off x="914400" y="4160520"/>
-            <a:ext cx="10424160" cy="320040"/>
-          </a:xfrm>
-          <a:prstGeom prst="rect">
-            <a:avLst/>
-          </a:prstGeom>
-          <a:noFill/>
-        </p:spPr>
-        <p:txBody>
-          <a:bodyPr wrap="square">
-            <a:spAutoFit/>
-          </a:bodyPr>
-          <a:lstStyle/>
-          <a:p>
-            <a:r>
-              <a:rPr sz="1200" b="0">
-                <a:solidFill>
-                  <a:srgbClr val="9AA0B0"/>
-                </a:solidFill>
-                <a:latin typeface="Calibri"/>
-              </a:rPr>
-              <a:t>vendor_handbook.docx · “How long do refunds take and who approves large ones?” · budget 1,200</a:t>
-            </a:r>
-          </a:p>
-        </p:txBody>
-      </p:sp>
-      <p:sp>
-        <p:nvSpPr>
-          <p:cNvPr id="14" name="Bar"/>
+          <p:cNvPr id="9" name="Rectangle 8"/>
           <p:cNvSpPr/>
           <p:nvPr/>
         </p:nvSpPr>
         <p:spPr>
           <a:xfrm>
-            <a:off x="914400" y="4617720"/>
-            <a:ext cx="9966960" cy="457200"/>
+            <a:off x="4343400" y="1280160"/>
+            <a:ext cx="3520440" cy="45720"/>
           </a:xfrm>
           <a:prstGeom prst="rect">
             <a:avLst/>
           </a:prstGeom>
           <a:solidFill>
-            <a:srgbClr val="F87171"/>
+            <a:srgbClr val="1F5C42"/>
           </a:solidFill>
           <a:ln>
             <a:noFill/>
@@ -6513,14 +7150,14 @@
       </p:sp>
       <p:sp>
         <p:nvSpPr>
-          <p:cNvPr id="15" name="Text"/>
+          <p:cNvPr id="10" name="TextBox 9"/>
           <p:cNvSpPr txBox="1"/>
           <p:nvPr/>
         </p:nvSpPr>
         <p:spPr>
           <a:xfrm>
-            <a:off x="914400" y="4617720"/>
-            <a:ext cx="9966960" cy="457200"/>
+            <a:off x="4572000" y="1600200"/>
+            <a:ext cx="3154680" cy="640080"/>
           </a:xfrm>
           <a:prstGeom prst="rect">
             <a:avLst/>
@@ -6528,42 +7165,94 @@
           <a:noFill/>
         </p:spPr>
         <p:txBody>
-          <a:bodyPr wrap="square">
-            <a:spAutoFit/>
-          </a:bodyPr>
-          <a:lstStyle/>
-          <a:p>
-            <a:r>
-              <a:rPr sz="1200" b="1">
-                <a:solidFill>
-                  <a:srgbClr val="2B0A0A"/>
-                </a:solidFill>
-                <a:latin typeface="Calibri"/>
+          <a:bodyPr wrap="square" anchor="t"/>
+          <a:lstStyle/>
+          <a:p>
+            <a:pPr algn="l">
+              <a:spcBef>
+                <a:spcPts val="0"/>
+              </a:spcBef>
+              <a:spcAft>
+                <a:spcPts val="0"/>
+              </a:spcAft>
+            </a:pPr>
+            <a:r>
+              <a:rPr sz="3200" b="1">
+                <a:cs typeface="Georgia"/>
+                <a:ea typeface="Georgia"/>
+                <a:solidFill>
+                  <a:srgbClr val="1F5C42"/>
+                </a:solidFill>
+                <a:latin typeface="Georgia"/>
               </a:rPr>
-              <a:t>raw — 20,364 tokens</a:t>
-            </a:r>
-          </a:p>
-        </p:txBody>
-      </p:sp>
-      <p:sp>
-        <p:nvSpPr>
-          <p:cNvPr id="16" name="Bar"/>
+              <a:t>34×</a:t>
+            </a:r>
+          </a:p>
+        </p:txBody>
+      </p:sp>
+      <p:sp>
+        <p:nvSpPr>
+          <p:cNvPr id="11" name="TextBox 10"/>
+          <p:cNvSpPr txBox="1"/>
+          <p:nvPr/>
+        </p:nvSpPr>
+        <p:spPr>
+          <a:xfrm>
+            <a:off x="4572000" y="2331720"/>
+            <a:ext cx="3154680" cy="868680"/>
+          </a:xfrm>
+          <a:prstGeom prst="rect">
+            <a:avLst/>
+          </a:prstGeom>
+          <a:noFill/>
+        </p:spPr>
+        <p:txBody>
+          <a:bodyPr wrap="square" anchor="t"/>
+          <a:lstStyle/>
+          <a:p>
+            <a:pPr algn="l">
+              <a:spcBef>
+                <a:spcPts val="0"/>
+              </a:spcBef>
+              <a:spcAft>
+                <a:spcPts val="0"/>
+              </a:spcAft>
+            </a:pPr>
+            <a:r>
+              <a:rPr sz="1300" b="0">
+                <a:cs typeface="Helvetica"/>
+                <a:ea typeface="Helvetica"/>
+                <a:solidFill>
+                  <a:srgbClr val="4A5850"/>
+                </a:solidFill>
+                <a:latin typeface="Helvetica"/>
+              </a:rPr>
+              <a:t>cheaper per read — cached, so repeat reads are instant</a:t>
+            </a:r>
+          </a:p>
+        </p:txBody>
+      </p:sp>
+      <p:sp>
+        <p:nvSpPr>
+          <p:cNvPr id="12" name="Rectangle 11"/>
           <p:cNvSpPr/>
           <p:nvPr/>
         </p:nvSpPr>
         <p:spPr>
           <a:xfrm>
-            <a:off x="914400" y="5257800"/>
-            <a:ext cx="320040" cy="457200"/>
+            <a:off x="8046720" y="1280160"/>
+            <a:ext cx="3520440" cy="2148840"/>
           </a:xfrm>
           <a:prstGeom prst="rect">
             <a:avLst/>
           </a:prstGeom>
           <a:solidFill>
-            <a:srgbClr val="4ADE80"/>
+            <a:srgbClr val="F3F6F4"/>
           </a:solidFill>
-          <a:ln>
-            <a:noFill/>
+          <a:ln w="12700">
+            <a:solidFill>
+              <a:srgbClr val="C8D2CB"/>
+            </a:solidFill>
           </a:ln>
         </p:spPr>
         <p:style>
@@ -6590,14 +7279,57 @@
       </p:sp>
       <p:sp>
         <p:nvSpPr>
-          <p:cNvPr id="17" name="Text"/>
+          <p:cNvPr id="13" name="Rectangle 12"/>
+          <p:cNvSpPr/>
+          <p:nvPr/>
+        </p:nvSpPr>
+        <p:spPr>
+          <a:xfrm>
+            <a:off x="8046720" y="1280160"/>
+            <a:ext cx="3520440" cy="45720"/>
+          </a:xfrm>
+          <a:prstGeom prst="rect">
+            <a:avLst/>
+          </a:prstGeom>
+          <a:solidFill>
+            <a:srgbClr val="1F5C42"/>
+          </a:solidFill>
+          <a:ln>
+            <a:noFill/>
+          </a:ln>
+        </p:spPr>
+        <p:style>
+          <a:lnRef idx="1">
+            <a:schemeClr val="accent1"/>
+          </a:lnRef>
+          <a:fillRef idx="3">
+            <a:schemeClr val="accent1"/>
+          </a:fillRef>
+          <a:effectRef idx="2">
+            <a:schemeClr val="accent1"/>
+          </a:effectRef>
+          <a:fontRef idx="minor">
+            <a:schemeClr val="lt1"/>
+          </a:fontRef>
+        </p:style>
+        <p:txBody>
+          <a:bodyPr rtlCol="0" anchor="ctr"/>
+          <a:lstStyle/>
+          <a:p>
+            <a:pPr algn="ctr"/>
+          </a:p>
+        </p:txBody>
+      </p:sp>
+      <p:sp>
+        <p:nvSpPr>
+          <p:cNvPr id="14" name="TextBox 13"/>
           <p:cNvSpPr txBox="1"/>
           <p:nvPr/>
         </p:nvSpPr>
         <p:spPr>
           <a:xfrm>
-            <a:off x="1371600" y="5257800"/>
-            <a:ext cx="9509760" cy="457200"/>
+            <a:off x="8275320" y="1600200"/>
+            <a:ext cx="3154680" cy="640080"/>
           </a:xfrm>
           <a:prstGeom prst="rect">
             <a:avLst/>
@@ -6605,20 +7337,411 @@
           <a:noFill/>
         </p:spPr>
         <p:txBody>
-          <a:bodyPr wrap="square">
-            <a:spAutoFit/>
-          </a:bodyPr>
-          <a:lstStyle/>
-          <a:p>
-            <a:r>
-              <a:rPr sz="1200" b="1">
-                <a:solidFill>
-                  <a:srgbClr val="4ADE80"/>
-                </a:solidFill>
-                <a:latin typeface="Calibri"/>
+          <a:bodyPr wrap="square" anchor="t"/>
+          <a:lstStyle/>
+          <a:p>
+            <a:pPr algn="l">
+              <a:spcBef>
+                <a:spcPts val="0"/>
+              </a:spcBef>
+              <a:spcAft>
+                <a:spcPts val="0"/>
+              </a:spcAft>
+            </a:pPr>
+            <a:r>
+              <a:rPr sz="3200" b="1">
+                <a:cs typeface="Georgia"/>
+                <a:ea typeface="Georgia"/>
+                <a:solidFill>
+                  <a:srgbClr val="1F5C42"/>
+                </a:solidFill>
+                <a:latin typeface="Georgia"/>
               </a:rPr>
-              <a:t>compiled — 591 tokens · answer intact · verified by test suite + recall eval + MCP run</a:t>
-            </a:r>
+              <a:t>Parity</a:t>
+            </a:r>
+          </a:p>
+        </p:txBody>
+      </p:sp>
+      <p:sp>
+        <p:nvSpPr>
+          <p:cNvPr id="15" name="TextBox 14"/>
+          <p:cNvSpPr txBox="1"/>
+          <p:nvPr/>
+        </p:nvSpPr>
+        <p:spPr>
+          <a:xfrm>
+            <a:off x="8275320" y="2331720"/>
+            <a:ext cx="3154680" cy="868680"/>
+          </a:xfrm>
+          <a:prstGeom prst="rect">
+            <a:avLst/>
+          </a:prstGeom>
+          <a:noFill/>
+        </p:spPr>
+        <p:txBody>
+          <a:bodyPr wrap="square" anchor="t"/>
+          <a:lstStyle/>
+          <a:p>
+            <a:pPr algn="l">
+              <a:spcBef>
+                <a:spcPts val="0"/>
+              </a:spcBef>
+              <a:spcAft>
+                <a:spcPts val="0"/>
+              </a:spcAft>
+            </a:pPr>
+            <a:r>
+              <a:rPr sz="1300" b="0">
+                <a:cs typeface="Helvetica"/>
+                <a:ea typeface="Helvetica"/>
+                <a:solidFill>
+                  <a:srgbClr val="4A5850"/>
+                </a:solidFill>
+                <a:latin typeface="Helvetica"/>
+              </a:rPr>
+              <a:t>Full file vs compile (+ Include in Prove) — dual buttons; not an Agent run</a:t>
+            </a:r>
+          </a:p>
+        </p:txBody>
+      </p:sp>
+      <p:sp>
+        <p:nvSpPr>
+          <p:cNvPr id="16" name="Rectangle 15"/>
+          <p:cNvSpPr/>
+          <p:nvPr/>
+        </p:nvSpPr>
+        <p:spPr>
+          <a:xfrm>
+            <a:off x="640080" y="3794760"/>
+            <a:ext cx="10881360" cy="2331720"/>
+          </a:xfrm>
+          <a:prstGeom prst="rect">
+            <a:avLst/>
+          </a:prstGeom>
+          <a:solidFill>
+            <a:srgbClr val="1F5C42"/>
+          </a:solidFill>
+          <a:ln>
+            <a:noFill/>
+          </a:ln>
+        </p:spPr>
+        <p:style>
+          <a:lnRef idx="1">
+            <a:schemeClr val="accent1"/>
+          </a:lnRef>
+          <a:fillRef idx="3">
+            <a:schemeClr val="accent1"/>
+          </a:fillRef>
+          <a:effectRef idx="2">
+            <a:schemeClr val="accent1"/>
+          </a:effectRef>
+          <a:fontRef idx="minor">
+            <a:schemeClr val="lt1"/>
+          </a:fontRef>
+        </p:style>
+        <p:txBody>
+          <a:bodyPr rtlCol="0" anchor="ctr"/>
+          <a:lstStyle/>
+          <a:p>
+            <a:pPr algn="ctr"/>
+          </a:p>
+        </p:txBody>
+      </p:sp>
+      <p:sp>
+        <p:nvSpPr>
+          <p:cNvPr id="17" name="TextBox 16"/>
+          <p:cNvSpPr txBox="1"/>
+          <p:nvPr/>
+        </p:nvSpPr>
+        <p:spPr>
+          <a:xfrm>
+            <a:off x="914400" y="4023360"/>
+            <a:ext cx="10241280" cy="365760"/>
+          </a:xfrm>
+          <a:prstGeom prst="rect">
+            <a:avLst/>
+          </a:prstGeom>
+          <a:noFill/>
+        </p:spPr>
+        <p:txBody>
+          <a:bodyPr wrap="square" anchor="t"/>
+          <a:lstStyle/>
+          <a:p>
+            <a:pPr algn="l">
+              <a:spcBef>
+                <a:spcPts val="0"/>
+              </a:spcBef>
+              <a:spcAft>
+                <a:spcPts val="0"/>
+              </a:spcAft>
+            </a:pPr>
+            <a:r>
+              <a:rPr sz="1200" b="0">
+                <a:cs typeface="Menlo"/>
+                <a:ea typeface="Menlo"/>
+                <a:solidFill>
+                  <a:srgbClr val="B8D0C4"/>
+                </a:solidFill>
+                <a:latin typeface="Menlo"/>
+              </a:rPr>
+              <a:t>vendor_handbook.docx · “How long do refunds take and who approves large ones?” · budget 1,200</a:t>
+            </a:r>
+          </a:p>
+        </p:txBody>
+      </p:sp>
+      <p:sp>
+        <p:nvSpPr>
+          <p:cNvPr id="18" name="TextBox 17"/>
+          <p:cNvSpPr txBox="1"/>
+          <p:nvPr/>
+        </p:nvSpPr>
+        <p:spPr>
+          <a:xfrm>
+            <a:off x="914400" y="4572000"/>
+            <a:ext cx="10241280" cy="274320"/>
+          </a:xfrm>
+          <a:prstGeom prst="rect">
+            <a:avLst/>
+          </a:prstGeom>
+          <a:noFill/>
+        </p:spPr>
+        <p:txBody>
+          <a:bodyPr wrap="square" anchor="t"/>
+          <a:lstStyle/>
+          <a:p>
+            <a:pPr algn="l">
+              <a:spcBef>
+                <a:spcPts val="0"/>
+              </a:spcBef>
+              <a:spcAft>
+                <a:spcPts val="0"/>
+              </a:spcAft>
+            </a:pPr>
+            <a:r>
+              <a:rPr sz="1300" b="1">
+                <a:cs typeface="Helvetica"/>
+                <a:ea typeface="Helvetica"/>
+                <a:solidFill>
+                  <a:srgbClr val="E8F0EB"/>
+                </a:solidFill>
+                <a:latin typeface="Helvetica"/>
+              </a:rPr>
+              <a:t>Whole file — 20,364 tokens</a:t>
+            </a:r>
+          </a:p>
+        </p:txBody>
+      </p:sp>
+      <p:sp>
+        <p:nvSpPr>
+          <p:cNvPr id="19" name="Rectangle 18"/>
+          <p:cNvSpPr/>
+          <p:nvPr/>
+        </p:nvSpPr>
+        <p:spPr>
+          <a:xfrm>
+            <a:off x="914400" y="4892040"/>
+            <a:ext cx="9875520" cy="146304"/>
+          </a:xfrm>
+          <a:prstGeom prst="rect">
+            <a:avLst/>
+          </a:prstGeom>
+          <a:solidFill>
+            <a:srgbClr val="2A4A3A"/>
+          </a:solidFill>
+          <a:ln>
+            <a:noFill/>
+          </a:ln>
+        </p:spPr>
+        <p:style>
+          <a:lnRef idx="1">
+            <a:schemeClr val="accent1"/>
+          </a:lnRef>
+          <a:fillRef idx="3">
+            <a:schemeClr val="accent1"/>
+          </a:fillRef>
+          <a:effectRef idx="2">
+            <a:schemeClr val="accent1"/>
+          </a:effectRef>
+          <a:fontRef idx="minor">
+            <a:schemeClr val="lt1"/>
+          </a:fontRef>
+        </p:style>
+        <p:txBody>
+          <a:bodyPr rtlCol="0" anchor="ctr"/>
+          <a:lstStyle/>
+          <a:p>
+            <a:pPr algn="ctr"/>
+          </a:p>
+        </p:txBody>
+      </p:sp>
+      <p:sp>
+        <p:nvSpPr>
+          <p:cNvPr id="20" name="Rectangle 19"/>
+          <p:cNvSpPr/>
+          <p:nvPr/>
+        </p:nvSpPr>
+        <p:spPr>
+          <a:xfrm>
+            <a:off x="914400" y="4892040"/>
+            <a:ext cx="9875520" cy="146304"/>
+          </a:xfrm>
+          <a:prstGeom prst="rect">
+            <a:avLst/>
+          </a:prstGeom>
+          <a:solidFill>
+            <a:srgbClr val="9AAB9F"/>
+          </a:solidFill>
+          <a:ln>
+            <a:noFill/>
+          </a:ln>
+        </p:spPr>
+        <p:style>
+          <a:lnRef idx="1">
+            <a:schemeClr val="accent1"/>
+          </a:lnRef>
+          <a:fillRef idx="3">
+            <a:schemeClr val="accent1"/>
+          </a:fillRef>
+          <a:effectRef idx="2">
+            <a:schemeClr val="accent1"/>
+          </a:effectRef>
+          <a:fontRef idx="minor">
+            <a:schemeClr val="lt1"/>
+          </a:fontRef>
+        </p:style>
+        <p:txBody>
+          <a:bodyPr rtlCol="0" anchor="ctr"/>
+          <a:lstStyle/>
+          <a:p>
+            <a:pPr algn="ctr"/>
+          </a:p>
+        </p:txBody>
+      </p:sp>
+      <p:sp>
+        <p:nvSpPr>
+          <p:cNvPr id="21" name="TextBox 20"/>
+          <p:cNvSpPr txBox="1"/>
+          <p:nvPr/>
+        </p:nvSpPr>
+        <p:spPr>
+          <a:xfrm>
+            <a:off x="914400" y="5212080"/>
+            <a:ext cx="10241280" cy="274320"/>
+          </a:xfrm>
+          <a:prstGeom prst="rect">
+            <a:avLst/>
+          </a:prstGeom>
+          <a:noFill/>
+        </p:spPr>
+        <p:txBody>
+          <a:bodyPr wrap="square" anchor="t"/>
+          <a:lstStyle/>
+          <a:p>
+            <a:pPr algn="l">
+              <a:spcBef>
+                <a:spcPts val="0"/>
+              </a:spcBef>
+              <a:spcAft>
+                <a:spcPts val="0"/>
+              </a:spcAft>
+            </a:pPr>
+            <a:r>
+              <a:rPr sz="1300" b="1">
+                <a:cs typeface="Helvetica"/>
+                <a:ea typeface="Helvetica"/>
+                <a:solidFill>
+                  <a:srgbClr val="E8F0EB"/>
+                </a:solidFill>
+                <a:latin typeface="Helvetica"/>
+              </a:rPr>
+              <a:t>Compiled — 591 tokens · answer intact · verified by test suite + recall eval + MCP run</a:t>
+            </a:r>
+          </a:p>
+        </p:txBody>
+      </p:sp>
+      <p:sp>
+        <p:nvSpPr>
+          <p:cNvPr id="22" name="Rectangle 21"/>
+          <p:cNvSpPr/>
+          <p:nvPr/>
+        </p:nvSpPr>
+        <p:spPr>
+          <a:xfrm>
+            <a:off x="914400" y="5532120"/>
+            <a:ext cx="9875520" cy="146304"/>
+          </a:xfrm>
+          <a:prstGeom prst="rect">
+            <a:avLst/>
+          </a:prstGeom>
+          <a:solidFill>
+            <a:srgbClr val="2A4A3A"/>
+          </a:solidFill>
+          <a:ln>
+            <a:noFill/>
+          </a:ln>
+        </p:spPr>
+        <p:style>
+          <a:lnRef idx="1">
+            <a:schemeClr val="accent1"/>
+          </a:lnRef>
+          <a:fillRef idx="3">
+            <a:schemeClr val="accent1"/>
+          </a:fillRef>
+          <a:effectRef idx="2">
+            <a:schemeClr val="accent1"/>
+          </a:effectRef>
+          <a:fontRef idx="minor">
+            <a:schemeClr val="lt1"/>
+          </a:fontRef>
+        </p:style>
+        <p:txBody>
+          <a:bodyPr rtlCol="0" anchor="ctr"/>
+          <a:lstStyle/>
+          <a:p>
+            <a:pPr algn="ctr"/>
+          </a:p>
+        </p:txBody>
+      </p:sp>
+      <p:sp>
+        <p:nvSpPr>
+          <p:cNvPr id="23" name="Rectangle 22"/>
+          <p:cNvSpPr/>
+          <p:nvPr/>
+        </p:nvSpPr>
+        <p:spPr>
+          <a:xfrm>
+            <a:off x="914400" y="5532120"/>
+            <a:ext cx="320040" cy="146304"/>
+          </a:xfrm>
+          <a:prstGeom prst="rect">
+            <a:avLst/>
+          </a:prstGeom>
+          <a:solidFill>
+            <a:srgbClr val="8FCEB0"/>
+          </a:solidFill>
+          <a:ln>
+            <a:noFill/>
+          </a:ln>
+        </p:spPr>
+        <p:style>
+          <a:lnRef idx="1">
+            <a:schemeClr val="accent1"/>
+          </a:lnRef>
+          <a:fillRef idx="3">
+            <a:schemeClr val="accent1"/>
+          </a:fillRef>
+          <a:effectRef idx="2">
+            <a:schemeClr val="accent1"/>
+          </a:effectRef>
+          <a:fontRef idx="minor">
+            <a:schemeClr val="lt1"/>
+          </a:fontRef>
+        </p:style>
+        <p:txBody>
+          <a:bodyPr rtlCol="0" anchor="ctr"/>
+          <a:lstStyle/>
+          <a:p>
+            <a:pPr algn="ctr"/>
           </a:p>
         </p:txBody>
       </p:sp>
@@ -6633,14 +7756,6 @@
 <file path=ppt/slides/slide6.xml><?xml version="1.0" encoding="utf-8"?>
 <p:sld xmlns:a="http://schemas.openxmlformats.org/drawingml/2006/main" xmlns:p="http://schemas.openxmlformats.org/presentationml/2006/main" xmlns:r="http://schemas.openxmlformats.org/officeDocument/2006/relationships">
   <p:cSld>
-    <p:bg>
-      <p:bgPr>
-        <a:solidFill>
-          <a:srgbClr val="0F1117"/>
-        </a:solidFill>
-        <a:effectLst/>
-      </p:bgPr>
-    </p:bg>
     <p:spTree>
       <p:nvGrpSpPr>
         <p:cNvPr id="1" name=""/>
@@ -6650,56 +7765,20 @@
       <p:grpSpPr/>
       <p:sp>
         <p:nvSpPr>
-          <p:cNvPr id="2" name="Text 0"/>
-          <p:cNvSpPr txBox="1"/>
-          <p:nvPr/>
-        </p:nvSpPr>
-        <p:spPr>
-          <a:xfrm>
-            <a:off x="548640" y="457200"/>
-            <a:ext cx="11064240" cy="640080"/>
-          </a:xfrm>
-          <a:prstGeom prst="rect">
-            <a:avLst/>
-          </a:prstGeom>
-          <a:noFill/>
-        </p:spPr>
-        <p:txBody>
-          <a:bodyPr wrap="square">
-            <a:spAutoFit/>
-          </a:bodyPr>
-          <a:lstStyle/>
-          <a:p>
-            <a:r>
-              <a:rPr sz="3200" b="1">
-                <a:solidFill>
-                  <a:srgbClr val="E8EAF0"/>
-                </a:solidFill>
-                <a:latin typeface="Calibri"/>
-              </a:rPr>
-              <a:t>What's next</a:t>
-            </a:r>
-          </a:p>
-        </p:txBody>
-      </p:sp>
-      <p:sp>
-        <p:nvSpPr>
-          <p:cNvPr id="3" name="Shape"/>
+          <p:cNvPr id="2" name="Rectangle 1"/>
           <p:cNvSpPr/>
           <p:nvPr/>
         </p:nvSpPr>
         <p:spPr>
           <a:xfrm>
-            <a:off x="640080" y="1554480"/>
-            <a:ext cx="457200" cy="457200"/>
-          </a:xfrm>
-          <a:prstGeom prst="roundRect">
-            <a:avLst>
-              <a:gd name="adj" fmla="val 20000"/>
-            </a:avLst>
+            <a:off x="0" y="0"/>
+            <a:ext cx="12191695" cy="6858000"/>
+          </a:xfrm>
+          <a:prstGeom prst="rect">
+            <a:avLst/>
           </a:prstGeom>
           <a:solidFill>
-            <a:srgbClr val="6EA8FE"/>
+            <a:srgbClr val="E8ECE9"/>
           </a:solidFill>
           <a:ln>
             <a:noFill/>
@@ -6727,40 +7806,16 @@
           </a:p>
         </p:txBody>
       </p:sp>
-      <p:pic>
-        <p:nvPicPr>
-          <p:cNvPr id="4" name="Picture 3" descr="icon_5_df420960.png"/>
-          <p:cNvPicPr>
-            <a:picLocks noChangeAspect="1"/>
-          </p:cNvPicPr>
-          <p:nvPr/>
-        </p:nvPicPr>
-        <p:blipFill>
-          <a:blip r:embed="rId2"/>
-          <a:stretch>
-            <a:fillRect/>
-          </a:stretch>
-        </p:blipFill>
-        <p:spPr>
-          <a:xfrm>
-            <a:off x="749808" y="1664208"/>
-            <a:ext cx="237744" cy="237744"/>
-          </a:xfrm>
-          <a:prstGeom prst="rect">
-            <a:avLst/>
-          </a:prstGeom>
-        </p:spPr>
-      </p:pic>
-      <p:sp>
-        <p:nvSpPr>
-          <p:cNvPr id="5" name="Text"/>
+      <p:sp>
+        <p:nvSpPr>
+          <p:cNvPr id="3" name="TextBox 2"/>
           <p:cNvSpPr txBox="1"/>
           <p:nvPr/>
         </p:nvSpPr>
         <p:spPr>
           <a:xfrm>
-            <a:off x="1371600" y="1508760"/>
-            <a:ext cx="5303520" cy="320040"/>
+            <a:off x="640080" y="411480"/>
+            <a:ext cx="10972800" cy="640080"/>
           </a:xfrm>
           <a:prstGeom prst="rect">
             <a:avLst/>
@@ -6768,75 +7823,47 @@
           <a:noFill/>
         </p:spPr>
         <p:txBody>
-          <a:bodyPr wrap="square">
-            <a:spAutoFit/>
-          </a:bodyPr>
-          <a:lstStyle/>
-          <a:p>
-            <a:r>
-              <a:rPr sz="1500" b="1">
-                <a:solidFill>
-                  <a:srgbClr val="E8EAF0"/>
-                </a:solidFill>
-                <a:latin typeface="Calibri"/>
+          <a:bodyPr wrap="square" anchor="t"/>
+          <a:lstStyle/>
+          <a:p>
+            <a:pPr algn="l">
+              <a:spcBef>
+                <a:spcPts val="0"/>
+              </a:spcBef>
+              <a:spcAft>
+                <a:spcPts val="0"/>
+              </a:spcAft>
+            </a:pPr>
+            <a:r>
+              <a:rPr sz="2800" b="1">
+                <a:cs typeface="Georgia"/>
+                <a:ea typeface="Georgia"/>
+                <a:solidFill>
+                  <a:srgbClr val="1A221E"/>
+                </a:solidFill>
+                <a:latin typeface="Georgia"/>
               </a:rPr>
-              <a:t>Local embeddings</a:t>
-            </a:r>
-          </a:p>
-        </p:txBody>
-      </p:sp>
-      <p:sp>
-        <p:nvSpPr>
-          <p:cNvPr id="6" name="Text"/>
-          <p:cNvSpPr txBox="1"/>
-          <p:nvPr/>
-        </p:nvSpPr>
-        <p:spPr>
-          <a:xfrm>
-            <a:off x="1371600" y="1847088"/>
-            <a:ext cx="5303520" cy="548640"/>
-          </a:xfrm>
-          <a:prstGeom prst="rect">
-            <a:avLst/>
-          </a:prstGeom>
-          <a:noFill/>
-        </p:spPr>
-        <p:txBody>
-          <a:bodyPr wrap="square">
-            <a:spAutoFit/>
-          </a:bodyPr>
-          <a:lstStyle/>
-          <a:p>
-            <a:r>
-              <a:rPr sz="1200" b="0">
-                <a:solidFill>
-                  <a:srgbClr val="9AA0B0"/>
-                </a:solidFill>
-                <a:latin typeface="Calibri"/>
-              </a:rPr>
-              <a:t>Query cleanup + offline recall eval shipped; local embeddings next for paraphrase</a:t>
-            </a:r>
-          </a:p>
-        </p:txBody>
-      </p:sp>
-      <p:sp>
-        <p:nvSpPr>
-          <p:cNvPr id="7" name="Shape"/>
+              <a:t>What’s next</a:t>
+            </a:r>
+          </a:p>
+        </p:txBody>
+      </p:sp>
+      <p:sp>
+        <p:nvSpPr>
+          <p:cNvPr id="4" name="Rectangle 3"/>
           <p:cNvSpPr/>
           <p:nvPr/>
         </p:nvSpPr>
         <p:spPr>
           <a:xfrm>
-            <a:off x="640080" y="2697480"/>
-            <a:ext cx="457200" cy="457200"/>
-          </a:xfrm>
-          <a:prstGeom prst="roundRect">
-            <a:avLst>
-              <a:gd name="adj" fmla="val 20000"/>
-            </a:avLst>
+            <a:off x="640080" y="1234440"/>
+            <a:ext cx="73152" cy="822960"/>
+          </a:xfrm>
+          <a:prstGeom prst="rect">
+            <a:avLst/>
           </a:prstGeom>
           <a:solidFill>
-            <a:srgbClr val="4ADE80"/>
+            <a:srgbClr val="1F5C42"/>
           </a:solidFill>
           <a:ln>
             <a:noFill/>
@@ -6864,40 +7891,16 @@
           </a:p>
         </p:txBody>
       </p:sp>
-      <p:pic>
-        <p:nvPicPr>
-          <p:cNvPr id="8" name="Picture 7" descr="icon_5_4a4f87c8.png"/>
-          <p:cNvPicPr>
-            <a:picLocks noChangeAspect="1"/>
-          </p:cNvPicPr>
-          <p:nvPr/>
-        </p:nvPicPr>
-        <p:blipFill>
-          <a:blip r:embed="rId3"/>
-          <a:stretch>
-            <a:fillRect/>
-          </a:stretch>
-        </p:blipFill>
-        <p:spPr>
-          <a:xfrm>
-            <a:off x="749808" y="2807208"/>
-            <a:ext cx="237744" cy="237744"/>
-          </a:xfrm>
-          <a:prstGeom prst="rect">
-            <a:avLst/>
-          </a:prstGeom>
-        </p:spPr>
-      </p:pic>
-      <p:sp>
-        <p:nvSpPr>
-          <p:cNvPr id="9" name="Text"/>
+      <p:sp>
+        <p:nvSpPr>
+          <p:cNvPr id="5" name="TextBox 4"/>
           <p:cNvSpPr txBox="1"/>
           <p:nvPr/>
         </p:nvSpPr>
         <p:spPr>
           <a:xfrm>
-            <a:off x="1371600" y="2651760"/>
-            <a:ext cx="5303520" cy="320040"/>
+            <a:off x="960120" y="1234440"/>
+            <a:ext cx="5760720" cy="320040"/>
           </a:xfrm>
           <a:prstGeom prst="rect">
             <a:avLst/>
@@ -6905,33 +7908,41 @@
           <a:noFill/>
         </p:spPr>
         <p:txBody>
-          <a:bodyPr wrap="square">
-            <a:spAutoFit/>
-          </a:bodyPr>
-          <a:lstStyle/>
-          <a:p>
-            <a:r>
-              <a:rPr sz="1500" b="1">
-                <a:solidFill>
-                  <a:srgbClr val="E8EAF0"/>
-                </a:solidFill>
-                <a:latin typeface="Calibri"/>
+          <a:bodyPr wrap="square" anchor="t"/>
+          <a:lstStyle/>
+          <a:p>
+            <a:pPr algn="l">
+              <a:spcBef>
+                <a:spcPts val="0"/>
+              </a:spcBef>
+              <a:spcAft>
+                <a:spcPts val="0"/>
+              </a:spcAft>
+            </a:pPr>
+            <a:r>
+              <a:rPr sz="1600" b="1">
+                <a:cs typeface="Helvetica"/>
+                <a:ea typeface="Helvetica"/>
+                <a:solidFill>
+                  <a:srgbClr val="1A221E"/>
+                </a:solidFill>
+                <a:latin typeface="Helvetica"/>
               </a:rPr>
-              <a:t>Multi-file corpora</a:t>
-            </a:r>
-          </a:p>
-        </p:txBody>
-      </p:sp>
-      <p:sp>
-        <p:nvSpPr>
-          <p:cNvPr id="10" name="Text"/>
+              <a:t>Local embeddings</a:t>
+            </a:r>
+          </a:p>
+        </p:txBody>
+      </p:sp>
+      <p:sp>
+        <p:nvSpPr>
+          <p:cNvPr id="6" name="TextBox 5"/>
           <p:cNvSpPr txBox="1"/>
           <p:nvPr/>
         </p:nvSpPr>
         <p:spPr>
           <a:xfrm>
-            <a:off x="1371600" y="2990088"/>
-            <a:ext cx="5303520" cy="548640"/>
+            <a:off x="960120" y="1554480"/>
+            <a:ext cx="5760720" cy="502920"/>
           </a:xfrm>
           <a:prstGeom prst="rect">
             <a:avLst/>
@@ -6939,41 +7950,47 @@
           <a:noFill/>
         </p:spPr>
         <p:txBody>
-          <a:bodyPr wrap="square">
-            <a:spAutoFit/>
-          </a:bodyPr>
-          <a:lstStyle/>
-          <a:p>
-            <a:r>
-              <a:rPr sz="1200" b="0">
-                <a:solidFill>
-                  <a:srgbClr val="9AA0B0"/>
-                </a:solidFill>
-                <a:latin typeface="Calibri"/>
+          <a:bodyPr wrap="square" anchor="t"/>
+          <a:lstStyle/>
+          <a:p>
+            <a:pPr algn="l">
+              <a:spcBef>
+                <a:spcPts val="0"/>
+              </a:spcBef>
+              <a:spcAft>
+                <a:spcPts val="0"/>
+              </a:spcAft>
+            </a:pPr>
+            <a:r>
+              <a:rPr sz="1300" b="0">
+                <a:cs typeface="Helvetica"/>
+                <a:ea typeface="Helvetica"/>
+                <a:solidFill>
+                  <a:srgbClr val="4A5850"/>
+                </a:solidFill>
+                <a:latin typeface="Helvetica"/>
               </a:rPr>
-              <a:t>Compile across folders; shared conversion-cache gateway for teams</a:t>
-            </a:r>
-          </a:p>
-        </p:txBody>
-      </p:sp>
-      <p:sp>
-        <p:nvSpPr>
-          <p:cNvPr id="11" name="Shape"/>
+              <a:t>Query cleanup + offline recall eval shipped; local embeddings next for paraphrase.</a:t>
+            </a:r>
+          </a:p>
+        </p:txBody>
+      </p:sp>
+      <p:sp>
+        <p:nvSpPr>
+          <p:cNvPr id="7" name="Rectangle 6"/>
           <p:cNvSpPr/>
           <p:nvPr/>
         </p:nvSpPr>
         <p:spPr>
           <a:xfrm>
-            <a:off x="640080" y="3840480"/>
-            <a:ext cx="457200" cy="457200"/>
-          </a:xfrm>
-          <a:prstGeom prst="roundRect">
-            <a:avLst>
-              <a:gd name="adj" fmla="val 20000"/>
-            </a:avLst>
+            <a:off x="640080" y="2286000"/>
+            <a:ext cx="73152" cy="822960"/>
+          </a:xfrm>
+          <a:prstGeom prst="rect">
+            <a:avLst/>
           </a:prstGeom>
           <a:solidFill>
-            <a:srgbClr val="F87171"/>
+            <a:srgbClr val="1F5C42"/>
           </a:solidFill>
           <a:ln>
             <a:noFill/>
@@ -7001,40 +8018,16 @@
           </a:p>
         </p:txBody>
       </p:sp>
-      <p:pic>
-        <p:nvPicPr>
-          <p:cNvPr id="12" name="Picture 11" descr="icon_5_7806adbc.png"/>
-          <p:cNvPicPr>
-            <a:picLocks noChangeAspect="1"/>
-          </p:cNvPicPr>
-          <p:nvPr/>
-        </p:nvPicPr>
-        <p:blipFill>
-          <a:blip r:embed="rId4"/>
-          <a:stretch>
-            <a:fillRect/>
-          </a:stretch>
-        </p:blipFill>
-        <p:spPr>
-          <a:xfrm>
-            <a:off x="749808" y="3950208"/>
-            <a:ext cx="237744" cy="237744"/>
-          </a:xfrm>
-          <a:prstGeom prst="rect">
-            <a:avLst/>
-          </a:prstGeom>
-        </p:spPr>
-      </p:pic>
-      <p:sp>
-        <p:nvSpPr>
-          <p:cNvPr id="13" name="Text"/>
+      <p:sp>
+        <p:nvSpPr>
+          <p:cNvPr id="8" name="TextBox 7"/>
           <p:cNvSpPr txBox="1"/>
           <p:nvPr/>
         </p:nvSpPr>
         <p:spPr>
           <a:xfrm>
-            <a:off x="1371600" y="3794760"/>
-            <a:ext cx="5303520" cy="320040"/>
+            <a:off x="960120" y="2286000"/>
+            <a:ext cx="5760720" cy="320040"/>
           </a:xfrm>
           <a:prstGeom prst="rect">
             <a:avLst/>
@@ -7042,33 +8035,41 @@
           <a:noFill/>
         </p:spPr>
         <p:txBody>
-          <a:bodyPr wrap="square">
-            <a:spAutoFit/>
-          </a:bodyPr>
-          <a:lstStyle/>
-          <a:p>
-            <a:r>
-              <a:rPr sz="1500" b="1">
-                <a:solidFill>
-                  <a:srgbClr val="E8EAF0"/>
-                </a:solidFill>
-                <a:latin typeface="Calibri"/>
+          <a:bodyPr wrap="square" anchor="t"/>
+          <a:lstStyle/>
+          <a:p>
+            <a:pPr algn="l">
+              <a:spcBef>
+                <a:spcPts val="0"/>
+              </a:spcBef>
+              <a:spcAft>
+                <a:spcPts val="0"/>
+              </a:spcAft>
+            </a:pPr>
+            <a:r>
+              <a:rPr sz="1600" b="1">
+                <a:cs typeface="Helvetica"/>
+                <a:ea typeface="Helvetica"/>
+                <a:solidFill>
+                  <a:srgbClr val="1A221E"/>
+                </a:solidFill>
+                <a:latin typeface="Helvetica"/>
               </a:rPr>
-              <a:t>Video &amp; audio</a:t>
-            </a:r>
-          </a:p>
-        </p:txBody>
-      </p:sp>
-      <p:sp>
-        <p:nvSpPr>
-          <p:cNvPr id="14" name="Text"/>
+              <a:t>Multi-file corpora</a:t>
+            </a:r>
+          </a:p>
+        </p:txBody>
+      </p:sp>
+      <p:sp>
+        <p:nvSpPr>
+          <p:cNvPr id="9" name="TextBox 8"/>
           <p:cNvSpPr txBox="1"/>
           <p:nvPr/>
         </p:nvSpPr>
         <p:spPr>
           <a:xfrm>
-            <a:off x="1371600" y="4133088"/>
-            <a:ext cx="5303520" cy="548640"/>
+            <a:off x="960120" y="2606040"/>
+            <a:ext cx="5760720" cy="502920"/>
           </a:xfrm>
           <a:prstGeom prst="rect">
             <a:avLst/>
@@ -7076,41 +8077,47 @@
           <a:noFill/>
         </p:spPr>
         <p:txBody>
-          <a:bodyPr wrap="square">
-            <a:spAutoFit/>
-          </a:bodyPr>
-          <a:lstStyle/>
-          <a:p>
-            <a:r>
-              <a:rPr sz="1200" b="0">
-                <a:solidFill>
-                  <a:srgbClr val="9AA0B0"/>
-                </a:solidFill>
-                <a:latin typeface="Calibri"/>
+          <a:bodyPr wrap="square" anchor="t"/>
+          <a:lstStyle/>
+          <a:p>
+            <a:pPr algn="l">
+              <a:spcBef>
+                <a:spcPts val="0"/>
+              </a:spcBef>
+              <a:spcAft>
+                <a:spcPts val="0"/>
+              </a:spcAft>
+            </a:pPr>
+            <a:r>
+              <a:rPr sz="1300" b="0">
+                <a:cs typeface="Helvetica"/>
+                <a:ea typeface="Helvetica"/>
+                <a:solidFill>
+                  <a:srgbClr val="4A5850"/>
+                </a:solidFill>
+                <a:latin typeface="Helvetica"/>
               </a:rPr>
-              <a:t>Transcription into the same pipeline (deliberately cut for scope, not feasibility)</a:t>
-            </a:r>
-          </a:p>
-        </p:txBody>
-      </p:sp>
-      <p:sp>
-        <p:nvSpPr>
-          <p:cNvPr id="15" name="Shape"/>
+              <a:t>Compile across folders; shared conversion-cache gateway for teams.</a:t>
+            </a:r>
+          </a:p>
+        </p:txBody>
+      </p:sp>
+      <p:sp>
+        <p:nvSpPr>
+          <p:cNvPr id="10" name="Rectangle 9"/>
           <p:cNvSpPr/>
           <p:nvPr/>
         </p:nvSpPr>
         <p:spPr>
           <a:xfrm>
-            <a:off x="640080" y="4983480"/>
-            <a:ext cx="457200" cy="457200"/>
-          </a:xfrm>
-          <a:prstGeom prst="roundRect">
-            <a:avLst>
-              <a:gd name="adj" fmla="val 20000"/>
-            </a:avLst>
+            <a:off x="640080" y="3337560"/>
+            <a:ext cx="73152" cy="822960"/>
+          </a:xfrm>
+          <a:prstGeom prst="rect">
+            <a:avLst/>
           </a:prstGeom>
           <a:solidFill>
-            <a:srgbClr val="6EA8FE"/>
+            <a:srgbClr val="1F5C42"/>
           </a:solidFill>
           <a:ln>
             <a:noFill/>
@@ -7138,40 +8145,16 @@
           </a:p>
         </p:txBody>
       </p:sp>
-      <p:pic>
-        <p:nvPicPr>
-          <p:cNvPr id="16" name="Picture 15" descr="icon_5_1c2abdd2.png"/>
-          <p:cNvPicPr>
-            <a:picLocks noChangeAspect="1"/>
-          </p:cNvPicPr>
-          <p:nvPr/>
-        </p:nvPicPr>
-        <p:blipFill>
-          <a:blip r:embed="rId5"/>
-          <a:stretch>
-            <a:fillRect/>
-          </a:stretch>
-        </p:blipFill>
-        <p:spPr>
-          <a:xfrm>
-            <a:off x="749808" y="5093208"/>
-            <a:ext cx="237744" cy="237744"/>
-          </a:xfrm>
-          <a:prstGeom prst="rect">
-            <a:avLst/>
-          </a:prstGeom>
-        </p:spPr>
-      </p:pic>
-      <p:sp>
-        <p:nvSpPr>
-          <p:cNvPr id="17" name="Text"/>
+      <p:sp>
+        <p:nvSpPr>
+          <p:cNvPr id="11" name="TextBox 10"/>
           <p:cNvSpPr txBox="1"/>
           <p:nvPr/>
         </p:nvSpPr>
         <p:spPr>
           <a:xfrm>
-            <a:off x="1371600" y="4937760"/>
-            <a:ext cx="5303520" cy="320040"/>
+            <a:off x="960120" y="3337560"/>
+            <a:ext cx="5760720" cy="320040"/>
           </a:xfrm>
           <a:prstGeom prst="rect">
             <a:avLst/>
@@ -7179,33 +8162,41 @@
           <a:noFill/>
         </p:spPr>
         <p:txBody>
-          <a:bodyPr wrap="square">
-            <a:spAutoFit/>
-          </a:bodyPr>
-          <a:lstStyle/>
-          <a:p>
-            <a:r>
-              <a:rPr sz="1500" b="1">
-                <a:solidFill>
-                  <a:srgbClr val="E8EAF0"/>
-                </a:solidFill>
-                <a:latin typeface="Calibri"/>
+          <a:bodyPr wrap="square" anchor="t"/>
+          <a:lstStyle/>
+          <a:p>
+            <a:pPr algn="l">
+              <a:spcBef>
+                <a:spcPts val="0"/>
+              </a:spcBef>
+              <a:spcAft>
+                <a:spcPts val="0"/>
+              </a:spcAft>
+            </a:pPr>
+            <a:r>
+              <a:rPr sz="1600" b="1">
+                <a:cs typeface="Helvetica"/>
+                <a:ea typeface="Helvetica"/>
+                <a:solidFill>
+                  <a:srgbClr val="1A221E"/>
+                </a:solidFill>
+                <a:latin typeface="Helvetica"/>
               </a:rPr>
-              <a:t>npx context-compiler</a:t>
-            </a:r>
-          </a:p>
-        </p:txBody>
-      </p:sp>
-      <p:sp>
-        <p:nvSpPr>
-          <p:cNvPr id="18" name="Text"/>
+              <a:t>Video &amp; audio</a:t>
+            </a:r>
+          </a:p>
+        </p:txBody>
+      </p:sp>
+      <p:sp>
+        <p:nvSpPr>
+          <p:cNvPr id="12" name="TextBox 11"/>
           <p:cNvSpPr txBox="1"/>
           <p:nvPr/>
         </p:nvSpPr>
         <p:spPr>
           <a:xfrm>
-            <a:off x="1371600" y="5276088"/>
-            <a:ext cx="5303520" cy="548640"/>
+            <a:off x="960120" y="3657600"/>
+            <a:ext cx="5760720" cy="502920"/>
           </a:xfrm>
           <a:prstGeom prst="rect">
             <a:avLst/>
@@ -7213,41 +8204,47 @@
           <a:noFill/>
         </p:spPr>
         <p:txBody>
-          <a:bodyPr wrap="square">
-            <a:spAutoFit/>
-          </a:bodyPr>
-          <a:lstStyle/>
-          <a:p>
-            <a:r>
-              <a:rPr sz="1200" b="0">
-                <a:solidFill>
-                  <a:srgbClr val="9AA0B0"/>
-                </a:solidFill>
-                <a:latin typeface="Calibri"/>
+          <a:bodyPr wrap="square" anchor="t"/>
+          <a:lstStyle/>
+          <a:p>
+            <a:pPr algn="l">
+              <a:spcBef>
+                <a:spcPts val="0"/>
+              </a:spcBef>
+              <a:spcAft>
+                <a:spcPts val="0"/>
+              </a:spcAft>
+            </a:pPr>
+            <a:r>
+              <a:rPr sz="1300" b="0">
+                <a:cs typeface="Helvetica"/>
+                <a:ea typeface="Helvetica"/>
+                <a:solidFill>
+                  <a:srgbClr val="4A5850"/>
+                </a:solidFill>
+                <a:latin typeface="Helvetica"/>
               </a:rPr>
-              <a:t>One-command install for any MCP client</a:t>
-            </a:r>
-          </a:p>
-        </p:txBody>
-      </p:sp>
-      <p:sp>
-        <p:nvSpPr>
-          <p:cNvPr id="19" name="Shape"/>
+              <a:t>Transcription into the same pipeline (cut for scope, not feasibility).</a:t>
+            </a:r>
+          </a:p>
+        </p:txBody>
+      </p:sp>
+      <p:sp>
+        <p:nvSpPr>
+          <p:cNvPr id="13" name="Rectangle 12"/>
           <p:cNvSpPr/>
           <p:nvPr/>
         </p:nvSpPr>
         <p:spPr>
           <a:xfrm>
-            <a:off x="7223760" y="1554480"/>
-            <a:ext cx="4297680" cy="4160520"/>
-          </a:xfrm>
-          <a:prstGeom prst="roundRect">
-            <a:avLst>
-              <a:gd name="adj" fmla="val 8000"/>
-            </a:avLst>
+            <a:off x="640080" y="4389120"/>
+            <a:ext cx="73152" cy="822960"/>
+          </a:xfrm>
+          <a:prstGeom prst="rect">
+            <a:avLst/>
           </a:prstGeom>
           <a:solidFill>
-            <a:srgbClr val="181B23"/>
+            <a:srgbClr val="1F5C42"/>
           </a:solidFill>
           <a:ln>
             <a:noFill/>
@@ -7277,14 +8274,14 @@
       </p:sp>
       <p:sp>
         <p:nvSpPr>
-          <p:cNvPr id="20" name="Text"/>
+          <p:cNvPr id="14" name="TextBox 13"/>
           <p:cNvSpPr txBox="1"/>
           <p:nvPr/>
         </p:nvSpPr>
         <p:spPr>
           <a:xfrm>
-            <a:off x="7498080" y="1965960"/>
-            <a:ext cx="3749040" cy="411480"/>
+            <a:off x="960120" y="4389120"/>
+            <a:ext cx="5760720" cy="320040"/>
           </a:xfrm>
           <a:prstGeom prst="rect">
             <a:avLst/>
@@ -7292,17 +8289,152 @@
           <a:noFill/>
         </p:spPr>
         <p:txBody>
-          <a:bodyPr wrap="square">
-            <a:spAutoFit/>
-          </a:bodyPr>
-          <a:lstStyle/>
-          <a:p>
-            <a:r>
-              <a:rPr sz="1800" b="1">
-                <a:solidFill>
-                  <a:srgbClr val="E8EAF0"/>
-                </a:solidFill>
-                <a:latin typeface="Calibri"/>
+          <a:bodyPr wrap="square" anchor="t"/>
+          <a:lstStyle/>
+          <a:p>
+            <a:pPr algn="l">
+              <a:spcBef>
+                <a:spcPts val="0"/>
+              </a:spcBef>
+              <a:spcAft>
+                <a:spcPts val="0"/>
+              </a:spcAft>
+            </a:pPr>
+            <a:r>
+              <a:rPr sz="1600" b="1">
+                <a:cs typeface="Helvetica"/>
+                <a:ea typeface="Helvetica"/>
+                <a:solidFill>
+                  <a:srgbClr val="1A221E"/>
+                </a:solidFill>
+                <a:latin typeface="Helvetica"/>
+              </a:rPr>
+              <a:t>npx context-compiler</a:t>
+            </a:r>
+          </a:p>
+        </p:txBody>
+      </p:sp>
+      <p:sp>
+        <p:nvSpPr>
+          <p:cNvPr id="15" name="TextBox 14"/>
+          <p:cNvSpPr txBox="1"/>
+          <p:nvPr/>
+        </p:nvSpPr>
+        <p:spPr>
+          <a:xfrm>
+            <a:off x="960120" y="4709160"/>
+            <a:ext cx="5760720" cy="502920"/>
+          </a:xfrm>
+          <a:prstGeom prst="rect">
+            <a:avLst/>
+          </a:prstGeom>
+          <a:noFill/>
+        </p:spPr>
+        <p:txBody>
+          <a:bodyPr wrap="square" anchor="t"/>
+          <a:lstStyle/>
+          <a:p>
+            <a:pPr algn="l">
+              <a:spcBef>
+                <a:spcPts val="0"/>
+              </a:spcBef>
+              <a:spcAft>
+                <a:spcPts val="0"/>
+              </a:spcAft>
+            </a:pPr>
+            <a:r>
+              <a:rPr sz="1300" b="0">
+                <a:cs typeface="Helvetica"/>
+                <a:ea typeface="Helvetica"/>
+                <a:solidFill>
+                  <a:srgbClr val="4A5850"/>
+                </a:solidFill>
+                <a:latin typeface="Helvetica"/>
+              </a:rPr>
+              <a:t>One-command install for any MCP client.</a:t>
+            </a:r>
+          </a:p>
+        </p:txBody>
+      </p:sp>
+      <p:sp>
+        <p:nvSpPr>
+          <p:cNvPr id="16" name="Rectangle 15"/>
+          <p:cNvSpPr/>
+          <p:nvPr/>
+        </p:nvSpPr>
+        <p:spPr>
+          <a:xfrm>
+            <a:off x="7315200" y="1234440"/>
+            <a:ext cx="4206240" cy="4754880"/>
+          </a:xfrm>
+          <a:prstGeom prst="rect">
+            <a:avLst/>
+          </a:prstGeom>
+          <a:solidFill>
+            <a:srgbClr val="1F5C42"/>
+          </a:solidFill>
+          <a:ln>
+            <a:noFill/>
+          </a:ln>
+        </p:spPr>
+        <p:style>
+          <a:lnRef idx="1">
+            <a:schemeClr val="accent1"/>
+          </a:lnRef>
+          <a:fillRef idx="3">
+            <a:schemeClr val="accent1"/>
+          </a:fillRef>
+          <a:effectRef idx="2">
+            <a:schemeClr val="accent1"/>
+          </a:effectRef>
+          <a:fontRef idx="minor">
+            <a:schemeClr val="lt1"/>
+          </a:fontRef>
+        </p:style>
+        <p:txBody>
+          <a:bodyPr rtlCol="0" anchor="ctr"/>
+          <a:lstStyle/>
+          <a:p>
+            <a:pPr algn="ctr"/>
+          </a:p>
+        </p:txBody>
+      </p:sp>
+      <p:sp>
+        <p:nvSpPr>
+          <p:cNvPr id="17" name="TextBox 16"/>
+          <p:cNvSpPr txBox="1"/>
+          <p:nvPr/>
+        </p:nvSpPr>
+        <p:spPr>
+          <a:xfrm>
+            <a:off x="7635240" y="1600200"/>
+            <a:ext cx="3657600" cy="411480"/>
+          </a:xfrm>
+          <a:prstGeom prst="rect">
+            <a:avLst/>
+          </a:prstGeom>
+          <a:noFill/>
+        </p:spPr>
+        <p:txBody>
+          <a:bodyPr wrap="square" anchor="t"/>
+          <a:lstStyle/>
+          <a:p>
+            <a:pPr algn="l">
+              <a:spcBef>
+                <a:spcPts val="0"/>
+              </a:spcBef>
+              <a:spcAft>
+                <a:spcPts val="0"/>
+              </a:spcAft>
+            </a:pPr>
+            <a:r>
+              <a:rPr sz="2200" b="1">
+                <a:cs typeface="Georgia"/>
+                <a:ea typeface="Georgia"/>
+                <a:solidFill>
+                  <a:srgbClr val="E8F0EB"/>
+                </a:solidFill>
+                <a:latin typeface="Georgia"/>
               </a:rPr>
               <a:t>Try it live</a:t>
             </a:r>
@@ -7311,14 +8443,14 @@
       </p:sp>
       <p:sp>
         <p:nvSpPr>
-          <p:cNvPr id="21" name="Text"/>
+          <p:cNvPr id="18" name="TextBox 17"/>
           <p:cNvSpPr txBox="1"/>
           <p:nvPr/>
         </p:nvSpPr>
         <p:spPr>
           <a:xfrm>
-            <a:off x="7498080" y="2514600"/>
-            <a:ext cx="3749040" cy="914400"/>
+            <a:off x="7635240" y="2194560"/>
+            <a:ext cx="3657600" cy="1097280"/>
           </a:xfrm>
           <a:prstGeom prst="rect">
             <a:avLst/>
@@ -7326,44 +8458,43 @@
           <a:noFill/>
         </p:spPr>
         <p:txBody>
-          <a:bodyPr wrap="square">
-            <a:spAutoFit/>
-          </a:bodyPr>
-          <a:lstStyle/>
-          <a:p>
+          <a:bodyPr wrap="square" anchor="t"/>
+          <a:lstStyle/>
+          <a:p>
+            <a:pPr algn="l">
+              <a:spcBef>
+                <a:spcPts val="0"/>
+              </a:spcBef>
+              <a:spcAft>
+                <a:spcPts val="0"/>
+              </a:spcAft>
+            </a:pPr>
             <a:r>
               <a:rPr sz="1200" b="0">
-                <a:solidFill>
-                  <a:srgbClr val="6EA8FE"/>
-                </a:solidFill>
-                <a:latin typeface="Courier New"/>
+                <a:cs typeface="Menlo"/>
+                <a:ea typeface="Menlo"/>
+                <a:solidFill>
+                  <a:srgbClr val="B8D0C4"/>
+                </a:solidFill>
+                <a:latin typeface="Menlo"/>
               </a:rPr>
-              <a:t>demo:  Docker / Render deploy of this repo</a:t>
-            </a:r>
-          </a:p>
-          <a:p>
-            <a:r>
-              <a:rPr sz="1200" b="0">
-                <a:solidFill>
-                  <a:srgbClr val="6EA8FE"/>
-                </a:solidFill>
-                <a:latin typeface="Courier New"/>
-              </a:rPr>
-              <a:t>repo:  github.com/shenba1712/context-compiler</a:t>
-            </a:r>
-          </a:p>
-        </p:txBody>
-      </p:sp>
-      <p:sp>
-        <p:nvSpPr>
-          <p:cNvPr id="22" name="Text"/>
+              <a:t>demo:  context-compiler.onrender.com
+       Docker / Render deploy of this repo
+repo:  github.com/shenba1712/context-compiler</a:t>
+            </a:r>
+          </a:p>
+        </p:txBody>
+      </p:sp>
+      <p:sp>
+        <p:nvSpPr>
+          <p:cNvPr id="19" name="TextBox 18"/>
           <p:cNvSpPr txBox="1"/>
           <p:nvPr/>
         </p:nvSpPr>
         <p:spPr>
           <a:xfrm>
-            <a:off x="7498080" y="3703320"/>
-            <a:ext cx="3749040" cy="822960"/>
+            <a:off x="7635240" y="3520440"/>
+            <a:ext cx="3657600" cy="1097280"/>
           </a:xfrm>
           <a:prstGeom prst="rect">
             <a:avLst/>
@@ -7371,17 +8502,25 @@
           <a:noFill/>
         </p:spPr>
         <p:txBody>
-          <a:bodyPr wrap="square">
-            <a:spAutoFit/>
-          </a:bodyPr>
-          <a:lstStyle/>
-          <a:p>
-            <a:r>
-              <a:rPr sz="1300" b="0">
-                <a:solidFill>
-                  <a:srgbClr val="9AA0B0"/>
-                </a:solidFill>
-                <a:latin typeface="Calibri"/>
+          <a:bodyPr wrap="square" anchor="t"/>
+          <a:lstStyle/>
+          <a:p>
+            <a:pPr algn="l">
+              <a:spcBef>
+                <a:spcPts val="0"/>
+              </a:spcBef>
+              <a:spcAft>
+                <a:spcPts val="0"/>
+              </a:spcAft>
+            </a:pPr>
+            <a:r>
+              <a:rPr sz="1400" b="0">
+                <a:cs typeface="Helvetica"/>
+                <a:ea typeface="Helvetica"/>
+                <a:solidFill>
+                  <a:srgbClr val="E8F0EB"/>
+                </a:solidFill>
+                <a:latin typeface="Helvetica"/>
               </a:rPr>
               <a:t>Live demo + MCP in Cursor / Claude Code / Codex. Same two tools; prove answer parity on a real doc.</a:t>
             </a:r>
@@ -7390,14 +8529,14 @@
       </p:sp>
       <p:sp>
         <p:nvSpPr>
-          <p:cNvPr id="23" name="Text"/>
+          <p:cNvPr id="20" name="TextBox 19"/>
           <p:cNvSpPr txBox="1"/>
           <p:nvPr/>
         </p:nvSpPr>
         <p:spPr>
           <a:xfrm>
-            <a:off x="7498080" y="4846320"/>
-            <a:ext cx="3749040" cy="731520"/>
+            <a:off x="7635240" y="4937760"/>
+            <a:ext cx="3657600" cy="731520"/>
           </a:xfrm>
           <a:prstGeom prst="rect">
             <a:avLst/>
@@ -7405,19 +8544,27 @@
           <a:noFill/>
         </p:spPr>
         <p:txBody>
-          <a:bodyPr wrap="square">
-            <a:spAutoFit/>
-          </a:bodyPr>
-          <a:lstStyle/>
-          <a:p>
-            <a:r>
-              <a:rPr sz="1400" b="0">
-                <a:solidFill>
-                  <a:srgbClr val="4ADE80"/>
-                </a:solidFill>
-                <a:latin typeface="Calibri"/>
+          <a:bodyPr wrap="square" anchor="t"/>
+          <a:lstStyle/>
+          <a:p>
+            <a:pPr algn="l">
+              <a:spcBef>
+                <a:spcPts val="0"/>
+              </a:spcBef>
+              <a:spcAft>
+                <a:spcPts val="0"/>
+              </a:spcAft>
+            </a:pPr>
+            <a:r>
+              <a:rPr sz="1600" b="1">
+                <a:cs typeface="Helvetica"/>
+                <a:ea typeface="Helvetica"/>
+                <a:solidFill>
+                  <a:srgbClr val="8FCEB0"/>
+                </a:solidFill>
+                <a:latin typeface="Helvetica"/>
               </a:rPr>
-              <a:t>Stop paying for pages your agent doesn't read.</a:t>
+              <a:t>Stop paying for pages your agent doesn’t read.</a:t>
             </a:r>
           </a:p>
         </p:txBody>

--- a/pitch/context-compiler-pitch.pptx
+++ b/pitch/context-compiler-pitch.pptx
@@ -3138,229 +3138,14 @@
       </p:sp>
       <p:sp>
         <p:nvSpPr>
-          <p:cNvPr id="3" name="TextBox 2"/>
-          <p:cNvSpPr txBox="1"/>
-          <p:nvPr/>
-        </p:nvSpPr>
-        <p:spPr>
-          <a:xfrm>
-            <a:off x="640080" y="1691640"/>
-            <a:ext cx="6217920" cy="1005840"/>
-          </a:xfrm>
-          <a:prstGeom prst="rect">
-            <a:avLst/>
-          </a:prstGeom>
-          <a:noFill/>
-        </p:spPr>
-        <p:txBody>
-          <a:bodyPr wrap="none">
-            <a:spAutoFit/>
-          </a:bodyPr>
-          <a:lstStyle/>
-          <a:p>
-            <a:r>
-              <a:rPr sz="4400" b="1">
-                <a:cs typeface="Georgia"/>
-                <a:ea typeface="Georgia"/>
-                <a:solidFill>
-                  <a:srgbClr val="1A221E"/>
-                </a:solidFill>
-                <a:latin typeface="Georgia"/>
-              </a:rPr>
-              <a:t>Context </a:t>
-            </a:r>
-            <a:r>
-              <a:rPr sz="4400" b="1">
-                <a:cs typeface="Georgia"/>
-                <a:ea typeface="Georgia"/>
-                <a:solidFill>
-                  <a:srgbClr val="1F5C42"/>
-                </a:solidFill>
-                <a:latin typeface="Georgia"/>
-              </a:rPr>
-              <a:t>Compiler</a:t>
-            </a:r>
-          </a:p>
-        </p:txBody>
-      </p:sp>
-      <p:sp>
-        <p:nvSpPr>
-          <p:cNvPr id="4" name="TextBox 3"/>
-          <p:cNvSpPr txBox="1"/>
-          <p:nvPr/>
-        </p:nvSpPr>
-        <p:spPr>
-          <a:xfrm>
-            <a:off x="640080" y="2606040"/>
-            <a:ext cx="6217920" cy="320040"/>
-          </a:xfrm>
-          <a:prstGeom prst="rect">
-            <a:avLst/>
-          </a:prstGeom>
-          <a:noFill/>
-        </p:spPr>
-        <p:txBody>
-          <a:bodyPr wrap="square" anchor="t"/>
-          <a:lstStyle/>
-          <a:p>
-            <a:pPr algn="l">
-              <a:spcBef>
-                <a:spcPts val="0"/>
-              </a:spcBef>
-              <a:spcAft>
-                <a:spcPts val="0"/>
-              </a:spcAft>
-            </a:pPr>
-            <a:r>
-              <a:rPr sz="1100" b="0">
-                <a:cs typeface="Menlo"/>
-                <a:ea typeface="Menlo"/>
-                <a:solidFill>
-                  <a:srgbClr val="1F5C42"/>
-                </a:solidFill>
-                <a:latin typeface="Menlo"/>
-              </a:rPr>
-              <a:t>MCP · LOCAL BM25 · NO KEY FOR COMPILE</a:t>
-            </a:r>
-          </a:p>
-        </p:txBody>
-      </p:sp>
-      <p:sp>
-        <p:nvSpPr>
-          <p:cNvPr id="5" name="TextBox 4"/>
-          <p:cNvSpPr txBox="1"/>
-          <p:nvPr/>
-        </p:nvSpPr>
-        <p:spPr>
-          <a:xfrm>
-            <a:off x="640080" y="3063240"/>
-            <a:ext cx="6035040" cy="640080"/>
-          </a:xfrm>
-          <a:prstGeom prst="rect">
-            <a:avLst/>
-          </a:prstGeom>
-          <a:noFill/>
-        </p:spPr>
-        <p:txBody>
-          <a:bodyPr wrap="square" anchor="t"/>
-          <a:lstStyle/>
-          <a:p>
-            <a:pPr algn="l">
-              <a:spcBef>
-                <a:spcPts val="0"/>
-              </a:spcBef>
-              <a:spcAft>
-                <a:spcPts val="0"/>
-              </a:spcAft>
-            </a:pPr>
-            <a:r>
-              <a:rPr sz="2600" b="1">
-                <a:cs typeface="Helvetica"/>
-                <a:ea typeface="Helvetica"/>
-                <a:solidFill>
-                  <a:srgbClr val="1A221E"/>
-                </a:solidFill>
-                <a:latin typeface="Helvetica"/>
-              </a:rPr>
-              <a:t>Same answer. 3% of the tokens.</a:t>
-            </a:r>
-          </a:p>
-        </p:txBody>
-      </p:sp>
-      <p:sp>
-        <p:nvSpPr>
-          <p:cNvPr id="6" name="TextBox 5"/>
-          <p:cNvSpPr txBox="1"/>
-          <p:nvPr/>
-        </p:nvSpPr>
-        <p:spPr>
-          <a:xfrm>
-            <a:off x="640080" y="3749039"/>
-            <a:ext cx="5852160" cy="1097280"/>
-          </a:xfrm>
-          <a:prstGeom prst="rect">
-            <a:avLst/>
-          </a:prstGeom>
-          <a:noFill/>
-        </p:spPr>
-        <p:txBody>
-          <a:bodyPr wrap="square" anchor="t"/>
-          <a:lstStyle/>
-          <a:p>
-            <a:pPr algn="l">
-              <a:spcBef>
-                <a:spcPts val="0"/>
-              </a:spcBef>
-              <a:spcAft>
-                <a:spcPts val="0"/>
-              </a:spcAft>
-            </a:pPr>
-            <a:r>
-              <a:rPr sz="1500" b="0">
-                <a:cs typeface="Helvetica"/>
-                <a:ea typeface="Helvetica"/>
-                <a:solidFill>
-                  <a:srgbClr val="4A5850"/>
-                </a:solidFill>
-                <a:latin typeface="Helvetica"/>
-              </a:rPr>
-              <a:t>Task-aware compile under a hard token budget — coverage-first packing, omit honesty, MCP or the hosted web demo.</a:t>
-            </a:r>
-          </a:p>
-        </p:txBody>
-      </p:sp>
-      <p:sp>
-        <p:nvSpPr>
-          <p:cNvPr id="7" name="TextBox 6"/>
-          <p:cNvSpPr txBox="1"/>
-          <p:nvPr/>
-        </p:nvSpPr>
-        <p:spPr>
-          <a:xfrm>
-            <a:off x="640080" y="6263640"/>
-            <a:ext cx="10972800" cy="320040"/>
-          </a:xfrm>
-          <a:prstGeom prst="rect">
-            <a:avLst/>
-          </a:prstGeom>
-          <a:noFill/>
-        </p:spPr>
-        <p:txBody>
-          <a:bodyPr wrap="square" anchor="t"/>
-          <a:lstStyle/>
-          <a:p>
-            <a:pPr algn="l">
-              <a:spcBef>
-                <a:spcPts val="0"/>
-              </a:spcBef>
-              <a:spcAft>
-                <a:spcPts val="0"/>
-              </a:spcAft>
-            </a:pPr>
-            <a:r>
-              <a:rPr sz="1100" b="0">
-                <a:cs typeface="Menlo"/>
-                <a:ea typeface="Menlo"/>
-                <a:solidFill>
-                  <a:srgbClr val="5C6B62"/>
-                </a:solidFill>
-                <a:latin typeface="Menlo"/>
-              </a:rPr>
-              <a:t>OpenAI × NamasteDev Codex Hackathon · July 2026 · solo build</a:t>
-            </a:r>
-          </a:p>
-        </p:txBody>
-      </p:sp>
-      <p:sp>
-        <p:nvSpPr>
-          <p:cNvPr id="8" name="Rectangle 7"/>
+          <p:cNvPr id="3" name="Rectangle 2"/>
           <p:cNvSpPr/>
           <p:nvPr/>
         </p:nvSpPr>
         <p:spPr>
           <a:xfrm>
-            <a:off x="7360920" y="1554480"/>
-            <a:ext cx="4160520" cy="3657600"/>
+            <a:off x="0" y="0"/>
+            <a:ext cx="164592" cy="6858000"/>
           </a:xfrm>
           <a:prstGeom prst="rect">
             <a:avLst/>
@@ -3396,14 +3181,149 @@
       </p:sp>
       <p:sp>
         <p:nvSpPr>
-          <p:cNvPr id="9" name="TextBox 8"/>
+          <p:cNvPr id="4" name="Rectangle 3"/>
+          <p:cNvSpPr/>
+          <p:nvPr/>
+        </p:nvSpPr>
+        <p:spPr>
+          <a:xfrm>
+            <a:off x="594360" y="1417320"/>
+            <a:ext cx="6309360" cy="3977639"/>
+          </a:xfrm>
+          <a:prstGeom prst="rect">
+            <a:avLst/>
+          </a:prstGeom>
+          <a:solidFill>
+            <a:srgbClr val="F3F6F4"/>
+          </a:solidFill>
+          <a:ln w="12700">
+            <a:solidFill>
+              <a:srgbClr val="C8D2CB"/>
+            </a:solidFill>
+          </a:ln>
+        </p:spPr>
+        <p:style>
+          <a:lnRef idx="1">
+            <a:schemeClr val="accent1"/>
+          </a:lnRef>
+          <a:fillRef idx="3">
+            <a:schemeClr val="accent1"/>
+          </a:fillRef>
+          <a:effectRef idx="2">
+            <a:schemeClr val="accent1"/>
+          </a:effectRef>
+          <a:fontRef idx="minor">
+            <a:schemeClr val="lt1"/>
+          </a:fontRef>
+        </p:style>
+        <p:txBody>
+          <a:bodyPr rtlCol="0" anchor="ctr"/>
+          <a:lstStyle/>
+          <a:p>
+            <a:pPr algn="ctr"/>
+          </a:p>
+        </p:txBody>
+      </p:sp>
+      <p:sp>
+        <p:nvSpPr>
+          <p:cNvPr id="5" name="Rectangle 4"/>
+          <p:cNvSpPr/>
+          <p:nvPr/>
+        </p:nvSpPr>
+        <p:spPr>
+          <a:xfrm>
+            <a:off x="594360" y="1417320"/>
+            <a:ext cx="6309360" cy="73152"/>
+          </a:xfrm>
+          <a:prstGeom prst="rect">
+            <a:avLst/>
+          </a:prstGeom>
+          <a:solidFill>
+            <a:srgbClr val="1F5C42"/>
+          </a:solidFill>
+          <a:ln>
+            <a:noFill/>
+          </a:ln>
+        </p:spPr>
+        <p:style>
+          <a:lnRef idx="1">
+            <a:schemeClr val="accent1"/>
+          </a:lnRef>
+          <a:fillRef idx="3">
+            <a:schemeClr val="accent1"/>
+          </a:fillRef>
+          <a:effectRef idx="2">
+            <a:schemeClr val="accent1"/>
+          </a:effectRef>
+          <a:fontRef idx="minor">
+            <a:schemeClr val="lt1"/>
+          </a:fontRef>
+        </p:style>
+        <p:txBody>
+          <a:bodyPr rtlCol="0" anchor="ctr"/>
+          <a:lstStyle/>
+          <a:p>
+            <a:pPr algn="ctr"/>
+          </a:p>
+        </p:txBody>
+      </p:sp>
+      <p:sp>
+        <p:nvSpPr>
+          <p:cNvPr id="6" name="TextBox 5"/>
           <p:cNvSpPr txBox="1"/>
           <p:nvPr/>
         </p:nvSpPr>
         <p:spPr>
           <a:xfrm>
-            <a:off x="7635240" y="1783080"/>
-            <a:ext cx="3657600" cy="365760"/>
+            <a:off x="868680" y="1737360"/>
+            <a:ext cx="5760720" cy="914400"/>
+          </a:xfrm>
+          <a:prstGeom prst="rect">
+            <a:avLst/>
+          </a:prstGeom>
+          <a:noFill/>
+        </p:spPr>
+        <p:txBody>
+          <a:bodyPr wrap="none">
+            <a:spAutoFit/>
+          </a:bodyPr>
+          <a:lstStyle/>
+          <a:p>
+            <a:r>
+              <a:rPr sz="4200" b="1">
+                <a:cs typeface="Georgia"/>
+                <a:ea typeface="Georgia"/>
+                <a:solidFill>
+                  <a:srgbClr val="1A221E"/>
+                </a:solidFill>
+                <a:latin typeface="Georgia"/>
+              </a:rPr>
+              <a:t>Context </a:t>
+            </a:r>
+            <a:r>
+              <a:rPr sz="4200" b="1">
+                <a:cs typeface="Georgia"/>
+                <a:ea typeface="Georgia"/>
+                <a:solidFill>
+                  <a:srgbClr val="1F5C42"/>
+                </a:solidFill>
+                <a:latin typeface="Georgia"/>
+              </a:rPr>
+              <a:t>Compiler</a:t>
+            </a:r>
+          </a:p>
+        </p:txBody>
+      </p:sp>
+      <p:sp>
+        <p:nvSpPr>
+          <p:cNvPr id="7" name="TextBox 6"/>
+          <p:cNvSpPr txBox="1"/>
+          <p:nvPr/>
+        </p:nvSpPr>
+        <p:spPr>
+          <a:xfrm>
+            <a:off x="868680" y="2606040"/>
+            <a:ext cx="5669280" cy="320040"/>
           </a:xfrm>
           <a:prstGeom prst="rect">
             <a:avLst/>
@@ -3427,11 +3347,95 @@
                 <a:cs typeface="Menlo"/>
                 <a:ea typeface="Menlo"/>
                 <a:solidFill>
-                  <a:srgbClr val="B8D0C4"/>
+                  <a:srgbClr val="1F5C42"/>
                 </a:solidFill>
                 <a:latin typeface="Menlo"/>
               </a:rPr>
-              <a:t>vendor_handbook.docx · one question</a:t>
+              <a:t>WORKS IN YOUR AGENT  ·  RUNS OFFLINE  ·  NO KEY TO COMPILE</a:t>
+            </a:r>
+          </a:p>
+        </p:txBody>
+      </p:sp>
+      <p:sp>
+        <p:nvSpPr>
+          <p:cNvPr id="8" name="TextBox 7"/>
+          <p:cNvSpPr txBox="1"/>
+          <p:nvPr/>
+        </p:nvSpPr>
+        <p:spPr>
+          <a:xfrm>
+            <a:off x="868680" y="3063240"/>
+            <a:ext cx="5669280" cy="502920"/>
+          </a:xfrm>
+          <a:prstGeom prst="rect">
+            <a:avLst/>
+          </a:prstGeom>
+          <a:noFill/>
+        </p:spPr>
+        <p:txBody>
+          <a:bodyPr wrap="square" anchor="t"/>
+          <a:lstStyle/>
+          <a:p>
+            <a:pPr algn="l">
+              <a:spcBef>
+                <a:spcPts val="0"/>
+              </a:spcBef>
+              <a:spcAft>
+                <a:spcPts val="0"/>
+              </a:spcAft>
+            </a:pPr>
+            <a:r>
+              <a:rPr sz="2400" b="1">
+                <a:cs typeface="Helvetica"/>
+                <a:ea typeface="Helvetica"/>
+                <a:solidFill>
+                  <a:srgbClr val="1A221E"/>
+                </a:solidFill>
+                <a:latin typeface="Helvetica"/>
+              </a:rPr>
+              <a:t>Same answer. About 3% of the tokens.</a:t>
+            </a:r>
+          </a:p>
+        </p:txBody>
+      </p:sp>
+      <p:sp>
+        <p:nvSpPr>
+          <p:cNvPr id="9" name="TextBox 8"/>
+          <p:cNvSpPr txBox="1"/>
+          <p:nvPr/>
+        </p:nvSpPr>
+        <p:spPr>
+          <a:xfrm>
+            <a:off x="868680" y="3703320"/>
+            <a:ext cx="5577840" cy="1234440"/>
+          </a:xfrm>
+          <a:prstGeom prst="rect">
+            <a:avLst/>
+          </a:prstGeom>
+          <a:noFill/>
+        </p:spPr>
+        <p:txBody>
+          <a:bodyPr wrap="square" anchor="t"/>
+          <a:lstStyle/>
+          <a:p>
+            <a:pPr algn="l">
+              <a:spcBef>
+                <a:spcPts val="0"/>
+              </a:spcBef>
+              <a:spcAft>
+                <a:spcPts val="0"/>
+              </a:spcAft>
+            </a:pPr>
+            <a:r>
+              <a:rPr sz="1500" b="0">
+                <a:cs typeface="Helvetica"/>
+                <a:ea typeface="Helvetica"/>
+                <a:solidFill>
+                  <a:srgbClr val="4A5850"/>
+                </a:solidFill>
+                <a:latin typeface="Helvetica"/>
+              </a:rPr>
+              <a:t>Give it a file, a question, and a token budget. It returns the useful parts as markdown, and a clear list of what it left out.</a:t>
             </a:r>
           </a:p>
         </p:txBody>
@@ -3444,8 +3448,135 @@
         </p:nvSpPr>
         <p:spPr>
           <a:xfrm>
-            <a:off x="7635240" y="2286000"/>
-            <a:ext cx="3657600" cy="274320"/>
+            <a:off x="594360" y="6309360"/>
+            <a:ext cx="10972800" cy="320040"/>
+          </a:xfrm>
+          <a:prstGeom prst="rect">
+            <a:avLst/>
+          </a:prstGeom>
+          <a:noFill/>
+        </p:spPr>
+        <p:txBody>
+          <a:bodyPr wrap="square" anchor="t"/>
+          <a:lstStyle/>
+          <a:p>
+            <a:pPr algn="l">
+              <a:spcBef>
+                <a:spcPts val="0"/>
+              </a:spcBef>
+              <a:spcAft>
+                <a:spcPts val="0"/>
+              </a:spcAft>
+            </a:pPr>
+            <a:r>
+              <a:rPr sz="1100" b="0">
+                <a:cs typeface="Menlo"/>
+                <a:ea typeface="Menlo"/>
+                <a:solidFill>
+                  <a:srgbClr val="5C6B62"/>
+                </a:solidFill>
+                <a:latin typeface="Menlo"/>
+              </a:rPr>
+              <a:t>OpenAI × NamasteDev Codex Hackathon  ·  July 2026  ·  solo build</a:t>
+            </a:r>
+          </a:p>
+        </p:txBody>
+      </p:sp>
+      <p:sp>
+        <p:nvSpPr>
+          <p:cNvPr id="11" name="Rectangle 10"/>
+          <p:cNvSpPr/>
+          <p:nvPr/>
+        </p:nvSpPr>
+        <p:spPr>
+          <a:xfrm>
+            <a:off x="7315200" y="1417320"/>
+            <a:ext cx="4297680" cy="3977639"/>
+          </a:xfrm>
+          <a:prstGeom prst="rect">
+            <a:avLst/>
+          </a:prstGeom>
+          <a:solidFill>
+            <a:srgbClr val="1F5C42"/>
+          </a:solidFill>
+          <a:ln>
+            <a:noFill/>
+          </a:ln>
+        </p:spPr>
+        <p:style>
+          <a:lnRef idx="1">
+            <a:schemeClr val="accent1"/>
+          </a:lnRef>
+          <a:fillRef idx="3">
+            <a:schemeClr val="accent1"/>
+          </a:fillRef>
+          <a:effectRef idx="2">
+            <a:schemeClr val="accent1"/>
+          </a:effectRef>
+          <a:fontRef idx="minor">
+            <a:schemeClr val="lt1"/>
+          </a:fontRef>
+        </p:style>
+        <p:txBody>
+          <a:bodyPr rtlCol="0" anchor="ctr"/>
+          <a:lstStyle/>
+          <a:p>
+            <a:pPr algn="ctr"/>
+          </a:p>
+        </p:txBody>
+      </p:sp>
+      <p:sp>
+        <p:nvSpPr>
+          <p:cNvPr id="12" name="TextBox 11"/>
+          <p:cNvSpPr txBox="1"/>
+          <p:nvPr/>
+        </p:nvSpPr>
+        <p:spPr>
+          <a:xfrm>
+            <a:off x="7589520" y="1645920"/>
+            <a:ext cx="3840480" cy="411480"/>
+          </a:xfrm>
+          <a:prstGeom prst="rect">
+            <a:avLst/>
+          </a:prstGeom>
+          <a:noFill/>
+        </p:spPr>
+        <p:txBody>
+          <a:bodyPr wrap="square" anchor="t"/>
+          <a:lstStyle/>
+          <a:p>
+            <a:pPr algn="l">
+              <a:spcBef>
+                <a:spcPts val="0"/>
+              </a:spcBef>
+              <a:spcAft>
+                <a:spcPts val="0"/>
+              </a:spcAft>
+            </a:pPr>
+            <a:r>
+              <a:rPr sz="1200" b="0">
+                <a:cs typeface="Helvetica"/>
+                <a:ea typeface="Helvetica"/>
+                <a:solidFill>
+                  <a:srgbClr val="B8D0C4"/>
+                </a:solidFill>
+                <a:latin typeface="Helvetica"/>
+              </a:rPr>
+              <a:t>One real handbook · one refunds question</a:t>
+            </a:r>
+          </a:p>
+        </p:txBody>
+      </p:sp>
+      <p:sp>
+        <p:nvSpPr>
+          <p:cNvPr id="13" name="TextBox 12"/>
+          <p:cNvSpPr txBox="1"/>
+          <p:nvPr/>
+        </p:nvSpPr>
+        <p:spPr>
+          <a:xfrm>
+            <a:off x="7589520" y="2194560"/>
+            <a:ext cx="2194560" cy="274320"/>
           </a:xfrm>
           <a:prstGeom prst="rect">
             <a:avLst/>
@@ -3480,14 +3611,14 @@
       </p:sp>
       <p:sp>
         <p:nvSpPr>
-          <p:cNvPr id="11" name="TextBox 10"/>
+          <p:cNvPr id="14" name="TextBox 13"/>
           <p:cNvSpPr txBox="1"/>
           <p:nvPr/>
         </p:nvSpPr>
         <p:spPr>
           <a:xfrm>
-            <a:off x="9692640" y="2286000"/>
-            <a:ext cx="1554480" cy="274320"/>
+            <a:off x="9601200" y="2194560"/>
+            <a:ext cx="1737360" cy="274320"/>
           </a:xfrm>
           <a:prstGeom prst="rect">
             <a:avLst/>
@@ -3522,14 +3653,14 @@
       </p:sp>
       <p:sp>
         <p:nvSpPr>
-          <p:cNvPr id="12" name="Rectangle 11"/>
+          <p:cNvPr id="15" name="Rectangle 14"/>
           <p:cNvSpPr/>
           <p:nvPr/>
         </p:nvSpPr>
         <p:spPr>
           <a:xfrm>
-            <a:off x="7635240" y="2606040"/>
-            <a:ext cx="3611880" cy="128016"/>
+            <a:off x="7589520" y="2560320"/>
+            <a:ext cx="3749039" cy="164592"/>
           </a:xfrm>
           <a:prstGeom prst="rect">
             <a:avLst/>
@@ -3565,14 +3696,14 @@
       </p:sp>
       <p:sp>
         <p:nvSpPr>
-          <p:cNvPr id="13" name="Rectangle 12"/>
+          <p:cNvPr id="16" name="Rectangle 15"/>
           <p:cNvSpPr/>
           <p:nvPr/>
         </p:nvSpPr>
         <p:spPr>
           <a:xfrm>
-            <a:off x="7635240" y="2606040"/>
-            <a:ext cx="3611880" cy="128016"/>
+            <a:off x="7589520" y="2560320"/>
+            <a:ext cx="3749039" cy="164592"/>
           </a:xfrm>
           <a:prstGeom prst="rect">
             <a:avLst/>
@@ -3608,14 +3739,14 @@
       </p:sp>
       <p:sp>
         <p:nvSpPr>
-          <p:cNvPr id="14" name="TextBox 13"/>
+          <p:cNvPr id="17" name="TextBox 16"/>
           <p:cNvSpPr txBox="1"/>
           <p:nvPr/>
         </p:nvSpPr>
         <p:spPr>
           <a:xfrm>
-            <a:off x="7635240" y="3017520"/>
-            <a:ext cx="3657600" cy="274320"/>
+            <a:off x="7589520" y="2971800"/>
+            <a:ext cx="2194560" cy="274320"/>
           </a:xfrm>
           <a:prstGeom prst="rect">
             <a:avLst/>
@@ -3650,14 +3781,14 @@
       </p:sp>
       <p:sp>
         <p:nvSpPr>
-          <p:cNvPr id="15" name="TextBox 14"/>
+          <p:cNvPr id="18" name="TextBox 17"/>
           <p:cNvSpPr txBox="1"/>
           <p:nvPr/>
         </p:nvSpPr>
         <p:spPr>
           <a:xfrm>
-            <a:off x="9692640" y="3017520"/>
-            <a:ext cx="1554480" cy="274320"/>
+            <a:off x="9601200" y="2971800"/>
+            <a:ext cx="1737360" cy="274320"/>
           </a:xfrm>
           <a:prstGeom prst="rect">
             <a:avLst/>
@@ -3692,14 +3823,14 @@
       </p:sp>
       <p:sp>
         <p:nvSpPr>
-          <p:cNvPr id="16" name="Rectangle 15"/>
+          <p:cNvPr id="19" name="Rectangle 18"/>
           <p:cNvSpPr/>
           <p:nvPr/>
         </p:nvSpPr>
         <p:spPr>
           <a:xfrm>
-            <a:off x="7635240" y="3337560"/>
-            <a:ext cx="3611880" cy="128016"/>
+            <a:off x="7589520" y="3337560"/>
+            <a:ext cx="3749039" cy="164592"/>
           </a:xfrm>
           <a:prstGeom prst="rect">
             <a:avLst/>
@@ -3735,14 +3866,14 @@
       </p:sp>
       <p:sp>
         <p:nvSpPr>
-          <p:cNvPr id="17" name="Rectangle 16"/>
+          <p:cNvPr id="20" name="Rectangle 19"/>
           <p:cNvSpPr/>
           <p:nvPr/>
         </p:nvSpPr>
         <p:spPr>
           <a:xfrm>
-            <a:off x="7635240" y="3337560"/>
-            <a:ext cx="146304" cy="128016"/>
+            <a:off x="7589520" y="3337560"/>
+            <a:ext cx="164592" cy="164592"/>
           </a:xfrm>
           <a:prstGeom prst="rect">
             <a:avLst/>
@@ -3778,14 +3909,14 @@
       </p:sp>
       <p:sp>
         <p:nvSpPr>
-          <p:cNvPr id="18" name="TextBox 17"/>
+          <p:cNvPr id="21" name="TextBox 20"/>
           <p:cNvSpPr txBox="1"/>
           <p:nvPr/>
         </p:nvSpPr>
         <p:spPr>
           <a:xfrm>
-            <a:off x="7635240" y="3794760"/>
-            <a:ext cx="3657600" cy="822960"/>
+            <a:off x="7589520" y="3794760"/>
+            <a:ext cx="3840480" cy="1280160"/>
           </a:xfrm>
           <a:prstGeom prst="rect">
             <a:avLst/>
@@ -3805,13 +3936,13 @@
               </a:spcAft>
             </a:pPr>
             <a:r>
-              <a:rPr sz="1800" b="1">
-                <a:cs typeface="Helvetica"/>
-                <a:ea typeface="Helvetica"/>
+              <a:rPr sz="2200" b="1">
+                <a:cs typeface="Georgia"/>
+                <a:ea typeface="Georgia"/>
                 <a:solidFill>
                   <a:srgbClr val="E8F0EB"/>
                 </a:solidFill>
-                <a:latin typeface="Helvetica"/>
+                <a:latin typeface="Georgia"/>
               </a:rPr>
               <a:t>97% fewer tokens</a:t>
             </a:r>
@@ -3819,14 +3950,14 @@
           <a:p>
             <a:pPr algn="l">
               <a:spcBef>
-                <a:spcPts val="600"/>
+                <a:spcPts val="800"/>
               </a:spcBef>
               <a:spcAft>
                 <a:spcPts val="0"/>
               </a:spcAft>
             </a:pPr>
             <a:r>
-              <a:rPr sz="1300" b="0">
+              <a:rPr sz="1400" b="0">
                 <a:cs typeface="Helvetica"/>
                 <a:ea typeface="Helvetica"/>
                 <a:solidFill>
@@ -3840,22 +3971,22 @@
           <a:p>
             <a:pPr algn="l">
               <a:spcBef>
-                <a:spcPts val="1000"/>
+                <a:spcPts val="1200"/>
               </a:spcBef>
               <a:spcAft>
                 <a:spcPts val="0"/>
               </a:spcAft>
             </a:pPr>
             <a:r>
-              <a:rPr sz="1000" b="0">
-                <a:cs typeface="Menlo"/>
-                <a:ea typeface="Menlo"/>
+              <a:rPr sz="1100" b="0">
+                <a:cs typeface="Helvetica"/>
+                <a:ea typeface="Helvetica"/>
                 <a:solidFill>
                   <a:srgbClr val="B8D0C4"/>
                 </a:solidFill>
-                <a:latin typeface="Menlo"/>
+                <a:latin typeface="Helvetica"/>
               </a:rPr>
-              <a:t>verified: unit tests + recall eval + live runs</a:t>
+              <a:t>Checked with tests, a recall eval, and live runs</a:t>
             </a:r>
           </a:p>
         </p:txBody>
@@ -3923,56 +4054,14 @@
       </p:sp>
       <p:sp>
         <p:nvSpPr>
-          <p:cNvPr id="3" name="TextBox 2"/>
-          <p:cNvSpPr txBox="1"/>
-          <p:nvPr/>
-        </p:nvSpPr>
-        <p:spPr>
-          <a:xfrm>
-            <a:off x="640080" y="411480"/>
-            <a:ext cx="10972800" cy="640080"/>
-          </a:xfrm>
-          <a:prstGeom prst="rect">
-            <a:avLst/>
-          </a:prstGeom>
-          <a:noFill/>
-        </p:spPr>
-        <p:txBody>
-          <a:bodyPr wrap="square" anchor="t"/>
-          <a:lstStyle/>
-          <a:p>
-            <a:pPr algn="l">
-              <a:spcBef>
-                <a:spcPts val="0"/>
-              </a:spcBef>
-              <a:spcAft>
-                <a:spcPts val="0"/>
-              </a:spcAft>
-            </a:pPr>
-            <a:r>
-              <a:rPr sz="2800" b="1">
-                <a:cs typeface="Georgia"/>
-                <a:ea typeface="Georgia"/>
-                <a:solidFill>
-                  <a:srgbClr val="1A221E"/>
-                </a:solidFill>
-                <a:latin typeface="Georgia"/>
-              </a:rPr>
-              <a:t>Agents pay to read pages they don’t need</a:t>
-            </a:r>
-          </a:p>
-        </p:txBody>
-      </p:sp>
-      <p:sp>
-        <p:nvSpPr>
-          <p:cNvPr id="4" name="Rectangle 3"/>
+          <p:cNvPr id="3" name="Rectangle 2"/>
           <p:cNvSpPr/>
           <p:nvPr/>
         </p:nvSpPr>
         <p:spPr>
           <a:xfrm>
-            <a:off x="640080" y="1280160"/>
-            <a:ext cx="73152" cy="1005840"/>
+            <a:off x="0" y="0"/>
+            <a:ext cx="164592" cy="6858000"/>
           </a:xfrm>
           <a:prstGeom prst="rect">
             <a:avLst/>
@@ -4008,14 +4097,56 @@
       </p:sp>
       <p:sp>
         <p:nvSpPr>
+          <p:cNvPr id="4" name="TextBox 3"/>
+          <p:cNvSpPr txBox="1"/>
+          <p:nvPr/>
+        </p:nvSpPr>
+        <p:spPr>
+          <a:xfrm>
+            <a:off x="594360" y="292608"/>
+            <a:ext cx="10972800" cy="256032"/>
+          </a:xfrm>
+          <a:prstGeom prst="rect">
+            <a:avLst/>
+          </a:prstGeom>
+          <a:noFill/>
+        </p:spPr>
+        <p:txBody>
+          <a:bodyPr wrap="square" anchor="t"/>
+          <a:lstStyle/>
+          <a:p>
+            <a:pPr algn="l">
+              <a:spcBef>
+                <a:spcPts val="0"/>
+              </a:spcBef>
+              <a:spcAft>
+                <a:spcPts val="0"/>
+              </a:spcAft>
+            </a:pPr>
+            <a:r>
+              <a:rPr sz="1100" b="1">
+                <a:cs typeface="Menlo"/>
+                <a:ea typeface="Menlo"/>
+                <a:solidFill>
+                  <a:srgbClr val="1F5C42"/>
+                </a:solidFill>
+                <a:latin typeface="Menlo"/>
+              </a:rPr>
+              <a:t>THE HABIT</a:t>
+            </a:r>
+          </a:p>
+        </p:txBody>
+      </p:sp>
+      <p:sp>
+        <p:nvSpPr>
           <p:cNvPr id="5" name="TextBox 4"/>
           <p:cNvSpPr txBox="1"/>
           <p:nvPr/>
         </p:nvSpPr>
         <p:spPr>
           <a:xfrm>
-            <a:off x="960120" y="1280160"/>
-            <a:ext cx="5669280" cy="365760"/>
+            <a:off x="594360" y="548640"/>
+            <a:ext cx="10972800" cy="594360"/>
           </a:xfrm>
           <a:prstGeom prst="rect">
             <a:avLst/>
@@ -4035,325 +4166,29 @@
               </a:spcAft>
             </a:pPr>
             <a:r>
-              <a:rPr sz="1800" b="1">
-                <a:cs typeface="Helvetica"/>
-                <a:ea typeface="Helvetica"/>
+              <a:rPr sz="2800" b="1">
+                <a:cs typeface="Georgia"/>
+                <a:ea typeface="Georgia"/>
                 <a:solidFill>
                   <a:srgbClr val="1A221E"/>
                 </a:solidFill>
-                <a:latin typeface="Helvetica"/>
+                <a:latin typeface="Georgia"/>
               </a:rPr>
-              <a:t>Whole-file reads</a:t>
-            </a:r>
-          </a:p>
-        </p:txBody>
-      </p:sp>
-      <p:sp>
-        <p:nvSpPr>
-          <p:cNvPr id="6" name="TextBox 5"/>
-          <p:cNvSpPr txBox="1"/>
-          <p:nvPr/>
-        </p:nvSpPr>
-        <p:spPr>
-          <a:xfrm>
-            <a:off x="960120" y="1645920"/>
-            <a:ext cx="5669280" cy="640080"/>
-          </a:xfrm>
-          <a:prstGeom prst="rect">
-            <a:avLst/>
-          </a:prstGeom>
-          <a:noFill/>
-        </p:spPr>
-        <p:txBody>
-          <a:bodyPr wrap="square" anchor="t"/>
-          <a:lstStyle/>
-          <a:p>
-            <a:pPr algn="l">
-              <a:spcBef>
-                <a:spcPts val="0"/>
-              </a:spcBef>
-              <a:spcAft>
-                <a:spcPts val="0"/>
-              </a:spcAft>
-            </a:pPr>
-            <a:r>
-              <a:rPr sz="1400" b="0">
-                <a:cs typeface="Helvetica"/>
-                <a:ea typeface="Helvetica"/>
-                <a:solidFill>
-                  <a:srgbClr val="4A5850"/>
-                </a:solidFill>
-                <a:latin typeface="Helvetica"/>
-              </a:rPr>
-              <a:t>Agents convert and ingest entire documents to answer a single question — every time.</a:t>
-            </a:r>
-          </a:p>
-        </p:txBody>
-      </p:sp>
-      <p:sp>
-        <p:nvSpPr>
-          <p:cNvPr id="7" name="Rectangle 6"/>
+              <a:t>Agents pay to read pages they don’t need</a:t>
+            </a:r>
+          </a:p>
+        </p:txBody>
+      </p:sp>
+      <p:sp>
+        <p:nvSpPr>
+          <p:cNvPr id="6" name="Rectangle 5"/>
           <p:cNvSpPr/>
           <p:nvPr/>
         </p:nvSpPr>
         <p:spPr>
           <a:xfrm>
-            <a:off x="640080" y="2651760"/>
-            <a:ext cx="73152" cy="1005840"/>
-          </a:xfrm>
-          <a:prstGeom prst="rect">
-            <a:avLst/>
-          </a:prstGeom>
-          <a:solidFill>
-            <a:srgbClr val="1F5C42"/>
-          </a:solidFill>
-          <a:ln>
-            <a:noFill/>
-          </a:ln>
-        </p:spPr>
-        <p:style>
-          <a:lnRef idx="1">
-            <a:schemeClr val="accent1"/>
-          </a:lnRef>
-          <a:fillRef idx="3">
-            <a:schemeClr val="accent1"/>
-          </a:fillRef>
-          <a:effectRef idx="2">
-            <a:schemeClr val="accent1"/>
-          </a:effectRef>
-          <a:fontRef idx="minor">
-            <a:schemeClr val="lt1"/>
-          </a:fontRef>
-        </p:style>
-        <p:txBody>
-          <a:bodyPr rtlCol="0" anchor="ctr"/>
-          <a:lstStyle/>
-          <a:p>
-            <a:pPr algn="ctr"/>
-          </a:p>
-        </p:txBody>
-      </p:sp>
-      <p:sp>
-        <p:nvSpPr>
-          <p:cNvPr id="8" name="TextBox 7"/>
-          <p:cNvSpPr txBox="1"/>
-          <p:nvPr/>
-        </p:nvSpPr>
-        <p:spPr>
-          <a:xfrm>
-            <a:off x="960120" y="2651760"/>
-            <a:ext cx="5669280" cy="365760"/>
-          </a:xfrm>
-          <a:prstGeom prst="rect">
-            <a:avLst/>
-          </a:prstGeom>
-          <a:noFill/>
-        </p:spPr>
-        <p:txBody>
-          <a:bodyPr wrap="square" anchor="t"/>
-          <a:lstStyle/>
-          <a:p>
-            <a:pPr algn="l">
-              <a:spcBef>
-                <a:spcPts val="0"/>
-              </a:spcBef>
-              <a:spcAft>
-                <a:spcPts val="0"/>
-              </a:spcAft>
-            </a:pPr>
-            <a:r>
-              <a:rPr sz="1800" b="1">
-                <a:cs typeface="Helvetica"/>
-                <a:ea typeface="Helvetica"/>
-                <a:solidFill>
-                  <a:srgbClr val="1A221E"/>
-                </a:solidFill>
-                <a:latin typeface="Helvetica"/>
-              </a:rPr>
-              <a:t>95%+ never touches the answer</a:t>
-            </a:r>
-          </a:p>
-        </p:txBody>
-      </p:sp>
-      <p:sp>
-        <p:nvSpPr>
-          <p:cNvPr id="9" name="TextBox 8"/>
-          <p:cNvSpPr txBox="1"/>
-          <p:nvPr/>
-        </p:nvSpPr>
-        <p:spPr>
-          <a:xfrm>
-            <a:off x="960120" y="3017520"/>
-            <a:ext cx="5669280" cy="640080"/>
-          </a:xfrm>
-          <a:prstGeom prst="rect">
-            <a:avLst/>
-          </a:prstGeom>
-          <a:noFill/>
-        </p:spPr>
-        <p:txBody>
-          <a:bodyPr wrap="square" anchor="t"/>
-          <a:lstStyle/>
-          <a:p>
-            <a:pPr algn="l">
-              <a:spcBef>
-                <a:spcPts val="0"/>
-              </a:spcBef>
-              <a:spcAft>
-                <a:spcPts val="0"/>
-              </a:spcAft>
-            </a:pPr>
-            <a:r>
-              <a:rPr sz="1400" b="0">
-                <a:cs typeface="Helvetica"/>
-                <a:ea typeface="Helvetica"/>
-                <a:solidFill>
-                  <a:srgbClr val="4A5850"/>
-                </a:solidFill>
-                <a:latin typeface="Helvetica"/>
-              </a:rPr>
-              <a:t>The relevant clause is 2 pages of 100. The other 98 are pure token spend.</a:t>
-            </a:r>
-          </a:p>
-        </p:txBody>
-      </p:sp>
-      <p:sp>
-        <p:nvSpPr>
-          <p:cNvPr id="10" name="Rectangle 9"/>
-          <p:cNvSpPr/>
-          <p:nvPr/>
-        </p:nvSpPr>
-        <p:spPr>
-          <a:xfrm>
-            <a:off x="640080" y="4023360"/>
-            <a:ext cx="73152" cy="1005840"/>
-          </a:xfrm>
-          <a:prstGeom prst="rect">
-            <a:avLst/>
-          </a:prstGeom>
-          <a:solidFill>
-            <a:srgbClr val="1F5C42"/>
-          </a:solidFill>
-          <a:ln>
-            <a:noFill/>
-          </a:ln>
-        </p:spPr>
-        <p:style>
-          <a:lnRef idx="1">
-            <a:schemeClr val="accent1"/>
-          </a:lnRef>
-          <a:fillRef idx="3">
-            <a:schemeClr val="accent1"/>
-          </a:fillRef>
-          <a:effectRef idx="2">
-            <a:schemeClr val="accent1"/>
-          </a:effectRef>
-          <a:fontRef idx="minor">
-            <a:schemeClr val="lt1"/>
-          </a:fontRef>
-        </p:style>
-        <p:txBody>
-          <a:bodyPr rtlCol="0" anchor="ctr"/>
-          <a:lstStyle/>
-          <a:p>
-            <a:pPr algn="ctr"/>
-          </a:p>
-        </p:txBody>
-      </p:sp>
-      <p:sp>
-        <p:nvSpPr>
-          <p:cNvPr id="11" name="TextBox 10"/>
-          <p:cNvSpPr txBox="1"/>
-          <p:nvPr/>
-        </p:nvSpPr>
-        <p:spPr>
-          <a:xfrm>
-            <a:off x="960120" y="4023360"/>
-            <a:ext cx="5669280" cy="365760"/>
-          </a:xfrm>
-          <a:prstGeom prst="rect">
-            <a:avLst/>
-          </a:prstGeom>
-          <a:noFill/>
-        </p:spPr>
-        <p:txBody>
-          <a:bodyPr wrap="square" anchor="t"/>
-          <a:lstStyle/>
-          <a:p>
-            <a:pPr algn="l">
-              <a:spcBef>
-                <a:spcPts val="0"/>
-              </a:spcBef>
-              <a:spcAft>
-                <a:spcPts val="0"/>
-              </a:spcAft>
-            </a:pPr>
-            <a:r>
-              <a:rPr sz="1800" b="1">
-                <a:cs typeface="Helvetica"/>
-                <a:ea typeface="Helvetica"/>
-                <a:solidFill>
-                  <a:srgbClr val="1A221E"/>
-                </a:solidFill>
-                <a:latin typeface="Helvetica"/>
-              </a:rPr>
-              <a:t>And it compounds</a:t>
-            </a:r>
-          </a:p>
-        </p:txBody>
-      </p:sp>
-      <p:sp>
-        <p:nvSpPr>
-          <p:cNvPr id="12" name="TextBox 11"/>
-          <p:cNvSpPr txBox="1"/>
-          <p:nvPr/>
-        </p:nvSpPr>
-        <p:spPr>
-          <a:xfrm>
-            <a:off x="960120" y="4389120"/>
-            <a:ext cx="5669280" cy="640080"/>
-          </a:xfrm>
-          <a:prstGeom prst="rect">
-            <a:avLst/>
-          </a:prstGeom>
-          <a:noFill/>
-        </p:spPr>
-        <p:txBody>
-          <a:bodyPr wrap="square" anchor="t"/>
-          <a:lstStyle/>
-          <a:p>
-            <a:pPr algn="l">
-              <a:spcBef>
-                <a:spcPts val="0"/>
-              </a:spcBef>
-              <a:spcAft>
-                <a:spcPts val="0"/>
-              </a:spcAft>
-            </a:pPr>
-            <a:r>
-              <a:rPr sz="1400" b="0">
-                <a:cs typeface="Helvetica"/>
-                <a:ea typeface="Helvetica"/>
-                <a:solidFill>
-                  <a:srgbClr val="4A5850"/>
-                </a:solidFill>
-                <a:latin typeface="Helvetica"/>
-              </a:rPr>
-              <a:t>Every file × every question × every agent × every day. Context windows fill, latency and cost climb.</a:t>
-            </a:r>
-          </a:p>
-        </p:txBody>
-      </p:sp>
-      <p:sp>
-        <p:nvSpPr>
-          <p:cNvPr id="13" name="Rectangle 12"/>
-          <p:cNvSpPr/>
-          <p:nvPr/>
-        </p:nvSpPr>
-        <p:spPr>
-          <a:xfrm>
-            <a:off x="7315200" y="1280160"/>
-            <a:ext cx="4206240" cy="1965960"/>
+            <a:off x="594360" y="1325880"/>
+            <a:ext cx="6400800" cy="1097280"/>
           </a:xfrm>
           <a:prstGeom prst="rect">
             <a:avLst/>
@@ -4391,14 +4226,14 @@
       </p:sp>
       <p:sp>
         <p:nvSpPr>
-          <p:cNvPr id="14" name="Rectangle 13"/>
+          <p:cNvPr id="7" name="Rectangle 6"/>
           <p:cNvSpPr/>
           <p:nvPr/>
         </p:nvSpPr>
         <p:spPr>
           <a:xfrm>
-            <a:off x="7315200" y="1280160"/>
-            <a:ext cx="4206240" cy="45720"/>
+            <a:off x="594360" y="1325880"/>
+            <a:ext cx="91440" cy="1097280"/>
           </a:xfrm>
           <a:prstGeom prst="rect">
             <a:avLst/>
@@ -4434,14 +4269,14 @@
       </p:sp>
       <p:sp>
         <p:nvSpPr>
-          <p:cNvPr id="15" name="TextBox 14"/>
+          <p:cNvPr id="8" name="TextBox 7"/>
           <p:cNvSpPr txBox="1"/>
           <p:nvPr/>
         </p:nvSpPr>
         <p:spPr>
           <a:xfrm>
-            <a:off x="7589520" y="1600200"/>
-            <a:ext cx="3657600" cy="640080"/>
+            <a:off x="914400" y="1490472"/>
+            <a:ext cx="502920" cy="320040"/>
           </a:xfrm>
           <a:prstGeom prst="rect">
             <a:avLst/>
@@ -4461,29 +4296,29 @@
               </a:spcAft>
             </a:pPr>
             <a:r>
-              <a:rPr sz="3200" b="1">
-                <a:cs typeface="Georgia"/>
-                <a:ea typeface="Georgia"/>
+              <a:rPr sz="1400" b="1">
+                <a:cs typeface="Menlo"/>
+                <a:ea typeface="Menlo"/>
                 <a:solidFill>
                   <a:srgbClr val="1F5C42"/>
                 </a:solidFill>
-                <a:latin typeface="Georgia"/>
+                <a:latin typeface="Menlo"/>
               </a:rPr>
-              <a:t>$61 → $2</a:t>
-            </a:r>
-          </a:p>
-        </p:txBody>
-      </p:sp>
-      <p:sp>
-        <p:nvSpPr>
-          <p:cNvPr id="16" name="TextBox 15"/>
+              <a:t>01</a:t>
+            </a:r>
+          </a:p>
+        </p:txBody>
+      </p:sp>
+      <p:sp>
+        <p:nvSpPr>
+          <p:cNvPr id="9" name="TextBox 8"/>
           <p:cNvSpPr txBox="1"/>
           <p:nvPr/>
         </p:nvSpPr>
         <p:spPr>
           <a:xfrm>
-            <a:off x="7589520" y="2331720"/>
-            <a:ext cx="3657600" cy="731520"/>
+            <a:off x="1417320" y="1490472"/>
+            <a:ext cx="5303520" cy="320040"/>
           </a:xfrm>
           <a:prstGeom prst="rect">
             <a:avLst/>
@@ -4503,29 +4338,71 @@
               </a:spcAft>
             </a:pPr>
             <a:r>
-              <a:rPr sz="1300" b="0">
+              <a:rPr sz="1700" b="1">
                 <a:cs typeface="Helvetica"/>
                 <a:ea typeface="Helvetica"/>
                 <a:solidFill>
-                  <a:srgbClr val="4A5850"/>
+                  <a:srgbClr val="1A221E"/>
                 </a:solidFill>
                 <a:latin typeface="Helvetica"/>
               </a:rPr>
-              <a:t>per 1,000 reads of one 100-page document (at $3/Mtok input — demo cost meter default)</a:t>
-            </a:r>
-          </a:p>
-        </p:txBody>
-      </p:sp>
-      <p:sp>
-        <p:nvSpPr>
-          <p:cNvPr id="17" name="Rectangle 16"/>
+              <a:t>Whole-file habit</a:t>
+            </a:r>
+          </a:p>
+        </p:txBody>
+      </p:sp>
+      <p:sp>
+        <p:nvSpPr>
+          <p:cNvPr id="10" name="TextBox 9"/>
+          <p:cNvSpPr txBox="1"/>
+          <p:nvPr/>
+        </p:nvSpPr>
+        <p:spPr>
+          <a:xfrm>
+            <a:off x="1417320" y="1828800"/>
+            <a:ext cx="5303520" cy="457200"/>
+          </a:xfrm>
+          <a:prstGeom prst="rect">
+            <a:avLst/>
+          </a:prstGeom>
+          <a:noFill/>
+        </p:spPr>
+        <p:txBody>
+          <a:bodyPr wrap="square" anchor="t"/>
+          <a:lstStyle/>
+          <a:p>
+            <a:pPr algn="l">
+              <a:spcBef>
+                <a:spcPts val="0"/>
+              </a:spcBef>
+              <a:spcAft>
+                <a:spcPts val="0"/>
+              </a:spcAft>
+            </a:pPr>
+            <a:r>
+              <a:rPr sz="1400" b="0">
+                <a:cs typeface="Helvetica"/>
+                <a:ea typeface="Helvetica"/>
+                <a:solidFill>
+                  <a:srgbClr val="4A5850"/>
+                </a:solidFill>
+                <a:latin typeface="Helvetica"/>
+              </a:rPr>
+              <a:t>Agents often load an entire document to answer one question. Every time.</a:t>
+            </a:r>
+          </a:p>
+        </p:txBody>
+      </p:sp>
+      <p:sp>
+        <p:nvSpPr>
+          <p:cNvPr id="11" name="Rectangle 10"/>
           <p:cNvSpPr/>
           <p:nvPr/>
         </p:nvSpPr>
         <p:spPr>
           <a:xfrm>
-            <a:off x="7315200" y="3474720"/>
-            <a:ext cx="4206240" cy="1965960"/>
+            <a:off x="594360" y="2560320"/>
+            <a:ext cx="6400800" cy="1097280"/>
           </a:xfrm>
           <a:prstGeom prst="rect">
             <a:avLst/>
@@ -4563,14 +4440,14 @@
       </p:sp>
       <p:sp>
         <p:nvSpPr>
-          <p:cNvPr id="18" name="Rectangle 17"/>
+          <p:cNvPr id="12" name="Rectangle 11"/>
           <p:cNvSpPr/>
           <p:nvPr/>
         </p:nvSpPr>
         <p:spPr>
           <a:xfrm>
-            <a:off x="7315200" y="3474720"/>
-            <a:ext cx="4206240" cy="45720"/>
+            <a:off x="594360" y="2560320"/>
+            <a:ext cx="91440" cy="1097280"/>
           </a:xfrm>
           <a:prstGeom prst="rect">
             <a:avLst/>
@@ -4606,14 +4483,270 @@
       </p:sp>
       <p:sp>
         <p:nvSpPr>
+          <p:cNvPr id="13" name="TextBox 12"/>
+          <p:cNvSpPr txBox="1"/>
+          <p:nvPr/>
+        </p:nvSpPr>
+        <p:spPr>
+          <a:xfrm>
+            <a:off x="914400" y="2724912"/>
+            <a:ext cx="502920" cy="320040"/>
+          </a:xfrm>
+          <a:prstGeom prst="rect">
+            <a:avLst/>
+          </a:prstGeom>
+          <a:noFill/>
+        </p:spPr>
+        <p:txBody>
+          <a:bodyPr wrap="square" anchor="t"/>
+          <a:lstStyle/>
+          <a:p>
+            <a:pPr algn="l">
+              <a:spcBef>
+                <a:spcPts val="0"/>
+              </a:spcBef>
+              <a:spcAft>
+                <a:spcPts val="0"/>
+              </a:spcAft>
+            </a:pPr>
+            <a:r>
+              <a:rPr sz="1400" b="1">
+                <a:cs typeface="Menlo"/>
+                <a:ea typeface="Menlo"/>
+                <a:solidFill>
+                  <a:srgbClr val="1F5C42"/>
+                </a:solidFill>
+                <a:latin typeface="Menlo"/>
+              </a:rPr>
+              <a:t>02</a:t>
+            </a:r>
+          </a:p>
+        </p:txBody>
+      </p:sp>
+      <p:sp>
+        <p:nvSpPr>
+          <p:cNvPr id="14" name="TextBox 13"/>
+          <p:cNvSpPr txBox="1"/>
+          <p:nvPr/>
+        </p:nvSpPr>
+        <p:spPr>
+          <a:xfrm>
+            <a:off x="1417320" y="2724912"/>
+            <a:ext cx="5303520" cy="320040"/>
+          </a:xfrm>
+          <a:prstGeom prst="rect">
+            <a:avLst/>
+          </a:prstGeom>
+          <a:noFill/>
+        </p:spPr>
+        <p:txBody>
+          <a:bodyPr wrap="square" anchor="t"/>
+          <a:lstStyle/>
+          <a:p>
+            <a:pPr algn="l">
+              <a:spcBef>
+                <a:spcPts val="0"/>
+              </a:spcBef>
+              <a:spcAft>
+                <a:spcPts val="0"/>
+              </a:spcAft>
+            </a:pPr>
+            <a:r>
+              <a:rPr sz="1700" b="1">
+                <a:cs typeface="Helvetica"/>
+                <a:ea typeface="Helvetica"/>
+                <a:solidFill>
+                  <a:srgbClr val="1A221E"/>
+                </a:solidFill>
+                <a:latin typeface="Helvetica"/>
+              </a:rPr>
+              <a:t>Most of it is unused</a:t>
+            </a:r>
+          </a:p>
+        </p:txBody>
+      </p:sp>
+      <p:sp>
+        <p:nvSpPr>
+          <p:cNvPr id="15" name="TextBox 14"/>
+          <p:cNvSpPr txBox="1"/>
+          <p:nvPr/>
+        </p:nvSpPr>
+        <p:spPr>
+          <a:xfrm>
+            <a:off x="1417320" y="3063240"/>
+            <a:ext cx="5303520" cy="457200"/>
+          </a:xfrm>
+          <a:prstGeom prst="rect">
+            <a:avLst/>
+          </a:prstGeom>
+          <a:noFill/>
+        </p:spPr>
+        <p:txBody>
+          <a:bodyPr wrap="square" anchor="t"/>
+          <a:lstStyle/>
+          <a:p>
+            <a:pPr algn="l">
+              <a:spcBef>
+                <a:spcPts val="0"/>
+              </a:spcBef>
+              <a:spcAft>
+                <a:spcPts val="0"/>
+              </a:spcAft>
+            </a:pPr>
+            <a:r>
+              <a:rPr sz="1400" b="0">
+                <a:cs typeface="Helvetica"/>
+                <a:ea typeface="Helvetica"/>
+                <a:solidFill>
+                  <a:srgbClr val="4A5850"/>
+                </a:solidFill>
+                <a:latin typeface="Helvetica"/>
+              </a:rPr>
+              <a:t>The useful clause might be 2 pages of 100. The other 98 are pure token spend.</a:t>
+            </a:r>
+          </a:p>
+        </p:txBody>
+      </p:sp>
+      <p:sp>
+        <p:nvSpPr>
+          <p:cNvPr id="16" name="Rectangle 15"/>
+          <p:cNvSpPr/>
+          <p:nvPr/>
+        </p:nvSpPr>
+        <p:spPr>
+          <a:xfrm>
+            <a:off x="594360" y="3794760"/>
+            <a:ext cx="6400800" cy="1097280"/>
+          </a:xfrm>
+          <a:prstGeom prst="rect">
+            <a:avLst/>
+          </a:prstGeom>
+          <a:solidFill>
+            <a:srgbClr val="F3F6F4"/>
+          </a:solidFill>
+          <a:ln w="12700">
+            <a:solidFill>
+              <a:srgbClr val="C8D2CB"/>
+            </a:solidFill>
+          </a:ln>
+        </p:spPr>
+        <p:style>
+          <a:lnRef idx="1">
+            <a:schemeClr val="accent1"/>
+          </a:lnRef>
+          <a:fillRef idx="3">
+            <a:schemeClr val="accent1"/>
+          </a:fillRef>
+          <a:effectRef idx="2">
+            <a:schemeClr val="accent1"/>
+          </a:effectRef>
+          <a:fontRef idx="minor">
+            <a:schemeClr val="lt1"/>
+          </a:fontRef>
+        </p:style>
+        <p:txBody>
+          <a:bodyPr rtlCol="0" anchor="ctr"/>
+          <a:lstStyle/>
+          <a:p>
+            <a:pPr algn="ctr"/>
+          </a:p>
+        </p:txBody>
+      </p:sp>
+      <p:sp>
+        <p:nvSpPr>
+          <p:cNvPr id="17" name="Rectangle 16"/>
+          <p:cNvSpPr/>
+          <p:nvPr/>
+        </p:nvSpPr>
+        <p:spPr>
+          <a:xfrm>
+            <a:off x="594360" y="3794760"/>
+            <a:ext cx="91440" cy="1097280"/>
+          </a:xfrm>
+          <a:prstGeom prst="rect">
+            <a:avLst/>
+          </a:prstGeom>
+          <a:solidFill>
+            <a:srgbClr val="1F5C42"/>
+          </a:solidFill>
+          <a:ln>
+            <a:noFill/>
+          </a:ln>
+        </p:spPr>
+        <p:style>
+          <a:lnRef idx="1">
+            <a:schemeClr val="accent1"/>
+          </a:lnRef>
+          <a:fillRef idx="3">
+            <a:schemeClr val="accent1"/>
+          </a:fillRef>
+          <a:effectRef idx="2">
+            <a:schemeClr val="accent1"/>
+          </a:effectRef>
+          <a:fontRef idx="minor">
+            <a:schemeClr val="lt1"/>
+          </a:fontRef>
+        </p:style>
+        <p:txBody>
+          <a:bodyPr rtlCol="0" anchor="ctr"/>
+          <a:lstStyle/>
+          <a:p>
+            <a:pPr algn="ctr"/>
+          </a:p>
+        </p:txBody>
+      </p:sp>
+      <p:sp>
+        <p:nvSpPr>
+          <p:cNvPr id="18" name="TextBox 17"/>
+          <p:cNvSpPr txBox="1"/>
+          <p:nvPr/>
+        </p:nvSpPr>
+        <p:spPr>
+          <a:xfrm>
+            <a:off x="914400" y="3959352"/>
+            <a:ext cx="502920" cy="320040"/>
+          </a:xfrm>
+          <a:prstGeom prst="rect">
+            <a:avLst/>
+          </a:prstGeom>
+          <a:noFill/>
+        </p:spPr>
+        <p:txBody>
+          <a:bodyPr wrap="square" anchor="t"/>
+          <a:lstStyle/>
+          <a:p>
+            <a:pPr algn="l">
+              <a:spcBef>
+                <a:spcPts val="0"/>
+              </a:spcBef>
+              <a:spcAft>
+                <a:spcPts val="0"/>
+              </a:spcAft>
+            </a:pPr>
+            <a:r>
+              <a:rPr sz="1400" b="1">
+                <a:cs typeface="Menlo"/>
+                <a:ea typeface="Menlo"/>
+                <a:solidFill>
+                  <a:srgbClr val="1F5C42"/>
+                </a:solidFill>
+                <a:latin typeface="Menlo"/>
+              </a:rPr>
+              <a:t>03</a:t>
+            </a:r>
+          </a:p>
+        </p:txBody>
+      </p:sp>
+      <p:sp>
+        <p:nvSpPr>
           <p:cNvPr id="19" name="TextBox 18"/>
           <p:cNvSpPr txBox="1"/>
           <p:nvPr/>
         </p:nvSpPr>
         <p:spPr>
           <a:xfrm>
-            <a:off x="7589520" y="3794760"/>
-            <a:ext cx="3657600" cy="640080"/>
+            <a:off x="1417320" y="3959352"/>
+            <a:ext cx="5303520" cy="320040"/>
           </a:xfrm>
           <a:prstGeom prst="rect">
             <a:avLst/>
@@ -4633,29 +4766,156 @@
               </a:spcAft>
             </a:pPr>
             <a:r>
-              <a:rPr sz="3200" b="1">
+              <a:rPr sz="1700" b="1">
+                <a:cs typeface="Helvetica"/>
+                <a:ea typeface="Helvetica"/>
+                <a:solidFill>
+                  <a:srgbClr val="1A221E"/>
+                </a:solidFill>
+                <a:latin typeface="Helvetica"/>
+              </a:rPr>
+              <a:t>It adds up fast</a:t>
+            </a:r>
+          </a:p>
+        </p:txBody>
+      </p:sp>
+      <p:sp>
+        <p:nvSpPr>
+          <p:cNvPr id="20" name="TextBox 19"/>
+          <p:cNvSpPr txBox="1"/>
+          <p:nvPr/>
+        </p:nvSpPr>
+        <p:spPr>
+          <a:xfrm>
+            <a:off x="1417320" y="4297680"/>
+            <a:ext cx="5303520" cy="457200"/>
+          </a:xfrm>
+          <a:prstGeom prst="rect">
+            <a:avLst/>
+          </a:prstGeom>
+          <a:noFill/>
+        </p:spPr>
+        <p:txBody>
+          <a:bodyPr wrap="square" anchor="t"/>
+          <a:lstStyle/>
+          <a:p>
+            <a:pPr algn="l">
+              <a:spcBef>
+                <a:spcPts val="0"/>
+              </a:spcBef>
+              <a:spcAft>
+                <a:spcPts val="0"/>
+              </a:spcAft>
+            </a:pPr>
+            <a:r>
+              <a:rPr sz="1400" b="0">
+                <a:cs typeface="Helvetica"/>
+                <a:ea typeface="Helvetica"/>
+                <a:solidFill>
+                  <a:srgbClr val="4A5850"/>
+                </a:solidFill>
+                <a:latin typeface="Helvetica"/>
+              </a:rPr>
+              <a:t>Every file × every question × every agent × every day. Cost and latency climb together.</a:t>
+            </a:r>
+          </a:p>
+        </p:txBody>
+      </p:sp>
+      <p:sp>
+        <p:nvSpPr>
+          <p:cNvPr id="21" name="Rectangle 20"/>
+          <p:cNvSpPr/>
+          <p:nvPr/>
+        </p:nvSpPr>
+        <p:spPr>
+          <a:xfrm>
+            <a:off x="7360920" y="1325880"/>
+            <a:ext cx="4251960" cy="1965960"/>
+          </a:xfrm>
+          <a:prstGeom prst="rect">
+            <a:avLst/>
+          </a:prstGeom>
+          <a:solidFill>
+            <a:srgbClr val="1F5C42"/>
+          </a:solidFill>
+          <a:ln>
+            <a:noFill/>
+          </a:ln>
+        </p:spPr>
+        <p:style>
+          <a:lnRef idx="1">
+            <a:schemeClr val="accent1"/>
+          </a:lnRef>
+          <a:fillRef idx="3">
+            <a:schemeClr val="accent1"/>
+          </a:fillRef>
+          <a:effectRef idx="2">
+            <a:schemeClr val="accent1"/>
+          </a:effectRef>
+          <a:fontRef idx="minor">
+            <a:schemeClr val="lt1"/>
+          </a:fontRef>
+        </p:style>
+        <p:txBody>
+          <a:bodyPr rtlCol="0" anchor="ctr"/>
+          <a:lstStyle/>
+          <a:p>
+            <a:pPr algn="ctr"/>
+          </a:p>
+        </p:txBody>
+      </p:sp>
+      <p:sp>
+        <p:nvSpPr>
+          <p:cNvPr id="22" name="TextBox 21"/>
+          <p:cNvSpPr txBox="1"/>
+          <p:nvPr/>
+        </p:nvSpPr>
+        <p:spPr>
+          <a:xfrm>
+            <a:off x="7635240" y="1645920"/>
+            <a:ext cx="3749039" cy="640080"/>
+          </a:xfrm>
+          <a:prstGeom prst="rect">
+            <a:avLst/>
+          </a:prstGeom>
+          <a:noFill/>
+        </p:spPr>
+        <p:txBody>
+          <a:bodyPr wrap="square" anchor="t"/>
+          <a:lstStyle/>
+          <a:p>
+            <a:pPr algn="l">
+              <a:spcBef>
+                <a:spcPts val="0"/>
+              </a:spcBef>
+              <a:spcAft>
+                <a:spcPts val="0"/>
+              </a:spcAft>
+            </a:pPr>
+            <a:r>
+              <a:rPr sz="3400" b="1">
                 <a:cs typeface="Georgia"/>
                 <a:ea typeface="Georgia"/>
                 <a:solidFill>
-                  <a:srgbClr val="1F5C42"/>
+                  <a:srgbClr val="E8F0EB"/>
                 </a:solidFill>
                 <a:latin typeface="Georgia"/>
               </a:rPr>
-              <a:t>95%</a:t>
-            </a:r>
-          </a:p>
-        </p:txBody>
-      </p:sp>
-      <p:sp>
-        <p:nvSpPr>
-          <p:cNvPr id="20" name="TextBox 19"/>
+              <a:t>$61 → $2</a:t>
+            </a:r>
+          </a:p>
+        </p:txBody>
+      </p:sp>
+      <p:sp>
+        <p:nvSpPr>
+          <p:cNvPr id="23" name="TextBox 22"/>
           <p:cNvSpPr txBox="1"/>
           <p:nvPr/>
         </p:nvSpPr>
         <p:spPr>
           <a:xfrm>
-            <a:off x="7589520" y="4526280"/>
-            <a:ext cx="3657600" cy="731520"/>
+            <a:off x="7635240" y="2377440"/>
+            <a:ext cx="3749039" cy="731520"/>
           </a:xfrm>
           <a:prstGeom prst="rect">
             <a:avLst/>
@@ -4679,11 +4939,183 @@
                 <a:cs typeface="Helvetica"/>
                 <a:ea typeface="Helvetica"/>
                 <a:solidFill>
-                  <a:srgbClr val="4A5850"/>
+                  <a:srgbClr val="B8D0C4"/>
                 </a:solidFill>
                 <a:latin typeface="Helvetica"/>
               </a:rPr>
-              <a:t>of file tokens are wasted per task — across pdf, docx, xlsx, pptx, images</a:t>
+              <a:t>per 1,000 reads of one 100-page document (at $3 per million input tokens; demo cost meter default)</a:t>
+            </a:r>
+          </a:p>
+        </p:txBody>
+      </p:sp>
+      <p:sp>
+        <p:nvSpPr>
+          <p:cNvPr id="24" name="Rectangle 23"/>
+          <p:cNvSpPr/>
+          <p:nvPr/>
+        </p:nvSpPr>
+        <p:spPr>
+          <a:xfrm>
+            <a:off x="7360920" y="3474720"/>
+            <a:ext cx="4251960" cy="1965960"/>
+          </a:xfrm>
+          <a:prstGeom prst="rect">
+            <a:avLst/>
+          </a:prstGeom>
+          <a:solidFill>
+            <a:srgbClr val="F3F6F4"/>
+          </a:solidFill>
+          <a:ln w="12700">
+            <a:solidFill>
+              <a:srgbClr val="C8D2CB"/>
+            </a:solidFill>
+          </a:ln>
+        </p:spPr>
+        <p:style>
+          <a:lnRef idx="1">
+            <a:schemeClr val="accent1"/>
+          </a:lnRef>
+          <a:fillRef idx="3">
+            <a:schemeClr val="accent1"/>
+          </a:fillRef>
+          <a:effectRef idx="2">
+            <a:schemeClr val="accent1"/>
+          </a:effectRef>
+          <a:fontRef idx="minor">
+            <a:schemeClr val="lt1"/>
+          </a:fontRef>
+        </p:style>
+        <p:txBody>
+          <a:bodyPr rtlCol="0" anchor="ctr"/>
+          <a:lstStyle/>
+          <a:p>
+            <a:pPr algn="ctr"/>
+          </a:p>
+        </p:txBody>
+      </p:sp>
+      <p:sp>
+        <p:nvSpPr>
+          <p:cNvPr id="25" name="Rectangle 24"/>
+          <p:cNvSpPr/>
+          <p:nvPr/>
+        </p:nvSpPr>
+        <p:spPr>
+          <a:xfrm>
+            <a:off x="7360920" y="3474720"/>
+            <a:ext cx="4251960" cy="54864"/>
+          </a:xfrm>
+          <a:prstGeom prst="rect">
+            <a:avLst/>
+          </a:prstGeom>
+          <a:solidFill>
+            <a:srgbClr val="1F5C42"/>
+          </a:solidFill>
+          <a:ln>
+            <a:noFill/>
+          </a:ln>
+        </p:spPr>
+        <p:style>
+          <a:lnRef idx="1">
+            <a:schemeClr val="accent1"/>
+          </a:lnRef>
+          <a:fillRef idx="3">
+            <a:schemeClr val="accent1"/>
+          </a:fillRef>
+          <a:effectRef idx="2">
+            <a:schemeClr val="accent1"/>
+          </a:effectRef>
+          <a:fontRef idx="minor">
+            <a:schemeClr val="lt1"/>
+          </a:fontRef>
+        </p:style>
+        <p:txBody>
+          <a:bodyPr rtlCol="0" anchor="ctr"/>
+          <a:lstStyle/>
+          <a:p>
+            <a:pPr algn="ctr"/>
+          </a:p>
+        </p:txBody>
+      </p:sp>
+      <p:sp>
+        <p:nvSpPr>
+          <p:cNvPr id="26" name="TextBox 25"/>
+          <p:cNvSpPr txBox="1"/>
+          <p:nvPr/>
+        </p:nvSpPr>
+        <p:spPr>
+          <a:xfrm>
+            <a:off x="7635240" y="3794760"/>
+            <a:ext cx="3749039" cy="640080"/>
+          </a:xfrm>
+          <a:prstGeom prst="rect">
+            <a:avLst/>
+          </a:prstGeom>
+          <a:noFill/>
+        </p:spPr>
+        <p:txBody>
+          <a:bodyPr wrap="square" anchor="t"/>
+          <a:lstStyle/>
+          <a:p>
+            <a:pPr algn="l">
+              <a:spcBef>
+                <a:spcPts val="0"/>
+              </a:spcBef>
+              <a:spcAft>
+                <a:spcPts val="0"/>
+              </a:spcAft>
+            </a:pPr>
+            <a:r>
+              <a:rPr sz="3400" b="1">
+                <a:cs typeface="Georgia"/>
+                <a:ea typeface="Georgia"/>
+                <a:solidFill>
+                  <a:srgbClr val="1F5C42"/>
+                </a:solidFill>
+                <a:latin typeface="Georgia"/>
+              </a:rPr>
+              <a:t>~95%</a:t>
+            </a:r>
+          </a:p>
+        </p:txBody>
+      </p:sp>
+      <p:sp>
+        <p:nvSpPr>
+          <p:cNvPr id="27" name="TextBox 26"/>
+          <p:cNvSpPr txBox="1"/>
+          <p:nvPr/>
+        </p:nvSpPr>
+        <p:spPr>
+          <a:xfrm>
+            <a:off x="7635240" y="4526280"/>
+            <a:ext cx="3749039" cy="731520"/>
+          </a:xfrm>
+          <a:prstGeom prst="rect">
+            <a:avLst/>
+          </a:prstGeom>
+          <a:noFill/>
+        </p:spPr>
+        <p:txBody>
+          <a:bodyPr wrap="square" anchor="t"/>
+          <a:lstStyle/>
+          <a:p>
+            <a:pPr algn="l">
+              <a:spcBef>
+                <a:spcPts val="0"/>
+              </a:spcBef>
+              <a:spcAft>
+                <a:spcPts val="0"/>
+              </a:spcAft>
+            </a:pPr>
+            <a:r>
+              <a:rPr sz="1300" b="0">
+                <a:cs typeface="Helvetica"/>
+                <a:ea typeface="Helvetica"/>
+                <a:solidFill>
+                  <a:srgbClr val="4A5850"/>
+                </a:solidFill>
+                <a:latin typeface="Helvetica"/>
+              </a:rPr>
+              <a:t>of file tokens often unused for a single task, across pdf, docx, xlsx, pptx, and images</a:t>
             </a:r>
           </a:p>
         </p:txBody>
@@ -4751,14 +5183,99 @@
       </p:sp>
       <p:sp>
         <p:nvSpPr>
-          <p:cNvPr id="3" name="TextBox 2"/>
+          <p:cNvPr id="3" name="Rectangle 2"/>
+          <p:cNvSpPr/>
+          <p:nvPr/>
+        </p:nvSpPr>
+        <p:spPr>
+          <a:xfrm>
+            <a:off x="0" y="0"/>
+            <a:ext cx="164592" cy="6858000"/>
+          </a:xfrm>
+          <a:prstGeom prst="rect">
+            <a:avLst/>
+          </a:prstGeom>
+          <a:solidFill>
+            <a:srgbClr val="1F5C42"/>
+          </a:solidFill>
+          <a:ln>
+            <a:noFill/>
+          </a:ln>
+        </p:spPr>
+        <p:style>
+          <a:lnRef idx="1">
+            <a:schemeClr val="accent1"/>
+          </a:lnRef>
+          <a:fillRef idx="3">
+            <a:schemeClr val="accent1"/>
+          </a:fillRef>
+          <a:effectRef idx="2">
+            <a:schemeClr val="accent1"/>
+          </a:effectRef>
+          <a:fontRef idx="minor">
+            <a:schemeClr val="lt1"/>
+          </a:fontRef>
+        </p:style>
+        <p:txBody>
+          <a:bodyPr rtlCol="0" anchor="ctr"/>
+          <a:lstStyle/>
+          <a:p>
+            <a:pPr algn="ctr"/>
+          </a:p>
+        </p:txBody>
+      </p:sp>
+      <p:sp>
+        <p:nvSpPr>
+          <p:cNvPr id="4" name="TextBox 3"/>
           <p:cNvSpPr txBox="1"/>
           <p:nvPr/>
         </p:nvSpPr>
         <p:spPr>
           <a:xfrm>
-            <a:off x="640080" y="411480"/>
-            <a:ext cx="10972800" cy="640080"/>
+            <a:off x="594360" y="292608"/>
+            <a:ext cx="10972800" cy="256032"/>
+          </a:xfrm>
+          <a:prstGeom prst="rect">
+            <a:avLst/>
+          </a:prstGeom>
+          <a:noFill/>
+        </p:spPr>
+        <p:txBody>
+          <a:bodyPr wrap="square" anchor="t"/>
+          <a:lstStyle/>
+          <a:p>
+            <a:pPr algn="l">
+              <a:spcBef>
+                <a:spcPts val="0"/>
+              </a:spcBef>
+              <a:spcAft>
+                <a:spcPts val="0"/>
+              </a:spcAft>
+            </a:pPr>
+            <a:r>
+              <a:rPr sz="1100" b="1">
+                <a:cs typeface="Menlo"/>
+                <a:ea typeface="Menlo"/>
+                <a:solidFill>
+                  <a:srgbClr val="1F5C42"/>
+                </a:solidFill>
+                <a:latin typeface="Menlo"/>
+              </a:rPr>
+              <a:t>FIT</a:t>
+            </a:r>
+          </a:p>
+        </p:txBody>
+      </p:sp>
+      <p:sp>
+        <p:nvSpPr>
+          <p:cNvPr id="5" name="TextBox 4"/>
+          <p:cNvSpPr txBox="1"/>
+          <p:nvPr/>
+        </p:nvSpPr>
+        <p:spPr>
+          <a:xfrm>
+            <a:off x="594360" y="548640"/>
+            <a:ext cx="10972800" cy="502920"/>
           </a:xfrm>
           <a:prstGeom prst="rect">
             <a:avLst/>
@@ -4786,21 +5303,63 @@
                 </a:solidFill>
                 <a:latin typeface="Georgia"/>
               </a:rPr>
-              <a:t>Who buys, why now, where we wedge</a:t>
-            </a:r>
-          </a:p>
-        </p:txBody>
-      </p:sp>
-      <p:sp>
-        <p:nvSpPr>
-          <p:cNvPr id="4" name="Rectangle 3"/>
+              <a:t>Who it’s for, and where it fits</a:t>
+            </a:r>
+          </a:p>
+        </p:txBody>
+      </p:sp>
+      <p:sp>
+        <p:nvSpPr>
+          <p:cNvPr id="6" name="TextBox 5"/>
+          <p:cNvSpPr txBox="1"/>
+          <p:nvPr/>
+        </p:nvSpPr>
+        <p:spPr>
+          <a:xfrm>
+            <a:off x="594360" y="1097280"/>
+            <a:ext cx="10972800" cy="365760"/>
+          </a:xfrm>
+          <a:prstGeom prst="rect">
+            <a:avLst/>
+          </a:prstGeom>
+          <a:noFill/>
+        </p:spPr>
+        <p:txBody>
+          <a:bodyPr wrap="square" anchor="t"/>
+          <a:lstStyle/>
+          <a:p>
+            <a:pPr algn="l">
+              <a:spcBef>
+                <a:spcPts val="0"/>
+              </a:spcBef>
+              <a:spcAft>
+                <a:spcPts val="0"/>
+              </a:spcAft>
+            </a:pPr>
+            <a:r>
+              <a:rPr sz="1400" b="0">
+                <a:cs typeface="Helvetica"/>
+                <a:ea typeface="Helvetica"/>
+                <a:solidFill>
+                  <a:srgbClr val="4A5850"/>
+                </a:solidFill>
+                <a:latin typeface="Helvetica"/>
+              </a:rPr>
+              <a:t>Plain version: who needs this, why we built it, what’s different, and how it sits next to converters.</a:t>
+            </a:r>
+          </a:p>
+        </p:txBody>
+      </p:sp>
+      <p:sp>
+        <p:nvSpPr>
+          <p:cNvPr id="7" name="Rectangle 6"/>
           <p:cNvSpPr/>
           <p:nvPr/>
         </p:nvSpPr>
         <p:spPr>
           <a:xfrm>
-            <a:off x="640080" y="1280160"/>
-            <a:ext cx="5303520" cy="2194560"/>
+            <a:off x="594360" y="1645920"/>
+            <a:ext cx="5303520" cy="2011680"/>
           </a:xfrm>
           <a:prstGeom prst="rect">
             <a:avLst/>
@@ -4838,14 +5397,14 @@
       </p:sp>
       <p:sp>
         <p:nvSpPr>
-          <p:cNvPr id="5" name="Rectangle 4"/>
+          <p:cNvPr id="8" name="Rectangle 7"/>
           <p:cNvSpPr/>
           <p:nvPr/>
         </p:nvSpPr>
         <p:spPr>
           <a:xfrm>
-            <a:off x="640080" y="1280160"/>
-            <a:ext cx="5303520" cy="45720"/>
+            <a:off x="594360" y="1645920"/>
+            <a:ext cx="5303520" cy="54864"/>
           </a:xfrm>
           <a:prstGeom prst="rect">
             <a:avLst/>
@@ -4881,14 +5440,14 @@
       </p:sp>
       <p:sp>
         <p:nvSpPr>
-          <p:cNvPr id="6" name="TextBox 5"/>
+          <p:cNvPr id="9" name="TextBox 8"/>
           <p:cNvSpPr txBox="1"/>
           <p:nvPr/>
         </p:nvSpPr>
         <p:spPr>
           <a:xfrm>
-            <a:off x="914400" y="1600200"/>
-            <a:ext cx="4754880" cy="411480"/>
+            <a:off x="868680" y="1920240"/>
+            <a:ext cx="4754880" cy="365760"/>
           </a:xfrm>
           <a:prstGeom prst="rect">
             <a:avLst/>
@@ -4916,21 +5475,21 @@
                 </a:solidFill>
                 <a:latin typeface="Helvetica"/>
               </a:rPr>
-              <a:t>Who buys</a:t>
-            </a:r>
-          </a:p>
-        </p:txBody>
-      </p:sp>
-      <p:sp>
-        <p:nvSpPr>
-          <p:cNvPr id="7" name="TextBox 6"/>
+              <a:t>Who</a:t>
+            </a:r>
+          </a:p>
+        </p:txBody>
+      </p:sp>
+      <p:sp>
+        <p:nvSpPr>
+          <p:cNvPr id="10" name="TextBox 9"/>
           <p:cNvSpPr txBox="1"/>
           <p:nvPr/>
         </p:nvSpPr>
         <p:spPr>
           <a:xfrm>
-            <a:off x="914400" y="2103120"/>
-            <a:ext cx="4754880" cy="1188720"/>
+            <a:off x="868680" y="2423160"/>
+            <a:ext cx="4754880" cy="1051560"/>
           </a:xfrm>
           <a:prstGeom prst="rect">
             <a:avLst/>
@@ -4958,21 +5517,21 @@
                 </a:solidFill>
                 <a:latin typeface="Helvetica"/>
               </a:rPr>
-              <a:t>Teams wiring coding and document agents — Cursor, Claude Code, Codex, and internal agent platforms.</a:t>
-            </a:r>
-          </a:p>
-        </p:txBody>
-      </p:sp>
-      <p:sp>
-        <p:nvSpPr>
-          <p:cNvPr id="8" name="Rectangle 7"/>
+              <a:t>People building coding and document agents. Cursor, Claude Code, Codex, and internal agent platforms.</a:t>
+            </a:r>
+          </a:p>
+        </p:txBody>
+      </p:sp>
+      <p:sp>
+        <p:nvSpPr>
+          <p:cNvPr id="11" name="Rectangle 10"/>
           <p:cNvSpPr/>
           <p:nvPr/>
         </p:nvSpPr>
         <p:spPr>
           <a:xfrm>
-            <a:off x="6263640" y="1280160"/>
-            <a:ext cx="5303520" cy="2194560"/>
+            <a:off x="6263640" y="1645920"/>
+            <a:ext cx="5303520" cy="2011680"/>
           </a:xfrm>
           <a:prstGeom prst="rect">
             <a:avLst/>
@@ -5010,14 +5569,14 @@
       </p:sp>
       <p:sp>
         <p:nvSpPr>
-          <p:cNvPr id="9" name="Rectangle 8"/>
+          <p:cNvPr id="12" name="Rectangle 11"/>
           <p:cNvSpPr/>
           <p:nvPr/>
         </p:nvSpPr>
         <p:spPr>
           <a:xfrm>
-            <a:off x="6263640" y="1280160"/>
-            <a:ext cx="5303520" cy="45720"/>
+            <a:off x="6263640" y="1645920"/>
+            <a:ext cx="5303520" cy="54864"/>
           </a:xfrm>
           <a:prstGeom prst="rect">
             <a:avLst/>
@@ -5053,14 +5612,14 @@
       </p:sp>
       <p:sp>
         <p:nvSpPr>
-          <p:cNvPr id="10" name="TextBox 9"/>
+          <p:cNvPr id="13" name="TextBox 12"/>
           <p:cNvSpPr txBox="1"/>
           <p:nvPr/>
         </p:nvSpPr>
         <p:spPr>
           <a:xfrm>
-            <a:off x="6537960" y="1600200"/>
-            <a:ext cx="4754880" cy="411480"/>
+            <a:off x="6537960" y="1920240"/>
+            <a:ext cx="4754880" cy="365760"/>
           </a:xfrm>
           <a:prstGeom prst="rect">
             <a:avLst/>
@@ -5088,21 +5647,21 @@
                 </a:solidFill>
                 <a:latin typeface="Helvetica"/>
               </a:rPr>
-              <a:t>Why now</a:t>
-            </a:r>
-          </a:p>
-        </p:txBody>
-      </p:sp>
-      <p:sp>
-        <p:nvSpPr>
-          <p:cNvPr id="11" name="TextBox 10"/>
+              <a:t>Why it exists</a:t>
+            </a:r>
+          </a:p>
+        </p:txBody>
+      </p:sp>
+      <p:sp>
+        <p:nvSpPr>
+          <p:cNvPr id="14" name="TextBox 13"/>
           <p:cNvSpPr txBox="1"/>
           <p:nvPr/>
         </p:nvSpPr>
         <p:spPr>
           <a:xfrm>
-            <a:off x="6537960" y="2103120"/>
-            <a:ext cx="4754880" cy="1188720"/>
+            <a:off x="6537960" y="2423160"/>
+            <a:ext cx="4754880" cy="1051560"/>
           </a:xfrm>
           <a:prstGeom prst="rect">
             <a:avLst/>
@@ -5130,21 +5689,148 @@
                 </a:solidFill>
                 <a:latin typeface="Helvetica"/>
               </a:rPr>
-              <a:t>MCP is the distribution rail. Context windows + $/Mtok make whole-file reads expensive. Agents re-read the same docs across tasks.</a:t>
-            </a:r>
-          </a:p>
-        </p:txBody>
-      </p:sp>
-      <p:sp>
-        <p:nvSpPr>
-          <p:cNvPr id="12" name="Rectangle 11"/>
+              <a:t>Whole-file reads are getting expensive. Agents keep reopening the same manuals and reports for different questions.</a:t>
+            </a:r>
+          </a:p>
+        </p:txBody>
+      </p:sp>
+      <p:sp>
+        <p:nvSpPr>
+          <p:cNvPr id="15" name="Rectangle 14"/>
           <p:cNvSpPr/>
           <p:nvPr/>
         </p:nvSpPr>
         <p:spPr>
           <a:xfrm>
-            <a:off x="640080" y="3794760"/>
-            <a:ext cx="5303520" cy="2194560"/>
+            <a:off x="594360" y="3977639"/>
+            <a:ext cx="5303520" cy="2011680"/>
+          </a:xfrm>
+          <a:prstGeom prst="rect">
+            <a:avLst/>
+          </a:prstGeom>
+          <a:solidFill>
+            <a:srgbClr val="1F5C42"/>
+          </a:solidFill>
+          <a:ln>
+            <a:noFill/>
+          </a:ln>
+        </p:spPr>
+        <p:style>
+          <a:lnRef idx="1">
+            <a:schemeClr val="accent1"/>
+          </a:lnRef>
+          <a:fillRef idx="3">
+            <a:schemeClr val="accent1"/>
+          </a:fillRef>
+          <a:effectRef idx="2">
+            <a:schemeClr val="accent1"/>
+          </a:effectRef>
+          <a:fontRef idx="minor">
+            <a:schemeClr val="lt1"/>
+          </a:fontRef>
+        </p:style>
+        <p:txBody>
+          <a:bodyPr rtlCol="0" anchor="ctr"/>
+          <a:lstStyle/>
+          <a:p>
+            <a:pPr algn="ctr"/>
+          </a:p>
+        </p:txBody>
+      </p:sp>
+      <p:sp>
+        <p:nvSpPr>
+          <p:cNvPr id="16" name="TextBox 15"/>
+          <p:cNvSpPr txBox="1"/>
+          <p:nvPr/>
+        </p:nvSpPr>
+        <p:spPr>
+          <a:xfrm>
+            <a:off x="868680" y="4251959"/>
+            <a:ext cx="4754880" cy="365760"/>
+          </a:xfrm>
+          <a:prstGeom prst="rect">
+            <a:avLst/>
+          </a:prstGeom>
+          <a:noFill/>
+        </p:spPr>
+        <p:txBody>
+          <a:bodyPr wrap="square" anchor="t"/>
+          <a:lstStyle/>
+          <a:p>
+            <a:pPr algn="l">
+              <a:spcBef>
+                <a:spcPts val="0"/>
+              </a:spcBef>
+              <a:spcAft>
+                <a:spcPts val="0"/>
+              </a:spcAft>
+            </a:pPr>
+            <a:r>
+              <a:rPr sz="1800" b="1">
+                <a:cs typeface="Helvetica"/>
+                <a:ea typeface="Helvetica"/>
+                <a:solidFill>
+                  <a:srgbClr val="E8F0EB"/>
+                </a:solidFill>
+                <a:latin typeface="Helvetica"/>
+              </a:rPr>
+              <a:t>What’s different</a:t>
+            </a:r>
+          </a:p>
+        </p:txBody>
+      </p:sp>
+      <p:sp>
+        <p:nvSpPr>
+          <p:cNvPr id="17" name="TextBox 16"/>
+          <p:cNvSpPr txBox="1"/>
+          <p:nvPr/>
+        </p:nvSpPr>
+        <p:spPr>
+          <a:xfrm>
+            <a:off x="868680" y="4754879"/>
+            <a:ext cx="4754880" cy="1051560"/>
+          </a:xfrm>
+          <a:prstGeom prst="rect">
+            <a:avLst/>
+          </a:prstGeom>
+          <a:noFill/>
+        </p:spPr>
+        <p:txBody>
+          <a:bodyPr wrap="square" anchor="t"/>
+          <a:lstStyle/>
+          <a:p>
+            <a:pPr algn="l">
+              <a:spcBef>
+                <a:spcPts val="0"/>
+              </a:spcBef>
+              <a:spcAft>
+                <a:spcPts val="0"/>
+              </a:spcAft>
+            </a:pPr>
+            <a:r>
+              <a:rPr sz="1400" b="0">
+                <a:cs typeface="Helvetica"/>
+                <a:ea typeface="Helvetica"/>
+                <a:solidFill>
+                  <a:srgbClr val="B8D0C4"/>
+                </a:solidFill>
+                <a:latin typeface="Helvetica"/>
+              </a:rPr>
+              <a:t>One job. Pick what the agent needs under a hard token budget. Not a full search platform.</a:t>
+            </a:r>
+          </a:p>
+        </p:txBody>
+      </p:sp>
+      <p:sp>
+        <p:nvSpPr>
+          <p:cNvPr id="18" name="Rectangle 17"/>
+          <p:cNvSpPr/>
+          <p:nvPr/>
+        </p:nvSpPr>
+        <p:spPr>
+          <a:xfrm>
+            <a:off x="6263640" y="3977639"/>
+            <a:ext cx="5303520" cy="2011680"/>
           </a:xfrm>
           <a:prstGeom prst="rect">
             <a:avLst/>
@@ -5182,14 +5868,14 @@
       </p:sp>
       <p:sp>
         <p:nvSpPr>
-          <p:cNvPr id="13" name="Rectangle 12"/>
+          <p:cNvPr id="19" name="Rectangle 18"/>
           <p:cNvSpPr/>
           <p:nvPr/>
         </p:nvSpPr>
         <p:spPr>
           <a:xfrm>
-            <a:off x="640080" y="3794760"/>
-            <a:ext cx="5303520" cy="45720"/>
+            <a:off x="6263640" y="3977639"/>
+            <a:ext cx="5303520" cy="54864"/>
           </a:xfrm>
           <a:prstGeom prst="rect">
             <a:avLst/>
@@ -5225,14 +5911,14 @@
       </p:sp>
       <p:sp>
         <p:nvSpPr>
-          <p:cNvPr id="14" name="TextBox 13"/>
+          <p:cNvPr id="20" name="TextBox 19"/>
           <p:cNvSpPr txBox="1"/>
           <p:nvPr/>
         </p:nvSpPr>
         <p:spPr>
           <a:xfrm>
-            <a:off x="914400" y="4114800"/>
-            <a:ext cx="4754880" cy="411480"/>
+            <a:off x="6537960" y="4251959"/>
+            <a:ext cx="4754880" cy="365760"/>
           </a:xfrm>
           <a:prstGeom prst="rect">
             <a:avLst/>
@@ -5260,21 +5946,21 @@
                 </a:solidFill>
                 <a:latin typeface="Helvetica"/>
               </a:rPr>
-              <a:t>Wedge</a:t>
-            </a:r>
-          </a:p>
-        </p:txBody>
-      </p:sp>
-      <p:sp>
-        <p:nvSpPr>
-          <p:cNvPr id="15" name="TextBox 14"/>
+              <a:t>Where it fits</a:t>
+            </a:r>
+          </a:p>
+        </p:txBody>
+      </p:sp>
+      <p:sp>
+        <p:nvSpPr>
+          <p:cNvPr id="21" name="TextBox 20"/>
           <p:cNvSpPr txBox="1"/>
           <p:nvPr/>
         </p:nvSpPr>
         <p:spPr>
           <a:xfrm>
-            <a:off x="914400" y="4617720"/>
-            <a:ext cx="4754880" cy="1188720"/>
+            <a:off x="6537960" y="4754879"/>
+            <a:ext cx="4754880" cy="1051560"/>
           </a:xfrm>
           <a:prstGeom prst="rect">
             <a:avLst/>
@@ -5302,179 +5988,7 @@
                 </a:solidFill>
                 <a:latin typeface="Helvetica"/>
               </a:rPr>
-              <a:t>A task-budgeted file prep layer — not a full RAG platform. One job: select what the agent needs under a hard token budget.</a:t>
-            </a:r>
-          </a:p>
-        </p:txBody>
-      </p:sp>
-      <p:sp>
-        <p:nvSpPr>
-          <p:cNvPr id="16" name="Rectangle 15"/>
-          <p:cNvSpPr/>
-          <p:nvPr/>
-        </p:nvSpPr>
-        <p:spPr>
-          <a:xfrm>
-            <a:off x="6263640" y="3794760"/>
-            <a:ext cx="5303520" cy="2194560"/>
-          </a:xfrm>
-          <a:prstGeom prst="rect">
-            <a:avLst/>
-          </a:prstGeom>
-          <a:solidFill>
-            <a:srgbClr val="F3F6F4"/>
-          </a:solidFill>
-          <a:ln w="12700">
-            <a:solidFill>
-              <a:srgbClr val="C8D2CB"/>
-            </a:solidFill>
-          </a:ln>
-        </p:spPr>
-        <p:style>
-          <a:lnRef idx="1">
-            <a:schemeClr val="accent1"/>
-          </a:lnRef>
-          <a:fillRef idx="3">
-            <a:schemeClr val="accent1"/>
-          </a:fillRef>
-          <a:effectRef idx="2">
-            <a:schemeClr val="accent1"/>
-          </a:effectRef>
-          <a:fontRef idx="minor">
-            <a:schemeClr val="lt1"/>
-          </a:fontRef>
-        </p:style>
-        <p:txBody>
-          <a:bodyPr rtlCol="0" anchor="ctr"/>
-          <a:lstStyle/>
-          <a:p>
-            <a:pPr algn="ctr"/>
-          </a:p>
-        </p:txBody>
-      </p:sp>
-      <p:sp>
-        <p:nvSpPr>
-          <p:cNvPr id="17" name="Rectangle 16"/>
-          <p:cNvSpPr/>
-          <p:nvPr/>
-        </p:nvSpPr>
-        <p:spPr>
-          <a:xfrm>
-            <a:off x="6263640" y="3794760"/>
-            <a:ext cx="5303520" cy="45720"/>
-          </a:xfrm>
-          <a:prstGeom prst="rect">
-            <a:avLst/>
-          </a:prstGeom>
-          <a:solidFill>
-            <a:srgbClr val="1F5C42"/>
-          </a:solidFill>
-          <a:ln>
-            <a:noFill/>
-          </a:ln>
-        </p:spPr>
-        <p:style>
-          <a:lnRef idx="1">
-            <a:schemeClr val="accent1"/>
-          </a:lnRef>
-          <a:fillRef idx="3">
-            <a:schemeClr val="accent1"/>
-          </a:fillRef>
-          <a:effectRef idx="2">
-            <a:schemeClr val="accent1"/>
-          </a:effectRef>
-          <a:fontRef idx="minor">
-            <a:schemeClr val="lt1"/>
-          </a:fontRef>
-        </p:style>
-        <p:txBody>
-          <a:bodyPr rtlCol="0" anchor="ctr"/>
-          <a:lstStyle/>
-          <a:p>
-            <a:pPr algn="ctr"/>
-          </a:p>
-        </p:txBody>
-      </p:sp>
-      <p:sp>
-        <p:nvSpPr>
-          <p:cNvPr id="18" name="TextBox 17"/>
-          <p:cNvSpPr txBox="1"/>
-          <p:nvPr/>
-        </p:nvSpPr>
-        <p:spPr>
-          <a:xfrm>
-            <a:off x="6537960" y="4114800"/>
-            <a:ext cx="4754880" cy="411480"/>
-          </a:xfrm>
-          <a:prstGeom prst="rect">
-            <a:avLst/>
-          </a:prstGeom>
-          <a:noFill/>
-        </p:spPr>
-        <p:txBody>
-          <a:bodyPr wrap="square" anchor="t"/>
-          <a:lstStyle/>
-          <a:p>
-            <a:pPr algn="l">
-              <a:spcBef>
-                <a:spcPts val="0"/>
-              </a:spcBef>
-              <a:spcAft>
-                <a:spcPts val="0"/>
-              </a:spcAft>
-            </a:pPr>
-            <a:r>
-              <a:rPr sz="1800" b="1">
-                <a:cs typeface="Helvetica"/>
-                <a:ea typeface="Helvetica"/>
-                <a:solidFill>
-                  <a:srgbClr val="1F5C42"/>
-                </a:solidFill>
-                <a:latin typeface="Helvetica"/>
-              </a:rPr>
-              <a:t>Vs converters</a:t>
-            </a:r>
-          </a:p>
-        </p:txBody>
-      </p:sp>
-      <p:sp>
-        <p:nvSpPr>
-          <p:cNvPr id="19" name="TextBox 18"/>
-          <p:cNvSpPr txBox="1"/>
-          <p:nvPr/>
-        </p:nvSpPr>
-        <p:spPr>
-          <a:xfrm>
-            <a:off x="6537960" y="4617720"/>
-            <a:ext cx="4754880" cy="1188720"/>
-          </a:xfrm>
-          <a:prstGeom prst="rect">
-            <a:avLst/>
-          </a:prstGeom>
-          <a:noFill/>
-        </p:spPr>
-        <p:txBody>
-          <a:bodyPr wrap="square" anchor="t"/>
-          <a:lstStyle/>
-          <a:p>
-            <a:pPr algn="l">
-              <a:spcBef>
-                <a:spcPts val="0"/>
-              </a:spcBef>
-              <a:spcAft>
-                <a:spcPts val="0"/>
-              </a:spcAft>
-            </a:pPr>
-            <a:r>
-              <a:rPr sz="1400" b="0">
-                <a:cs typeface="Helvetica"/>
-                <a:ea typeface="Helvetica"/>
-                <a:solidFill>
-                  <a:srgbClr val="4A5850"/>
-                </a:solidFill>
-                <a:latin typeface="Helvetica"/>
-              </a:rPr>
-              <a:t>Converters: format-in → whole-file-out. We select under budget and return a recoverable omitted-sections manifest.</a:t>
+              <a:t>Converters turn a file into text of the whole thing. We select under a budget and tell you what was left out, so you can pull more if needed.</a:t>
             </a:r>
           </a:p>
         </p:txBody>
@@ -5542,14 +6056,57 @@
       </p:sp>
       <p:sp>
         <p:nvSpPr>
-          <p:cNvPr id="3" name="TextBox 2"/>
+          <p:cNvPr id="3" name="Rectangle 2"/>
+          <p:cNvSpPr/>
+          <p:nvPr/>
+        </p:nvSpPr>
+        <p:spPr>
+          <a:xfrm>
+            <a:off x="0" y="0"/>
+            <a:ext cx="164592" cy="6858000"/>
+          </a:xfrm>
+          <a:prstGeom prst="rect">
+            <a:avLst/>
+          </a:prstGeom>
+          <a:solidFill>
+            <a:srgbClr val="1F5C42"/>
+          </a:solidFill>
+          <a:ln>
+            <a:noFill/>
+          </a:ln>
+        </p:spPr>
+        <p:style>
+          <a:lnRef idx="1">
+            <a:schemeClr val="accent1"/>
+          </a:lnRef>
+          <a:fillRef idx="3">
+            <a:schemeClr val="accent1"/>
+          </a:fillRef>
+          <a:effectRef idx="2">
+            <a:schemeClr val="accent1"/>
+          </a:effectRef>
+          <a:fontRef idx="minor">
+            <a:schemeClr val="lt1"/>
+          </a:fontRef>
+        </p:style>
+        <p:txBody>
+          <a:bodyPr rtlCol="0" anchor="ctr"/>
+          <a:lstStyle/>
+          <a:p>
+            <a:pPr algn="ctr"/>
+          </a:p>
+        </p:txBody>
+      </p:sp>
+      <p:sp>
+        <p:nvSpPr>
+          <p:cNvPr id="4" name="TextBox 3"/>
           <p:cNvSpPr txBox="1"/>
           <p:nvPr/>
         </p:nvSpPr>
         <p:spPr>
           <a:xfrm>
-            <a:off x="640080" y="365760"/>
-            <a:ext cx="10972800" cy="502920"/>
+            <a:off x="594360" y="292608"/>
+            <a:ext cx="10972800" cy="256032"/>
           </a:xfrm>
           <a:prstGeom prst="rect">
             <a:avLst/>
@@ -5569,28 +6126,70 @@
               </a:spcAft>
             </a:pPr>
             <a:r>
-              <a:rPr sz="2600" b="1">
+              <a:rPr sz="1100" b="1">
                 <a:cs typeface="Menlo"/>
                 <a:ea typeface="Menlo"/>
                 <a:solidFill>
-                  <a:srgbClr val="1A221E"/>
+                  <a:srgbClr val="1F5C42"/>
                 </a:solidFill>
                 <a:latin typeface="Menlo"/>
               </a:rPr>
-              <a:t>compile_context(file, task, budget)</a:t>
-            </a:r>
-          </a:p>
-        </p:txBody>
-      </p:sp>
-      <p:sp>
-        <p:nvSpPr>
-          <p:cNvPr id="4" name="TextBox 3"/>
+              <a:t>PIPELINE</a:t>
+            </a:r>
+          </a:p>
+        </p:txBody>
+      </p:sp>
+      <p:sp>
+        <p:nvSpPr>
+          <p:cNvPr id="5" name="TextBox 4"/>
           <p:cNvSpPr txBox="1"/>
           <p:nvPr/>
         </p:nvSpPr>
         <p:spPr>
           <a:xfrm>
-            <a:off x="640080" y="914400"/>
+            <a:off x="594360" y="548640"/>
+            <a:ext cx="10972800" cy="457200"/>
+          </a:xfrm>
+          <a:prstGeom prst="rect">
+            <a:avLst/>
+          </a:prstGeom>
+          <a:noFill/>
+        </p:spPr>
+        <p:txBody>
+          <a:bodyPr wrap="square" anchor="t"/>
+          <a:lstStyle/>
+          <a:p>
+            <a:pPr algn="l">
+              <a:spcBef>
+                <a:spcPts val="0"/>
+              </a:spcBef>
+              <a:spcAft>
+                <a:spcPts val="0"/>
+              </a:spcAft>
+            </a:pPr>
+            <a:r>
+              <a:rPr sz="2600" b="1">
+                <a:cs typeface="Georgia"/>
+                <a:ea typeface="Georgia"/>
+                <a:solidFill>
+                  <a:srgbClr val="1A221E"/>
+                </a:solidFill>
+                <a:latin typeface="Georgia"/>
+              </a:rPr>
+              <a:t>File in. Useful parts out. Under your budget.</a:t>
+            </a:r>
+          </a:p>
+        </p:txBody>
+      </p:sp>
+      <p:sp>
+        <p:nvSpPr>
+          <p:cNvPr id="6" name="TextBox 5"/>
+          <p:cNvSpPr txBox="1"/>
+          <p:nvPr/>
+        </p:nvSpPr>
+        <p:spPr>
+          <a:xfrm>
+            <a:off x="594360" y="1051560"/>
             <a:ext cx="10972800" cy="365760"/>
           </a:xfrm>
           <a:prstGeom prst="rect">
@@ -5619,21 +6218,21 @@
                 </a:solidFill>
                 <a:latin typeface="Helvetica"/>
               </a:rPr>
-              <a:t>One tool call in — guaranteed-size, task-relevant markdown out.</a:t>
-            </a:r>
-          </a:p>
-        </p:txBody>
-      </p:sp>
-      <p:sp>
-        <p:nvSpPr>
-          <p:cNvPr id="5" name="Rectangle 4"/>
+              <a:t>You set the ceiling. The agent gets markdown it can read, plus a list of skipped sections.</a:t>
+            </a:r>
+          </a:p>
+        </p:txBody>
+      </p:sp>
+      <p:sp>
+        <p:nvSpPr>
+          <p:cNvPr id="7" name="Rectangle 6"/>
           <p:cNvSpPr/>
           <p:nvPr/>
         </p:nvSpPr>
         <p:spPr>
           <a:xfrm>
-            <a:off x="640080" y="1508760"/>
-            <a:ext cx="2468880" cy="1554480"/>
+            <a:off x="594360" y="1554480"/>
+            <a:ext cx="2514600" cy="1874519"/>
           </a:xfrm>
           <a:prstGeom prst="rect">
             <a:avLst/>
@@ -5671,14 +6270,14 @@
       </p:sp>
       <p:sp>
         <p:nvSpPr>
-          <p:cNvPr id="6" name="Rectangle 5"/>
+          <p:cNvPr id="8" name="Rectangle 7"/>
           <p:cNvSpPr/>
           <p:nvPr/>
         </p:nvSpPr>
         <p:spPr>
           <a:xfrm>
-            <a:off x="640080" y="1508760"/>
-            <a:ext cx="2468880" cy="45720"/>
+            <a:off x="594360" y="1554480"/>
+            <a:ext cx="2514600" cy="54864"/>
           </a:xfrm>
           <a:prstGeom prst="rect">
             <a:avLst/>
@@ -5714,14 +6313,14 @@
       </p:sp>
       <p:sp>
         <p:nvSpPr>
-          <p:cNvPr id="7" name="TextBox 6"/>
+          <p:cNvPr id="9" name="TextBox 8"/>
           <p:cNvSpPr txBox="1"/>
           <p:nvPr/>
         </p:nvSpPr>
         <p:spPr>
           <a:xfrm>
-            <a:off x="804672" y="1737360"/>
-            <a:ext cx="2194560" cy="365760"/>
+            <a:off x="777240" y="1737360"/>
+            <a:ext cx="2194560" cy="274320"/>
           </a:xfrm>
           <a:prstGeom prst="rect">
             <a:avLst/>
@@ -5741,7 +6340,7 @@
               </a:spcAft>
             </a:pPr>
             <a:r>
-              <a:rPr sz="1500" b="1">
+              <a:rPr sz="1200" b="1">
                 <a:cs typeface="Menlo"/>
                 <a:ea typeface="Menlo"/>
                 <a:solidFill>
@@ -5749,21 +6348,63 @@
                 </a:solidFill>
                 <a:latin typeface="Menlo"/>
               </a:rPr>
-              <a:t>1 · Convert</a:t>
-            </a:r>
-          </a:p>
-        </p:txBody>
-      </p:sp>
-      <p:sp>
-        <p:nvSpPr>
-          <p:cNvPr id="8" name="TextBox 7"/>
+              <a:t>1</a:t>
+            </a:r>
+          </a:p>
+        </p:txBody>
+      </p:sp>
+      <p:sp>
+        <p:nvSpPr>
+          <p:cNvPr id="10" name="TextBox 9"/>
           <p:cNvSpPr txBox="1"/>
           <p:nvPr/>
         </p:nvSpPr>
         <p:spPr>
           <a:xfrm>
-            <a:off x="804672" y="2194560"/>
-            <a:ext cx="2194560" cy="731520"/>
+            <a:off x="777240" y="2057400"/>
+            <a:ext cx="2194560" cy="320040"/>
+          </a:xfrm>
+          <a:prstGeom prst="rect">
+            <a:avLst/>
+          </a:prstGeom>
+          <a:noFill/>
+        </p:spPr>
+        <p:txBody>
+          <a:bodyPr wrap="square" anchor="t"/>
+          <a:lstStyle/>
+          <a:p>
+            <a:pPr algn="l">
+              <a:spcBef>
+                <a:spcPts val="0"/>
+              </a:spcBef>
+              <a:spcAft>
+                <a:spcPts val="0"/>
+              </a:spcAft>
+            </a:pPr>
+            <a:r>
+              <a:rPr sz="1700" b="1">
+                <a:cs typeface="Helvetica"/>
+                <a:ea typeface="Helvetica"/>
+                <a:solidFill>
+                  <a:srgbClr val="1A221E"/>
+                </a:solidFill>
+                <a:latin typeface="Helvetica"/>
+              </a:rPr>
+              <a:t>Convert</a:t>
+            </a:r>
+          </a:p>
+        </p:txBody>
+      </p:sp>
+      <p:sp>
+        <p:nvSpPr>
+          <p:cNvPr id="11" name="TextBox 10"/>
+          <p:cNvSpPr txBox="1"/>
+          <p:nvPr/>
+        </p:nvSpPr>
+        <p:spPr>
+          <a:xfrm>
+            <a:off x="777240" y="2468880"/>
+            <a:ext cx="2194560" cy="777240"/>
           </a:xfrm>
           <a:prstGeom prst="rect">
             <a:avLst/>
@@ -5791,21 +6432,21 @@
                 </a:solidFill>
                 <a:latin typeface="Helvetica"/>
               </a:rPr>
-              <a:t>markitdown + content-hash cache</a:t>
-            </a:r>
-          </a:p>
-        </p:txBody>
-      </p:sp>
-      <p:sp>
-        <p:nvSpPr>
-          <p:cNvPr id="9" name="Rectangle 8"/>
+              <a:t>Turn the file into markdown. Cache by content so repeats are cheap.</a:t>
+            </a:r>
+          </a:p>
+        </p:txBody>
+      </p:sp>
+      <p:sp>
+        <p:nvSpPr>
+          <p:cNvPr id="12" name="Rectangle 11"/>
           <p:cNvSpPr/>
           <p:nvPr/>
         </p:nvSpPr>
         <p:spPr>
           <a:xfrm>
-            <a:off x="3127248" y="2194560"/>
-            <a:ext cx="164592" cy="36576"/>
+            <a:off x="3127248" y="2377440"/>
+            <a:ext cx="146304" cy="36576"/>
           </a:xfrm>
           <a:prstGeom prst="rect">
             <a:avLst/>
@@ -5841,14 +6482,14 @@
       </p:sp>
       <p:sp>
         <p:nvSpPr>
-          <p:cNvPr id="10" name="Rectangle 9"/>
+          <p:cNvPr id="13" name="Rectangle 12"/>
           <p:cNvSpPr/>
           <p:nvPr/>
         </p:nvSpPr>
         <p:spPr>
           <a:xfrm>
-            <a:off x="3310128" y="1508760"/>
-            <a:ext cx="2468880" cy="1554480"/>
+            <a:off x="3291840" y="1554480"/>
+            <a:ext cx="2514600" cy="1874519"/>
           </a:xfrm>
           <a:prstGeom prst="rect">
             <a:avLst/>
@@ -5886,14 +6527,14 @@
       </p:sp>
       <p:sp>
         <p:nvSpPr>
-          <p:cNvPr id="11" name="Rectangle 10"/>
+          <p:cNvPr id="14" name="Rectangle 13"/>
           <p:cNvSpPr/>
           <p:nvPr/>
         </p:nvSpPr>
         <p:spPr>
           <a:xfrm>
-            <a:off x="3310128" y="1508760"/>
-            <a:ext cx="2468880" cy="45720"/>
+            <a:off x="3291840" y="1554480"/>
+            <a:ext cx="2514600" cy="54864"/>
           </a:xfrm>
           <a:prstGeom prst="rect">
             <a:avLst/>
@@ -5929,14 +6570,14 @@
       </p:sp>
       <p:sp>
         <p:nvSpPr>
-          <p:cNvPr id="12" name="TextBox 11"/>
+          <p:cNvPr id="15" name="TextBox 14"/>
           <p:cNvSpPr txBox="1"/>
           <p:nvPr/>
         </p:nvSpPr>
         <p:spPr>
           <a:xfrm>
             <a:off x="3474720" y="1737360"/>
-            <a:ext cx="2194560" cy="365760"/>
+            <a:ext cx="2194560" cy="274320"/>
           </a:xfrm>
           <a:prstGeom prst="rect">
             <a:avLst/>
@@ -5956,7 +6597,7 @@
               </a:spcAft>
             </a:pPr>
             <a:r>
-              <a:rPr sz="1500" b="1">
+              <a:rPr sz="1200" b="1">
                 <a:cs typeface="Menlo"/>
                 <a:ea typeface="Menlo"/>
                 <a:solidFill>
@@ -5964,21 +6605,63 @@
                 </a:solidFill>
                 <a:latin typeface="Menlo"/>
               </a:rPr>
-              <a:t>2 · Chunk</a:t>
-            </a:r>
-          </a:p>
-        </p:txBody>
-      </p:sp>
-      <p:sp>
-        <p:nvSpPr>
-          <p:cNvPr id="13" name="TextBox 12"/>
+              <a:t>2</a:t>
+            </a:r>
+          </a:p>
+        </p:txBody>
+      </p:sp>
+      <p:sp>
+        <p:nvSpPr>
+          <p:cNvPr id="16" name="TextBox 15"/>
           <p:cNvSpPr txBox="1"/>
           <p:nvPr/>
         </p:nvSpPr>
         <p:spPr>
           <a:xfrm>
-            <a:off x="3474720" y="2194560"/>
-            <a:ext cx="2194560" cy="731520"/>
+            <a:off x="3474720" y="2057400"/>
+            <a:ext cx="2194560" cy="320040"/>
+          </a:xfrm>
+          <a:prstGeom prst="rect">
+            <a:avLst/>
+          </a:prstGeom>
+          <a:noFill/>
+        </p:spPr>
+        <p:txBody>
+          <a:bodyPr wrap="square" anchor="t"/>
+          <a:lstStyle/>
+          <a:p>
+            <a:pPr algn="l">
+              <a:spcBef>
+                <a:spcPts val="0"/>
+              </a:spcBef>
+              <a:spcAft>
+                <a:spcPts val="0"/>
+              </a:spcAft>
+            </a:pPr>
+            <a:r>
+              <a:rPr sz="1700" b="1">
+                <a:cs typeface="Helvetica"/>
+                <a:ea typeface="Helvetica"/>
+                <a:solidFill>
+                  <a:srgbClr val="1A221E"/>
+                </a:solidFill>
+                <a:latin typeface="Helvetica"/>
+              </a:rPr>
+              <a:t>Split</a:t>
+            </a:r>
+          </a:p>
+        </p:txBody>
+      </p:sp>
+      <p:sp>
+        <p:nvSpPr>
+          <p:cNvPr id="17" name="TextBox 16"/>
+          <p:cNvSpPr txBox="1"/>
+          <p:nvPr/>
+        </p:nvSpPr>
+        <p:spPr>
+          <a:xfrm>
+            <a:off x="3474720" y="2468880"/>
+            <a:ext cx="2194560" cy="777240"/>
           </a:xfrm>
           <a:prstGeom prst="rect">
             <a:avLst/>
@@ -6006,21 +6689,21 @@
                 </a:solidFill>
                 <a:latin typeface="Helvetica"/>
               </a:rPr>
-              <a:t>heading-aware; tables never split</a:t>
-            </a:r>
-          </a:p>
-        </p:txBody>
-      </p:sp>
-      <p:sp>
-        <p:nvSpPr>
-          <p:cNvPr id="14" name="Rectangle 13"/>
+              <a:t>Break on headings. Keep tables whole.</a:t>
+            </a:r>
+          </a:p>
+        </p:txBody>
+      </p:sp>
+      <p:sp>
+        <p:nvSpPr>
+          <p:cNvPr id="18" name="Rectangle 17"/>
           <p:cNvSpPr/>
           <p:nvPr/>
         </p:nvSpPr>
         <p:spPr>
           <a:xfrm>
-            <a:off x="5797296" y="2194560"/>
-            <a:ext cx="164592" cy="36576"/>
+            <a:off x="5824728" y="2377440"/>
+            <a:ext cx="146304" cy="36576"/>
           </a:xfrm>
           <a:prstGeom prst="rect">
             <a:avLst/>
@@ -6056,14 +6739,14 @@
       </p:sp>
       <p:sp>
         <p:nvSpPr>
-          <p:cNvPr id="15" name="Rectangle 14"/>
+          <p:cNvPr id="19" name="Rectangle 18"/>
           <p:cNvSpPr/>
           <p:nvPr/>
         </p:nvSpPr>
         <p:spPr>
           <a:xfrm>
-            <a:off x="5980176" y="1508760"/>
-            <a:ext cx="2468880" cy="1554480"/>
+            <a:off x="5989320" y="1554480"/>
+            <a:ext cx="2514600" cy="1874519"/>
           </a:xfrm>
           <a:prstGeom prst="rect">
             <a:avLst/>
@@ -6101,14 +6784,14 @@
       </p:sp>
       <p:sp>
         <p:nvSpPr>
-          <p:cNvPr id="16" name="Rectangle 15"/>
+          <p:cNvPr id="20" name="Rectangle 19"/>
           <p:cNvSpPr/>
           <p:nvPr/>
         </p:nvSpPr>
         <p:spPr>
           <a:xfrm>
-            <a:off x="5980176" y="1508760"/>
-            <a:ext cx="2468880" cy="45720"/>
+            <a:off x="5989320" y="1554480"/>
+            <a:ext cx="2514600" cy="54864"/>
           </a:xfrm>
           <a:prstGeom prst="rect">
             <a:avLst/>
@@ -6144,14 +6827,14 @@
       </p:sp>
       <p:sp>
         <p:nvSpPr>
-          <p:cNvPr id="17" name="TextBox 16"/>
+          <p:cNvPr id="21" name="TextBox 20"/>
           <p:cNvSpPr txBox="1"/>
           <p:nvPr/>
         </p:nvSpPr>
         <p:spPr>
           <a:xfrm>
-            <a:off x="6144768" y="1737360"/>
-            <a:ext cx="2194560" cy="365760"/>
+            <a:off x="6172200" y="1737360"/>
+            <a:ext cx="2194560" cy="274320"/>
           </a:xfrm>
           <a:prstGeom prst="rect">
             <a:avLst/>
@@ -6171,7 +6854,7 @@
               </a:spcAft>
             </a:pPr>
             <a:r>
-              <a:rPr sz="1500" b="1">
+              <a:rPr sz="1200" b="1">
                 <a:cs typeface="Menlo"/>
                 <a:ea typeface="Menlo"/>
                 <a:solidFill>
@@ -6179,21 +6862,63 @@
                 </a:solidFill>
                 <a:latin typeface="Menlo"/>
               </a:rPr>
-              <a:t>3 · Rank</a:t>
-            </a:r>
-          </a:p>
-        </p:txBody>
-      </p:sp>
-      <p:sp>
-        <p:nvSpPr>
-          <p:cNvPr id="18" name="TextBox 17"/>
+              <a:t>3</a:t>
+            </a:r>
+          </a:p>
+        </p:txBody>
+      </p:sp>
+      <p:sp>
+        <p:nvSpPr>
+          <p:cNvPr id="22" name="TextBox 21"/>
           <p:cNvSpPr txBox="1"/>
           <p:nvPr/>
         </p:nvSpPr>
         <p:spPr>
           <a:xfrm>
-            <a:off x="6144768" y="2194560"/>
-            <a:ext cx="2194560" cy="731520"/>
+            <a:off x="6172200" y="2057400"/>
+            <a:ext cx="2194560" cy="320040"/>
+          </a:xfrm>
+          <a:prstGeom prst="rect">
+            <a:avLst/>
+          </a:prstGeom>
+          <a:noFill/>
+        </p:spPr>
+        <p:txBody>
+          <a:bodyPr wrap="square" anchor="t"/>
+          <a:lstStyle/>
+          <a:p>
+            <a:pPr algn="l">
+              <a:spcBef>
+                <a:spcPts val="0"/>
+              </a:spcBef>
+              <a:spcAft>
+                <a:spcPts val="0"/>
+              </a:spcAft>
+            </a:pPr>
+            <a:r>
+              <a:rPr sz="1700" b="1">
+                <a:cs typeface="Helvetica"/>
+                <a:ea typeface="Helvetica"/>
+                <a:solidFill>
+                  <a:srgbClr val="1A221E"/>
+                </a:solidFill>
+                <a:latin typeface="Helvetica"/>
+              </a:rPr>
+              <a:t>Rank</a:t>
+            </a:r>
+          </a:p>
+        </p:txBody>
+      </p:sp>
+      <p:sp>
+        <p:nvSpPr>
+          <p:cNvPr id="23" name="TextBox 22"/>
+          <p:cNvSpPr txBox="1"/>
+          <p:nvPr/>
+        </p:nvSpPr>
+        <p:spPr>
+          <a:xfrm>
+            <a:off x="6172200" y="2468880"/>
+            <a:ext cx="2194560" cy="777240"/>
           </a:xfrm>
           <a:prstGeom prst="rect">
             <a:avLst/>
@@ -6221,21 +6946,21 @@
                 </a:solidFill>
                 <a:latin typeface="Helvetica"/>
               </a:rPr>
-              <a:t>BM25 + query cleanup — local, no LLM</a:t>
-            </a:r>
-          </a:p>
-        </p:txBody>
-      </p:sp>
-      <p:sp>
-        <p:nvSpPr>
-          <p:cNvPr id="19" name="Rectangle 18"/>
+              <a:t>Match sections to the question on your machine. No model call to compile.</a:t>
+            </a:r>
+          </a:p>
+        </p:txBody>
+      </p:sp>
+      <p:sp>
+        <p:nvSpPr>
+          <p:cNvPr id="24" name="Rectangle 23"/>
           <p:cNvSpPr/>
           <p:nvPr/>
         </p:nvSpPr>
         <p:spPr>
           <a:xfrm>
-            <a:off x="8467344" y="2194560"/>
-            <a:ext cx="164592" cy="36576"/>
+            <a:off x="8522208" y="2377440"/>
+            <a:ext cx="146304" cy="36576"/>
           </a:xfrm>
           <a:prstGeom prst="rect">
             <a:avLst/>
@@ -6271,14 +6996,14 @@
       </p:sp>
       <p:sp>
         <p:nvSpPr>
-          <p:cNvPr id="20" name="Rectangle 19"/>
+          <p:cNvPr id="25" name="Rectangle 24"/>
           <p:cNvSpPr/>
           <p:nvPr/>
         </p:nvSpPr>
         <p:spPr>
           <a:xfrm>
-            <a:off x="8650224" y="1508760"/>
-            <a:ext cx="2468880" cy="1554480"/>
+            <a:off x="8686800" y="1554480"/>
+            <a:ext cx="2514600" cy="1874519"/>
           </a:xfrm>
           <a:prstGeom prst="rect">
             <a:avLst/>
@@ -6316,14 +7041,14 @@
       </p:sp>
       <p:sp>
         <p:nvSpPr>
-          <p:cNvPr id="21" name="Rectangle 20"/>
+          <p:cNvPr id="26" name="Rectangle 25"/>
           <p:cNvSpPr/>
           <p:nvPr/>
         </p:nvSpPr>
         <p:spPr>
           <a:xfrm>
-            <a:off x="8650224" y="1508760"/>
-            <a:ext cx="2468880" cy="45720"/>
+            <a:off x="8686800" y="1554480"/>
+            <a:ext cx="2514600" cy="54864"/>
           </a:xfrm>
           <a:prstGeom prst="rect">
             <a:avLst/>
@@ -6359,14 +7084,14 @@
       </p:sp>
       <p:sp>
         <p:nvSpPr>
-          <p:cNvPr id="22" name="TextBox 21"/>
+          <p:cNvPr id="27" name="TextBox 26"/>
           <p:cNvSpPr txBox="1"/>
           <p:nvPr/>
         </p:nvSpPr>
         <p:spPr>
           <a:xfrm>
-            <a:off x="8814816" y="1737360"/>
-            <a:ext cx="2194560" cy="365760"/>
+            <a:off x="8869680" y="1737360"/>
+            <a:ext cx="2194560" cy="274320"/>
           </a:xfrm>
           <a:prstGeom prst="rect">
             <a:avLst/>
@@ -6386,7 +7111,7 @@
               </a:spcAft>
             </a:pPr>
             <a:r>
-              <a:rPr sz="1500" b="1">
+              <a:rPr sz="1200" b="1">
                 <a:cs typeface="Menlo"/>
                 <a:ea typeface="Menlo"/>
                 <a:solidFill>
@@ -6394,21 +7119,63 @@
                 </a:solidFill>
                 <a:latin typeface="Menlo"/>
               </a:rPr>
-              <a:t>4 · Pack</a:t>
-            </a:r>
-          </a:p>
-        </p:txBody>
-      </p:sp>
-      <p:sp>
-        <p:nvSpPr>
-          <p:cNvPr id="23" name="TextBox 22"/>
+              <a:t>4</a:t>
+            </a:r>
+          </a:p>
+        </p:txBody>
+      </p:sp>
+      <p:sp>
+        <p:nvSpPr>
+          <p:cNvPr id="28" name="TextBox 27"/>
           <p:cNvSpPr txBox="1"/>
           <p:nvPr/>
         </p:nvSpPr>
         <p:spPr>
           <a:xfrm>
-            <a:off x="8814816" y="2194560"/>
-            <a:ext cx="2194560" cy="731520"/>
+            <a:off x="8869680" y="2057400"/>
+            <a:ext cx="2194560" cy="320040"/>
+          </a:xfrm>
+          <a:prstGeom prst="rect">
+            <a:avLst/>
+          </a:prstGeom>
+          <a:noFill/>
+        </p:spPr>
+        <p:txBody>
+          <a:bodyPr wrap="square" anchor="t"/>
+          <a:lstStyle/>
+          <a:p>
+            <a:pPr algn="l">
+              <a:spcBef>
+                <a:spcPts val="0"/>
+              </a:spcBef>
+              <a:spcAft>
+                <a:spcPts val="0"/>
+              </a:spcAft>
+            </a:pPr>
+            <a:r>
+              <a:rPr sz="1700" b="1">
+                <a:cs typeface="Helvetica"/>
+                <a:ea typeface="Helvetica"/>
+                <a:solidFill>
+                  <a:srgbClr val="1A221E"/>
+                </a:solidFill>
+                <a:latin typeface="Helvetica"/>
+              </a:rPr>
+              <a:t>Pack</a:t>
+            </a:r>
+          </a:p>
+        </p:txBody>
+      </p:sp>
+      <p:sp>
+        <p:nvSpPr>
+          <p:cNvPr id="29" name="TextBox 28"/>
+          <p:cNvSpPr txBox="1"/>
+          <p:nvPr/>
+        </p:nvSpPr>
+        <p:spPr>
+          <a:xfrm>
+            <a:off x="8869680" y="2468880"/>
+            <a:ext cx="2194560" cy="777240"/>
           </a:xfrm>
           <a:prstGeom prst="rect">
             <a:avLst/>
@@ -6436,21 +7203,21 @@
                 </a:solidFill>
                 <a:latin typeface="Helvetica"/>
               </a:rPr>
-              <a:t>coverage-first under budget; content before manifest; relevance floor</a:t>
-            </a:r>
-          </a:p>
-        </p:txBody>
-      </p:sp>
-      <p:sp>
-        <p:nvSpPr>
-          <p:cNvPr id="24" name="Rectangle 23"/>
+              <a:t>Fill the strongest sections first until the question is covered, then stop.</a:t>
+            </a:r>
+          </a:p>
+        </p:txBody>
+      </p:sp>
+      <p:sp>
+        <p:nvSpPr>
+          <p:cNvPr id="30" name="Rectangle 29"/>
           <p:cNvSpPr/>
           <p:nvPr/>
         </p:nvSpPr>
         <p:spPr>
           <a:xfrm>
-            <a:off x="640080" y="3520440"/>
-            <a:ext cx="5303520" cy="2606040"/>
+            <a:off x="594360" y="3749039"/>
+            <a:ext cx="5303520" cy="2331720"/>
           </a:xfrm>
           <a:prstGeom prst="rect">
             <a:avLst/>
@@ -6488,14 +7255,14 @@
       </p:sp>
       <p:sp>
         <p:nvSpPr>
-          <p:cNvPr id="25" name="Rectangle 24"/>
+          <p:cNvPr id="31" name="Rectangle 30"/>
           <p:cNvSpPr/>
           <p:nvPr/>
         </p:nvSpPr>
         <p:spPr>
           <a:xfrm>
-            <a:off x="640080" y="3520440"/>
-            <a:ext cx="91440" cy="2606040"/>
+            <a:off x="594360" y="3749039"/>
+            <a:ext cx="91440" cy="2331720"/>
           </a:xfrm>
           <a:prstGeom prst="rect">
             <a:avLst/>
@@ -6531,14 +7298,14 @@
       </p:sp>
       <p:sp>
         <p:nvSpPr>
-          <p:cNvPr id="26" name="TextBox 25"/>
+          <p:cNvPr id="32" name="TextBox 31"/>
           <p:cNvSpPr txBox="1"/>
           <p:nvPr/>
         </p:nvSpPr>
         <p:spPr>
           <a:xfrm>
-            <a:off x="1005840" y="3794760"/>
-            <a:ext cx="4663440" cy="411480"/>
+            <a:off x="914400" y="4023360"/>
+            <a:ext cx="4709160" cy="411480"/>
           </a:xfrm>
           <a:prstGeom prst="rect">
             <a:avLst/>
@@ -6566,21 +7333,21 @@
                 </a:solidFill>
                 <a:latin typeface="Helvetica"/>
               </a:rPr>
-              <a:t>MCP + web demo</a:t>
-            </a:r>
-          </a:p>
-        </p:txBody>
-      </p:sp>
-      <p:sp>
-        <p:nvSpPr>
-          <p:cNvPr id="27" name="TextBox 26"/>
+              <a:t>Plug in, or try it here</a:t>
+            </a:r>
+          </a:p>
+        </p:txBody>
+      </p:sp>
+      <p:sp>
+        <p:nvSpPr>
+          <p:cNvPr id="33" name="TextBox 32"/>
           <p:cNvSpPr txBox="1"/>
           <p:nvPr/>
         </p:nvSpPr>
         <p:spPr>
           <a:xfrm>
-            <a:off x="1005840" y="4297680"/>
-            <a:ext cx="4663440" cy="1463040"/>
+            <a:off x="914400" y="4572000"/>
+            <a:ext cx="4709160" cy="1234440"/>
           </a:xfrm>
           <a:prstGeom prst="rect">
             <a:avLst/>
@@ -6608,66 +7375,21 @@
                 </a:solidFill>
                 <a:latin typeface="Helvetica"/>
               </a:rPr>
-              <a:t>Two tools: compile_context + expand_section. Cursor, Claude Code, Codex, Claude Desktop — plus the hosted demo. No API key for compile.</a:t>
-            </a:r>
-          </a:p>
-        </p:txBody>
-      </p:sp>
-      <p:sp>
-        <p:nvSpPr>
-          <p:cNvPr id="28" name="Rectangle 27"/>
+              <a:t>Works with Cursor, Claude Code, Codex, and Claude Desktop. Or use the hosted web demo. Compile needs no API key.</a:t>
+            </a:r>
+          </a:p>
+        </p:txBody>
+      </p:sp>
+      <p:sp>
+        <p:nvSpPr>
+          <p:cNvPr id="34" name="Rectangle 33"/>
           <p:cNvSpPr/>
           <p:nvPr/>
         </p:nvSpPr>
         <p:spPr>
           <a:xfrm>
-            <a:off x="6263640" y="3520440"/>
-            <a:ext cx="5303520" cy="2606040"/>
-          </a:xfrm>
-          <a:prstGeom prst="rect">
-            <a:avLst/>
-          </a:prstGeom>
-          <a:solidFill>
-            <a:srgbClr val="F3F6F4"/>
-          </a:solidFill>
-          <a:ln w="12700">
-            <a:solidFill>
-              <a:srgbClr val="C8D2CB"/>
-            </a:solidFill>
-          </a:ln>
-        </p:spPr>
-        <p:style>
-          <a:lnRef idx="1">
-            <a:schemeClr val="accent1"/>
-          </a:lnRef>
-          <a:fillRef idx="3">
-            <a:schemeClr val="accent1"/>
-          </a:fillRef>
-          <a:effectRef idx="2">
-            <a:schemeClr val="accent1"/>
-          </a:effectRef>
-          <a:fontRef idx="minor">
-            <a:schemeClr val="lt1"/>
-          </a:fontRef>
-        </p:style>
-        <p:txBody>
-          <a:bodyPr rtlCol="0" anchor="ctr"/>
-          <a:lstStyle/>
-          <a:p>
-            <a:pPr algn="ctr"/>
-          </a:p>
-        </p:txBody>
-      </p:sp>
-      <p:sp>
-        <p:nvSpPr>
-          <p:cNvPr id="29" name="Rectangle 28"/>
-          <p:cNvSpPr/>
-          <p:nvPr/>
-        </p:nvSpPr>
-        <p:spPr>
-          <a:xfrm>
-            <a:off x="6263640" y="3520440"/>
-            <a:ext cx="91440" cy="2606040"/>
+            <a:off x="6263640" y="3749039"/>
+            <a:ext cx="5303520" cy="2331720"/>
           </a:xfrm>
           <a:prstGeom prst="rect">
             <a:avLst/>
@@ -6703,14 +7425,14 @@
       </p:sp>
       <p:sp>
         <p:nvSpPr>
-          <p:cNvPr id="30" name="TextBox 29"/>
+          <p:cNvPr id="35" name="TextBox 34"/>
           <p:cNvSpPr txBox="1"/>
           <p:nvPr/>
         </p:nvSpPr>
         <p:spPr>
           <a:xfrm>
-            <a:off x="6629400" y="3794760"/>
-            <a:ext cx="4663440" cy="411480"/>
+            <a:off x="6583680" y="4023360"/>
+            <a:ext cx="4709160" cy="411480"/>
           </a:xfrm>
           <a:prstGeom prst="rect">
             <a:avLst/>
@@ -6734,25 +7456,25 @@
                 <a:cs typeface="Helvetica"/>
                 <a:ea typeface="Helvetica"/>
                 <a:solidFill>
-                  <a:srgbClr val="1A221E"/>
+                  <a:srgbClr val="E8F0EB"/>
                 </a:solidFill>
                 <a:latin typeface="Helvetica"/>
               </a:rPr>
-              <a:t>Omit honesty</a:t>
-            </a:r>
-          </a:p>
-        </p:txBody>
-      </p:sp>
-      <p:sp>
-        <p:nvSpPr>
-          <p:cNvPr id="31" name="TextBox 30"/>
+              <a:t>Honest about cuts</a:t>
+            </a:r>
+          </a:p>
+        </p:txBody>
+      </p:sp>
+      <p:sp>
+        <p:nvSpPr>
+          <p:cNvPr id="36" name="TextBox 35"/>
           <p:cNvSpPr txBox="1"/>
           <p:nvPr/>
         </p:nvSpPr>
         <p:spPr>
           <a:xfrm>
-            <a:off x="6629400" y="4297680"/>
-            <a:ext cx="4663440" cy="1463040"/>
+            <a:off x="6583680" y="4572000"/>
+            <a:ext cx="4709160" cy="1234440"/>
           </a:xfrm>
           <a:prstGeom prst="rect">
             <a:avLst/>
@@ -6776,11 +7498,11 @@
                 <a:cs typeface="Helvetica"/>
                 <a:ea typeface="Helvetica"/>
                 <a:solidFill>
-                  <a:srgbClr val="4A5850"/>
+                  <a:srgbClr val="B8D0C4"/>
                 </a:solidFill>
                 <a:latin typeface="Helvetica"/>
               </a:rPr>
-              <a:t>Every response ends with an omitted-sections manifest. Fetch any section by id via expand_section. Trimming is never silent.</a:t>
+              <a:t>Every result lists what was left out. Open a skipped section when you need more of a chapter. Nothing is trimmed in silence.</a:t>
             </a:r>
           </a:p>
         </p:txBody>
@@ -6848,14 +7570,99 @@
       </p:sp>
       <p:sp>
         <p:nvSpPr>
-          <p:cNvPr id="3" name="TextBox 2"/>
+          <p:cNvPr id="3" name="Rectangle 2"/>
+          <p:cNvSpPr/>
+          <p:nvPr/>
+        </p:nvSpPr>
+        <p:spPr>
+          <a:xfrm>
+            <a:off x="0" y="0"/>
+            <a:ext cx="164592" cy="6858000"/>
+          </a:xfrm>
+          <a:prstGeom prst="rect">
+            <a:avLst/>
+          </a:prstGeom>
+          <a:solidFill>
+            <a:srgbClr val="1F5C42"/>
+          </a:solidFill>
+          <a:ln>
+            <a:noFill/>
+          </a:ln>
+        </p:spPr>
+        <p:style>
+          <a:lnRef idx="1">
+            <a:schemeClr val="accent1"/>
+          </a:lnRef>
+          <a:fillRef idx="3">
+            <a:schemeClr val="accent1"/>
+          </a:fillRef>
+          <a:effectRef idx="2">
+            <a:schemeClr val="accent1"/>
+          </a:effectRef>
+          <a:fontRef idx="minor">
+            <a:schemeClr val="lt1"/>
+          </a:fontRef>
+        </p:style>
+        <p:txBody>
+          <a:bodyPr rtlCol="0" anchor="ctr"/>
+          <a:lstStyle/>
+          <a:p>
+            <a:pPr algn="ctr"/>
+          </a:p>
+        </p:txBody>
+      </p:sp>
+      <p:sp>
+        <p:nvSpPr>
+          <p:cNvPr id="4" name="TextBox 3"/>
           <p:cNvSpPr txBox="1"/>
           <p:nvPr/>
         </p:nvSpPr>
         <p:spPr>
           <a:xfrm>
-            <a:off x="640080" y="411480"/>
-            <a:ext cx="10972800" cy="640080"/>
+            <a:off x="594360" y="292608"/>
+            <a:ext cx="10972800" cy="256032"/>
+          </a:xfrm>
+          <a:prstGeom prst="rect">
+            <a:avLst/>
+          </a:prstGeom>
+          <a:noFill/>
+        </p:spPr>
+        <p:txBody>
+          <a:bodyPr wrap="square" anchor="t"/>
+          <a:lstStyle/>
+          <a:p>
+            <a:pPr algn="l">
+              <a:spcBef>
+                <a:spcPts val="0"/>
+              </a:spcBef>
+              <a:spcAft>
+                <a:spcPts val="0"/>
+              </a:spcAft>
+            </a:pPr>
+            <a:r>
+              <a:rPr sz="1100" b="1">
+                <a:cs typeface="Menlo"/>
+                <a:ea typeface="Menlo"/>
+                <a:solidFill>
+                  <a:srgbClr val="1F5C42"/>
+                </a:solidFill>
+                <a:latin typeface="Menlo"/>
+              </a:rPr>
+              <a:t>DEMO EVIDENCE</a:t>
+            </a:r>
+          </a:p>
+        </p:txBody>
+      </p:sp>
+      <p:sp>
+        <p:nvSpPr>
+          <p:cNvPr id="5" name="TextBox 4"/>
+          <p:cNvSpPr txBox="1"/>
+          <p:nvPr/>
+        </p:nvSpPr>
+        <p:spPr>
+          <a:xfrm>
+            <a:off x="594360" y="548640"/>
+            <a:ext cx="10972800" cy="457200"/>
           </a:xfrm>
           <a:prstGeom prst="rect">
             <a:avLst/>
@@ -6883,21 +7690,191 @@
                 </a:solidFill>
                 <a:latin typeface="Georgia"/>
               </a:rPr>
-              <a:t>Measured, not promised</a:t>
-            </a:r>
-          </a:p>
-        </p:txBody>
-      </p:sp>
-      <p:sp>
-        <p:nvSpPr>
-          <p:cNvPr id="4" name="Rectangle 3"/>
+              <a:t>What you actually get back</a:t>
+            </a:r>
+          </a:p>
+        </p:txBody>
+      </p:sp>
+      <p:sp>
+        <p:nvSpPr>
+          <p:cNvPr id="6" name="TextBox 5"/>
+          <p:cNvSpPr txBox="1"/>
+          <p:nvPr/>
+        </p:nvSpPr>
+        <p:spPr>
+          <a:xfrm>
+            <a:off x="594360" y="1051560"/>
+            <a:ext cx="10972800" cy="320040"/>
+          </a:xfrm>
+          <a:prstGeom prst="rect">
+            <a:avLst/>
+          </a:prstGeom>
+          <a:noFill/>
+        </p:spPr>
+        <p:txBody>
+          <a:bodyPr wrap="square" anchor="t"/>
+          <a:lstStyle/>
+          <a:p>
+            <a:pPr algn="l">
+              <a:spcBef>
+                <a:spcPts val="0"/>
+              </a:spcBef>
+              <a:spcAft>
+                <a:spcPts val="0"/>
+              </a:spcAft>
+            </a:pPr>
+            <a:r>
+              <a:rPr sz="1500" b="0">
+                <a:cs typeface="Helvetica"/>
+                <a:ea typeface="Helvetica"/>
+                <a:solidFill>
+                  <a:srgbClr val="4A5850"/>
+                </a:solidFill>
+                <a:latin typeface="Helvetica"/>
+              </a:rPr>
+              <a:t>Real 78-section handbook. One refunds question. Budget 1,200 tokens.</a:t>
+            </a:r>
+          </a:p>
+        </p:txBody>
+      </p:sp>
+      <p:sp>
+        <p:nvSpPr>
+          <p:cNvPr id="7" name="Rectangle 6"/>
           <p:cNvSpPr/>
           <p:nvPr/>
         </p:nvSpPr>
         <p:spPr>
           <a:xfrm>
-            <a:off x="640080" y="1280160"/>
-            <a:ext cx="3520440" cy="2148840"/>
+            <a:off x="594360" y="1508760"/>
+            <a:ext cx="3566160" cy="2011680"/>
+          </a:xfrm>
+          <a:prstGeom prst="rect">
+            <a:avLst/>
+          </a:prstGeom>
+          <a:solidFill>
+            <a:srgbClr val="1F5C42"/>
+          </a:solidFill>
+          <a:ln>
+            <a:noFill/>
+          </a:ln>
+        </p:spPr>
+        <p:style>
+          <a:lnRef idx="1">
+            <a:schemeClr val="accent1"/>
+          </a:lnRef>
+          <a:fillRef idx="3">
+            <a:schemeClr val="accent1"/>
+          </a:fillRef>
+          <a:effectRef idx="2">
+            <a:schemeClr val="accent1"/>
+          </a:effectRef>
+          <a:fontRef idx="minor">
+            <a:schemeClr val="lt1"/>
+          </a:fontRef>
+        </p:style>
+        <p:txBody>
+          <a:bodyPr rtlCol="0" anchor="ctr"/>
+          <a:lstStyle/>
+          <a:p>
+            <a:pPr algn="ctr"/>
+          </a:p>
+        </p:txBody>
+      </p:sp>
+      <p:sp>
+        <p:nvSpPr>
+          <p:cNvPr id="8" name="TextBox 7"/>
+          <p:cNvSpPr txBox="1"/>
+          <p:nvPr/>
+        </p:nvSpPr>
+        <p:spPr>
+          <a:xfrm>
+            <a:off x="822960" y="1783080"/>
+            <a:ext cx="3200400" cy="548640"/>
+          </a:xfrm>
+          <a:prstGeom prst="rect">
+            <a:avLst/>
+          </a:prstGeom>
+          <a:noFill/>
+        </p:spPr>
+        <p:txBody>
+          <a:bodyPr wrap="square" anchor="t"/>
+          <a:lstStyle/>
+          <a:p>
+            <a:pPr algn="l">
+              <a:spcBef>
+                <a:spcPts val="0"/>
+              </a:spcBef>
+              <a:spcAft>
+                <a:spcPts val="0"/>
+              </a:spcAft>
+            </a:pPr>
+            <a:r>
+              <a:rPr sz="3200" b="1">
+                <a:cs typeface="Georgia"/>
+                <a:ea typeface="Georgia"/>
+                <a:solidFill>
+                  <a:srgbClr val="E8F0EB"/>
+                </a:solidFill>
+                <a:latin typeface="Georgia"/>
+              </a:rPr>
+              <a:t>97%</a:t>
+            </a:r>
+          </a:p>
+        </p:txBody>
+      </p:sp>
+      <p:sp>
+        <p:nvSpPr>
+          <p:cNvPr id="9" name="TextBox 8"/>
+          <p:cNvSpPr txBox="1"/>
+          <p:nvPr/>
+        </p:nvSpPr>
+        <p:spPr>
+          <a:xfrm>
+            <a:off x="822960" y="2423160"/>
+            <a:ext cx="3200400" cy="868680"/>
+          </a:xfrm>
+          <a:prstGeom prst="rect">
+            <a:avLst/>
+          </a:prstGeom>
+          <a:noFill/>
+        </p:spPr>
+        <p:txBody>
+          <a:bodyPr wrap="square" anchor="t"/>
+          <a:lstStyle/>
+          <a:p>
+            <a:pPr algn="l">
+              <a:spcBef>
+                <a:spcPts val="0"/>
+              </a:spcBef>
+              <a:spcAft>
+                <a:spcPts val="0"/>
+              </a:spcAft>
+            </a:pPr>
+            <a:r>
+              <a:rPr sz="1300" b="0">
+                <a:cs typeface="Helvetica"/>
+                <a:ea typeface="Helvetica"/>
+                <a:solidFill>
+                  <a:srgbClr val="B8D0C4"/>
+                </a:solidFill>
+                <a:latin typeface="Helvetica"/>
+              </a:rPr>
+              <a:t>fewer tokens, answer still intact
+20,364 → 591</a:t>
+            </a:r>
+          </a:p>
+        </p:txBody>
+      </p:sp>
+      <p:sp>
+        <p:nvSpPr>
+          <p:cNvPr id="10" name="Rectangle 9"/>
+          <p:cNvSpPr/>
+          <p:nvPr/>
+        </p:nvSpPr>
+        <p:spPr>
+          <a:xfrm>
+            <a:off x="4325112" y="1508760"/>
+            <a:ext cx="3566160" cy="2011680"/>
           </a:xfrm>
           <a:prstGeom prst="rect">
             <a:avLst/>
@@ -6935,14 +7912,14 @@
       </p:sp>
       <p:sp>
         <p:nvSpPr>
-          <p:cNvPr id="5" name="Rectangle 4"/>
+          <p:cNvPr id="11" name="Rectangle 10"/>
           <p:cNvSpPr/>
           <p:nvPr/>
         </p:nvSpPr>
         <p:spPr>
           <a:xfrm>
-            <a:off x="640080" y="1280160"/>
-            <a:ext cx="3520440" cy="45720"/>
+            <a:off x="4325112" y="1508760"/>
+            <a:ext cx="3566160" cy="54864"/>
           </a:xfrm>
           <a:prstGeom prst="rect">
             <a:avLst/>
@@ -6978,14 +7955,14 @@
       </p:sp>
       <p:sp>
         <p:nvSpPr>
-          <p:cNvPr id="6" name="TextBox 5"/>
+          <p:cNvPr id="12" name="TextBox 11"/>
           <p:cNvSpPr txBox="1"/>
           <p:nvPr/>
         </p:nvSpPr>
         <p:spPr>
           <a:xfrm>
-            <a:off x="868680" y="1600200"/>
-            <a:ext cx="3154680" cy="640080"/>
+            <a:off x="4553712" y="1783080"/>
+            <a:ext cx="3200400" cy="548640"/>
           </a:xfrm>
           <a:prstGeom prst="rect">
             <a:avLst/>
@@ -7013,21 +7990,21 @@
                 </a:solidFill>
                 <a:latin typeface="Georgia"/>
               </a:rPr>
-              <a:t>97.1%</a:t>
-            </a:r>
-          </a:p>
-        </p:txBody>
-      </p:sp>
-      <p:sp>
-        <p:nvSpPr>
-          <p:cNvPr id="7" name="TextBox 6"/>
+              <a:t>~34×</a:t>
+            </a:r>
+          </a:p>
+        </p:txBody>
+      </p:sp>
+      <p:sp>
+        <p:nvSpPr>
+          <p:cNvPr id="13" name="TextBox 12"/>
           <p:cNvSpPr txBox="1"/>
           <p:nvPr/>
         </p:nvSpPr>
         <p:spPr>
           <a:xfrm>
-            <a:off x="868680" y="2331720"/>
-            <a:ext cx="3154680" cy="868680"/>
+            <a:off x="4553712" y="2423160"/>
+            <a:ext cx="3200400" cy="868680"/>
           </a:xfrm>
           <a:prstGeom prst="rect">
             <a:avLst/>
@@ -7055,21 +8032,21 @@
                 </a:solidFill>
                 <a:latin typeface="Helvetica"/>
               </a:rPr>
-              <a:t>token reduction on a real 78-section docx, answer intact</a:t>
-            </a:r>
-          </a:p>
-        </p:txBody>
-      </p:sp>
-      <p:sp>
-        <p:nvSpPr>
-          <p:cNvPr id="8" name="Rectangle 7"/>
+              <a:t>cheaper per read when conversion is cached; repeats come back fast</a:t>
+            </a:r>
+          </a:p>
+        </p:txBody>
+      </p:sp>
+      <p:sp>
+        <p:nvSpPr>
+          <p:cNvPr id="14" name="Rectangle 13"/>
           <p:cNvSpPr/>
           <p:nvPr/>
         </p:nvSpPr>
         <p:spPr>
           <a:xfrm>
-            <a:off x="4343400" y="1280160"/>
-            <a:ext cx="3520440" cy="2148840"/>
+            <a:off x="8055864" y="1508760"/>
+            <a:ext cx="3566160" cy="2011680"/>
           </a:xfrm>
           <a:prstGeom prst="rect">
             <a:avLst/>
@@ -7107,14 +8084,14 @@
       </p:sp>
       <p:sp>
         <p:nvSpPr>
-          <p:cNvPr id="9" name="Rectangle 8"/>
+          <p:cNvPr id="15" name="Rectangle 14"/>
           <p:cNvSpPr/>
           <p:nvPr/>
         </p:nvSpPr>
         <p:spPr>
           <a:xfrm>
-            <a:off x="4343400" y="1280160"/>
-            <a:ext cx="3520440" cy="45720"/>
+            <a:off x="8055864" y="1508760"/>
+            <a:ext cx="3566160" cy="54864"/>
           </a:xfrm>
           <a:prstGeom prst="rect">
             <a:avLst/>
@@ -7150,14 +8127,14 @@
       </p:sp>
       <p:sp>
         <p:nvSpPr>
-          <p:cNvPr id="10" name="TextBox 9"/>
+          <p:cNvPr id="16" name="TextBox 15"/>
           <p:cNvSpPr txBox="1"/>
           <p:nvPr/>
         </p:nvSpPr>
         <p:spPr>
           <a:xfrm>
-            <a:off x="4572000" y="1600200"/>
-            <a:ext cx="3154680" cy="640080"/>
+            <a:off x="8284464" y="1783080"/>
+            <a:ext cx="3200400" cy="548640"/>
           </a:xfrm>
           <a:prstGeom prst="rect">
             <a:avLst/>
@@ -7185,21 +8162,21 @@
                 </a:solidFill>
                 <a:latin typeface="Georgia"/>
               </a:rPr>
-              <a:t>34×</a:t>
-            </a:r>
-          </a:p>
-        </p:txBody>
-      </p:sp>
-      <p:sp>
-        <p:nvSpPr>
-          <p:cNvPr id="11" name="TextBox 10"/>
+              <a:t>Check it</a:t>
+            </a:r>
+          </a:p>
+        </p:txBody>
+      </p:sp>
+      <p:sp>
+        <p:nvSpPr>
+          <p:cNvPr id="17" name="TextBox 16"/>
           <p:cNvSpPr txBox="1"/>
           <p:nvPr/>
         </p:nvSpPr>
         <p:spPr>
           <a:xfrm>
-            <a:off x="4572000" y="2331720"/>
-            <a:ext cx="3154680" cy="868680"/>
+            <a:off x="8284464" y="2423160"/>
+            <a:ext cx="3200400" cy="868680"/>
           </a:xfrm>
           <a:prstGeom prst="rect">
             <a:avLst/>
@@ -7227,66 +8204,21 @@
                 </a:solidFill>
                 <a:latin typeface="Helvetica"/>
               </a:rPr>
-              <a:t>cheaper per read — cached, so repeat reads are instant</a:t>
-            </a:r>
-          </a:p>
-        </p:txBody>
-      </p:sp>
-      <p:sp>
-        <p:nvSpPr>
-          <p:cNvPr id="12" name="Rectangle 11"/>
+              <a:t>Same question from the full file and from the compiled slice. Compare the facts yourself.</a:t>
+            </a:r>
+          </a:p>
+        </p:txBody>
+      </p:sp>
+      <p:sp>
+        <p:nvSpPr>
+          <p:cNvPr id="18" name="Rectangle 17"/>
           <p:cNvSpPr/>
           <p:nvPr/>
         </p:nvSpPr>
         <p:spPr>
           <a:xfrm>
-            <a:off x="8046720" y="1280160"/>
-            <a:ext cx="3520440" cy="2148840"/>
-          </a:xfrm>
-          <a:prstGeom prst="rect">
-            <a:avLst/>
-          </a:prstGeom>
-          <a:solidFill>
-            <a:srgbClr val="F3F6F4"/>
-          </a:solidFill>
-          <a:ln w="12700">
-            <a:solidFill>
-              <a:srgbClr val="C8D2CB"/>
-            </a:solidFill>
-          </a:ln>
-        </p:spPr>
-        <p:style>
-          <a:lnRef idx="1">
-            <a:schemeClr val="accent1"/>
-          </a:lnRef>
-          <a:fillRef idx="3">
-            <a:schemeClr val="accent1"/>
-          </a:fillRef>
-          <a:effectRef idx="2">
-            <a:schemeClr val="accent1"/>
-          </a:effectRef>
-          <a:fontRef idx="minor">
-            <a:schemeClr val="lt1"/>
-          </a:fontRef>
-        </p:style>
-        <p:txBody>
-          <a:bodyPr rtlCol="0" anchor="ctr"/>
-          <a:lstStyle/>
-          <a:p>
-            <a:pPr algn="ctr"/>
-          </a:p>
-        </p:txBody>
-      </p:sp>
-      <p:sp>
-        <p:nvSpPr>
-          <p:cNvPr id="13" name="Rectangle 12"/>
-          <p:cNvSpPr/>
-          <p:nvPr/>
-        </p:nvSpPr>
-        <p:spPr>
-          <a:xfrm>
-            <a:off x="8046720" y="1280160"/>
-            <a:ext cx="3520440" cy="45720"/>
+            <a:off x="594360" y="3794760"/>
+            <a:ext cx="10972800" cy="2377440"/>
           </a:xfrm>
           <a:prstGeom prst="rect">
             <a:avLst/>
@@ -7322,56 +8254,14 @@
       </p:sp>
       <p:sp>
         <p:nvSpPr>
-          <p:cNvPr id="14" name="TextBox 13"/>
+          <p:cNvPr id="19" name="TextBox 18"/>
           <p:cNvSpPr txBox="1"/>
           <p:nvPr/>
         </p:nvSpPr>
         <p:spPr>
           <a:xfrm>
-            <a:off x="8275320" y="1600200"/>
-            <a:ext cx="3154680" cy="640080"/>
-          </a:xfrm>
-          <a:prstGeom prst="rect">
-            <a:avLst/>
-          </a:prstGeom>
-          <a:noFill/>
-        </p:spPr>
-        <p:txBody>
-          <a:bodyPr wrap="square" anchor="t"/>
-          <a:lstStyle/>
-          <a:p>
-            <a:pPr algn="l">
-              <a:spcBef>
-                <a:spcPts val="0"/>
-              </a:spcBef>
-              <a:spcAft>
-                <a:spcPts val="0"/>
-              </a:spcAft>
-            </a:pPr>
-            <a:r>
-              <a:rPr sz="3200" b="1">
-                <a:cs typeface="Georgia"/>
-                <a:ea typeface="Georgia"/>
-                <a:solidFill>
-                  <a:srgbClr val="1F5C42"/>
-                </a:solidFill>
-                <a:latin typeface="Georgia"/>
-              </a:rPr>
-              <a:t>Parity</a:t>
-            </a:r>
-          </a:p>
-        </p:txBody>
-      </p:sp>
-      <p:sp>
-        <p:nvSpPr>
-          <p:cNvPr id="15" name="TextBox 14"/>
-          <p:cNvSpPr txBox="1"/>
-          <p:nvPr/>
-        </p:nvSpPr>
-        <p:spPr>
-          <a:xfrm>
-            <a:off x="8275320" y="2331720"/>
-            <a:ext cx="3154680" cy="868680"/>
+            <a:off x="868680" y="4023360"/>
+            <a:ext cx="10332720" cy="411480"/>
           </a:xfrm>
           <a:prstGeom prst="rect">
             <a:avLst/>
@@ -7395,68 +8285,25 @@
                 <a:cs typeface="Helvetica"/>
                 <a:ea typeface="Helvetica"/>
                 <a:solidFill>
-                  <a:srgbClr val="4A5850"/>
+                  <a:srgbClr val="B8D0C4"/>
                 </a:solidFill>
                 <a:latin typeface="Helvetica"/>
               </a:rPr>
-              <a:t>Full file vs compile (+ Include in Prove) — dual buttons; not an Agent run</a:t>
-            </a:r>
-          </a:p>
-        </p:txBody>
-      </p:sp>
-      <p:sp>
-        <p:nvSpPr>
-          <p:cNvPr id="16" name="Rectangle 15"/>
-          <p:cNvSpPr/>
-          <p:nvPr/>
-        </p:nvSpPr>
-        <p:spPr>
-          <a:xfrm>
-            <a:off x="640080" y="3794760"/>
-            <a:ext cx="10881360" cy="2331720"/>
-          </a:xfrm>
-          <a:prstGeom prst="rect">
-            <a:avLst/>
-          </a:prstGeom>
-          <a:solidFill>
-            <a:srgbClr val="1F5C42"/>
-          </a:solidFill>
-          <a:ln>
-            <a:noFill/>
-          </a:ln>
-        </p:spPr>
-        <p:style>
-          <a:lnRef idx="1">
-            <a:schemeClr val="accent1"/>
-          </a:lnRef>
-          <a:fillRef idx="3">
-            <a:schemeClr val="accent1"/>
-          </a:fillRef>
-          <a:effectRef idx="2">
-            <a:schemeClr val="accent1"/>
-          </a:effectRef>
-          <a:fontRef idx="minor">
-            <a:schemeClr val="lt1"/>
-          </a:fontRef>
-        </p:style>
-        <p:txBody>
-          <a:bodyPr rtlCol="0" anchor="ctr"/>
-          <a:lstStyle/>
-          <a:p>
-            <a:pPr algn="ctr"/>
-          </a:p>
-        </p:txBody>
-      </p:sp>
-      <p:sp>
-        <p:nvSpPr>
-          <p:cNvPr id="17" name="TextBox 16"/>
+              <a:t>Story: vendor handbook  ·  “How long do refunds take and who approves large ones?”  ·  budget 1,200</a:t>
+            </a:r>
+          </a:p>
+        </p:txBody>
+      </p:sp>
+      <p:sp>
+        <p:nvSpPr>
+          <p:cNvPr id="20" name="TextBox 19"/>
           <p:cNvSpPr txBox="1"/>
           <p:nvPr/>
         </p:nvSpPr>
         <p:spPr>
           <a:xfrm>
-            <a:off x="914400" y="4023360"/>
-            <a:ext cx="10241280" cy="365760"/>
+            <a:off x="868680" y="4572000"/>
+            <a:ext cx="10332720" cy="274320"/>
           </a:xfrm>
           <a:prstGeom prst="rect">
             <a:avLst/>
@@ -7476,49 +8323,7 @@
               </a:spcAft>
             </a:pPr>
             <a:r>
-              <a:rPr sz="1200" b="0">
-                <a:cs typeface="Menlo"/>
-                <a:ea typeface="Menlo"/>
-                <a:solidFill>
-                  <a:srgbClr val="B8D0C4"/>
-                </a:solidFill>
-                <a:latin typeface="Menlo"/>
-              </a:rPr>
-              <a:t>vendor_handbook.docx · “How long do refunds take and who approves large ones?” · budget 1,200</a:t>
-            </a:r>
-          </a:p>
-        </p:txBody>
-      </p:sp>
-      <p:sp>
-        <p:nvSpPr>
-          <p:cNvPr id="18" name="TextBox 17"/>
-          <p:cNvSpPr txBox="1"/>
-          <p:nvPr/>
-        </p:nvSpPr>
-        <p:spPr>
-          <a:xfrm>
-            <a:off x="914400" y="4572000"/>
-            <a:ext cx="10241280" cy="274320"/>
-          </a:xfrm>
-          <a:prstGeom prst="rect">
-            <a:avLst/>
-          </a:prstGeom>
-          <a:noFill/>
-        </p:spPr>
-        <p:txBody>
-          <a:bodyPr wrap="square" anchor="t"/>
-          <a:lstStyle/>
-          <a:p>
-            <a:pPr algn="l">
-              <a:spcBef>
-                <a:spcPts val="0"/>
-              </a:spcBef>
-              <a:spcAft>
-                <a:spcPts val="0"/>
-              </a:spcAft>
-            </a:pPr>
-            <a:r>
-              <a:rPr sz="1300" b="1">
+              <a:rPr sz="1400" b="1">
                 <a:cs typeface="Helvetica"/>
                 <a:ea typeface="Helvetica"/>
                 <a:solidFill>
@@ -7526,21 +8331,21 @@
                 </a:solidFill>
                 <a:latin typeface="Helvetica"/>
               </a:rPr>
-              <a:t>Whole file — 20,364 tokens</a:t>
-            </a:r>
-          </a:p>
-        </p:txBody>
-      </p:sp>
-      <p:sp>
-        <p:nvSpPr>
-          <p:cNvPr id="19" name="Rectangle 18"/>
+              <a:t>Whole file: 20,364 tokens</a:t>
+            </a:r>
+          </a:p>
+        </p:txBody>
+      </p:sp>
+      <p:sp>
+        <p:nvSpPr>
+          <p:cNvPr id="21" name="Rectangle 20"/>
           <p:cNvSpPr/>
           <p:nvPr/>
         </p:nvSpPr>
         <p:spPr>
           <a:xfrm>
-            <a:off x="914400" y="4892040"/>
-            <a:ext cx="9875520" cy="146304"/>
+            <a:off x="868680" y="4937760"/>
+            <a:ext cx="10058400" cy="164592"/>
           </a:xfrm>
           <a:prstGeom prst="rect">
             <a:avLst/>
@@ -7576,14 +8381,14 @@
       </p:sp>
       <p:sp>
         <p:nvSpPr>
-          <p:cNvPr id="20" name="Rectangle 19"/>
+          <p:cNvPr id="22" name="Rectangle 21"/>
           <p:cNvSpPr/>
           <p:nvPr/>
         </p:nvSpPr>
         <p:spPr>
           <a:xfrm>
-            <a:off x="914400" y="4892040"/>
-            <a:ext cx="9875520" cy="146304"/>
+            <a:off x="868680" y="4937760"/>
+            <a:ext cx="10058400" cy="164592"/>
           </a:xfrm>
           <a:prstGeom prst="rect">
             <a:avLst/>
@@ -7619,14 +8424,14 @@
       </p:sp>
       <p:sp>
         <p:nvSpPr>
-          <p:cNvPr id="21" name="TextBox 20"/>
+          <p:cNvPr id="23" name="TextBox 22"/>
           <p:cNvSpPr txBox="1"/>
           <p:nvPr/>
         </p:nvSpPr>
         <p:spPr>
           <a:xfrm>
-            <a:off x="914400" y="5212080"/>
-            <a:ext cx="10241280" cy="274320"/>
+            <a:off x="868680" y="5257800"/>
+            <a:ext cx="10332720" cy="274320"/>
           </a:xfrm>
           <a:prstGeom prst="rect">
             <a:avLst/>
@@ -7646,7 +8451,7 @@
               </a:spcAft>
             </a:pPr>
             <a:r>
-              <a:rPr sz="1300" b="1">
+              <a:rPr sz="1400" b="1">
                 <a:cs typeface="Helvetica"/>
                 <a:ea typeface="Helvetica"/>
                 <a:solidFill>
@@ -7654,21 +8459,21 @@
                 </a:solidFill>
                 <a:latin typeface="Helvetica"/>
               </a:rPr>
-              <a:t>Compiled — 591 tokens · answer intact · verified by test suite + recall eval + MCP run</a:t>
-            </a:r>
-          </a:p>
-        </p:txBody>
-      </p:sp>
-      <p:sp>
-        <p:nvSpPr>
-          <p:cNvPr id="22" name="Rectangle 21"/>
+              <a:t>Compiled: 591 tokens  ·  answer intact  ·  list of skipped sections included</a:t>
+            </a:r>
+          </a:p>
+        </p:txBody>
+      </p:sp>
+      <p:sp>
+        <p:nvSpPr>
+          <p:cNvPr id="24" name="Rectangle 23"/>
           <p:cNvSpPr/>
           <p:nvPr/>
         </p:nvSpPr>
         <p:spPr>
           <a:xfrm>
-            <a:off x="914400" y="5532120"/>
-            <a:ext cx="9875520" cy="146304"/>
+            <a:off x="868680" y="5623560"/>
+            <a:ext cx="10058400" cy="164592"/>
           </a:xfrm>
           <a:prstGeom prst="rect">
             <a:avLst/>
@@ -7704,14 +8509,14 @@
       </p:sp>
       <p:sp>
         <p:nvSpPr>
-          <p:cNvPr id="23" name="Rectangle 22"/>
+          <p:cNvPr id="25" name="Rectangle 24"/>
           <p:cNvSpPr/>
           <p:nvPr/>
         </p:nvSpPr>
         <p:spPr>
           <a:xfrm>
-            <a:off x="914400" y="5532120"/>
-            <a:ext cx="320040" cy="146304"/>
+            <a:off x="868680" y="5623560"/>
+            <a:ext cx="329184" cy="164592"/>
           </a:xfrm>
           <a:prstGeom prst="rect">
             <a:avLst/>
@@ -7808,56 +8613,14 @@
       </p:sp>
       <p:sp>
         <p:nvSpPr>
-          <p:cNvPr id="3" name="TextBox 2"/>
-          <p:cNvSpPr txBox="1"/>
-          <p:nvPr/>
-        </p:nvSpPr>
-        <p:spPr>
-          <a:xfrm>
-            <a:off x="640080" y="411480"/>
-            <a:ext cx="10972800" cy="640080"/>
-          </a:xfrm>
-          <a:prstGeom prst="rect">
-            <a:avLst/>
-          </a:prstGeom>
-          <a:noFill/>
-        </p:spPr>
-        <p:txBody>
-          <a:bodyPr wrap="square" anchor="t"/>
-          <a:lstStyle/>
-          <a:p>
-            <a:pPr algn="l">
-              <a:spcBef>
-                <a:spcPts val="0"/>
-              </a:spcBef>
-              <a:spcAft>
-                <a:spcPts val="0"/>
-              </a:spcAft>
-            </a:pPr>
-            <a:r>
-              <a:rPr sz="2800" b="1">
-                <a:cs typeface="Georgia"/>
-                <a:ea typeface="Georgia"/>
-                <a:solidFill>
-                  <a:srgbClr val="1A221E"/>
-                </a:solidFill>
-                <a:latin typeface="Georgia"/>
-              </a:rPr>
-              <a:t>What’s next</a:t>
-            </a:r>
-          </a:p>
-        </p:txBody>
-      </p:sp>
-      <p:sp>
-        <p:nvSpPr>
-          <p:cNvPr id="4" name="Rectangle 3"/>
+          <p:cNvPr id="3" name="Rectangle 2"/>
           <p:cNvSpPr/>
           <p:nvPr/>
         </p:nvSpPr>
         <p:spPr>
           <a:xfrm>
-            <a:off x="640080" y="1234440"/>
-            <a:ext cx="73152" cy="822960"/>
+            <a:off x="0" y="0"/>
+            <a:ext cx="164592" cy="6858000"/>
           </a:xfrm>
           <a:prstGeom prst="rect">
             <a:avLst/>
@@ -7893,14 +8656,56 @@
       </p:sp>
       <p:sp>
         <p:nvSpPr>
+          <p:cNvPr id="4" name="TextBox 3"/>
+          <p:cNvSpPr txBox="1"/>
+          <p:nvPr/>
+        </p:nvSpPr>
+        <p:spPr>
+          <a:xfrm>
+            <a:off x="594360" y="292608"/>
+            <a:ext cx="10972800" cy="256032"/>
+          </a:xfrm>
+          <a:prstGeom prst="rect">
+            <a:avLst/>
+          </a:prstGeom>
+          <a:noFill/>
+        </p:spPr>
+        <p:txBody>
+          <a:bodyPr wrap="square" anchor="t"/>
+          <a:lstStyle/>
+          <a:p>
+            <a:pPr algn="l">
+              <a:spcBef>
+                <a:spcPts val="0"/>
+              </a:spcBef>
+              <a:spcAft>
+                <a:spcPts val="0"/>
+              </a:spcAft>
+            </a:pPr>
+            <a:r>
+              <a:rPr sz="1100" b="1">
+                <a:cs typeface="Menlo"/>
+                <a:ea typeface="Menlo"/>
+                <a:solidFill>
+                  <a:srgbClr val="1F5C42"/>
+                </a:solidFill>
+                <a:latin typeface="Menlo"/>
+              </a:rPr>
+              <a:t>ROADMAP</a:t>
+            </a:r>
+          </a:p>
+        </p:txBody>
+      </p:sp>
+      <p:sp>
+        <p:nvSpPr>
           <p:cNvPr id="5" name="TextBox 4"/>
           <p:cNvSpPr txBox="1"/>
           <p:nvPr/>
         </p:nvSpPr>
         <p:spPr>
           <a:xfrm>
-            <a:off x="960120" y="1234440"/>
-            <a:ext cx="5760720" cy="320040"/>
+            <a:off x="594360" y="548640"/>
+            <a:ext cx="6400800" cy="502920"/>
           </a:xfrm>
           <a:prstGeom prst="rect">
             <a:avLst/>
@@ -7920,58 +8725,61 @@
               </a:spcAft>
             </a:pPr>
             <a:r>
-              <a:rPr sz="1600" b="1">
-                <a:cs typeface="Helvetica"/>
-                <a:ea typeface="Helvetica"/>
+              <a:rPr sz="2800" b="1">
+                <a:cs typeface="Georgia"/>
+                <a:ea typeface="Georgia"/>
                 <a:solidFill>
                   <a:srgbClr val="1A221E"/>
                 </a:solidFill>
-                <a:latin typeface="Helvetica"/>
+                <a:latin typeface="Georgia"/>
               </a:rPr>
-              <a:t>Local embeddings</a:t>
-            </a:r>
-          </a:p>
-        </p:txBody>
-      </p:sp>
-      <p:sp>
-        <p:nvSpPr>
-          <p:cNvPr id="6" name="TextBox 5"/>
-          <p:cNvSpPr txBox="1"/>
-          <p:nvPr/>
-        </p:nvSpPr>
-        <p:spPr>
-          <a:xfrm>
-            <a:off x="960120" y="1554480"/>
-            <a:ext cx="5760720" cy="502920"/>
-          </a:xfrm>
-          <a:prstGeom prst="rect">
-            <a:avLst/>
-          </a:prstGeom>
-          <a:noFill/>
-        </p:spPr>
-        <p:txBody>
-          <a:bodyPr wrap="square" anchor="t"/>
-          <a:lstStyle/>
-          <a:p>
-            <a:pPr algn="l">
-              <a:spcBef>
-                <a:spcPts val="0"/>
-              </a:spcBef>
-              <a:spcAft>
-                <a:spcPts val="0"/>
-              </a:spcAft>
-            </a:pPr>
-            <a:r>
-              <a:rPr sz="1300" b="0">
-                <a:cs typeface="Helvetica"/>
-                <a:ea typeface="Helvetica"/>
-                <a:solidFill>
-                  <a:srgbClr val="4A5850"/>
-                </a:solidFill>
-                <a:latin typeface="Helvetica"/>
-              </a:rPr>
-              <a:t>Query cleanup + offline recall eval shipped; local embeddings next for paraphrase.</a:t>
-            </a:r>
+              <a:t>What’s next</a:t>
+            </a:r>
+          </a:p>
+        </p:txBody>
+      </p:sp>
+      <p:sp>
+        <p:nvSpPr>
+          <p:cNvPr id="6" name="Rectangle 5"/>
+          <p:cNvSpPr/>
+          <p:nvPr/>
+        </p:nvSpPr>
+        <p:spPr>
+          <a:xfrm>
+            <a:off x="594360" y="1234440"/>
+            <a:ext cx="6400800" cy="960120"/>
+          </a:xfrm>
+          <a:prstGeom prst="rect">
+            <a:avLst/>
+          </a:prstGeom>
+          <a:solidFill>
+            <a:srgbClr val="F3F6F4"/>
+          </a:solidFill>
+          <a:ln w="12700">
+            <a:solidFill>
+              <a:srgbClr val="C8D2CB"/>
+            </a:solidFill>
+          </a:ln>
+        </p:spPr>
+        <p:style>
+          <a:lnRef idx="1">
+            <a:schemeClr val="accent1"/>
+          </a:lnRef>
+          <a:fillRef idx="3">
+            <a:schemeClr val="accent1"/>
+          </a:fillRef>
+          <a:effectRef idx="2">
+            <a:schemeClr val="accent1"/>
+          </a:effectRef>
+          <a:fontRef idx="minor">
+            <a:schemeClr val="lt1"/>
+          </a:fontRef>
+        </p:style>
+        <p:txBody>
+          <a:bodyPr rtlCol="0" anchor="ctr"/>
+          <a:lstStyle/>
+          <a:p>
+            <a:pPr algn="ctr"/>
           </a:p>
         </p:txBody>
       </p:sp>
@@ -7983,8 +8791,8 @@
         </p:nvSpPr>
         <p:spPr>
           <a:xfrm>
-            <a:off x="640080" y="2286000"/>
-            <a:ext cx="73152" cy="822960"/>
+            <a:off x="594360" y="1234440"/>
+            <a:ext cx="91440" cy="960120"/>
           </a:xfrm>
           <a:prstGeom prst="rect">
             <a:avLst/>
@@ -8026,8 +8834,8 @@
         </p:nvSpPr>
         <p:spPr>
           <a:xfrm>
-            <a:off x="960120" y="2286000"/>
-            <a:ext cx="5760720" cy="320040"/>
+            <a:off x="914400" y="1371600"/>
+            <a:ext cx="457200" cy="274320"/>
           </a:xfrm>
           <a:prstGeom prst="rect">
             <a:avLst/>
@@ -8047,7 +8855,49 @@
               </a:spcAft>
             </a:pPr>
             <a:r>
-              <a:rPr sz="1600" b="1">
+              <a:rPr sz="1200" b="1">
+                <a:cs typeface="Menlo"/>
+                <a:ea typeface="Menlo"/>
+                <a:solidFill>
+                  <a:srgbClr val="1F5C42"/>
+                </a:solidFill>
+                <a:latin typeface="Menlo"/>
+              </a:rPr>
+              <a:t>01</a:t>
+            </a:r>
+          </a:p>
+        </p:txBody>
+      </p:sp>
+      <p:sp>
+        <p:nvSpPr>
+          <p:cNvPr id="9" name="TextBox 8"/>
+          <p:cNvSpPr txBox="1"/>
+          <p:nvPr/>
+        </p:nvSpPr>
+        <p:spPr>
+          <a:xfrm>
+            <a:off x="1371600" y="1371600"/>
+            <a:ext cx="5303520" cy="274320"/>
+          </a:xfrm>
+          <a:prstGeom prst="rect">
+            <a:avLst/>
+          </a:prstGeom>
+          <a:noFill/>
+        </p:spPr>
+        <p:txBody>
+          <a:bodyPr wrap="square" anchor="t"/>
+          <a:lstStyle/>
+          <a:p>
+            <a:pPr algn="l">
+              <a:spcBef>
+                <a:spcPts val="0"/>
+              </a:spcBef>
+              <a:spcAft>
+                <a:spcPts val="0"/>
+              </a:spcAft>
+            </a:pPr>
+            <a:r>
+              <a:rPr sz="1500" b="1">
                 <a:cs typeface="Helvetica"/>
                 <a:ea typeface="Helvetica"/>
                 <a:solidFill>
@@ -8055,21 +8905,21 @@
                 </a:solidFill>
                 <a:latin typeface="Helvetica"/>
               </a:rPr>
-              <a:t>Multi-file corpora</a:t>
-            </a:r>
-          </a:p>
-        </p:txBody>
-      </p:sp>
-      <p:sp>
-        <p:nvSpPr>
-          <p:cNvPr id="9" name="TextBox 8"/>
+              <a:t>Clearer paraphrase matching</a:t>
+            </a:r>
+          </a:p>
+        </p:txBody>
+      </p:sp>
+      <p:sp>
+        <p:nvSpPr>
+          <p:cNvPr id="10" name="TextBox 9"/>
           <p:cNvSpPr txBox="1"/>
           <p:nvPr/>
         </p:nvSpPr>
         <p:spPr>
           <a:xfrm>
-            <a:off x="960120" y="2606040"/>
-            <a:ext cx="5760720" cy="502920"/>
+            <a:off x="1371600" y="1691640"/>
+            <a:ext cx="5303520" cy="411480"/>
           </a:xfrm>
           <a:prstGeom prst="rect">
             <a:avLst/>
@@ -8097,21 +8947,66 @@
                 </a:solidFill>
                 <a:latin typeface="Helvetica"/>
               </a:rPr>
-              <a:t>Compile across folders; shared conversion-cache gateway for teams.</a:t>
-            </a:r>
-          </a:p>
-        </p:txBody>
-      </p:sp>
-      <p:sp>
-        <p:nvSpPr>
-          <p:cNvPr id="10" name="Rectangle 9"/>
+              <a:t>Local embeddings next. Query cleanup and offline recall eval already shipped.</a:t>
+            </a:r>
+          </a:p>
+        </p:txBody>
+      </p:sp>
+      <p:sp>
+        <p:nvSpPr>
+          <p:cNvPr id="11" name="Rectangle 10"/>
           <p:cNvSpPr/>
           <p:nvPr/>
         </p:nvSpPr>
         <p:spPr>
           <a:xfrm>
-            <a:off x="640080" y="3337560"/>
-            <a:ext cx="73152" cy="822960"/>
+            <a:off x="594360" y="2331720"/>
+            <a:ext cx="6400800" cy="960120"/>
+          </a:xfrm>
+          <a:prstGeom prst="rect">
+            <a:avLst/>
+          </a:prstGeom>
+          <a:solidFill>
+            <a:srgbClr val="F3F6F4"/>
+          </a:solidFill>
+          <a:ln w="12700">
+            <a:solidFill>
+              <a:srgbClr val="C8D2CB"/>
+            </a:solidFill>
+          </a:ln>
+        </p:spPr>
+        <p:style>
+          <a:lnRef idx="1">
+            <a:schemeClr val="accent1"/>
+          </a:lnRef>
+          <a:fillRef idx="3">
+            <a:schemeClr val="accent1"/>
+          </a:fillRef>
+          <a:effectRef idx="2">
+            <a:schemeClr val="accent1"/>
+          </a:effectRef>
+          <a:fontRef idx="minor">
+            <a:schemeClr val="lt1"/>
+          </a:fontRef>
+        </p:style>
+        <p:txBody>
+          <a:bodyPr rtlCol="0" anchor="ctr"/>
+          <a:lstStyle/>
+          <a:p>
+            <a:pPr algn="ctr"/>
+          </a:p>
+        </p:txBody>
+      </p:sp>
+      <p:sp>
+        <p:nvSpPr>
+          <p:cNvPr id="12" name="Rectangle 11"/>
+          <p:cNvSpPr/>
+          <p:nvPr/>
+        </p:nvSpPr>
+        <p:spPr>
+          <a:xfrm>
+            <a:off x="594360" y="2331720"/>
+            <a:ext cx="91440" cy="960120"/>
           </a:xfrm>
           <a:prstGeom prst="rect">
             <a:avLst/>
@@ -8147,14 +9042,14 @@
       </p:sp>
       <p:sp>
         <p:nvSpPr>
-          <p:cNvPr id="11" name="TextBox 10"/>
+          <p:cNvPr id="13" name="TextBox 12"/>
           <p:cNvSpPr txBox="1"/>
           <p:nvPr/>
         </p:nvSpPr>
         <p:spPr>
           <a:xfrm>
-            <a:off x="960120" y="3337560"/>
-            <a:ext cx="5760720" cy="320040"/>
+            <a:off x="914400" y="2468880"/>
+            <a:ext cx="457200" cy="274320"/>
           </a:xfrm>
           <a:prstGeom prst="rect">
             <a:avLst/>
@@ -8174,7 +9069,49 @@
               </a:spcAft>
             </a:pPr>
             <a:r>
-              <a:rPr sz="1600" b="1">
+              <a:rPr sz="1200" b="1">
+                <a:cs typeface="Menlo"/>
+                <a:ea typeface="Menlo"/>
+                <a:solidFill>
+                  <a:srgbClr val="1F5C42"/>
+                </a:solidFill>
+                <a:latin typeface="Menlo"/>
+              </a:rPr>
+              <a:t>02</a:t>
+            </a:r>
+          </a:p>
+        </p:txBody>
+      </p:sp>
+      <p:sp>
+        <p:nvSpPr>
+          <p:cNvPr id="14" name="TextBox 13"/>
+          <p:cNvSpPr txBox="1"/>
+          <p:nvPr/>
+        </p:nvSpPr>
+        <p:spPr>
+          <a:xfrm>
+            <a:off x="1371600" y="2468880"/>
+            <a:ext cx="5303520" cy="274320"/>
+          </a:xfrm>
+          <a:prstGeom prst="rect">
+            <a:avLst/>
+          </a:prstGeom>
+          <a:noFill/>
+        </p:spPr>
+        <p:txBody>
+          <a:bodyPr wrap="square" anchor="t"/>
+          <a:lstStyle/>
+          <a:p>
+            <a:pPr algn="l">
+              <a:spcBef>
+                <a:spcPts val="0"/>
+              </a:spcBef>
+              <a:spcAft>
+                <a:spcPts val="0"/>
+              </a:spcAft>
+            </a:pPr>
+            <a:r>
+              <a:rPr sz="1500" b="1">
                 <a:cs typeface="Helvetica"/>
                 <a:ea typeface="Helvetica"/>
                 <a:solidFill>
@@ -8182,21 +9119,21 @@
                 </a:solidFill>
                 <a:latin typeface="Helvetica"/>
               </a:rPr>
-              <a:t>Video &amp; audio</a:t>
-            </a:r>
-          </a:p>
-        </p:txBody>
-      </p:sp>
-      <p:sp>
-        <p:nvSpPr>
-          <p:cNvPr id="12" name="TextBox 11"/>
+              <a:t>Whole folders, not one file</a:t>
+            </a:r>
+          </a:p>
+        </p:txBody>
+      </p:sp>
+      <p:sp>
+        <p:nvSpPr>
+          <p:cNvPr id="15" name="TextBox 14"/>
           <p:cNvSpPr txBox="1"/>
           <p:nvPr/>
         </p:nvSpPr>
         <p:spPr>
           <a:xfrm>
-            <a:off x="960120" y="3657600"/>
-            <a:ext cx="5760720" cy="502920"/>
+            <a:off x="1371600" y="2788920"/>
+            <a:ext cx="5303520" cy="411480"/>
           </a:xfrm>
           <a:prstGeom prst="rect">
             <a:avLst/>
@@ -8224,21 +9161,66 @@
                 </a:solidFill>
                 <a:latin typeface="Helvetica"/>
               </a:rPr>
-              <a:t>Transcription into the same pipeline (cut for scope, not feasibility).</a:t>
-            </a:r>
-          </a:p>
-        </p:txBody>
-      </p:sp>
-      <p:sp>
-        <p:nvSpPr>
-          <p:cNvPr id="13" name="Rectangle 12"/>
+              <a:t>Compile across a folder. Shared conversion cache for teams.</a:t>
+            </a:r>
+          </a:p>
+        </p:txBody>
+      </p:sp>
+      <p:sp>
+        <p:nvSpPr>
+          <p:cNvPr id="16" name="Rectangle 15"/>
           <p:cNvSpPr/>
           <p:nvPr/>
         </p:nvSpPr>
         <p:spPr>
           <a:xfrm>
-            <a:off x="640080" y="4389120"/>
-            <a:ext cx="73152" cy="822960"/>
+            <a:off x="594360" y="3429000"/>
+            <a:ext cx="6400800" cy="960120"/>
+          </a:xfrm>
+          <a:prstGeom prst="rect">
+            <a:avLst/>
+          </a:prstGeom>
+          <a:solidFill>
+            <a:srgbClr val="F3F6F4"/>
+          </a:solidFill>
+          <a:ln w="12700">
+            <a:solidFill>
+              <a:srgbClr val="C8D2CB"/>
+            </a:solidFill>
+          </a:ln>
+        </p:spPr>
+        <p:style>
+          <a:lnRef idx="1">
+            <a:schemeClr val="accent1"/>
+          </a:lnRef>
+          <a:fillRef idx="3">
+            <a:schemeClr val="accent1"/>
+          </a:fillRef>
+          <a:effectRef idx="2">
+            <a:schemeClr val="accent1"/>
+          </a:effectRef>
+          <a:fontRef idx="minor">
+            <a:schemeClr val="lt1"/>
+          </a:fontRef>
+        </p:style>
+        <p:txBody>
+          <a:bodyPr rtlCol="0" anchor="ctr"/>
+          <a:lstStyle/>
+          <a:p>
+            <a:pPr algn="ctr"/>
+          </a:p>
+        </p:txBody>
+      </p:sp>
+      <p:sp>
+        <p:nvSpPr>
+          <p:cNvPr id="17" name="Rectangle 16"/>
+          <p:cNvSpPr/>
+          <p:nvPr/>
+        </p:nvSpPr>
+        <p:spPr>
+          <a:xfrm>
+            <a:off x="594360" y="3429000"/>
+            <a:ext cx="91440" cy="960120"/>
           </a:xfrm>
           <a:prstGeom prst="rect">
             <a:avLst/>
@@ -8274,14 +9256,14 @@
       </p:sp>
       <p:sp>
         <p:nvSpPr>
-          <p:cNvPr id="14" name="TextBox 13"/>
+          <p:cNvPr id="18" name="TextBox 17"/>
           <p:cNvSpPr txBox="1"/>
           <p:nvPr/>
         </p:nvSpPr>
         <p:spPr>
           <a:xfrm>
-            <a:off x="960120" y="4389120"/>
-            <a:ext cx="5760720" cy="320040"/>
+            <a:off x="914400" y="3566160"/>
+            <a:ext cx="457200" cy="274320"/>
           </a:xfrm>
           <a:prstGeom prst="rect">
             <a:avLst/>
@@ -8301,7 +9283,49 @@
               </a:spcAft>
             </a:pPr>
             <a:r>
-              <a:rPr sz="1600" b="1">
+              <a:rPr sz="1200" b="1">
+                <a:cs typeface="Menlo"/>
+                <a:ea typeface="Menlo"/>
+                <a:solidFill>
+                  <a:srgbClr val="1F5C42"/>
+                </a:solidFill>
+                <a:latin typeface="Menlo"/>
+              </a:rPr>
+              <a:t>03</a:t>
+            </a:r>
+          </a:p>
+        </p:txBody>
+      </p:sp>
+      <p:sp>
+        <p:nvSpPr>
+          <p:cNvPr id="19" name="TextBox 18"/>
+          <p:cNvSpPr txBox="1"/>
+          <p:nvPr/>
+        </p:nvSpPr>
+        <p:spPr>
+          <a:xfrm>
+            <a:off x="1371600" y="3566160"/>
+            <a:ext cx="5303520" cy="274320"/>
+          </a:xfrm>
+          <a:prstGeom prst="rect">
+            <a:avLst/>
+          </a:prstGeom>
+          <a:noFill/>
+        </p:spPr>
+        <p:txBody>
+          <a:bodyPr wrap="square" anchor="t"/>
+          <a:lstStyle/>
+          <a:p>
+            <a:pPr algn="l">
+              <a:spcBef>
+                <a:spcPts val="0"/>
+              </a:spcBef>
+              <a:spcAft>
+                <a:spcPts val="0"/>
+              </a:spcAft>
+            </a:pPr>
+            <a:r>
+              <a:rPr sz="1500" b="1">
                 <a:cs typeface="Helvetica"/>
                 <a:ea typeface="Helvetica"/>
                 <a:solidFill>
@@ -8309,21 +9333,21 @@
                 </a:solidFill>
                 <a:latin typeface="Helvetica"/>
               </a:rPr>
-              <a:t>npx context-compiler</a:t>
-            </a:r>
-          </a:p>
-        </p:txBody>
-      </p:sp>
-      <p:sp>
-        <p:nvSpPr>
-          <p:cNvPr id="15" name="TextBox 14"/>
+              <a:t>Video and audio</a:t>
+            </a:r>
+          </a:p>
+        </p:txBody>
+      </p:sp>
+      <p:sp>
+        <p:nvSpPr>
+          <p:cNvPr id="20" name="TextBox 19"/>
           <p:cNvSpPr txBox="1"/>
           <p:nvPr/>
         </p:nvSpPr>
         <p:spPr>
           <a:xfrm>
-            <a:off x="960120" y="4709160"/>
-            <a:ext cx="5760720" cy="502920"/>
+            <a:off x="1371600" y="3886200"/>
+            <a:ext cx="5303520" cy="411480"/>
           </a:xfrm>
           <a:prstGeom prst="rect">
             <a:avLst/>
@@ -8351,21 +9375,66 @@
                 </a:solidFill>
                 <a:latin typeface="Helvetica"/>
               </a:rPr>
-              <a:t>One-command install for any MCP client.</a:t>
-            </a:r>
-          </a:p>
-        </p:txBody>
-      </p:sp>
-      <p:sp>
-        <p:nvSpPr>
-          <p:cNvPr id="16" name="Rectangle 15"/>
+              <a:t>Transcribe into the same pipeline.</a:t>
+            </a:r>
+          </a:p>
+        </p:txBody>
+      </p:sp>
+      <p:sp>
+        <p:nvSpPr>
+          <p:cNvPr id="21" name="Rectangle 20"/>
           <p:cNvSpPr/>
           <p:nvPr/>
         </p:nvSpPr>
         <p:spPr>
           <a:xfrm>
-            <a:off x="7315200" y="1234440"/>
-            <a:ext cx="4206240" cy="4754880"/>
+            <a:off x="594360" y="4526280"/>
+            <a:ext cx="6400800" cy="960120"/>
+          </a:xfrm>
+          <a:prstGeom prst="rect">
+            <a:avLst/>
+          </a:prstGeom>
+          <a:solidFill>
+            <a:srgbClr val="F3F6F4"/>
+          </a:solidFill>
+          <a:ln w="12700">
+            <a:solidFill>
+              <a:srgbClr val="C8D2CB"/>
+            </a:solidFill>
+          </a:ln>
+        </p:spPr>
+        <p:style>
+          <a:lnRef idx="1">
+            <a:schemeClr val="accent1"/>
+          </a:lnRef>
+          <a:fillRef idx="3">
+            <a:schemeClr val="accent1"/>
+          </a:fillRef>
+          <a:effectRef idx="2">
+            <a:schemeClr val="accent1"/>
+          </a:effectRef>
+          <a:fontRef idx="minor">
+            <a:schemeClr val="lt1"/>
+          </a:fontRef>
+        </p:style>
+        <p:txBody>
+          <a:bodyPr rtlCol="0" anchor="ctr"/>
+          <a:lstStyle/>
+          <a:p>
+            <a:pPr algn="ctr"/>
+          </a:p>
+        </p:txBody>
+      </p:sp>
+      <p:sp>
+        <p:nvSpPr>
+          <p:cNvPr id="22" name="Rectangle 21"/>
+          <p:cNvSpPr/>
+          <p:nvPr/>
+        </p:nvSpPr>
+        <p:spPr>
+          <a:xfrm>
+            <a:off x="594360" y="4526280"/>
+            <a:ext cx="91440" cy="960120"/>
           </a:xfrm>
           <a:prstGeom prst="rect">
             <a:avLst/>
@@ -8401,14 +9470,14 @@
       </p:sp>
       <p:sp>
         <p:nvSpPr>
-          <p:cNvPr id="17" name="TextBox 16"/>
+          <p:cNvPr id="23" name="TextBox 22"/>
           <p:cNvSpPr txBox="1"/>
           <p:nvPr/>
         </p:nvSpPr>
         <p:spPr>
           <a:xfrm>
-            <a:off x="7635240" y="1600200"/>
-            <a:ext cx="3657600" cy="411480"/>
+            <a:off x="914400" y="4663440"/>
+            <a:ext cx="457200" cy="274320"/>
           </a:xfrm>
           <a:prstGeom prst="rect">
             <a:avLst/>
@@ -8428,7 +9497,176 @@
               </a:spcAft>
             </a:pPr>
             <a:r>
-              <a:rPr sz="2200" b="1">
+              <a:rPr sz="1200" b="1">
+                <a:cs typeface="Menlo"/>
+                <a:ea typeface="Menlo"/>
+                <a:solidFill>
+                  <a:srgbClr val="1F5C42"/>
+                </a:solidFill>
+                <a:latin typeface="Menlo"/>
+              </a:rPr>
+              <a:t>04</a:t>
+            </a:r>
+          </a:p>
+        </p:txBody>
+      </p:sp>
+      <p:sp>
+        <p:nvSpPr>
+          <p:cNvPr id="24" name="TextBox 23"/>
+          <p:cNvSpPr txBox="1"/>
+          <p:nvPr/>
+        </p:nvSpPr>
+        <p:spPr>
+          <a:xfrm>
+            <a:off x="1371600" y="4663440"/>
+            <a:ext cx="5303520" cy="274320"/>
+          </a:xfrm>
+          <a:prstGeom prst="rect">
+            <a:avLst/>
+          </a:prstGeom>
+          <a:noFill/>
+        </p:spPr>
+        <p:txBody>
+          <a:bodyPr wrap="square" anchor="t"/>
+          <a:lstStyle/>
+          <a:p>
+            <a:pPr algn="l">
+              <a:spcBef>
+                <a:spcPts val="0"/>
+              </a:spcBef>
+              <a:spcAft>
+                <a:spcPts val="0"/>
+              </a:spcAft>
+            </a:pPr>
+            <a:r>
+              <a:rPr sz="1500" b="1">
+                <a:cs typeface="Helvetica"/>
+                <a:ea typeface="Helvetica"/>
+                <a:solidFill>
+                  <a:srgbClr val="1A221E"/>
+                </a:solidFill>
+                <a:latin typeface="Helvetica"/>
+              </a:rPr>
+              <a:t>One-command install</a:t>
+            </a:r>
+          </a:p>
+        </p:txBody>
+      </p:sp>
+      <p:sp>
+        <p:nvSpPr>
+          <p:cNvPr id="25" name="TextBox 24"/>
+          <p:cNvSpPr txBox="1"/>
+          <p:nvPr/>
+        </p:nvSpPr>
+        <p:spPr>
+          <a:xfrm>
+            <a:off x="1371600" y="4983480"/>
+            <a:ext cx="5303520" cy="411480"/>
+          </a:xfrm>
+          <a:prstGeom prst="rect">
+            <a:avLst/>
+          </a:prstGeom>
+          <a:noFill/>
+        </p:spPr>
+        <p:txBody>
+          <a:bodyPr wrap="square" anchor="t"/>
+          <a:lstStyle/>
+          <a:p>
+            <a:pPr algn="l">
+              <a:spcBef>
+                <a:spcPts val="0"/>
+              </a:spcBef>
+              <a:spcAft>
+                <a:spcPts val="0"/>
+              </a:spcAft>
+            </a:pPr>
+            <a:r>
+              <a:rPr sz="1300" b="0">
+                <a:cs typeface="Helvetica"/>
+                <a:ea typeface="Helvetica"/>
+                <a:solidFill>
+                  <a:srgbClr val="4A5850"/>
+                </a:solidFill>
+                <a:latin typeface="Helvetica"/>
+              </a:rPr>
+              <a:t>Quick setup for any agent client that speaks the same protocol.</a:t>
+            </a:r>
+          </a:p>
+        </p:txBody>
+      </p:sp>
+      <p:sp>
+        <p:nvSpPr>
+          <p:cNvPr id="26" name="Rectangle 25"/>
+          <p:cNvSpPr/>
+          <p:nvPr/>
+        </p:nvSpPr>
+        <p:spPr>
+          <a:xfrm>
+            <a:off x="7360920" y="1234440"/>
+            <a:ext cx="4251960" cy="4846320"/>
+          </a:xfrm>
+          <a:prstGeom prst="rect">
+            <a:avLst/>
+          </a:prstGeom>
+          <a:solidFill>
+            <a:srgbClr val="1F5C42"/>
+          </a:solidFill>
+          <a:ln>
+            <a:noFill/>
+          </a:ln>
+        </p:spPr>
+        <p:style>
+          <a:lnRef idx="1">
+            <a:schemeClr val="accent1"/>
+          </a:lnRef>
+          <a:fillRef idx="3">
+            <a:schemeClr val="accent1"/>
+          </a:fillRef>
+          <a:effectRef idx="2">
+            <a:schemeClr val="accent1"/>
+          </a:effectRef>
+          <a:fontRef idx="minor">
+            <a:schemeClr val="lt1"/>
+          </a:fontRef>
+        </p:style>
+        <p:txBody>
+          <a:bodyPr rtlCol="0" anchor="ctr"/>
+          <a:lstStyle/>
+          <a:p>
+            <a:pPr algn="ctr"/>
+          </a:p>
+        </p:txBody>
+      </p:sp>
+      <p:sp>
+        <p:nvSpPr>
+          <p:cNvPr id="27" name="TextBox 26"/>
+          <p:cNvSpPr txBox="1"/>
+          <p:nvPr/>
+        </p:nvSpPr>
+        <p:spPr>
+          <a:xfrm>
+            <a:off x="7680960" y="1554480"/>
+            <a:ext cx="3657600" cy="457200"/>
+          </a:xfrm>
+          <a:prstGeom prst="rect">
+            <a:avLst/>
+          </a:prstGeom>
+          <a:noFill/>
+        </p:spPr>
+        <p:txBody>
+          <a:bodyPr wrap="square" anchor="t"/>
+          <a:lstStyle/>
+          <a:p>
+            <a:pPr algn="l">
+              <a:spcBef>
+                <a:spcPts val="0"/>
+              </a:spcBef>
+              <a:spcAft>
+                <a:spcPts val="0"/>
+              </a:spcAft>
+            </a:pPr>
+            <a:r>
+              <a:rPr sz="2400" b="1">
                 <a:cs typeface="Georgia"/>
                 <a:ea typeface="Georgia"/>
                 <a:solidFill>
@@ -8443,14 +9681,14 @@
       </p:sp>
       <p:sp>
         <p:nvSpPr>
-          <p:cNvPr id="18" name="TextBox 17"/>
+          <p:cNvPr id="28" name="TextBox 27"/>
           <p:cNvSpPr txBox="1"/>
           <p:nvPr/>
         </p:nvSpPr>
         <p:spPr>
           <a:xfrm>
-            <a:off x="7635240" y="2194560"/>
-            <a:ext cx="3657600" cy="1097280"/>
+            <a:off x="7680960" y="2194560"/>
+            <a:ext cx="3657600" cy="1371600"/>
           </a:xfrm>
           <a:prstGeom prst="rect">
             <a:avLst/>
@@ -8470,31 +9708,31 @@
               </a:spcAft>
             </a:pPr>
             <a:r>
-              <a:rPr sz="1200" b="0">
-                <a:cs typeface="Menlo"/>
-                <a:ea typeface="Menlo"/>
+              <a:rPr sz="1300" b="0">
+                <a:cs typeface="Helvetica"/>
+                <a:ea typeface="Helvetica"/>
                 <a:solidFill>
                   <a:srgbClr val="B8D0C4"/>
                 </a:solidFill>
-                <a:latin typeface="Menlo"/>
+                <a:latin typeface="Helvetica"/>
               </a:rPr>
-              <a:t>demo:  context-compiler.onrender.com
-       Docker / Render deploy of this repo
-repo:  github.com/shenba1712/context-compiler</a:t>
-            </a:r>
-          </a:p>
-        </p:txBody>
-      </p:sp>
-      <p:sp>
-        <p:nvSpPr>
-          <p:cNvPr id="19" name="TextBox 18"/>
+              <a:t>context-compiler.onrender.com
+Docker or Render from this repo
+github.com/shenba1712/context-compiler</a:t>
+            </a:r>
+          </a:p>
+        </p:txBody>
+      </p:sp>
+      <p:sp>
+        <p:nvSpPr>
+          <p:cNvPr id="29" name="TextBox 28"/>
           <p:cNvSpPr txBox="1"/>
           <p:nvPr/>
         </p:nvSpPr>
         <p:spPr>
           <a:xfrm>
-            <a:off x="7635240" y="3520440"/>
-            <a:ext cx="3657600" cy="1097280"/>
+            <a:off x="7680960" y="3794760"/>
+            <a:ext cx="3657600" cy="1005840"/>
           </a:xfrm>
           <a:prstGeom prst="rect">
             <a:avLst/>
@@ -8522,20 +9760,20 @@
                 </a:solidFill>
                 <a:latin typeface="Helvetica"/>
               </a:rPr>
-              <a:t>Live demo + MCP in Cursor / Claude Code / Codex. Same two tools; prove answer parity on a real doc.</a:t>
-            </a:r>
-          </a:p>
-        </p:txBody>
-      </p:sp>
-      <p:sp>
-        <p:nvSpPr>
-          <p:cNvPr id="20" name="TextBox 19"/>
+              <a:t>Open the demo, or wire it into Cursor, Claude Code, or Codex. Check the answer on a real doc.</a:t>
+            </a:r>
+          </a:p>
+        </p:txBody>
+      </p:sp>
+      <p:sp>
+        <p:nvSpPr>
+          <p:cNvPr id="30" name="TextBox 29"/>
           <p:cNvSpPr txBox="1"/>
           <p:nvPr/>
         </p:nvSpPr>
         <p:spPr>
           <a:xfrm>
-            <a:off x="7635240" y="4937760"/>
+            <a:off x="7680960" y="5029200"/>
             <a:ext cx="3657600" cy="731520"/>
           </a:xfrm>
           <a:prstGeom prst="rect">
@@ -8556,7 +9794,7 @@
               </a:spcAft>
             </a:pPr>
             <a:r>
-              <a:rPr sz="1600" b="1">
+              <a:rPr sz="1500" b="1">
                 <a:cs typeface="Helvetica"/>
                 <a:ea typeface="Helvetica"/>
                 <a:solidFill>

--- a/pitch/context-compiler-pitch.pptx
+++ b/pitch/context-compiler-pitch.pptx
@@ -3435,7 +3435,7 @@
                 </a:solidFill>
                 <a:latin typeface="Helvetica"/>
               </a:rPr>
-              <a:t>Give it a file, a question, and a token budget. It returns the useful parts as markdown, and a clear list of what it left out.</a:t>
+              <a:t>You give it a file, a question, and a token budget. You get the useful parts back as text, plus a clear list of what it skipped.</a:t>
             </a:r>
           </a:p>
         </p:txBody>
@@ -3562,7 +3562,7 @@
                 </a:solidFill>
                 <a:latin typeface="Helvetica"/>
               </a:rPr>
-              <a:t>One real handbook · one refunds question</a:t>
+              <a:t>One vendor handbook · one refunds question</a:t>
             </a:r>
           </a:p>
         </p:txBody>
@@ -4388,7 +4388,7 @@
                 </a:solidFill>
                 <a:latin typeface="Helvetica"/>
               </a:rPr>
-              <a:t>Agents often load an entire document to answer one question. Every time.</a:t>
+              <a:t>To answer one question, agents often load the entire document.</a:t>
             </a:r>
           </a:p>
         </p:txBody>
@@ -4560,7 +4560,7 @@
                 </a:solidFill>
                 <a:latin typeface="Helvetica"/>
               </a:rPr>
-              <a:t>Most of it is unused</a:t>
+              <a:t>Most of it never helps</a:t>
             </a:r>
           </a:p>
         </p:txBody>
@@ -4602,7 +4602,7 @@
                 </a:solidFill>
                 <a:latin typeface="Helvetica"/>
               </a:rPr>
-              <a:t>The useful clause might be 2 pages of 100. The other 98 are pure token spend.</a:t>
+              <a:t>Maybe 2 useful pages out of 100. The rest is pure spend.</a:t>
             </a:r>
           </a:p>
         </p:txBody>
@@ -4774,7 +4774,7 @@
                 </a:solidFill>
                 <a:latin typeface="Helvetica"/>
               </a:rPr>
-              <a:t>It adds up fast</a:t>
+              <a:t>Then it multiplies</a:t>
             </a:r>
           </a:p>
         </p:txBody>
@@ -4816,7 +4816,7 @@
                 </a:solidFill>
                 <a:latin typeface="Helvetica"/>
               </a:rPr>
-              <a:t>Every file × every question × every agent × every day. Cost and latency climb together.</a:t>
+              <a:t>Every file, every question, every agent, every day. Cost and latency climb together.</a:t>
             </a:r>
           </a:p>
         </p:txBody>
@@ -4943,7 +4943,7 @@
                 </a:solidFill>
                 <a:latin typeface="Helvetica"/>
               </a:rPr>
-              <a:t>per 1,000 reads of one 100-page document (at $3 per million input tokens; demo cost meter default)</a:t>
+              <a:t>per 1,000 reads of one 100-page document (at $3 per million input tokens; same default as the demo cost meter)</a:t>
             </a:r>
           </a:p>
         </p:txBody>
@@ -5115,7 +5115,7 @@
                 </a:solidFill>
                 <a:latin typeface="Helvetica"/>
               </a:rPr>
-              <a:t>of file tokens often unused for a single task, across pdf, docx, xlsx, pptx, and images</a:t>
+              <a:t>of the file’s tokens often unused for a single task (pdf, docx, xlsx, pptx, images)</a:t>
             </a:r>
           </a:p>
         </p:txBody>
@@ -5345,7 +5345,7 @@
                 </a:solidFill>
                 <a:latin typeface="Helvetica"/>
               </a:rPr>
-              <a:t>Plain version: who needs this, why we built it, what’s different, and how it sits next to converters.</a:t>
+              <a:t>Who needs this, why we built it, what’s different, and how it sits next to converters.</a:t>
             </a:r>
           </a:p>
         </p:txBody>
@@ -5517,7 +5517,7 @@
                 </a:solidFill>
                 <a:latin typeface="Helvetica"/>
               </a:rPr>
-              <a:t>People building coding and document agents. Cursor, Claude Code, Codex, and internal agent platforms.</a:t>
+              <a:t>People wiring coding agents and document agents. Cursor, Claude Code, Codex, internal platforms.</a:t>
             </a:r>
           </a:p>
         </p:txBody>
@@ -5689,7 +5689,7 @@
                 </a:solidFill>
                 <a:latin typeface="Helvetica"/>
               </a:rPr>
-              <a:t>Whole-file reads are getting expensive. Agents keep reopening the same manuals and reports for different questions.</a:t>
+              <a:t>Reading whole files is getting expensive. The same manuals and reports get reopened for different questions.</a:t>
             </a:r>
           </a:p>
         </p:txBody>
@@ -5816,7 +5816,7 @@
                 </a:solidFill>
                 <a:latin typeface="Helvetica"/>
               </a:rPr>
-              <a:t>One job. Pick what the agent needs under a hard token budget. Not a full search platform.</a:t>
+              <a:t>We do one job. Under a hard token budget, pick what the agent needs. We are not building a full search product.</a:t>
             </a:r>
           </a:p>
         </p:txBody>
@@ -5988,7 +5988,7 @@
                 </a:solidFill>
                 <a:latin typeface="Helvetica"/>
               </a:rPr>
-              <a:t>Converters turn a file into text of the whole thing. We select under a budget and tell you what was left out, so you can pull more if needed.</a:t>
+              <a:t>A converter gives you the whole file as text. We give you a budgeted slice, and we tell you what we left out so you can pull more if you need it.</a:t>
             </a:r>
           </a:p>
         </p:txBody>
@@ -6218,7 +6218,7 @@
                 </a:solidFill>
                 <a:latin typeface="Helvetica"/>
               </a:rPr>
-              <a:t>You set the ceiling. The agent gets markdown it can read, plus a list of skipped sections.</a:t>
+              <a:t>You set the ceiling. The agent gets readable text, plus a list of skipped sections.</a:t>
             </a:r>
           </a:p>
         </p:txBody>
@@ -6432,7 +6432,7 @@
                 </a:solidFill>
                 <a:latin typeface="Helvetica"/>
               </a:rPr>
-              <a:t>Turn the file into markdown. Cache by content so repeats are cheap.</a:t>
+              <a:t>Turn the file into text. Cache it so repeats are cheap.</a:t>
             </a:r>
           </a:p>
         </p:txBody>
@@ -6946,7 +6946,7 @@
                 </a:solidFill>
                 <a:latin typeface="Helvetica"/>
               </a:rPr>
-              <a:t>Match sections to the question on your machine. No model call to compile.</a:t>
+              <a:t>Match sections to the question on your machine. Compile does not call a model.</a:t>
             </a:r>
           </a:p>
         </p:txBody>
@@ -7203,7 +7203,7 @@
                 </a:solidFill>
                 <a:latin typeface="Helvetica"/>
               </a:rPr>
-              <a:t>Fill the strongest sections first until the question is covered, then stop.</a:t>
+              <a:t>Pack the strongest sections until the question is covered, then stop.</a:t>
             </a:r>
           </a:p>
         </p:txBody>
@@ -7375,7 +7375,7 @@
                 </a:solidFill>
                 <a:latin typeface="Helvetica"/>
               </a:rPr>
-              <a:t>Works with Cursor, Claude Code, Codex, and Claude Desktop. Or use the hosted web demo. Compile needs no API key.</a:t>
+              <a:t>Use it from Cursor, Claude Code, Codex, or Claude Desktop. Or try the web demo. Compile needs no API key.</a:t>
             </a:r>
           </a:p>
         </p:txBody>
@@ -7502,7 +7502,7 @@
                 </a:solidFill>
                 <a:latin typeface="Helvetica"/>
               </a:rPr>
-              <a:t>Every result lists what was left out. Open a skipped section when you need more of a chapter. Nothing is trimmed in silence.</a:t>
+              <a:t>Every result lists what was left out. Open a skipped section when you need more of a chapter. Nothing disappears quietly.</a:t>
             </a:r>
           </a:p>
         </p:txBody>
@@ -8032,7 +8032,7 @@
                 </a:solidFill>
                 <a:latin typeface="Helvetica"/>
               </a:rPr>
-              <a:t>cheaper per read when conversion is cached; repeats come back fast</a:t>
+              <a:t>cheaper per read once conversion is cached; repeats come back fast</a:t>
             </a:r>
           </a:p>
         </p:txBody>
@@ -8204,7 +8204,7 @@
                 </a:solidFill>
                 <a:latin typeface="Helvetica"/>
               </a:rPr>
-              <a:t>Same question from the full file and from the compiled slice. Compare the facts yourself.</a:t>
+              <a:t>Same question, full file vs compiled slice. You compare the facts. Not the same as letting the model browse on its own.</a:t>
             </a:r>
           </a:p>
         </p:txBody>
@@ -8459,7 +8459,7 @@
                 </a:solidFill>
                 <a:latin typeface="Helvetica"/>
               </a:rPr>
-              <a:t>Compiled: 591 tokens  ·  answer intact  ·  list of skipped sections included</a:t>
+              <a:t>Compiled: 591 tokens  ·  answer intact  ·  skipped sections listed</a:t>
             </a:r>
           </a:p>
         </p:txBody>
@@ -8947,7 +8947,7 @@
                 </a:solidFill>
                 <a:latin typeface="Helvetica"/>
               </a:rPr>
-              <a:t>Local embeddings next. Query cleanup and offline recall eval already shipped.</a:t>
+              <a:t>Local embeddings next. Cleanup and offline recall checks already shipped.</a:t>
             </a:r>
           </a:p>
         </p:txBody>
@@ -9161,7 +9161,7 @@
                 </a:solidFill>
                 <a:latin typeface="Helvetica"/>
               </a:rPr>
-              <a:t>Compile across a folder. Shared conversion cache for teams.</a:t>
+              <a:t>Compile across a folder of files. Shared conversion cache for teams.</a:t>
             </a:r>
           </a:p>
         </p:txBody>
@@ -9375,7 +9375,7 @@
                 </a:solidFill>
                 <a:latin typeface="Helvetica"/>
               </a:rPr>
-              <a:t>Transcribe into the same pipeline.</a:t>
+              <a:t>Transcribe, then run the same pipeline.</a:t>
             </a:r>
           </a:p>
         </p:txBody>
@@ -9589,7 +9589,7 @@
                 </a:solidFill>
                 <a:latin typeface="Helvetica"/>
               </a:rPr>
-              <a:t>Quick setup for any agent client that speaks the same protocol.</a:t>
+              <a:t>Quick setup for agent clients.</a:t>
             </a:r>
           </a:p>
         </p:txBody>
